--- a/docs/pptx/auc3/jx-auc3-linsubhr-ratio-throm2.pptx
+++ b/docs/pptx/auc3/jx-auc3-linsubhr-ratio-throm2.pptx
@@ -2271,7 +2271,7 @@
           </p:nvSpPr>
           <p:spPr>
             <a:xfrm>
-              <a:off x="817517" y="5114368"/>
+              <a:off x="817517" y="5142518"/>
               <a:ext cx="7799693" cy="0"/>
             </a:xfrm>
             <a:custGeom>
@@ -2314,7 +2314,7 @@
           </p:nvSpPr>
           <p:spPr>
             <a:xfrm>
-              <a:off x="817517" y="4244691"/>
+              <a:off x="817517" y="4313054"/>
               <a:ext cx="7799693" cy="0"/>
             </a:xfrm>
             <a:custGeom>
@@ -2357,7 +2357,7 @@
           </p:nvSpPr>
           <p:spPr>
             <a:xfrm>
-              <a:off x="817517" y="3375014"/>
+              <a:off x="817517" y="3483591"/>
               <a:ext cx="7799693" cy="0"/>
             </a:xfrm>
             <a:custGeom>
@@ -2400,7 +2400,7 @@
           </p:nvSpPr>
           <p:spPr>
             <a:xfrm>
-              <a:off x="817517" y="2505337"/>
+              <a:off x="817517" y="2654127"/>
               <a:ext cx="7799693" cy="0"/>
             </a:xfrm>
             <a:custGeom>
@@ -2443,15 +2443,15 @@
           </p:nvSpPr>
           <p:spPr>
             <a:xfrm>
-              <a:off x="1615213" y="1896563"/>
-              <a:ext cx="0" cy="3826579"/>
+              <a:off x="1615213" y="2073503"/>
+              <a:ext cx="0" cy="3649639"/>
             </a:xfrm>
             <a:custGeom>
               <a:avLst/>
               <a:pathLst>
-                <a:path w="0" h="3826579">
+                <a:path w="0" h="3649639">
                   <a:moveTo>
-                    <a:pt x="0" y="3826579"/>
+                    <a:pt x="0" y="3649639"/>
                   </a:moveTo>
                   <a:lnTo>
                     <a:pt x="0" y="0"/>
@@ -2486,15 +2486,15 @@
           </p:nvSpPr>
           <p:spPr>
             <a:xfrm>
-              <a:off x="3387871" y="1896563"/>
-              <a:ext cx="0" cy="3826579"/>
+              <a:off x="3387871" y="2073503"/>
+              <a:ext cx="0" cy="3649639"/>
             </a:xfrm>
             <a:custGeom>
               <a:avLst/>
               <a:pathLst>
-                <a:path w="0" h="3826579">
+                <a:path w="0" h="3649639">
                   <a:moveTo>
-                    <a:pt x="0" y="3826579"/>
+                    <a:pt x="0" y="3649639"/>
                   </a:moveTo>
                   <a:lnTo>
                     <a:pt x="0" y="0"/>
@@ -2529,15 +2529,15 @@
           </p:nvSpPr>
           <p:spPr>
             <a:xfrm>
-              <a:off x="5160528" y="1896563"/>
-              <a:ext cx="0" cy="3826579"/>
+              <a:off x="5160528" y="2073503"/>
+              <a:ext cx="0" cy="3649639"/>
             </a:xfrm>
             <a:custGeom>
               <a:avLst/>
               <a:pathLst>
-                <a:path w="0" h="3826579">
+                <a:path w="0" h="3649639">
                   <a:moveTo>
-                    <a:pt x="0" y="3826579"/>
+                    <a:pt x="0" y="3649639"/>
                   </a:moveTo>
                   <a:lnTo>
                     <a:pt x="0" y="0"/>
@@ -2572,15 +2572,15 @@
           </p:nvSpPr>
           <p:spPr>
             <a:xfrm>
-              <a:off x="6933186" y="1896563"/>
-              <a:ext cx="0" cy="3826579"/>
+              <a:off x="6933186" y="2073503"/>
+              <a:ext cx="0" cy="3649639"/>
             </a:xfrm>
             <a:custGeom>
               <a:avLst/>
               <a:pathLst>
-                <a:path w="0" h="3826579">
+                <a:path w="0" h="3649639">
                   <a:moveTo>
-                    <a:pt x="0" y="3826579"/>
+                    <a:pt x="0" y="3649639"/>
                   </a:moveTo>
                   <a:lnTo>
                     <a:pt x="0" y="0"/>
@@ -2615,7 +2615,7 @@
           </p:nvSpPr>
           <p:spPr>
             <a:xfrm>
-              <a:off x="817517" y="5549207"/>
+              <a:off x="817517" y="5557249"/>
               <a:ext cx="7799693" cy="0"/>
             </a:xfrm>
             <a:custGeom>
@@ -2658,7 +2658,7 @@
           </p:nvSpPr>
           <p:spPr>
             <a:xfrm>
-              <a:off x="817517" y="4679530"/>
+              <a:off x="817517" y="4727786"/>
               <a:ext cx="7799693" cy="0"/>
             </a:xfrm>
             <a:custGeom>
@@ -2701,7 +2701,7 @@
           </p:nvSpPr>
           <p:spPr>
             <a:xfrm>
-              <a:off x="817517" y="3809853"/>
+              <a:off x="817517" y="3898322"/>
               <a:ext cx="7799693" cy="0"/>
             </a:xfrm>
             <a:custGeom>
@@ -2744,7 +2744,7 @@
           </p:nvSpPr>
           <p:spPr>
             <a:xfrm>
-              <a:off x="817517" y="2940175"/>
+              <a:off x="817517" y="3068859"/>
               <a:ext cx="7799693" cy="0"/>
             </a:xfrm>
             <a:custGeom>
@@ -2787,7 +2787,7 @@
           </p:nvSpPr>
           <p:spPr>
             <a:xfrm>
-              <a:off x="817517" y="2070498"/>
+              <a:off x="817517" y="2239395"/>
               <a:ext cx="7799693" cy="0"/>
             </a:xfrm>
             <a:custGeom>
@@ -2830,15 +2830,15 @@
           </p:nvSpPr>
           <p:spPr>
             <a:xfrm>
-              <a:off x="2501542" y="1896563"/>
-              <a:ext cx="0" cy="3826579"/>
+              <a:off x="2501542" y="2073503"/>
+              <a:ext cx="0" cy="3649639"/>
             </a:xfrm>
             <a:custGeom>
               <a:avLst/>
               <a:pathLst>
-                <a:path w="0" h="3826579">
+                <a:path w="0" h="3649639">
                   <a:moveTo>
-                    <a:pt x="0" y="3826579"/>
+                    <a:pt x="0" y="3649639"/>
                   </a:moveTo>
                   <a:lnTo>
                     <a:pt x="0" y="0"/>
@@ -2873,15 +2873,15 @@
           </p:nvSpPr>
           <p:spPr>
             <a:xfrm>
-              <a:off x="4274200" y="1896563"/>
-              <a:ext cx="0" cy="3826579"/>
+              <a:off x="4274200" y="2073503"/>
+              <a:ext cx="0" cy="3649639"/>
             </a:xfrm>
             <a:custGeom>
               <a:avLst/>
               <a:pathLst>
-                <a:path w="0" h="3826579">
+                <a:path w="0" h="3649639">
                   <a:moveTo>
-                    <a:pt x="0" y="3826579"/>
+                    <a:pt x="0" y="3649639"/>
                   </a:moveTo>
                   <a:lnTo>
                     <a:pt x="0" y="0"/>
@@ -2916,15 +2916,15 @@
           </p:nvSpPr>
           <p:spPr>
             <a:xfrm>
-              <a:off x="6046857" y="1896563"/>
-              <a:ext cx="0" cy="3826579"/>
+              <a:off x="6046857" y="2073503"/>
+              <a:ext cx="0" cy="3649639"/>
             </a:xfrm>
             <a:custGeom>
               <a:avLst/>
               <a:pathLst>
-                <a:path w="0" h="3826579">
+                <a:path w="0" h="3649639">
                   <a:moveTo>
-                    <a:pt x="0" y="3826579"/>
+                    <a:pt x="0" y="3649639"/>
                   </a:moveTo>
                   <a:lnTo>
                     <a:pt x="0" y="0"/>
@@ -2959,15 +2959,15 @@
           </p:nvSpPr>
           <p:spPr>
             <a:xfrm>
-              <a:off x="7819515" y="1896563"/>
-              <a:ext cx="0" cy="3826579"/>
+              <a:off x="7819515" y="2073503"/>
+              <a:ext cx="0" cy="3649639"/>
             </a:xfrm>
             <a:custGeom>
               <a:avLst/>
               <a:pathLst>
-                <a:path w="0" h="3826579">
+                <a:path w="0" h="3649639">
                   <a:moveTo>
-                    <a:pt x="0" y="3826579"/>
+                    <a:pt x="0" y="3649639"/>
                   </a:moveTo>
                   <a:lnTo>
                     <a:pt x="0" y="0"/>
@@ -3002,558 +3002,558 @@
           </p:nvSpPr>
           <p:spPr>
             <a:xfrm>
-              <a:off x="817517" y="1896563"/>
-              <a:ext cx="7392041" cy="3582367"/>
+              <a:off x="817517" y="2073503"/>
+              <a:ext cx="7392041" cy="3416719"/>
             </a:xfrm>
             <a:custGeom>
               <a:avLst/>
               <a:pathLst>
-                <a:path w="7392041" h="3582367">
+                <a:path w="7392041" h="3416719">
                   <a:moveTo>
                     <a:pt x="965908" y="0"/>
                   </a:moveTo>
                   <a:lnTo>
-                    <a:pt x="980824" y="33983"/>
-                  </a:lnTo>
-                  <a:lnTo>
-                    <a:pt x="1058068" y="201806"/>
-                  </a:lnTo>
-                  <a:lnTo>
-                    <a:pt x="1135311" y="361846"/>
-                  </a:lnTo>
-                  <a:lnTo>
-                    <a:pt x="1212555" y="514464"/>
-                  </a:lnTo>
-                  <a:lnTo>
-                    <a:pt x="1289799" y="660003"/>
-                  </a:lnTo>
-                  <a:lnTo>
-                    <a:pt x="1367042" y="798793"/>
-                  </a:lnTo>
-                  <a:lnTo>
-                    <a:pt x="1444286" y="931147"/>
-                  </a:lnTo>
-                  <a:lnTo>
-                    <a:pt x="1521529" y="1057362"/>
-                  </a:lnTo>
-                  <a:lnTo>
-                    <a:pt x="1598773" y="1177723"/>
-                  </a:lnTo>
-                  <a:lnTo>
-                    <a:pt x="1676016" y="1292503"/>
-                  </a:lnTo>
-                  <a:lnTo>
-                    <a:pt x="1753260" y="1401959"/>
-                  </a:lnTo>
-                  <a:lnTo>
-                    <a:pt x="1830504" y="1506340"/>
-                  </a:lnTo>
-                  <a:lnTo>
-                    <a:pt x="1907747" y="1605879"/>
-                  </a:lnTo>
-                  <a:lnTo>
-                    <a:pt x="1984991" y="1700802"/>
-                  </a:lnTo>
-                  <a:lnTo>
-                    <a:pt x="2062234" y="1791323"/>
-                  </a:lnTo>
-                  <a:lnTo>
-                    <a:pt x="2139478" y="1877645"/>
-                  </a:lnTo>
-                  <a:lnTo>
-                    <a:pt x="2216721" y="1959965"/>
-                  </a:lnTo>
-                  <a:lnTo>
-                    <a:pt x="2293965" y="2038466"/>
-                  </a:lnTo>
-                  <a:lnTo>
-                    <a:pt x="2371209" y="2113327"/>
-                  </a:lnTo>
-                  <a:lnTo>
-                    <a:pt x="2448452" y="2184716"/>
-                  </a:lnTo>
-                  <a:lnTo>
-                    <a:pt x="2525696" y="2252794"/>
-                  </a:lnTo>
-                  <a:lnTo>
-                    <a:pt x="2602939" y="2317715"/>
-                  </a:lnTo>
-                  <a:lnTo>
-                    <a:pt x="2680183" y="2379625"/>
-                  </a:lnTo>
-                  <a:lnTo>
-                    <a:pt x="2757426" y="2438664"/>
-                  </a:lnTo>
-                  <a:lnTo>
-                    <a:pt x="2834670" y="2494965"/>
-                  </a:lnTo>
-                  <a:lnTo>
-                    <a:pt x="2911914" y="2548655"/>
-                  </a:lnTo>
-                  <a:lnTo>
-                    <a:pt x="2989157" y="2599855"/>
-                  </a:lnTo>
-                  <a:lnTo>
-                    <a:pt x="3066401" y="2648680"/>
-                  </a:lnTo>
-                  <a:lnTo>
-                    <a:pt x="3143644" y="2695241"/>
-                  </a:lnTo>
-                  <a:lnTo>
-                    <a:pt x="3220888" y="2739642"/>
-                  </a:lnTo>
-                  <a:lnTo>
-                    <a:pt x="3298131" y="2781985"/>
-                  </a:lnTo>
-                  <a:lnTo>
-                    <a:pt x="3375375" y="2784638"/>
-                  </a:lnTo>
-                  <a:lnTo>
-                    <a:pt x="3452619" y="2786347"/>
-                  </a:lnTo>
-                  <a:lnTo>
-                    <a:pt x="3529862" y="2788053"/>
-                  </a:lnTo>
-                  <a:lnTo>
-                    <a:pt x="3607106" y="2789756"/>
-                  </a:lnTo>
-                  <a:lnTo>
-                    <a:pt x="3684349" y="2791455"/>
-                  </a:lnTo>
-                  <a:lnTo>
-                    <a:pt x="3761593" y="2793151"/>
-                  </a:lnTo>
-                  <a:lnTo>
-                    <a:pt x="3838836" y="2794844"/>
-                  </a:lnTo>
-                  <a:lnTo>
-                    <a:pt x="3916080" y="2796533"/>
-                  </a:lnTo>
-                  <a:lnTo>
-                    <a:pt x="3993324" y="2798219"/>
-                  </a:lnTo>
-                  <a:lnTo>
-                    <a:pt x="4070567" y="2799901"/>
-                  </a:lnTo>
-                  <a:lnTo>
-                    <a:pt x="4147811" y="2801580"/>
-                  </a:lnTo>
-                  <a:lnTo>
-                    <a:pt x="4225054" y="2803256"/>
-                  </a:lnTo>
-                  <a:lnTo>
-                    <a:pt x="4302298" y="2804929"/>
-                  </a:lnTo>
-                  <a:lnTo>
-                    <a:pt x="4379541" y="2806598"/>
-                  </a:lnTo>
-                  <a:lnTo>
-                    <a:pt x="4456785" y="2808264"/>
-                  </a:lnTo>
-                  <a:lnTo>
-                    <a:pt x="4534029" y="2809927"/>
-                  </a:lnTo>
-                  <a:lnTo>
-                    <a:pt x="4611272" y="2811587"/>
-                  </a:lnTo>
-                  <a:lnTo>
-                    <a:pt x="4688516" y="2813243"/>
-                  </a:lnTo>
-                  <a:lnTo>
-                    <a:pt x="4765759" y="2814896"/>
-                  </a:lnTo>
-                  <a:lnTo>
-                    <a:pt x="4843003" y="2816545"/>
-                  </a:lnTo>
-                  <a:lnTo>
-                    <a:pt x="4920246" y="2818192"/>
-                  </a:lnTo>
-                  <a:lnTo>
-                    <a:pt x="4997490" y="2819835"/>
-                  </a:lnTo>
-                  <a:lnTo>
-                    <a:pt x="5074734" y="2821475"/>
-                  </a:lnTo>
-                  <a:lnTo>
-                    <a:pt x="5151977" y="2823112"/>
-                  </a:lnTo>
-                  <a:lnTo>
-                    <a:pt x="5229221" y="2824745"/>
-                  </a:lnTo>
-                  <a:lnTo>
-                    <a:pt x="5306464" y="2826376"/>
-                  </a:lnTo>
-                  <a:lnTo>
-                    <a:pt x="5383708" y="2828003"/>
-                  </a:lnTo>
-                  <a:lnTo>
-                    <a:pt x="5460951" y="2829627"/>
-                  </a:lnTo>
-                  <a:lnTo>
-                    <a:pt x="5538195" y="2831247"/>
-                  </a:lnTo>
-                  <a:lnTo>
-                    <a:pt x="5615439" y="2832865"/>
-                  </a:lnTo>
-                  <a:lnTo>
-                    <a:pt x="5692682" y="2834479"/>
-                  </a:lnTo>
-                  <a:lnTo>
-                    <a:pt x="5769926" y="2836090"/>
-                  </a:lnTo>
-                  <a:lnTo>
-                    <a:pt x="5847169" y="2837698"/>
-                  </a:lnTo>
-                  <a:lnTo>
-                    <a:pt x="5924413" y="2839303"/>
-                  </a:lnTo>
-                  <a:lnTo>
-                    <a:pt x="6001656" y="2840905"/>
-                  </a:lnTo>
-                  <a:lnTo>
-                    <a:pt x="6078900" y="2842503"/>
-                  </a:lnTo>
-                  <a:lnTo>
-                    <a:pt x="6156144" y="2844099"/>
-                  </a:lnTo>
-                  <a:lnTo>
-                    <a:pt x="6233387" y="2845691"/>
-                  </a:lnTo>
-                  <a:lnTo>
-                    <a:pt x="6310631" y="2847280"/>
-                  </a:lnTo>
-                  <a:lnTo>
-                    <a:pt x="6387874" y="2848866"/>
-                  </a:lnTo>
-                  <a:lnTo>
-                    <a:pt x="6465118" y="2850449"/>
-                  </a:lnTo>
-                  <a:lnTo>
-                    <a:pt x="6542361" y="2852028"/>
-                  </a:lnTo>
-                  <a:lnTo>
-                    <a:pt x="6619605" y="2853605"/>
-                  </a:lnTo>
-                  <a:lnTo>
-                    <a:pt x="6696849" y="2855178"/>
-                  </a:lnTo>
-                  <a:lnTo>
-                    <a:pt x="6774092" y="2856749"/>
-                  </a:lnTo>
-                  <a:lnTo>
-                    <a:pt x="6851336" y="2858316"/>
-                  </a:lnTo>
-                  <a:lnTo>
-                    <a:pt x="6928579" y="2859880"/>
-                  </a:lnTo>
-                  <a:lnTo>
-                    <a:pt x="7005823" y="2861441"/>
-                  </a:lnTo>
-                  <a:lnTo>
-                    <a:pt x="7083066" y="2862999"/>
-                  </a:lnTo>
-                  <a:lnTo>
-                    <a:pt x="7160310" y="2864554"/>
-                  </a:lnTo>
-                  <a:lnTo>
-                    <a:pt x="7237554" y="2866106"/>
-                  </a:lnTo>
-                  <a:lnTo>
-                    <a:pt x="7314797" y="2867655"/>
-                  </a:lnTo>
-                  <a:lnTo>
-                    <a:pt x="7392041" y="2869201"/>
-                  </a:lnTo>
-                  <a:lnTo>
-                    <a:pt x="7392041" y="3582367"/>
-                  </a:lnTo>
-                  <a:lnTo>
-                    <a:pt x="7314797" y="3578949"/>
-                  </a:lnTo>
-                  <a:lnTo>
-                    <a:pt x="7237554" y="3575365"/>
-                  </a:lnTo>
-                  <a:lnTo>
-                    <a:pt x="7160310" y="3571607"/>
-                  </a:lnTo>
-                  <a:lnTo>
-                    <a:pt x="7083066" y="3567666"/>
-                  </a:lnTo>
-                  <a:lnTo>
-                    <a:pt x="7005823" y="3563533"/>
-                  </a:lnTo>
-                  <a:lnTo>
-                    <a:pt x="6928579" y="3559199"/>
-                  </a:lnTo>
-                  <a:lnTo>
-                    <a:pt x="6851336" y="3554655"/>
-                  </a:lnTo>
-                  <a:lnTo>
-                    <a:pt x="6774092" y="3549889"/>
-                  </a:lnTo>
-                  <a:lnTo>
-                    <a:pt x="6696849" y="3544892"/>
-                  </a:lnTo>
-                  <a:lnTo>
-                    <a:pt x="6619605" y="3539652"/>
-                  </a:lnTo>
-                  <a:lnTo>
-                    <a:pt x="6542361" y="3534157"/>
-                  </a:lnTo>
-                  <a:lnTo>
-                    <a:pt x="6465118" y="3528395"/>
-                  </a:lnTo>
-                  <a:lnTo>
-                    <a:pt x="6387874" y="3522352"/>
-                  </a:lnTo>
-                  <a:lnTo>
-                    <a:pt x="6310631" y="3516016"/>
-                  </a:lnTo>
-                  <a:lnTo>
-                    <a:pt x="6233387" y="3509371"/>
-                  </a:lnTo>
-                  <a:lnTo>
-                    <a:pt x="6156144" y="3502404"/>
-                  </a:lnTo>
-                  <a:lnTo>
-                    <a:pt x="6078900" y="3495097"/>
-                  </a:lnTo>
-                  <a:lnTo>
-                    <a:pt x="6001656" y="3487435"/>
-                  </a:lnTo>
-                  <a:lnTo>
-                    <a:pt x="5924413" y="3479401"/>
-                  </a:lnTo>
-                  <a:lnTo>
-                    <a:pt x="5847169" y="3470976"/>
-                  </a:lnTo>
-                  <a:lnTo>
-                    <a:pt x="5769926" y="3462141"/>
-                  </a:lnTo>
-                  <a:lnTo>
-                    <a:pt x="5692682" y="3452876"/>
-                  </a:lnTo>
-                  <a:lnTo>
-                    <a:pt x="5615439" y="3443161"/>
-                  </a:lnTo>
-                  <a:lnTo>
-                    <a:pt x="5538195" y="3432973"/>
-                  </a:lnTo>
-                  <a:lnTo>
-                    <a:pt x="5460951" y="3422290"/>
-                  </a:lnTo>
-                  <a:lnTo>
-                    <a:pt x="5383708" y="3411087"/>
-                  </a:lnTo>
-                  <a:lnTo>
-                    <a:pt x="5306464" y="3399340"/>
-                  </a:lnTo>
-                  <a:lnTo>
-                    <a:pt x="5229221" y="3387021"/>
-                  </a:lnTo>
-                  <a:lnTo>
-                    <a:pt x="5151977" y="3374103"/>
-                  </a:lnTo>
-                  <a:lnTo>
-                    <a:pt x="5074734" y="3360557"/>
-                  </a:lnTo>
-                  <a:lnTo>
-                    <a:pt x="4997490" y="3346352"/>
-                  </a:lnTo>
-                  <a:lnTo>
-                    <a:pt x="4920246" y="3331456"/>
-                  </a:lnTo>
-                  <a:lnTo>
-                    <a:pt x="4843003" y="3315836"/>
-                  </a:lnTo>
-                  <a:lnTo>
-                    <a:pt x="4765759" y="3299456"/>
-                  </a:lnTo>
-                  <a:lnTo>
-                    <a:pt x="4688516" y="3282280"/>
-                  </a:lnTo>
-                  <a:lnTo>
-                    <a:pt x="4611272" y="3264268"/>
-                  </a:lnTo>
-                  <a:lnTo>
-                    <a:pt x="4534029" y="3245381"/>
-                  </a:lnTo>
-                  <a:lnTo>
-                    <a:pt x="4456785" y="3225574"/>
-                  </a:lnTo>
-                  <a:lnTo>
-                    <a:pt x="4379541" y="3204805"/>
-                  </a:lnTo>
-                  <a:lnTo>
-                    <a:pt x="4302298" y="3183025"/>
-                  </a:lnTo>
-                  <a:lnTo>
-                    <a:pt x="4225054" y="3160187"/>
-                  </a:lnTo>
-                  <a:lnTo>
-                    <a:pt x="4147811" y="3136237"/>
-                  </a:lnTo>
-                  <a:lnTo>
-                    <a:pt x="4070567" y="3111123"/>
-                  </a:lnTo>
-                  <a:lnTo>
-                    <a:pt x="3993324" y="3084788"/>
-                  </a:lnTo>
-                  <a:lnTo>
-                    <a:pt x="3916080" y="3057171"/>
-                  </a:lnTo>
-                  <a:lnTo>
-                    <a:pt x="3838836" y="3028212"/>
-                  </a:lnTo>
-                  <a:lnTo>
-                    <a:pt x="3761593" y="2997844"/>
-                  </a:lnTo>
-                  <a:lnTo>
-                    <a:pt x="3684349" y="2966000"/>
-                  </a:lnTo>
-                  <a:lnTo>
-                    <a:pt x="3607106" y="2932607"/>
-                  </a:lnTo>
-                  <a:lnTo>
-                    <a:pt x="3529862" y="2897590"/>
-                  </a:lnTo>
-                  <a:lnTo>
-                    <a:pt x="3452619" y="2860869"/>
-                  </a:lnTo>
-                  <a:lnTo>
-                    <a:pt x="3375375" y="2822363"/>
-                  </a:lnTo>
-                  <a:lnTo>
-                    <a:pt x="3298131" y="2782925"/>
-                  </a:lnTo>
-                  <a:lnTo>
-                    <a:pt x="3220888" y="2781209"/>
-                  </a:lnTo>
-                  <a:lnTo>
-                    <a:pt x="3143644" y="2779490"/>
-                  </a:lnTo>
-                  <a:lnTo>
-                    <a:pt x="3066401" y="2777767"/>
-                  </a:lnTo>
-                  <a:lnTo>
-                    <a:pt x="2989157" y="2776041"/>
-                  </a:lnTo>
-                  <a:lnTo>
-                    <a:pt x="2911914" y="2774311"/>
-                  </a:lnTo>
-                  <a:lnTo>
-                    <a:pt x="2834670" y="2772578"/>
-                  </a:lnTo>
-                  <a:lnTo>
-                    <a:pt x="2757426" y="2770842"/>
-                  </a:lnTo>
-                  <a:lnTo>
-                    <a:pt x="2680183" y="2769102"/>
-                  </a:lnTo>
-                  <a:lnTo>
-                    <a:pt x="2602939" y="2767359"/>
-                  </a:lnTo>
-                  <a:lnTo>
-                    <a:pt x="2525696" y="2765612"/>
-                  </a:lnTo>
-                  <a:lnTo>
-                    <a:pt x="2448452" y="2763862"/>
-                  </a:lnTo>
-                  <a:lnTo>
-                    <a:pt x="2371209" y="2762108"/>
-                  </a:lnTo>
-                  <a:lnTo>
-                    <a:pt x="2293965" y="2760351"/>
-                  </a:lnTo>
-                  <a:lnTo>
-                    <a:pt x="2216721" y="2758590"/>
-                  </a:lnTo>
-                  <a:lnTo>
-                    <a:pt x="2139478" y="2756826"/>
-                  </a:lnTo>
-                  <a:lnTo>
-                    <a:pt x="2062234" y="2755059"/>
-                  </a:lnTo>
-                  <a:lnTo>
-                    <a:pt x="1984991" y="2753288"/>
-                  </a:lnTo>
-                  <a:lnTo>
-                    <a:pt x="1907747" y="2751513"/>
-                  </a:lnTo>
-                  <a:lnTo>
-                    <a:pt x="1830504" y="2749735"/>
-                  </a:lnTo>
-                  <a:lnTo>
-                    <a:pt x="1753260" y="2747954"/>
-                  </a:lnTo>
-                  <a:lnTo>
-                    <a:pt x="1676016" y="2746169"/>
-                  </a:lnTo>
-                  <a:lnTo>
-                    <a:pt x="1598773" y="2744380"/>
-                  </a:lnTo>
-                  <a:lnTo>
-                    <a:pt x="1521529" y="2742588"/>
-                  </a:lnTo>
-                  <a:lnTo>
-                    <a:pt x="1444286" y="2740792"/>
-                  </a:lnTo>
-                  <a:lnTo>
-                    <a:pt x="1367042" y="2738993"/>
-                  </a:lnTo>
-                  <a:lnTo>
-                    <a:pt x="1289799" y="2737190"/>
-                  </a:lnTo>
-                  <a:lnTo>
-                    <a:pt x="1212555" y="2735384"/>
-                  </a:lnTo>
-                  <a:lnTo>
-                    <a:pt x="1135311" y="2733574"/>
-                  </a:lnTo>
-                  <a:lnTo>
-                    <a:pt x="1058068" y="2731761"/>
-                  </a:lnTo>
-                  <a:lnTo>
-                    <a:pt x="980824" y="2729944"/>
-                  </a:lnTo>
-                  <a:lnTo>
-                    <a:pt x="903581" y="2728123"/>
-                  </a:lnTo>
-                  <a:lnTo>
-                    <a:pt x="826337" y="2726299"/>
-                  </a:lnTo>
-                  <a:lnTo>
-                    <a:pt x="749094" y="2724471"/>
-                  </a:lnTo>
-                  <a:lnTo>
-                    <a:pt x="671850" y="2722640"/>
-                  </a:lnTo>
-                  <a:lnTo>
-                    <a:pt x="594606" y="2720805"/>
-                  </a:lnTo>
-                  <a:lnTo>
-                    <a:pt x="517363" y="2718966"/>
-                  </a:lnTo>
-                  <a:lnTo>
-                    <a:pt x="440119" y="2717124"/>
-                  </a:lnTo>
-                  <a:lnTo>
-                    <a:pt x="362876" y="2715278"/>
-                  </a:lnTo>
-                  <a:lnTo>
-                    <a:pt x="285632" y="2713429"/>
-                  </a:lnTo>
-                  <a:lnTo>
-                    <a:pt x="208389" y="2711576"/>
-                  </a:lnTo>
-                  <a:lnTo>
-                    <a:pt x="131145" y="2709719"/>
-                  </a:lnTo>
-                  <a:lnTo>
-                    <a:pt x="53901" y="2707858"/>
-                  </a:lnTo>
-                  <a:lnTo>
-                    <a:pt x="0" y="2706557"/>
+                    <a:pt x="980824" y="32412"/>
+                  </a:lnTo>
+                  <a:lnTo>
+                    <a:pt x="1058068" y="192475"/>
+                  </a:lnTo>
+                  <a:lnTo>
+                    <a:pt x="1135311" y="345114"/>
+                  </a:lnTo>
+                  <a:lnTo>
+                    <a:pt x="1212555" y="490675"/>
+                  </a:lnTo>
+                  <a:lnTo>
+                    <a:pt x="1289799" y="629485"/>
+                  </a:lnTo>
+                  <a:lnTo>
+                    <a:pt x="1367042" y="761857"/>
+                  </a:lnTo>
+                  <a:lnTo>
+                    <a:pt x="1444286" y="888091"/>
+                  </a:lnTo>
+                  <a:lnTo>
+                    <a:pt x="1521529" y="1008470"/>
+                  </a:lnTo>
+                  <a:lnTo>
+                    <a:pt x="1598773" y="1123266"/>
+                  </a:lnTo>
+                  <a:lnTo>
+                    <a:pt x="1676016" y="1232738"/>
+                  </a:lnTo>
+                  <a:lnTo>
+                    <a:pt x="1753260" y="1337133"/>
+                  </a:lnTo>
+                  <a:lnTo>
+                    <a:pt x="1830504" y="1436687"/>
+                  </a:lnTo>
+                  <a:lnTo>
+                    <a:pt x="1907747" y="1531624"/>
+                  </a:lnTo>
+                  <a:lnTo>
+                    <a:pt x="1984991" y="1622157"/>
+                  </a:lnTo>
+                  <a:lnTo>
+                    <a:pt x="2062234" y="1708493"/>
+                  </a:lnTo>
+                  <a:lnTo>
+                    <a:pt x="2139478" y="1790824"/>
+                  </a:lnTo>
+                  <a:lnTo>
+                    <a:pt x="2216721" y="1869337"/>
+                  </a:lnTo>
+                  <a:lnTo>
+                    <a:pt x="2293965" y="1944208"/>
+                  </a:lnTo>
+                  <a:lnTo>
+                    <a:pt x="2371209" y="2015608"/>
+                  </a:lnTo>
+                  <a:lnTo>
+                    <a:pt x="2448452" y="2083696"/>
+                  </a:lnTo>
+                  <a:lnTo>
+                    <a:pt x="2525696" y="2148626"/>
+                  </a:lnTo>
+                  <a:lnTo>
+                    <a:pt x="2602939" y="2210545"/>
+                  </a:lnTo>
+                  <a:lnTo>
+                    <a:pt x="2680183" y="2269592"/>
+                  </a:lnTo>
+                  <a:lnTo>
+                    <a:pt x="2757426" y="2325901"/>
+                  </a:lnTo>
+                  <a:lnTo>
+                    <a:pt x="2834670" y="2379599"/>
+                  </a:lnTo>
+                  <a:lnTo>
+                    <a:pt x="2911914" y="2430806"/>
+                  </a:lnTo>
+                  <a:lnTo>
+                    <a:pt x="2989157" y="2479638"/>
+                  </a:lnTo>
+                  <a:lnTo>
+                    <a:pt x="3066401" y="2526206"/>
+                  </a:lnTo>
+                  <a:lnTo>
+                    <a:pt x="3143644" y="2570614"/>
+                  </a:lnTo>
+                  <a:lnTo>
+                    <a:pt x="3220888" y="2612962"/>
+                  </a:lnTo>
+                  <a:lnTo>
+                    <a:pt x="3298131" y="2653347"/>
+                  </a:lnTo>
+                  <a:lnTo>
+                    <a:pt x="3375375" y="2655877"/>
+                  </a:lnTo>
+                  <a:lnTo>
+                    <a:pt x="3452619" y="2657508"/>
+                  </a:lnTo>
+                  <a:lnTo>
+                    <a:pt x="3529862" y="2659135"/>
+                  </a:lnTo>
+                  <a:lnTo>
+                    <a:pt x="3607106" y="2660759"/>
+                  </a:lnTo>
+                  <a:lnTo>
+                    <a:pt x="3684349" y="2662379"/>
+                  </a:lnTo>
+                  <a:lnTo>
+                    <a:pt x="3761593" y="2663997"/>
+                  </a:lnTo>
+                  <a:lnTo>
+                    <a:pt x="3838836" y="2665611"/>
+                  </a:lnTo>
+                  <a:lnTo>
+                    <a:pt x="3916080" y="2667222"/>
+                  </a:lnTo>
+                  <a:lnTo>
+                    <a:pt x="3993324" y="2668830"/>
+                  </a:lnTo>
+                  <a:lnTo>
+                    <a:pt x="4070567" y="2670435"/>
+                  </a:lnTo>
+                  <a:lnTo>
+                    <a:pt x="4147811" y="2672036"/>
+                  </a:lnTo>
+                  <a:lnTo>
+                    <a:pt x="4225054" y="2673635"/>
+                  </a:lnTo>
+                  <a:lnTo>
+                    <a:pt x="4302298" y="2675230"/>
+                  </a:lnTo>
+                  <a:lnTo>
+                    <a:pt x="4379541" y="2676822"/>
+                  </a:lnTo>
+                  <a:lnTo>
+                    <a:pt x="4456785" y="2678411"/>
+                  </a:lnTo>
+                  <a:lnTo>
+                    <a:pt x="4534029" y="2679997"/>
+                  </a:lnTo>
+                  <a:lnTo>
+                    <a:pt x="4611272" y="2681580"/>
+                  </a:lnTo>
+                  <a:lnTo>
+                    <a:pt x="4688516" y="2683159"/>
+                  </a:lnTo>
+                  <a:lnTo>
+                    <a:pt x="4765759" y="2684736"/>
+                  </a:lnTo>
+                  <a:lnTo>
+                    <a:pt x="4843003" y="2686309"/>
+                  </a:lnTo>
+                  <a:lnTo>
+                    <a:pt x="4920246" y="2687880"/>
+                  </a:lnTo>
+                  <a:lnTo>
+                    <a:pt x="4997490" y="2689447"/>
+                  </a:lnTo>
+                  <a:lnTo>
+                    <a:pt x="5074734" y="2691011"/>
+                  </a:lnTo>
+                  <a:lnTo>
+                    <a:pt x="5151977" y="2692572"/>
+                  </a:lnTo>
+                  <a:lnTo>
+                    <a:pt x="5229221" y="2694130"/>
+                  </a:lnTo>
+                  <a:lnTo>
+                    <a:pt x="5306464" y="2695685"/>
+                  </a:lnTo>
+                  <a:lnTo>
+                    <a:pt x="5383708" y="2697237"/>
+                  </a:lnTo>
+                  <a:lnTo>
+                    <a:pt x="5460951" y="2698786"/>
+                  </a:lnTo>
+                  <a:lnTo>
+                    <a:pt x="5538195" y="2700332"/>
+                  </a:lnTo>
+                  <a:lnTo>
+                    <a:pt x="5615439" y="2701874"/>
+                  </a:lnTo>
+                  <a:lnTo>
+                    <a:pt x="5692682" y="2703414"/>
+                  </a:lnTo>
+                  <a:lnTo>
+                    <a:pt x="5769926" y="2704951"/>
+                  </a:lnTo>
+                  <a:lnTo>
+                    <a:pt x="5847169" y="2706484"/>
+                  </a:lnTo>
+                  <a:lnTo>
+                    <a:pt x="5924413" y="2708015"/>
+                  </a:lnTo>
+                  <a:lnTo>
+                    <a:pt x="6001656" y="2709542"/>
+                  </a:lnTo>
+                  <a:lnTo>
+                    <a:pt x="6078900" y="2711067"/>
+                  </a:lnTo>
+                  <a:lnTo>
+                    <a:pt x="6156144" y="2712589"/>
+                  </a:lnTo>
+                  <a:lnTo>
+                    <a:pt x="6233387" y="2714107"/>
+                  </a:lnTo>
+                  <a:lnTo>
+                    <a:pt x="6310631" y="2715623"/>
+                  </a:lnTo>
+                  <a:lnTo>
+                    <a:pt x="6387874" y="2717135"/>
+                  </a:lnTo>
+                  <a:lnTo>
+                    <a:pt x="6465118" y="2718645"/>
+                  </a:lnTo>
+                  <a:lnTo>
+                    <a:pt x="6542361" y="2720152"/>
+                  </a:lnTo>
+                  <a:lnTo>
+                    <a:pt x="6619605" y="2721655"/>
+                  </a:lnTo>
+                  <a:lnTo>
+                    <a:pt x="6696849" y="2723156"/>
+                  </a:lnTo>
+                  <a:lnTo>
+                    <a:pt x="6774092" y="2724654"/>
+                  </a:lnTo>
+                  <a:lnTo>
+                    <a:pt x="6851336" y="2726149"/>
+                  </a:lnTo>
+                  <a:lnTo>
+                    <a:pt x="6928579" y="2727640"/>
+                  </a:lnTo>
+                  <a:lnTo>
+                    <a:pt x="7005823" y="2729129"/>
+                  </a:lnTo>
+                  <a:lnTo>
+                    <a:pt x="7083066" y="2730615"/>
+                  </a:lnTo>
+                  <a:lnTo>
+                    <a:pt x="7160310" y="2732098"/>
+                  </a:lnTo>
+                  <a:lnTo>
+                    <a:pt x="7237554" y="2733579"/>
+                  </a:lnTo>
+                  <a:lnTo>
+                    <a:pt x="7314797" y="2735056"/>
+                  </a:lnTo>
+                  <a:lnTo>
+                    <a:pt x="7392041" y="2736530"/>
+                  </a:lnTo>
+                  <a:lnTo>
+                    <a:pt x="7392041" y="3416719"/>
+                  </a:lnTo>
+                  <a:lnTo>
+                    <a:pt x="7314797" y="3413460"/>
+                  </a:lnTo>
+                  <a:lnTo>
+                    <a:pt x="7237554" y="3410041"/>
+                  </a:lnTo>
+                  <a:lnTo>
+                    <a:pt x="7160310" y="3406457"/>
+                  </a:lnTo>
+                  <a:lnTo>
+                    <a:pt x="7083066" y="3402698"/>
+                  </a:lnTo>
+                  <a:lnTo>
+                    <a:pt x="7005823" y="3398757"/>
+                  </a:lnTo>
+                  <a:lnTo>
+                    <a:pt x="6928579" y="3394623"/>
+                  </a:lnTo>
+                  <a:lnTo>
+                    <a:pt x="6851336" y="3390289"/>
+                  </a:lnTo>
+                  <a:lnTo>
+                    <a:pt x="6774092" y="3385744"/>
+                  </a:lnTo>
+                  <a:lnTo>
+                    <a:pt x="6696849" y="3380978"/>
+                  </a:lnTo>
+                  <a:lnTo>
+                    <a:pt x="6619605" y="3375980"/>
+                  </a:lnTo>
+                  <a:lnTo>
+                    <a:pt x="6542361" y="3370739"/>
+                  </a:lnTo>
+                  <a:lnTo>
+                    <a:pt x="6465118" y="3365243"/>
+                  </a:lnTo>
+                  <a:lnTo>
+                    <a:pt x="6387874" y="3359480"/>
+                  </a:lnTo>
+                  <a:lnTo>
+                    <a:pt x="6310631" y="3353437"/>
+                  </a:lnTo>
+                  <a:lnTo>
+                    <a:pt x="6233387" y="3347099"/>
+                  </a:lnTo>
+                  <a:lnTo>
+                    <a:pt x="6156144" y="3340454"/>
+                  </a:lnTo>
+                  <a:lnTo>
+                    <a:pt x="6078900" y="3333485"/>
+                  </a:lnTo>
+                  <a:lnTo>
+                    <a:pt x="6001656" y="3326177"/>
+                  </a:lnTo>
+                  <a:lnTo>
+                    <a:pt x="5924413" y="3318515"/>
+                  </a:lnTo>
+                  <a:lnTo>
+                    <a:pt x="5847169" y="3310479"/>
+                  </a:lnTo>
+                  <a:lnTo>
+                    <a:pt x="5769926" y="3302052"/>
+                  </a:lnTo>
+                  <a:lnTo>
+                    <a:pt x="5692682" y="3293216"/>
+                  </a:lnTo>
+                  <a:lnTo>
+                    <a:pt x="5615439" y="3283950"/>
+                  </a:lnTo>
+                  <a:lnTo>
+                    <a:pt x="5538195" y="3274234"/>
+                  </a:lnTo>
+                  <a:lnTo>
+                    <a:pt x="5460951" y="3264044"/>
+                  </a:lnTo>
+                  <a:lnTo>
+                    <a:pt x="5383708" y="3253360"/>
+                  </a:lnTo>
+                  <a:lnTo>
+                    <a:pt x="5306464" y="3242156"/>
+                  </a:lnTo>
+                  <a:lnTo>
+                    <a:pt x="5229221" y="3230406"/>
+                  </a:lnTo>
+                  <a:lnTo>
+                    <a:pt x="5151977" y="3218086"/>
+                  </a:lnTo>
+                  <a:lnTo>
+                    <a:pt x="5074734" y="3205166"/>
+                  </a:lnTo>
+                  <a:lnTo>
+                    <a:pt x="4997490" y="3191618"/>
+                  </a:lnTo>
+                  <a:lnTo>
+                    <a:pt x="4920246" y="3177411"/>
+                  </a:lnTo>
+                  <a:lnTo>
+                    <a:pt x="4843003" y="3162513"/>
+                  </a:lnTo>
+                  <a:lnTo>
+                    <a:pt x="4765759" y="3146891"/>
+                  </a:lnTo>
+                  <a:lnTo>
+                    <a:pt x="4688516" y="3130509"/>
+                  </a:lnTo>
+                  <a:lnTo>
+                    <a:pt x="4611272" y="3113330"/>
+                  </a:lnTo>
+                  <a:lnTo>
+                    <a:pt x="4534029" y="3095315"/>
+                  </a:lnTo>
+                  <a:lnTo>
+                    <a:pt x="4456785" y="3076425"/>
+                  </a:lnTo>
+                  <a:lnTo>
+                    <a:pt x="4379541" y="3056616"/>
+                  </a:lnTo>
+                  <a:lnTo>
+                    <a:pt x="4302298" y="3035844"/>
+                  </a:lnTo>
+                  <a:lnTo>
+                    <a:pt x="4225054" y="3014061"/>
+                  </a:lnTo>
+                  <a:lnTo>
+                    <a:pt x="4147811" y="2991219"/>
+                  </a:lnTo>
+                  <a:lnTo>
+                    <a:pt x="4070567" y="2967266"/>
+                  </a:lnTo>
+                  <a:lnTo>
+                    <a:pt x="3993324" y="2942148"/>
+                  </a:lnTo>
+                  <a:lnTo>
+                    <a:pt x="3916080" y="2915809"/>
+                  </a:lnTo>
+                  <a:lnTo>
+                    <a:pt x="3838836" y="2888189"/>
+                  </a:lnTo>
+                  <a:lnTo>
+                    <a:pt x="3761593" y="2859225"/>
+                  </a:lnTo>
+                  <a:lnTo>
+                    <a:pt x="3684349" y="2828853"/>
+                  </a:lnTo>
+                  <a:lnTo>
+                    <a:pt x="3607106" y="2797004"/>
+                  </a:lnTo>
+                  <a:lnTo>
+                    <a:pt x="3529862" y="2763606"/>
+                  </a:lnTo>
+                  <a:lnTo>
+                    <a:pt x="3452619" y="2728584"/>
+                  </a:lnTo>
+                  <a:lnTo>
+                    <a:pt x="3375375" y="2691858"/>
+                  </a:lnTo>
+                  <a:lnTo>
+                    <a:pt x="3298131" y="2654244"/>
+                  </a:lnTo>
+                  <a:lnTo>
+                    <a:pt x="3220888" y="2652607"/>
+                  </a:lnTo>
+                  <a:lnTo>
+                    <a:pt x="3143644" y="2650967"/>
+                  </a:lnTo>
+                  <a:lnTo>
+                    <a:pt x="3066401" y="2649324"/>
+                  </a:lnTo>
+                  <a:lnTo>
+                    <a:pt x="2989157" y="2647678"/>
+                  </a:lnTo>
+                  <a:lnTo>
+                    <a:pt x="2911914" y="2646028"/>
+                  </a:lnTo>
+                  <a:lnTo>
+                    <a:pt x="2834670" y="2644375"/>
+                  </a:lnTo>
+                  <a:lnTo>
+                    <a:pt x="2757426" y="2642719"/>
+                  </a:lnTo>
+                  <a:lnTo>
+                    <a:pt x="2680183" y="2641060"/>
+                  </a:lnTo>
+                  <a:lnTo>
+                    <a:pt x="2602939" y="2639397"/>
+                  </a:lnTo>
+                  <a:lnTo>
+                    <a:pt x="2525696" y="2637731"/>
+                  </a:lnTo>
+                  <a:lnTo>
+                    <a:pt x="2448452" y="2636062"/>
+                  </a:lnTo>
+                  <a:lnTo>
+                    <a:pt x="2371209" y="2634389"/>
+                  </a:lnTo>
+                  <a:lnTo>
+                    <a:pt x="2293965" y="2632713"/>
+                  </a:lnTo>
+                  <a:lnTo>
+                    <a:pt x="2216721" y="2631034"/>
+                  </a:lnTo>
+                  <a:lnTo>
+                    <a:pt x="2139478" y="2629352"/>
+                  </a:lnTo>
+                  <a:lnTo>
+                    <a:pt x="2062234" y="2627666"/>
+                  </a:lnTo>
+                  <a:lnTo>
+                    <a:pt x="1984991" y="2625977"/>
+                  </a:lnTo>
+                  <a:lnTo>
+                    <a:pt x="1907747" y="2624284"/>
+                  </a:lnTo>
+                  <a:lnTo>
+                    <a:pt x="1830504" y="2622588"/>
+                  </a:lnTo>
+                  <a:lnTo>
+                    <a:pt x="1753260" y="2620889"/>
+                  </a:lnTo>
+                  <a:lnTo>
+                    <a:pt x="1676016" y="2619187"/>
+                  </a:lnTo>
+                  <a:lnTo>
+                    <a:pt x="1598773" y="2617481"/>
+                  </a:lnTo>
+                  <a:lnTo>
+                    <a:pt x="1521529" y="2615772"/>
+                  </a:lnTo>
+                  <a:lnTo>
+                    <a:pt x="1444286" y="2614059"/>
+                  </a:lnTo>
+                  <a:lnTo>
+                    <a:pt x="1367042" y="2612343"/>
+                  </a:lnTo>
+                  <a:lnTo>
+                    <a:pt x="1289799" y="2610624"/>
+                  </a:lnTo>
+                  <a:lnTo>
+                    <a:pt x="1212555" y="2608901"/>
+                  </a:lnTo>
+                  <a:lnTo>
+                    <a:pt x="1135311" y="2607175"/>
+                  </a:lnTo>
+                  <a:lnTo>
+                    <a:pt x="1058068" y="2605445"/>
+                  </a:lnTo>
+                  <a:lnTo>
+                    <a:pt x="980824" y="2603712"/>
+                  </a:lnTo>
+                  <a:lnTo>
+                    <a:pt x="903581" y="2601976"/>
+                  </a:lnTo>
+                  <a:lnTo>
+                    <a:pt x="826337" y="2600236"/>
+                  </a:lnTo>
+                  <a:lnTo>
+                    <a:pt x="749094" y="2598493"/>
+                  </a:lnTo>
+                  <a:lnTo>
+                    <a:pt x="671850" y="2596746"/>
+                  </a:lnTo>
+                  <a:lnTo>
+                    <a:pt x="594606" y="2594996"/>
+                  </a:lnTo>
+                  <a:lnTo>
+                    <a:pt x="517363" y="2593242"/>
+                  </a:lnTo>
+                  <a:lnTo>
+                    <a:pt x="440119" y="2591485"/>
+                  </a:lnTo>
+                  <a:lnTo>
+                    <a:pt x="362876" y="2589725"/>
+                  </a:lnTo>
+                  <a:lnTo>
+                    <a:pt x="285632" y="2587961"/>
+                  </a:lnTo>
+                  <a:lnTo>
+                    <a:pt x="208389" y="2586193"/>
+                  </a:lnTo>
+                  <a:lnTo>
+                    <a:pt x="131145" y="2584422"/>
+                  </a:lnTo>
+                  <a:lnTo>
+                    <a:pt x="53901" y="2582648"/>
+                  </a:lnTo>
+                  <a:lnTo>
+                    <a:pt x="0" y="2581407"/>
                   </a:lnTo>
                   <a:close/>
                 </a:path>
@@ -3579,267 +3579,267 @@
           </p:nvSpPr>
           <p:spPr>
             <a:xfrm>
-              <a:off x="1783426" y="1896563"/>
-              <a:ext cx="6426132" cy="2869201"/>
+              <a:off x="1783426" y="2073503"/>
+              <a:ext cx="6426132" cy="2736530"/>
             </a:xfrm>
             <a:custGeom>
               <a:avLst/>
               <a:pathLst>
-                <a:path w="6426132" h="2869201">
+                <a:path w="6426132" h="2736530">
                   <a:moveTo>
                     <a:pt x="0" y="0"/>
                   </a:moveTo>
                   <a:lnTo>
-                    <a:pt x="14916" y="33983"/>
-                  </a:lnTo>
-                  <a:lnTo>
-                    <a:pt x="92159" y="201806"/>
-                  </a:lnTo>
-                  <a:lnTo>
-                    <a:pt x="169403" y="361846"/>
-                  </a:lnTo>
-                  <a:lnTo>
-                    <a:pt x="246646" y="514464"/>
-                  </a:lnTo>
-                  <a:lnTo>
-                    <a:pt x="323890" y="660003"/>
-                  </a:lnTo>
-                  <a:lnTo>
-                    <a:pt x="401133" y="798793"/>
-                  </a:lnTo>
-                  <a:lnTo>
-                    <a:pt x="478377" y="931147"/>
-                  </a:lnTo>
-                  <a:lnTo>
-                    <a:pt x="555621" y="1057362"/>
-                  </a:lnTo>
-                  <a:lnTo>
-                    <a:pt x="632864" y="1177723"/>
-                  </a:lnTo>
-                  <a:lnTo>
-                    <a:pt x="710108" y="1292503"/>
-                  </a:lnTo>
-                  <a:lnTo>
-                    <a:pt x="787351" y="1401959"/>
-                  </a:lnTo>
-                  <a:lnTo>
-                    <a:pt x="864595" y="1506340"/>
-                  </a:lnTo>
-                  <a:lnTo>
-                    <a:pt x="941838" y="1605879"/>
-                  </a:lnTo>
-                  <a:lnTo>
-                    <a:pt x="1019082" y="1700802"/>
-                  </a:lnTo>
-                  <a:lnTo>
-                    <a:pt x="1096326" y="1791323"/>
-                  </a:lnTo>
-                  <a:lnTo>
-                    <a:pt x="1173569" y="1877645"/>
-                  </a:lnTo>
-                  <a:lnTo>
-                    <a:pt x="1250813" y="1959965"/>
-                  </a:lnTo>
-                  <a:lnTo>
-                    <a:pt x="1328056" y="2038466"/>
-                  </a:lnTo>
-                  <a:lnTo>
-                    <a:pt x="1405300" y="2113327"/>
-                  </a:lnTo>
-                  <a:lnTo>
-                    <a:pt x="1482543" y="2184716"/>
-                  </a:lnTo>
-                  <a:lnTo>
-                    <a:pt x="1559787" y="2252794"/>
-                  </a:lnTo>
-                  <a:lnTo>
-                    <a:pt x="1637031" y="2317715"/>
-                  </a:lnTo>
-                  <a:lnTo>
-                    <a:pt x="1714274" y="2379625"/>
-                  </a:lnTo>
-                  <a:lnTo>
-                    <a:pt x="1791518" y="2438664"/>
-                  </a:lnTo>
-                  <a:lnTo>
-                    <a:pt x="1868761" y="2494965"/>
-                  </a:lnTo>
-                  <a:lnTo>
-                    <a:pt x="1946005" y="2548655"/>
-                  </a:lnTo>
-                  <a:lnTo>
-                    <a:pt x="2023248" y="2599855"/>
-                  </a:lnTo>
-                  <a:lnTo>
-                    <a:pt x="2100492" y="2648680"/>
-                  </a:lnTo>
-                  <a:lnTo>
-                    <a:pt x="2177736" y="2695241"/>
-                  </a:lnTo>
-                  <a:lnTo>
-                    <a:pt x="2254979" y="2739642"/>
-                  </a:lnTo>
-                  <a:lnTo>
-                    <a:pt x="2332223" y="2781985"/>
-                  </a:lnTo>
-                  <a:lnTo>
-                    <a:pt x="2409466" y="2784638"/>
-                  </a:lnTo>
-                  <a:lnTo>
-                    <a:pt x="2486710" y="2786347"/>
-                  </a:lnTo>
-                  <a:lnTo>
-                    <a:pt x="2563953" y="2788053"/>
-                  </a:lnTo>
-                  <a:lnTo>
-                    <a:pt x="2641197" y="2789756"/>
-                  </a:lnTo>
-                  <a:lnTo>
-                    <a:pt x="2718441" y="2791455"/>
-                  </a:lnTo>
-                  <a:lnTo>
-                    <a:pt x="2795684" y="2793151"/>
-                  </a:lnTo>
-                  <a:lnTo>
-                    <a:pt x="2872928" y="2794844"/>
-                  </a:lnTo>
-                  <a:lnTo>
-                    <a:pt x="2950171" y="2796533"/>
-                  </a:lnTo>
-                  <a:lnTo>
-                    <a:pt x="3027415" y="2798219"/>
-                  </a:lnTo>
-                  <a:lnTo>
-                    <a:pt x="3104658" y="2799901"/>
-                  </a:lnTo>
-                  <a:lnTo>
-                    <a:pt x="3181902" y="2801580"/>
-                  </a:lnTo>
-                  <a:lnTo>
-                    <a:pt x="3259146" y="2803256"/>
-                  </a:lnTo>
-                  <a:lnTo>
-                    <a:pt x="3336389" y="2804929"/>
-                  </a:lnTo>
-                  <a:lnTo>
-                    <a:pt x="3413633" y="2806598"/>
-                  </a:lnTo>
-                  <a:lnTo>
-                    <a:pt x="3490876" y="2808264"/>
-                  </a:lnTo>
-                  <a:lnTo>
-                    <a:pt x="3568120" y="2809927"/>
-                  </a:lnTo>
-                  <a:lnTo>
-                    <a:pt x="3645364" y="2811587"/>
-                  </a:lnTo>
-                  <a:lnTo>
-                    <a:pt x="3722607" y="2813243"/>
-                  </a:lnTo>
-                  <a:lnTo>
-                    <a:pt x="3799851" y="2814896"/>
-                  </a:lnTo>
-                  <a:lnTo>
-                    <a:pt x="3877094" y="2816545"/>
-                  </a:lnTo>
-                  <a:lnTo>
-                    <a:pt x="3954338" y="2818192"/>
-                  </a:lnTo>
-                  <a:lnTo>
-                    <a:pt x="4031581" y="2819835"/>
-                  </a:lnTo>
-                  <a:lnTo>
-                    <a:pt x="4108825" y="2821475"/>
-                  </a:lnTo>
-                  <a:lnTo>
-                    <a:pt x="4186069" y="2823112"/>
-                  </a:lnTo>
-                  <a:lnTo>
-                    <a:pt x="4263312" y="2824745"/>
-                  </a:lnTo>
-                  <a:lnTo>
-                    <a:pt x="4340556" y="2826376"/>
-                  </a:lnTo>
-                  <a:lnTo>
-                    <a:pt x="4417799" y="2828003"/>
-                  </a:lnTo>
-                  <a:lnTo>
-                    <a:pt x="4495043" y="2829627"/>
-                  </a:lnTo>
-                  <a:lnTo>
-                    <a:pt x="4572286" y="2831247"/>
-                  </a:lnTo>
-                  <a:lnTo>
-                    <a:pt x="4649530" y="2832865"/>
-                  </a:lnTo>
-                  <a:lnTo>
-                    <a:pt x="4726774" y="2834479"/>
-                  </a:lnTo>
-                  <a:lnTo>
-                    <a:pt x="4804017" y="2836090"/>
-                  </a:lnTo>
-                  <a:lnTo>
-                    <a:pt x="4881261" y="2837698"/>
-                  </a:lnTo>
-                  <a:lnTo>
-                    <a:pt x="4958504" y="2839303"/>
-                  </a:lnTo>
-                  <a:lnTo>
-                    <a:pt x="5035748" y="2840905"/>
-                  </a:lnTo>
-                  <a:lnTo>
-                    <a:pt x="5112991" y="2842503"/>
-                  </a:lnTo>
-                  <a:lnTo>
-                    <a:pt x="5190235" y="2844099"/>
-                  </a:lnTo>
-                  <a:lnTo>
-                    <a:pt x="5267479" y="2845691"/>
-                  </a:lnTo>
-                  <a:lnTo>
-                    <a:pt x="5344722" y="2847280"/>
-                  </a:lnTo>
-                  <a:lnTo>
-                    <a:pt x="5421966" y="2848866"/>
-                  </a:lnTo>
-                  <a:lnTo>
-                    <a:pt x="5499209" y="2850449"/>
-                  </a:lnTo>
-                  <a:lnTo>
-                    <a:pt x="5576453" y="2852028"/>
-                  </a:lnTo>
-                  <a:lnTo>
-                    <a:pt x="5653696" y="2853605"/>
-                  </a:lnTo>
-                  <a:lnTo>
-                    <a:pt x="5730940" y="2855178"/>
-                  </a:lnTo>
-                  <a:lnTo>
-                    <a:pt x="5808184" y="2856749"/>
-                  </a:lnTo>
-                  <a:lnTo>
-                    <a:pt x="5885427" y="2858316"/>
-                  </a:lnTo>
-                  <a:lnTo>
-                    <a:pt x="5962671" y="2859880"/>
-                  </a:lnTo>
-                  <a:lnTo>
-                    <a:pt x="6039914" y="2861441"/>
-                  </a:lnTo>
-                  <a:lnTo>
-                    <a:pt x="6117158" y="2862999"/>
-                  </a:lnTo>
-                  <a:lnTo>
-                    <a:pt x="6194401" y="2864554"/>
-                  </a:lnTo>
-                  <a:lnTo>
-                    <a:pt x="6271645" y="2866106"/>
-                  </a:lnTo>
-                  <a:lnTo>
-                    <a:pt x="6348889" y="2867655"/>
-                  </a:lnTo>
-                  <a:lnTo>
-                    <a:pt x="6426132" y="2869201"/>
+                    <a:pt x="14916" y="32412"/>
+                  </a:lnTo>
+                  <a:lnTo>
+                    <a:pt x="92159" y="192475"/>
+                  </a:lnTo>
+                  <a:lnTo>
+                    <a:pt x="169403" y="345114"/>
+                  </a:lnTo>
+                  <a:lnTo>
+                    <a:pt x="246646" y="490675"/>
+                  </a:lnTo>
+                  <a:lnTo>
+                    <a:pt x="323890" y="629485"/>
+                  </a:lnTo>
+                  <a:lnTo>
+                    <a:pt x="401133" y="761857"/>
+                  </a:lnTo>
+                  <a:lnTo>
+                    <a:pt x="478377" y="888091"/>
+                  </a:lnTo>
+                  <a:lnTo>
+                    <a:pt x="555621" y="1008470"/>
+                  </a:lnTo>
+                  <a:lnTo>
+                    <a:pt x="632864" y="1123266"/>
+                  </a:lnTo>
+                  <a:lnTo>
+                    <a:pt x="710108" y="1232738"/>
+                  </a:lnTo>
+                  <a:lnTo>
+                    <a:pt x="787351" y="1337133"/>
+                  </a:lnTo>
+                  <a:lnTo>
+                    <a:pt x="864595" y="1436687"/>
+                  </a:lnTo>
+                  <a:lnTo>
+                    <a:pt x="941838" y="1531624"/>
+                  </a:lnTo>
+                  <a:lnTo>
+                    <a:pt x="1019082" y="1622157"/>
+                  </a:lnTo>
+                  <a:lnTo>
+                    <a:pt x="1096326" y="1708493"/>
+                  </a:lnTo>
+                  <a:lnTo>
+                    <a:pt x="1173569" y="1790824"/>
+                  </a:lnTo>
+                  <a:lnTo>
+                    <a:pt x="1250813" y="1869337"/>
+                  </a:lnTo>
+                  <a:lnTo>
+                    <a:pt x="1328056" y="1944208"/>
+                  </a:lnTo>
+                  <a:lnTo>
+                    <a:pt x="1405300" y="2015608"/>
+                  </a:lnTo>
+                  <a:lnTo>
+                    <a:pt x="1482543" y="2083696"/>
+                  </a:lnTo>
+                  <a:lnTo>
+                    <a:pt x="1559787" y="2148626"/>
+                  </a:lnTo>
+                  <a:lnTo>
+                    <a:pt x="1637031" y="2210545"/>
+                  </a:lnTo>
+                  <a:lnTo>
+                    <a:pt x="1714274" y="2269592"/>
+                  </a:lnTo>
+                  <a:lnTo>
+                    <a:pt x="1791518" y="2325901"/>
+                  </a:lnTo>
+                  <a:lnTo>
+                    <a:pt x="1868761" y="2379599"/>
+                  </a:lnTo>
+                  <a:lnTo>
+                    <a:pt x="1946005" y="2430806"/>
+                  </a:lnTo>
+                  <a:lnTo>
+                    <a:pt x="2023248" y="2479638"/>
+                  </a:lnTo>
+                  <a:lnTo>
+                    <a:pt x="2100492" y="2526206"/>
+                  </a:lnTo>
+                  <a:lnTo>
+                    <a:pt x="2177736" y="2570614"/>
+                  </a:lnTo>
+                  <a:lnTo>
+                    <a:pt x="2254979" y="2612962"/>
+                  </a:lnTo>
+                  <a:lnTo>
+                    <a:pt x="2332223" y="2653347"/>
+                  </a:lnTo>
+                  <a:lnTo>
+                    <a:pt x="2409466" y="2655877"/>
+                  </a:lnTo>
+                  <a:lnTo>
+                    <a:pt x="2486710" y="2657508"/>
+                  </a:lnTo>
+                  <a:lnTo>
+                    <a:pt x="2563953" y="2659135"/>
+                  </a:lnTo>
+                  <a:lnTo>
+                    <a:pt x="2641197" y="2660759"/>
+                  </a:lnTo>
+                  <a:lnTo>
+                    <a:pt x="2718441" y="2662379"/>
+                  </a:lnTo>
+                  <a:lnTo>
+                    <a:pt x="2795684" y="2663997"/>
+                  </a:lnTo>
+                  <a:lnTo>
+                    <a:pt x="2872928" y="2665611"/>
+                  </a:lnTo>
+                  <a:lnTo>
+                    <a:pt x="2950171" y="2667222"/>
+                  </a:lnTo>
+                  <a:lnTo>
+                    <a:pt x="3027415" y="2668830"/>
+                  </a:lnTo>
+                  <a:lnTo>
+                    <a:pt x="3104658" y="2670435"/>
+                  </a:lnTo>
+                  <a:lnTo>
+                    <a:pt x="3181902" y="2672036"/>
+                  </a:lnTo>
+                  <a:lnTo>
+                    <a:pt x="3259146" y="2673635"/>
+                  </a:lnTo>
+                  <a:lnTo>
+                    <a:pt x="3336389" y="2675230"/>
+                  </a:lnTo>
+                  <a:lnTo>
+                    <a:pt x="3413633" y="2676822"/>
+                  </a:lnTo>
+                  <a:lnTo>
+                    <a:pt x="3490876" y="2678411"/>
+                  </a:lnTo>
+                  <a:lnTo>
+                    <a:pt x="3568120" y="2679997"/>
+                  </a:lnTo>
+                  <a:lnTo>
+                    <a:pt x="3645364" y="2681580"/>
+                  </a:lnTo>
+                  <a:lnTo>
+                    <a:pt x="3722607" y="2683159"/>
+                  </a:lnTo>
+                  <a:lnTo>
+                    <a:pt x="3799851" y="2684736"/>
+                  </a:lnTo>
+                  <a:lnTo>
+                    <a:pt x="3877094" y="2686309"/>
+                  </a:lnTo>
+                  <a:lnTo>
+                    <a:pt x="3954338" y="2687880"/>
+                  </a:lnTo>
+                  <a:lnTo>
+                    <a:pt x="4031581" y="2689447"/>
+                  </a:lnTo>
+                  <a:lnTo>
+                    <a:pt x="4108825" y="2691011"/>
+                  </a:lnTo>
+                  <a:lnTo>
+                    <a:pt x="4186069" y="2692572"/>
+                  </a:lnTo>
+                  <a:lnTo>
+                    <a:pt x="4263312" y="2694130"/>
+                  </a:lnTo>
+                  <a:lnTo>
+                    <a:pt x="4340556" y="2695685"/>
+                  </a:lnTo>
+                  <a:lnTo>
+                    <a:pt x="4417799" y="2697237"/>
+                  </a:lnTo>
+                  <a:lnTo>
+                    <a:pt x="4495043" y="2698786"/>
+                  </a:lnTo>
+                  <a:lnTo>
+                    <a:pt x="4572286" y="2700332"/>
+                  </a:lnTo>
+                  <a:lnTo>
+                    <a:pt x="4649530" y="2701874"/>
+                  </a:lnTo>
+                  <a:lnTo>
+                    <a:pt x="4726774" y="2703414"/>
+                  </a:lnTo>
+                  <a:lnTo>
+                    <a:pt x="4804017" y="2704951"/>
+                  </a:lnTo>
+                  <a:lnTo>
+                    <a:pt x="4881261" y="2706484"/>
+                  </a:lnTo>
+                  <a:lnTo>
+                    <a:pt x="4958504" y="2708015"/>
+                  </a:lnTo>
+                  <a:lnTo>
+                    <a:pt x="5035748" y="2709542"/>
+                  </a:lnTo>
+                  <a:lnTo>
+                    <a:pt x="5112991" y="2711067"/>
+                  </a:lnTo>
+                  <a:lnTo>
+                    <a:pt x="5190235" y="2712589"/>
+                  </a:lnTo>
+                  <a:lnTo>
+                    <a:pt x="5267479" y="2714107"/>
+                  </a:lnTo>
+                  <a:lnTo>
+                    <a:pt x="5344722" y="2715623"/>
+                  </a:lnTo>
+                  <a:lnTo>
+                    <a:pt x="5421966" y="2717135"/>
+                  </a:lnTo>
+                  <a:lnTo>
+                    <a:pt x="5499209" y="2718645"/>
+                  </a:lnTo>
+                  <a:lnTo>
+                    <a:pt x="5576453" y="2720152"/>
+                  </a:lnTo>
+                  <a:lnTo>
+                    <a:pt x="5653696" y="2721655"/>
+                  </a:lnTo>
+                  <a:lnTo>
+                    <a:pt x="5730940" y="2723156"/>
+                  </a:lnTo>
+                  <a:lnTo>
+                    <a:pt x="5808184" y="2724654"/>
+                  </a:lnTo>
+                  <a:lnTo>
+                    <a:pt x="5885427" y="2726149"/>
+                  </a:lnTo>
+                  <a:lnTo>
+                    <a:pt x="5962671" y="2727640"/>
+                  </a:lnTo>
+                  <a:lnTo>
+                    <a:pt x="6039914" y="2729129"/>
+                  </a:lnTo>
+                  <a:lnTo>
+                    <a:pt x="6117158" y="2730615"/>
+                  </a:lnTo>
+                  <a:lnTo>
+                    <a:pt x="6194401" y="2732098"/>
+                  </a:lnTo>
+                  <a:lnTo>
+                    <a:pt x="6271645" y="2733579"/>
+                  </a:lnTo>
+                  <a:lnTo>
+                    <a:pt x="6348889" y="2735056"/>
+                  </a:lnTo>
+                  <a:lnTo>
+                    <a:pt x="6426132" y="2736530"/>
                   </a:lnTo>
                 </a:path>
               </a:pathLst>
@@ -3859,300 +3859,300 @@
           </p:nvSpPr>
           <p:spPr>
             <a:xfrm>
-              <a:off x="817517" y="4603121"/>
-              <a:ext cx="7392041" cy="875809"/>
+              <a:off x="817517" y="4654910"/>
+              <a:ext cx="7392041" cy="835312"/>
             </a:xfrm>
             <a:custGeom>
               <a:avLst/>
               <a:pathLst>
-                <a:path w="7392041" h="875809">
+                <a:path w="7392041" h="835312">
                   <a:moveTo>
-                    <a:pt x="7392041" y="875809"/>
+                    <a:pt x="7392041" y="835312"/>
                   </a:moveTo>
                   <a:lnTo>
-                    <a:pt x="7314797" y="872391"/>
-                  </a:lnTo>
-                  <a:lnTo>
-                    <a:pt x="7237554" y="868807"/>
-                  </a:lnTo>
-                  <a:lnTo>
-                    <a:pt x="7160310" y="865049"/>
-                  </a:lnTo>
-                  <a:lnTo>
-                    <a:pt x="7083066" y="861108"/>
-                  </a:lnTo>
-                  <a:lnTo>
-                    <a:pt x="7005823" y="856975"/>
-                  </a:lnTo>
-                  <a:lnTo>
-                    <a:pt x="6928579" y="852641"/>
-                  </a:lnTo>
-                  <a:lnTo>
-                    <a:pt x="6851336" y="848097"/>
-                  </a:lnTo>
-                  <a:lnTo>
-                    <a:pt x="6774092" y="843332"/>
-                  </a:lnTo>
-                  <a:lnTo>
-                    <a:pt x="6696849" y="838334"/>
-                  </a:lnTo>
-                  <a:lnTo>
-                    <a:pt x="6619605" y="833094"/>
-                  </a:lnTo>
-                  <a:lnTo>
-                    <a:pt x="6542361" y="827599"/>
-                  </a:lnTo>
-                  <a:lnTo>
-                    <a:pt x="6465118" y="821837"/>
-                  </a:lnTo>
-                  <a:lnTo>
-                    <a:pt x="6387874" y="815794"/>
-                  </a:lnTo>
-                  <a:lnTo>
-                    <a:pt x="6310631" y="809458"/>
-                  </a:lnTo>
-                  <a:lnTo>
-                    <a:pt x="6233387" y="802813"/>
-                  </a:lnTo>
-                  <a:lnTo>
-                    <a:pt x="6156144" y="795846"/>
-                  </a:lnTo>
-                  <a:lnTo>
-                    <a:pt x="6078900" y="788539"/>
-                  </a:lnTo>
-                  <a:lnTo>
-                    <a:pt x="6001656" y="780877"/>
-                  </a:lnTo>
-                  <a:lnTo>
-                    <a:pt x="5924413" y="772843"/>
-                  </a:lnTo>
-                  <a:lnTo>
-                    <a:pt x="5847169" y="764418"/>
-                  </a:lnTo>
-                  <a:lnTo>
-                    <a:pt x="5769926" y="755583"/>
-                  </a:lnTo>
-                  <a:lnTo>
-                    <a:pt x="5692682" y="746318"/>
-                  </a:lnTo>
-                  <a:lnTo>
-                    <a:pt x="5615439" y="736603"/>
-                  </a:lnTo>
-                  <a:lnTo>
-                    <a:pt x="5538195" y="726415"/>
-                  </a:lnTo>
-                  <a:lnTo>
-                    <a:pt x="5460951" y="715732"/>
-                  </a:lnTo>
-                  <a:lnTo>
-                    <a:pt x="5383708" y="704529"/>
-                  </a:lnTo>
-                  <a:lnTo>
-                    <a:pt x="5306464" y="692782"/>
-                  </a:lnTo>
-                  <a:lnTo>
-                    <a:pt x="5229221" y="680463"/>
-                  </a:lnTo>
-                  <a:lnTo>
-                    <a:pt x="5151977" y="667545"/>
-                  </a:lnTo>
-                  <a:lnTo>
-                    <a:pt x="5074734" y="653999"/>
-                  </a:lnTo>
-                  <a:lnTo>
-                    <a:pt x="4997490" y="639794"/>
-                  </a:lnTo>
-                  <a:lnTo>
-                    <a:pt x="4920246" y="624898"/>
-                  </a:lnTo>
-                  <a:lnTo>
-                    <a:pt x="4843003" y="609278"/>
-                  </a:lnTo>
-                  <a:lnTo>
-                    <a:pt x="4765759" y="592898"/>
-                  </a:lnTo>
-                  <a:lnTo>
-                    <a:pt x="4688516" y="575722"/>
-                  </a:lnTo>
-                  <a:lnTo>
-                    <a:pt x="4611272" y="557710"/>
-                  </a:lnTo>
-                  <a:lnTo>
-                    <a:pt x="4534029" y="538823"/>
-                  </a:lnTo>
-                  <a:lnTo>
-                    <a:pt x="4456785" y="519017"/>
-                  </a:lnTo>
-                  <a:lnTo>
-                    <a:pt x="4379541" y="498247"/>
-                  </a:lnTo>
-                  <a:lnTo>
-                    <a:pt x="4302298" y="476468"/>
-                  </a:lnTo>
-                  <a:lnTo>
-                    <a:pt x="4225054" y="453629"/>
-                  </a:lnTo>
-                  <a:lnTo>
-                    <a:pt x="4147811" y="429679"/>
-                  </a:lnTo>
-                  <a:lnTo>
-                    <a:pt x="4070567" y="404565"/>
-                  </a:lnTo>
-                  <a:lnTo>
-                    <a:pt x="3993324" y="378230"/>
-                  </a:lnTo>
-                  <a:lnTo>
-                    <a:pt x="3916080" y="350614"/>
-                  </a:lnTo>
-                  <a:lnTo>
-                    <a:pt x="3838836" y="321654"/>
-                  </a:lnTo>
-                  <a:lnTo>
-                    <a:pt x="3761593" y="291287"/>
-                  </a:lnTo>
-                  <a:lnTo>
-                    <a:pt x="3684349" y="259442"/>
-                  </a:lnTo>
-                  <a:lnTo>
-                    <a:pt x="3607106" y="226049"/>
-                  </a:lnTo>
-                  <a:lnTo>
-                    <a:pt x="3529862" y="191032"/>
-                  </a:lnTo>
-                  <a:lnTo>
-                    <a:pt x="3452619" y="154311"/>
-                  </a:lnTo>
-                  <a:lnTo>
-                    <a:pt x="3375375" y="115805"/>
-                  </a:lnTo>
-                  <a:lnTo>
-                    <a:pt x="3298131" y="76368"/>
-                  </a:lnTo>
-                  <a:lnTo>
-                    <a:pt x="3220888" y="74652"/>
-                  </a:lnTo>
-                  <a:lnTo>
-                    <a:pt x="3143644" y="72932"/>
-                  </a:lnTo>
-                  <a:lnTo>
-                    <a:pt x="3066401" y="71209"/>
-                  </a:lnTo>
-                  <a:lnTo>
-                    <a:pt x="2989157" y="69483"/>
-                  </a:lnTo>
-                  <a:lnTo>
-                    <a:pt x="2911914" y="67753"/>
-                  </a:lnTo>
-                  <a:lnTo>
-                    <a:pt x="2834670" y="66020"/>
-                  </a:lnTo>
-                  <a:lnTo>
-                    <a:pt x="2757426" y="64284"/>
-                  </a:lnTo>
-                  <a:lnTo>
-                    <a:pt x="2680183" y="62544"/>
-                  </a:lnTo>
-                  <a:lnTo>
-                    <a:pt x="2602939" y="60801"/>
-                  </a:lnTo>
-                  <a:lnTo>
-                    <a:pt x="2525696" y="59054"/>
-                  </a:lnTo>
-                  <a:lnTo>
-                    <a:pt x="2448452" y="57304"/>
-                  </a:lnTo>
-                  <a:lnTo>
-                    <a:pt x="2371209" y="55550"/>
-                  </a:lnTo>
-                  <a:lnTo>
-                    <a:pt x="2293965" y="53793"/>
-                  </a:lnTo>
-                  <a:lnTo>
-                    <a:pt x="2216721" y="52032"/>
-                  </a:lnTo>
-                  <a:lnTo>
-                    <a:pt x="2139478" y="50268"/>
-                  </a:lnTo>
-                  <a:lnTo>
-                    <a:pt x="2062234" y="48501"/>
-                  </a:lnTo>
-                  <a:lnTo>
-                    <a:pt x="1984991" y="46730"/>
-                  </a:lnTo>
-                  <a:lnTo>
-                    <a:pt x="1907747" y="44955"/>
-                  </a:lnTo>
-                  <a:lnTo>
-                    <a:pt x="1830504" y="43177"/>
-                  </a:lnTo>
-                  <a:lnTo>
-                    <a:pt x="1753260" y="41396"/>
-                  </a:lnTo>
-                  <a:lnTo>
-                    <a:pt x="1676016" y="39611"/>
-                  </a:lnTo>
-                  <a:lnTo>
-                    <a:pt x="1598773" y="37822"/>
-                  </a:lnTo>
-                  <a:lnTo>
-                    <a:pt x="1521529" y="36030"/>
-                  </a:lnTo>
-                  <a:lnTo>
-                    <a:pt x="1444286" y="34234"/>
-                  </a:lnTo>
-                  <a:lnTo>
-                    <a:pt x="1367042" y="32435"/>
-                  </a:lnTo>
-                  <a:lnTo>
-                    <a:pt x="1289799" y="30632"/>
-                  </a:lnTo>
-                  <a:lnTo>
-                    <a:pt x="1212555" y="28826"/>
-                  </a:lnTo>
-                  <a:lnTo>
-                    <a:pt x="1135311" y="27016"/>
-                  </a:lnTo>
-                  <a:lnTo>
-                    <a:pt x="1058068" y="25203"/>
-                  </a:lnTo>
-                  <a:lnTo>
-                    <a:pt x="980824" y="23386"/>
-                  </a:lnTo>
-                  <a:lnTo>
-                    <a:pt x="903581" y="21565"/>
-                  </a:lnTo>
-                  <a:lnTo>
-                    <a:pt x="826337" y="19741"/>
-                  </a:lnTo>
-                  <a:lnTo>
-                    <a:pt x="749094" y="17913"/>
-                  </a:lnTo>
-                  <a:lnTo>
-                    <a:pt x="671850" y="16082"/>
-                  </a:lnTo>
-                  <a:lnTo>
-                    <a:pt x="594606" y="14247"/>
-                  </a:lnTo>
-                  <a:lnTo>
-                    <a:pt x="517363" y="12408"/>
-                  </a:lnTo>
-                  <a:lnTo>
-                    <a:pt x="440119" y="10566"/>
-                  </a:lnTo>
-                  <a:lnTo>
-                    <a:pt x="362876" y="8720"/>
-                  </a:lnTo>
-                  <a:lnTo>
-                    <a:pt x="285632" y="6871"/>
-                  </a:lnTo>
-                  <a:lnTo>
-                    <a:pt x="208389" y="5018"/>
-                  </a:lnTo>
-                  <a:lnTo>
-                    <a:pt x="131145" y="3161"/>
-                  </a:lnTo>
-                  <a:lnTo>
-                    <a:pt x="53901" y="1300"/>
+                    <a:pt x="7314797" y="832052"/>
+                  </a:lnTo>
+                  <a:lnTo>
+                    <a:pt x="7237554" y="828634"/>
+                  </a:lnTo>
+                  <a:lnTo>
+                    <a:pt x="7160310" y="825049"/>
+                  </a:lnTo>
+                  <a:lnTo>
+                    <a:pt x="7083066" y="821290"/>
+                  </a:lnTo>
+                  <a:lnTo>
+                    <a:pt x="7005823" y="817349"/>
+                  </a:lnTo>
+                  <a:lnTo>
+                    <a:pt x="6928579" y="813216"/>
+                  </a:lnTo>
+                  <a:lnTo>
+                    <a:pt x="6851336" y="808881"/>
+                  </a:lnTo>
+                  <a:lnTo>
+                    <a:pt x="6774092" y="804336"/>
+                  </a:lnTo>
+                  <a:lnTo>
+                    <a:pt x="6696849" y="799570"/>
+                  </a:lnTo>
+                  <a:lnTo>
+                    <a:pt x="6619605" y="794572"/>
+                  </a:lnTo>
+                  <a:lnTo>
+                    <a:pt x="6542361" y="789331"/>
+                  </a:lnTo>
+                  <a:lnTo>
+                    <a:pt x="6465118" y="783835"/>
+                  </a:lnTo>
+                  <a:lnTo>
+                    <a:pt x="6387874" y="778072"/>
+                  </a:lnTo>
+                  <a:lnTo>
+                    <a:pt x="6310631" y="772029"/>
+                  </a:lnTo>
+                  <a:lnTo>
+                    <a:pt x="6233387" y="765692"/>
+                  </a:lnTo>
+                  <a:lnTo>
+                    <a:pt x="6156144" y="759046"/>
+                  </a:lnTo>
+                  <a:lnTo>
+                    <a:pt x="6078900" y="752077"/>
+                  </a:lnTo>
+                  <a:lnTo>
+                    <a:pt x="6001656" y="744770"/>
+                  </a:lnTo>
+                  <a:lnTo>
+                    <a:pt x="5924413" y="737107"/>
+                  </a:lnTo>
+                  <a:lnTo>
+                    <a:pt x="5847169" y="729071"/>
+                  </a:lnTo>
+                  <a:lnTo>
+                    <a:pt x="5769926" y="720645"/>
+                  </a:lnTo>
+                  <a:lnTo>
+                    <a:pt x="5692682" y="711808"/>
+                  </a:lnTo>
+                  <a:lnTo>
+                    <a:pt x="5615439" y="702543"/>
+                  </a:lnTo>
+                  <a:lnTo>
+                    <a:pt x="5538195" y="692826"/>
+                  </a:lnTo>
+                  <a:lnTo>
+                    <a:pt x="5460951" y="682637"/>
+                  </a:lnTo>
+                  <a:lnTo>
+                    <a:pt x="5383708" y="671952"/>
+                  </a:lnTo>
+                  <a:lnTo>
+                    <a:pt x="5306464" y="660748"/>
+                  </a:lnTo>
+                  <a:lnTo>
+                    <a:pt x="5229221" y="648999"/>
+                  </a:lnTo>
+                  <a:lnTo>
+                    <a:pt x="5151977" y="636678"/>
+                  </a:lnTo>
+                  <a:lnTo>
+                    <a:pt x="5074734" y="623758"/>
+                  </a:lnTo>
+                  <a:lnTo>
+                    <a:pt x="4997490" y="610210"/>
+                  </a:lnTo>
+                  <a:lnTo>
+                    <a:pt x="4920246" y="596003"/>
+                  </a:lnTo>
+                  <a:lnTo>
+                    <a:pt x="4843003" y="581105"/>
+                  </a:lnTo>
+                  <a:lnTo>
+                    <a:pt x="4765759" y="565483"/>
+                  </a:lnTo>
+                  <a:lnTo>
+                    <a:pt x="4688516" y="549101"/>
+                  </a:lnTo>
+                  <a:lnTo>
+                    <a:pt x="4611272" y="531922"/>
+                  </a:lnTo>
+                  <a:lnTo>
+                    <a:pt x="4534029" y="513908"/>
+                  </a:lnTo>
+                  <a:lnTo>
+                    <a:pt x="4456785" y="495017"/>
+                  </a:lnTo>
+                  <a:lnTo>
+                    <a:pt x="4379541" y="475208"/>
+                  </a:lnTo>
+                  <a:lnTo>
+                    <a:pt x="4302298" y="454436"/>
+                  </a:lnTo>
+                  <a:lnTo>
+                    <a:pt x="4225054" y="432653"/>
+                  </a:lnTo>
+                  <a:lnTo>
+                    <a:pt x="4147811" y="409811"/>
+                  </a:lnTo>
+                  <a:lnTo>
+                    <a:pt x="4070567" y="385858"/>
+                  </a:lnTo>
+                  <a:lnTo>
+                    <a:pt x="3993324" y="360741"/>
+                  </a:lnTo>
+                  <a:lnTo>
+                    <a:pt x="3916080" y="334401"/>
+                  </a:lnTo>
+                  <a:lnTo>
+                    <a:pt x="3838836" y="306781"/>
+                  </a:lnTo>
+                  <a:lnTo>
+                    <a:pt x="3761593" y="277818"/>
+                  </a:lnTo>
+                  <a:lnTo>
+                    <a:pt x="3684349" y="247446"/>
+                  </a:lnTo>
+                  <a:lnTo>
+                    <a:pt x="3607106" y="215596"/>
+                  </a:lnTo>
+                  <a:lnTo>
+                    <a:pt x="3529862" y="182198"/>
+                  </a:lnTo>
+                  <a:lnTo>
+                    <a:pt x="3452619" y="147176"/>
+                  </a:lnTo>
+                  <a:lnTo>
+                    <a:pt x="3375375" y="110451"/>
+                  </a:lnTo>
+                  <a:lnTo>
+                    <a:pt x="3298131" y="72836"/>
+                  </a:lnTo>
+                  <a:lnTo>
+                    <a:pt x="3220888" y="71200"/>
+                  </a:lnTo>
+                  <a:lnTo>
+                    <a:pt x="3143644" y="69560"/>
+                  </a:lnTo>
+                  <a:lnTo>
+                    <a:pt x="3066401" y="67917"/>
+                  </a:lnTo>
+                  <a:lnTo>
+                    <a:pt x="2989157" y="66270"/>
+                  </a:lnTo>
+                  <a:lnTo>
+                    <a:pt x="2911914" y="64621"/>
+                  </a:lnTo>
+                  <a:lnTo>
+                    <a:pt x="2834670" y="62968"/>
+                  </a:lnTo>
+                  <a:lnTo>
+                    <a:pt x="2757426" y="61311"/>
+                  </a:lnTo>
+                  <a:lnTo>
+                    <a:pt x="2680183" y="59652"/>
+                  </a:lnTo>
+                  <a:lnTo>
+                    <a:pt x="2602939" y="57989"/>
+                  </a:lnTo>
+                  <a:lnTo>
+                    <a:pt x="2525696" y="56323"/>
+                  </a:lnTo>
+                  <a:lnTo>
+                    <a:pt x="2448452" y="54654"/>
+                  </a:lnTo>
+                  <a:lnTo>
+                    <a:pt x="2371209" y="52981"/>
+                  </a:lnTo>
+                  <a:lnTo>
+                    <a:pt x="2293965" y="51306"/>
+                  </a:lnTo>
+                  <a:lnTo>
+                    <a:pt x="2216721" y="49626"/>
+                  </a:lnTo>
+                  <a:lnTo>
+                    <a:pt x="2139478" y="47944"/>
+                  </a:lnTo>
+                  <a:lnTo>
+                    <a:pt x="2062234" y="46258"/>
+                  </a:lnTo>
+                  <a:lnTo>
+                    <a:pt x="1984991" y="44569"/>
+                  </a:lnTo>
+                  <a:lnTo>
+                    <a:pt x="1907747" y="42877"/>
+                  </a:lnTo>
+                  <a:lnTo>
+                    <a:pt x="1830504" y="41181"/>
+                  </a:lnTo>
+                  <a:lnTo>
+                    <a:pt x="1753260" y="39482"/>
+                  </a:lnTo>
+                  <a:lnTo>
+                    <a:pt x="1676016" y="37779"/>
+                  </a:lnTo>
+                  <a:lnTo>
+                    <a:pt x="1598773" y="36073"/>
+                  </a:lnTo>
+                  <a:lnTo>
+                    <a:pt x="1521529" y="34364"/>
+                  </a:lnTo>
+                  <a:lnTo>
+                    <a:pt x="1444286" y="32651"/>
+                  </a:lnTo>
+                  <a:lnTo>
+                    <a:pt x="1367042" y="30935"/>
+                  </a:lnTo>
+                  <a:lnTo>
+                    <a:pt x="1289799" y="29216"/>
+                  </a:lnTo>
+                  <a:lnTo>
+                    <a:pt x="1212555" y="27493"/>
+                  </a:lnTo>
+                  <a:lnTo>
+                    <a:pt x="1135311" y="25767"/>
+                  </a:lnTo>
+                  <a:lnTo>
+                    <a:pt x="1058068" y="24038"/>
+                  </a:lnTo>
+                  <a:lnTo>
+                    <a:pt x="980824" y="22305"/>
+                  </a:lnTo>
+                  <a:lnTo>
+                    <a:pt x="903581" y="20568"/>
+                  </a:lnTo>
+                  <a:lnTo>
+                    <a:pt x="826337" y="18828"/>
+                  </a:lnTo>
+                  <a:lnTo>
+                    <a:pt x="749094" y="17085"/>
+                  </a:lnTo>
+                  <a:lnTo>
+                    <a:pt x="671850" y="15338"/>
+                  </a:lnTo>
+                  <a:lnTo>
+                    <a:pt x="594606" y="13588"/>
+                  </a:lnTo>
+                  <a:lnTo>
+                    <a:pt x="517363" y="11835"/>
+                  </a:lnTo>
+                  <a:lnTo>
+                    <a:pt x="440119" y="10078"/>
+                  </a:lnTo>
+                  <a:lnTo>
+                    <a:pt x="362876" y="8317"/>
+                  </a:lnTo>
+                  <a:lnTo>
+                    <a:pt x="285632" y="6553"/>
+                  </a:lnTo>
+                  <a:lnTo>
+                    <a:pt x="208389" y="4786"/>
+                  </a:lnTo>
+                  <a:lnTo>
+                    <a:pt x="131145" y="3015"/>
+                  </a:lnTo>
+                  <a:lnTo>
+                    <a:pt x="53901" y="1240"/>
                   </a:lnTo>
                   <a:lnTo>
                     <a:pt x="0" y="0"/>
@@ -4175,303 +4175,303 @@
           </p:nvSpPr>
           <p:spPr>
             <a:xfrm>
-              <a:off x="817517" y="3047694"/>
-              <a:ext cx="7392041" cy="2266868"/>
+              <a:off x="817517" y="3171406"/>
+              <a:ext cx="7392041" cy="2162049"/>
             </a:xfrm>
             <a:custGeom>
               <a:avLst/>
               <a:pathLst>
-                <a:path w="7392041" h="2266868">
+                <a:path w="7392041" h="2162049">
                   <a:moveTo>
                     <a:pt x="0" y="0"/>
                   </a:moveTo>
                   <a:lnTo>
-                    <a:pt x="53901" y="42954"/>
-                  </a:lnTo>
-                  <a:lnTo>
-                    <a:pt x="131145" y="103006"/>
-                  </a:lnTo>
-                  <a:lnTo>
-                    <a:pt x="208389" y="161592"/>
-                  </a:lnTo>
-                  <a:lnTo>
-                    <a:pt x="285632" y="218746"/>
-                  </a:lnTo>
-                  <a:lnTo>
-                    <a:pt x="362876" y="274505"/>
-                  </a:lnTo>
-                  <a:lnTo>
-                    <a:pt x="440119" y="328901"/>
-                  </a:lnTo>
-                  <a:lnTo>
-                    <a:pt x="517363" y="381969"/>
-                  </a:lnTo>
-                  <a:lnTo>
-                    <a:pt x="594606" y="433741"/>
-                  </a:lnTo>
-                  <a:lnTo>
-                    <a:pt x="671850" y="484248"/>
-                  </a:lnTo>
-                  <a:lnTo>
-                    <a:pt x="749094" y="533521"/>
-                  </a:lnTo>
-                  <a:lnTo>
-                    <a:pt x="826337" y="581591"/>
-                  </a:lnTo>
-                  <a:lnTo>
-                    <a:pt x="903581" y="628486"/>
-                  </a:lnTo>
-                  <a:lnTo>
-                    <a:pt x="980824" y="674236"/>
-                  </a:lnTo>
-                  <a:lnTo>
-                    <a:pt x="1058068" y="718869"/>
-                  </a:lnTo>
-                  <a:lnTo>
-                    <a:pt x="1135311" y="762412"/>
-                  </a:lnTo>
-                  <a:lnTo>
-                    <a:pt x="1212555" y="804890"/>
-                  </a:lnTo>
-                  <a:lnTo>
-                    <a:pt x="1289799" y="846332"/>
-                  </a:lnTo>
-                  <a:lnTo>
-                    <a:pt x="1367042" y="886761"/>
-                  </a:lnTo>
-                  <a:lnTo>
-                    <a:pt x="1444286" y="926203"/>
-                  </a:lnTo>
-                  <a:lnTo>
-                    <a:pt x="1521529" y="964681"/>
-                  </a:lnTo>
-                  <a:lnTo>
-                    <a:pt x="1598773" y="1002219"/>
-                  </a:lnTo>
-                  <a:lnTo>
-                    <a:pt x="1676016" y="1038841"/>
-                  </a:lnTo>
-                  <a:lnTo>
-                    <a:pt x="1753260" y="1074567"/>
-                  </a:lnTo>
-                  <a:lnTo>
-                    <a:pt x="1830504" y="1109422"/>
-                  </a:lnTo>
-                  <a:lnTo>
-                    <a:pt x="1907747" y="1143425"/>
-                  </a:lnTo>
-                  <a:lnTo>
-                    <a:pt x="1984991" y="1176597"/>
-                  </a:lnTo>
-                  <a:lnTo>
-                    <a:pt x="2062234" y="1208959"/>
-                  </a:lnTo>
-                  <a:lnTo>
-                    <a:pt x="2139478" y="1240531"/>
-                  </a:lnTo>
-                  <a:lnTo>
-                    <a:pt x="2216721" y="1271331"/>
-                  </a:lnTo>
-                  <a:lnTo>
-                    <a:pt x="2293965" y="1301379"/>
-                  </a:lnTo>
-                  <a:lnTo>
-                    <a:pt x="2371209" y="1330694"/>
-                  </a:lnTo>
-                  <a:lnTo>
-                    <a:pt x="2448452" y="1359292"/>
-                  </a:lnTo>
-                  <a:lnTo>
-                    <a:pt x="2525696" y="1387191"/>
-                  </a:lnTo>
-                  <a:lnTo>
-                    <a:pt x="2602939" y="1414410"/>
-                  </a:lnTo>
-                  <a:lnTo>
-                    <a:pt x="2680183" y="1440963"/>
-                  </a:lnTo>
-                  <a:lnTo>
-                    <a:pt x="2757426" y="1466868"/>
-                  </a:lnTo>
-                  <a:lnTo>
-                    <a:pt x="2834670" y="1492140"/>
-                  </a:lnTo>
-                  <a:lnTo>
-                    <a:pt x="2911914" y="1516795"/>
-                  </a:lnTo>
-                  <a:lnTo>
-                    <a:pt x="2989157" y="1540847"/>
-                  </a:lnTo>
-                  <a:lnTo>
-                    <a:pt x="3066401" y="1564312"/>
-                  </a:lnTo>
-                  <a:lnTo>
-                    <a:pt x="3143644" y="1587204"/>
-                  </a:lnTo>
-                  <a:lnTo>
-                    <a:pt x="3220888" y="1609537"/>
-                  </a:lnTo>
-                  <a:lnTo>
-                    <a:pt x="3298131" y="1631324"/>
-                  </a:lnTo>
-                  <a:lnTo>
-                    <a:pt x="3375375" y="1652579"/>
-                  </a:lnTo>
-                  <a:lnTo>
-                    <a:pt x="3452619" y="1673315"/>
-                  </a:lnTo>
-                  <a:lnTo>
-                    <a:pt x="3529862" y="1693544"/>
-                  </a:lnTo>
-                  <a:lnTo>
-                    <a:pt x="3607106" y="1713279"/>
-                  </a:lnTo>
-                  <a:lnTo>
-                    <a:pt x="3684349" y="1732533"/>
-                  </a:lnTo>
-                  <a:lnTo>
-                    <a:pt x="3761593" y="1751316"/>
-                  </a:lnTo>
-                  <a:lnTo>
-                    <a:pt x="3838836" y="1769640"/>
-                  </a:lnTo>
-                  <a:lnTo>
-                    <a:pt x="3916080" y="1787516"/>
-                  </a:lnTo>
-                  <a:lnTo>
-                    <a:pt x="3993324" y="1804956"/>
-                  </a:lnTo>
-                  <a:lnTo>
-                    <a:pt x="4070567" y="1821970"/>
-                  </a:lnTo>
-                  <a:lnTo>
-                    <a:pt x="4147811" y="1838568"/>
-                  </a:lnTo>
-                  <a:lnTo>
-                    <a:pt x="4225054" y="1854761"/>
-                  </a:lnTo>
-                  <a:lnTo>
-                    <a:pt x="4302298" y="1870559"/>
-                  </a:lnTo>
-                  <a:lnTo>
-                    <a:pt x="4379541" y="1885970"/>
-                  </a:lnTo>
-                  <a:lnTo>
-                    <a:pt x="4456785" y="1901005"/>
-                  </a:lnTo>
-                  <a:lnTo>
-                    <a:pt x="4534029" y="1915673"/>
-                  </a:lnTo>
-                  <a:lnTo>
-                    <a:pt x="4611272" y="1929983"/>
-                  </a:lnTo>
-                  <a:lnTo>
-                    <a:pt x="4688516" y="1943943"/>
-                  </a:lnTo>
-                  <a:lnTo>
-                    <a:pt x="4765759" y="1957562"/>
-                  </a:lnTo>
-                  <a:lnTo>
-                    <a:pt x="4843003" y="1970848"/>
-                  </a:lnTo>
-                  <a:lnTo>
-                    <a:pt x="4920246" y="1983810"/>
-                  </a:lnTo>
-                  <a:lnTo>
-                    <a:pt x="4997490" y="1996456"/>
-                  </a:lnTo>
-                  <a:lnTo>
-                    <a:pt x="5074734" y="2008792"/>
-                  </a:lnTo>
-                  <a:lnTo>
-                    <a:pt x="5151977" y="2020827"/>
-                  </a:lnTo>
-                  <a:lnTo>
-                    <a:pt x="5229221" y="2032568"/>
-                  </a:lnTo>
-                  <a:lnTo>
-                    <a:pt x="5306464" y="2044023"/>
-                  </a:lnTo>
-                  <a:lnTo>
-                    <a:pt x="5383708" y="2055197"/>
-                  </a:lnTo>
-                  <a:lnTo>
-                    <a:pt x="5460951" y="2066099"/>
-                  </a:lnTo>
-                  <a:lnTo>
-                    <a:pt x="5538195" y="2076734"/>
-                  </a:lnTo>
-                  <a:lnTo>
-                    <a:pt x="5615439" y="2087110"/>
-                  </a:lnTo>
-                  <a:lnTo>
-                    <a:pt x="5692682" y="2097232"/>
-                  </a:lnTo>
-                  <a:lnTo>
-                    <a:pt x="5769926" y="2107107"/>
-                  </a:lnTo>
-                  <a:lnTo>
-                    <a:pt x="5847169" y="2116740"/>
-                  </a:lnTo>
-                  <a:lnTo>
-                    <a:pt x="5924413" y="2126139"/>
-                  </a:lnTo>
-                  <a:lnTo>
-                    <a:pt x="6001656" y="2135307"/>
-                  </a:lnTo>
-                  <a:lnTo>
-                    <a:pt x="6078900" y="2144252"/>
-                  </a:lnTo>
-                  <a:lnTo>
-                    <a:pt x="6156144" y="2152979"/>
-                  </a:lnTo>
-                  <a:lnTo>
-                    <a:pt x="6233387" y="2161492"/>
-                  </a:lnTo>
-                  <a:lnTo>
-                    <a:pt x="6310631" y="2169797"/>
-                  </a:lnTo>
-                  <a:lnTo>
-                    <a:pt x="6387874" y="2177899"/>
-                  </a:lnTo>
-                  <a:lnTo>
-                    <a:pt x="6465118" y="2185804"/>
-                  </a:lnTo>
-                  <a:lnTo>
-                    <a:pt x="6542361" y="2193515"/>
-                  </a:lnTo>
-                  <a:lnTo>
-                    <a:pt x="6619605" y="2201038"/>
-                  </a:lnTo>
-                  <a:lnTo>
-                    <a:pt x="6696849" y="2208378"/>
-                  </a:lnTo>
-                  <a:lnTo>
-                    <a:pt x="6774092" y="2215538"/>
-                  </a:lnTo>
-                  <a:lnTo>
-                    <a:pt x="6851336" y="2222523"/>
-                  </a:lnTo>
-                  <a:lnTo>
-                    <a:pt x="6928579" y="2229337"/>
-                  </a:lnTo>
-                  <a:lnTo>
-                    <a:pt x="7005823" y="2235986"/>
-                  </a:lnTo>
-                  <a:lnTo>
-                    <a:pt x="7083066" y="2242471"/>
-                  </a:lnTo>
-                  <a:lnTo>
-                    <a:pt x="7160310" y="2248798"/>
-                  </a:lnTo>
-                  <a:lnTo>
-                    <a:pt x="7237554" y="2254971"/>
-                  </a:lnTo>
-                  <a:lnTo>
-                    <a:pt x="7314797" y="2260993"/>
-                  </a:lnTo>
-                  <a:lnTo>
-                    <a:pt x="7392041" y="2266868"/>
+                    <a:pt x="53901" y="40968"/>
+                  </a:lnTo>
+                  <a:lnTo>
+                    <a:pt x="131145" y="98243"/>
+                  </a:lnTo>
+                  <a:lnTo>
+                    <a:pt x="208389" y="154120"/>
+                  </a:lnTo>
+                  <a:lnTo>
+                    <a:pt x="285632" y="208632"/>
+                  </a:lnTo>
+                  <a:lnTo>
+                    <a:pt x="362876" y="261812"/>
+                  </a:lnTo>
+                  <a:lnTo>
+                    <a:pt x="440119" y="313693"/>
+                  </a:lnTo>
+                  <a:lnTo>
+                    <a:pt x="517363" y="364307"/>
+                  </a:lnTo>
+                  <a:lnTo>
+                    <a:pt x="594606" y="413684"/>
+                  </a:lnTo>
+                  <a:lnTo>
+                    <a:pt x="671850" y="461856"/>
+                  </a:lnTo>
+                  <a:lnTo>
+                    <a:pt x="749094" y="508851"/>
+                  </a:lnTo>
+                  <a:lnTo>
+                    <a:pt x="826337" y="554698"/>
+                  </a:lnTo>
+                  <a:lnTo>
+                    <a:pt x="903581" y="599425"/>
+                  </a:lnTo>
+                  <a:lnTo>
+                    <a:pt x="980824" y="643060"/>
+                  </a:lnTo>
+                  <a:lnTo>
+                    <a:pt x="1058068" y="685629"/>
+                  </a:lnTo>
+                  <a:lnTo>
+                    <a:pt x="1135311" y="727158"/>
+                  </a:lnTo>
+                  <a:lnTo>
+                    <a:pt x="1212555" y="767673"/>
+                  </a:lnTo>
+                  <a:lnTo>
+                    <a:pt x="1289799" y="807198"/>
+                  </a:lnTo>
+                  <a:lnTo>
+                    <a:pt x="1367042" y="845757"/>
+                  </a:lnTo>
+                  <a:lnTo>
+                    <a:pt x="1444286" y="883375"/>
+                  </a:lnTo>
+                  <a:lnTo>
+                    <a:pt x="1521529" y="920074"/>
+                  </a:lnTo>
+                  <a:lnTo>
+                    <a:pt x="1598773" y="955877"/>
+                  </a:lnTo>
+                  <a:lnTo>
+                    <a:pt x="1676016" y="990805"/>
+                  </a:lnTo>
+                  <a:lnTo>
+                    <a:pt x="1753260" y="1024880"/>
+                  </a:lnTo>
+                  <a:lnTo>
+                    <a:pt x="1830504" y="1058122"/>
+                  </a:lnTo>
+                  <a:lnTo>
+                    <a:pt x="1907747" y="1090553"/>
+                  </a:lnTo>
+                  <a:lnTo>
+                    <a:pt x="1984991" y="1122192"/>
+                  </a:lnTo>
+                  <a:lnTo>
+                    <a:pt x="2062234" y="1153057"/>
+                  </a:lnTo>
+                  <a:lnTo>
+                    <a:pt x="2139478" y="1183169"/>
+                  </a:lnTo>
+                  <a:lnTo>
+                    <a:pt x="2216721" y="1212545"/>
+                  </a:lnTo>
+                  <a:lnTo>
+                    <a:pt x="2293965" y="1241204"/>
+                  </a:lnTo>
+                  <a:lnTo>
+                    <a:pt x="2371209" y="1269163"/>
+                  </a:lnTo>
+                  <a:lnTo>
+                    <a:pt x="2448452" y="1296439"/>
+                  </a:lnTo>
+                  <a:lnTo>
+                    <a:pt x="2525696" y="1323048"/>
+                  </a:lnTo>
+                  <a:lnTo>
+                    <a:pt x="2602939" y="1349008"/>
+                  </a:lnTo>
+                  <a:lnTo>
+                    <a:pt x="2680183" y="1374333"/>
+                  </a:lnTo>
+                  <a:lnTo>
+                    <a:pt x="2757426" y="1399040"/>
+                  </a:lnTo>
+                  <a:lnTo>
+                    <a:pt x="2834670" y="1423144"/>
+                  </a:lnTo>
+                  <a:lnTo>
+                    <a:pt x="2911914" y="1446658"/>
+                  </a:lnTo>
+                  <a:lnTo>
+                    <a:pt x="2989157" y="1469599"/>
+                  </a:lnTo>
+                  <a:lnTo>
+                    <a:pt x="3066401" y="1491979"/>
+                  </a:lnTo>
+                  <a:lnTo>
+                    <a:pt x="3143644" y="1513812"/>
+                  </a:lnTo>
+                  <a:lnTo>
+                    <a:pt x="3220888" y="1535112"/>
+                  </a:lnTo>
+                  <a:lnTo>
+                    <a:pt x="3298131" y="1555892"/>
+                  </a:lnTo>
+                  <a:lnTo>
+                    <a:pt x="3375375" y="1576164"/>
+                  </a:lnTo>
+                  <a:lnTo>
+                    <a:pt x="3452619" y="1595941"/>
+                  </a:lnTo>
+                  <a:lnTo>
+                    <a:pt x="3529862" y="1615235"/>
+                  </a:lnTo>
+                  <a:lnTo>
+                    <a:pt x="3607106" y="1634058"/>
+                  </a:lnTo>
+                  <a:lnTo>
+                    <a:pt x="3684349" y="1652421"/>
+                  </a:lnTo>
+                  <a:lnTo>
+                    <a:pt x="3761593" y="1670335"/>
+                  </a:lnTo>
+                  <a:lnTo>
+                    <a:pt x="3838836" y="1687812"/>
+                  </a:lnTo>
+                  <a:lnTo>
+                    <a:pt x="3916080" y="1704862"/>
+                  </a:lnTo>
+                  <a:lnTo>
+                    <a:pt x="3993324" y="1721496"/>
+                  </a:lnTo>
+                  <a:lnTo>
+                    <a:pt x="4070567" y="1737723"/>
+                  </a:lnTo>
+                  <a:lnTo>
+                    <a:pt x="4147811" y="1753554"/>
+                  </a:lnTo>
+                  <a:lnTo>
+                    <a:pt x="4225054" y="1768998"/>
+                  </a:lnTo>
+                  <a:lnTo>
+                    <a:pt x="4302298" y="1784065"/>
+                  </a:lnTo>
+                  <a:lnTo>
+                    <a:pt x="4379541" y="1798764"/>
+                  </a:lnTo>
+                  <a:lnTo>
+                    <a:pt x="4456785" y="1813104"/>
+                  </a:lnTo>
+                  <a:lnTo>
+                    <a:pt x="4534029" y="1827093"/>
+                  </a:lnTo>
+                  <a:lnTo>
+                    <a:pt x="4611272" y="1840741"/>
+                  </a:lnTo>
+                  <a:lnTo>
+                    <a:pt x="4688516" y="1854056"/>
+                  </a:lnTo>
+                  <a:lnTo>
+                    <a:pt x="4765759" y="1867045"/>
+                  </a:lnTo>
+                  <a:lnTo>
+                    <a:pt x="4843003" y="1879717"/>
+                  </a:lnTo>
+                  <a:lnTo>
+                    <a:pt x="4920246" y="1892080"/>
+                  </a:lnTo>
+                  <a:lnTo>
+                    <a:pt x="4997490" y="1904140"/>
+                  </a:lnTo>
+                  <a:lnTo>
+                    <a:pt x="5074734" y="1915906"/>
+                  </a:lnTo>
+                  <a:lnTo>
+                    <a:pt x="5151977" y="1927385"/>
+                  </a:lnTo>
+                  <a:lnTo>
+                    <a:pt x="5229221" y="1938583"/>
+                  </a:lnTo>
+                  <a:lnTo>
+                    <a:pt x="5306464" y="1949508"/>
+                  </a:lnTo>
+                  <a:lnTo>
+                    <a:pt x="5383708" y="1960166"/>
+                  </a:lnTo>
+                  <a:lnTo>
+                    <a:pt x="5460951" y="1970563"/>
+                  </a:lnTo>
+                  <a:lnTo>
+                    <a:pt x="5538195" y="1980707"/>
+                  </a:lnTo>
+                  <a:lnTo>
+                    <a:pt x="5615439" y="1990602"/>
+                  </a:lnTo>
+                  <a:lnTo>
+                    <a:pt x="5692682" y="2000256"/>
+                  </a:lnTo>
+                  <a:lnTo>
+                    <a:pt x="5769926" y="2009675"/>
+                  </a:lnTo>
+                  <a:lnTo>
+                    <a:pt x="5847169" y="2018863"/>
+                  </a:lnTo>
+                  <a:lnTo>
+                    <a:pt x="5924413" y="2027827"/>
+                  </a:lnTo>
+                  <a:lnTo>
+                    <a:pt x="6001656" y="2036572"/>
+                  </a:lnTo>
+                  <a:lnTo>
+                    <a:pt x="6078900" y="2045103"/>
+                  </a:lnTo>
+                  <a:lnTo>
+                    <a:pt x="6156144" y="2053426"/>
+                  </a:lnTo>
+                  <a:lnTo>
+                    <a:pt x="6233387" y="2061545"/>
+                  </a:lnTo>
+                  <a:lnTo>
+                    <a:pt x="6310631" y="2069466"/>
+                  </a:lnTo>
+                  <a:lnTo>
+                    <a:pt x="6387874" y="2077194"/>
+                  </a:lnTo>
+                  <a:lnTo>
+                    <a:pt x="6465118" y="2084733"/>
+                  </a:lnTo>
+                  <a:lnTo>
+                    <a:pt x="6542361" y="2092088"/>
+                  </a:lnTo>
+                  <a:lnTo>
+                    <a:pt x="6619605" y="2099263"/>
+                  </a:lnTo>
+                  <a:lnTo>
+                    <a:pt x="6696849" y="2106263"/>
+                  </a:lnTo>
+                  <a:lnTo>
+                    <a:pt x="6774092" y="2113092"/>
+                  </a:lnTo>
+                  <a:lnTo>
+                    <a:pt x="6851336" y="2119754"/>
+                  </a:lnTo>
+                  <a:lnTo>
+                    <a:pt x="6928579" y="2126254"/>
+                  </a:lnTo>
+                  <a:lnTo>
+                    <a:pt x="7005823" y="2132594"/>
+                  </a:lnTo>
+                  <a:lnTo>
+                    <a:pt x="7083066" y="2138780"/>
+                  </a:lnTo>
+                  <a:lnTo>
+                    <a:pt x="7160310" y="2144815"/>
+                  </a:lnTo>
+                  <a:lnTo>
+                    <a:pt x="7237554" y="2150702"/>
+                  </a:lnTo>
+                  <a:lnTo>
+                    <a:pt x="7314797" y="2156446"/>
+                  </a:lnTo>
+                  <a:lnTo>
+                    <a:pt x="7392041" y="2162049"/>
                   </a:lnTo>
                 </a:path>
               </a:pathLst>
@@ -4500,7 +4500,7 @@
           </p:nvSpPr>
           <p:spPr>
             <a:xfrm>
-              <a:off x="817517" y="4679530"/>
+              <a:off x="817517" y="4727786"/>
               <a:ext cx="7799693" cy="0"/>
             </a:xfrm>
             <a:custGeom>
@@ -4543,15 +4543,15 @@
           </p:nvSpPr>
           <p:spPr>
             <a:xfrm>
-              <a:off x="4117484" y="1896563"/>
-              <a:ext cx="0" cy="3826579"/>
+              <a:off x="4117484" y="2073503"/>
+              <a:ext cx="0" cy="3649639"/>
             </a:xfrm>
             <a:custGeom>
               <a:avLst/>
               <a:pathLst>
-                <a:path w="0" h="3826579">
+                <a:path w="0" h="3649639">
                   <a:moveTo>
-                    <a:pt x="0" y="3826579"/>
+                    <a:pt x="0" y="3649639"/>
                   </a:moveTo>
                   <a:lnTo>
                     <a:pt x="0" y="0"/>
@@ -4586,7 +4586,7 @@
           </p:nvSpPr>
           <p:spPr>
             <a:xfrm>
-              <a:off x="692708" y="5509156"/>
+              <a:off x="692708" y="5517199"/>
               <a:ext cx="62179" cy="80101"/>
             </a:xfrm>
             <a:prstGeom prst="rect">
@@ -4632,7 +4632,7 @@
           </p:nvSpPr>
           <p:spPr>
             <a:xfrm>
-              <a:off x="692708" y="4639479"/>
+              <a:off x="692708" y="4687735"/>
               <a:ext cx="62179" cy="80101"/>
             </a:xfrm>
             <a:prstGeom prst="rect">
@@ -4678,7 +4678,7 @@
           </p:nvSpPr>
           <p:spPr>
             <a:xfrm>
-              <a:off x="692708" y="3769802"/>
+              <a:off x="692708" y="3858272"/>
               <a:ext cx="62179" cy="80101"/>
             </a:xfrm>
             <a:prstGeom prst="rect">
@@ -4724,7 +4724,7 @@
           </p:nvSpPr>
           <p:spPr>
             <a:xfrm>
-              <a:off x="692708" y="2900125"/>
+              <a:off x="692708" y="3028808"/>
               <a:ext cx="62179" cy="80101"/>
             </a:xfrm>
             <a:prstGeom prst="rect">
@@ -4770,7 +4770,7 @@
           </p:nvSpPr>
           <p:spPr>
             <a:xfrm>
-              <a:off x="692708" y="2030448"/>
+              <a:off x="692708" y="2199345"/>
               <a:ext cx="62179" cy="80101"/>
             </a:xfrm>
             <a:prstGeom prst="rect">
@@ -5046,7 +5046,7 @@
           </p:nvSpPr>
           <p:spPr>
             <a:xfrm rot="-5400000">
-              <a:off x="68446" y="3759743"/>
+              <a:off x="68446" y="3848213"/>
               <a:ext cx="1016904" cy="100218"/>
             </a:xfrm>
             <a:prstGeom prst="rect">
@@ -5087,6 +5087,52 @@
         <p:sp>
           <p:nvSpPr>
             <p:cNvPr id="38" name="tx38"/>
+            <p:cNvSpPr/>
+            <p:nvPr/>
+          </p:nvSpPr>
+          <p:spPr>
+            <a:xfrm>
+              <a:off x="817517" y="1896563"/>
+              <a:ext cx="5626211" cy="82021"/>
+            </a:xfrm>
+            <a:prstGeom prst="rect">
+              <a:avLst/>
+            </a:prstGeom>
+            <a:noFill/>
+          </p:spPr>
+          <p:txBody>
+            <a:bodyPr lIns="0" rIns="0" tIns="0" bIns="0" anchorCtr="1" anchor="ctr" wrap="none"/>
+            <a:lstStyle/>
+            <a:p>
+              <a:pPr algn="l" marL="0" marR="0" indent="0">
+                <a:lnSpc>
+                  <a:spcPts val="900"/>
+                </a:lnSpc>
+                <a:spcBef>
+                  <a:spcPts val="0"/>
+                </a:spcBef>
+                <a:spcAft>
+                  <a:spcPts val="0"/>
+                </a:spcAft>
+              </a:pPr>
+              <a:r>
+                <a:rPr sz="900">
+                  <a:solidFill>
+                    <a:srgbClr val="404040">
+                      <a:alpha val="100000"/>
+                    </a:srgbClr>
+                  </a:solidFill>
+                  <a:latin typeface="Helvetica"/>
+                  <a:cs typeface="Helvetica"/>
+                </a:rPr>
+                <a:t>subHR per 0.1 ratio decline: 1.33 (1.02-1.72)  |  per IQR decline (Δ = 0.30): 2.31 (1.07-5.00)  |  IQR: [0.84, 1.14]</a:t>
+              </a:r>
+            </a:p>
+          </p:txBody>
+        </p:sp>
+        <p:sp>
+          <p:nvSpPr>
+            <p:cNvPr id="39" name="tx39"/>
             <p:cNvSpPr/>
             <p:nvPr/>
           </p:nvSpPr>

--- a/docs/pptx/auc3/jx-auc3-linsubhr-ratio-throm2.pptx
+++ b/docs/pptx/auc3/jx-auc3-linsubhr-ratio-throm2.pptx
@@ -5093,7 +5093,7 @@
           <p:spPr>
             <a:xfrm>
               <a:off x="817517" y="1896563"/>
-              <a:ext cx="5626211" cy="82021"/>
+              <a:ext cx="6169365" cy="82021"/>
             </a:xfrm>
             <a:prstGeom prst="rect">
               <a:avLst/>
@@ -5125,7 +5125,7 @@
                   <a:latin typeface="Helvetica"/>
                   <a:cs typeface="Helvetica"/>
                 </a:rPr>
-                <a:t>subHR per 0.1 ratio decline: 1.33 (1.02-1.72)  |  per IQR decline (Δ = 0.30): 2.31 (1.07-5.00)  |  IQR: [0.84, 1.14]</a:t>
+                <a:t>subHR per 0.1 ratio decline: 1.33 (1.02-1.72), p = 0.033  |  per IQR decline (Δ = 0.30): 2.31 (1.07-5.00)  |  IQR: [0.84, 1.14]</a:t>
               </a:r>
             </a:p>
           </p:txBody>

--- a/docs/pptx/auc3/jx-auc3-linsubhr-ratio-throm2.pptx
+++ b/docs/pptx/auc3/jx-auc3-linsubhr-ratio-throm2.pptx
@@ -5093,7 +5093,7 @@
           <p:spPr>
             <a:xfrm>
               <a:off x="817517" y="1896563"/>
-              <a:ext cx="6169365" cy="82021"/>
+              <a:ext cx="6833128" cy="82021"/>
             </a:xfrm>
             <a:prstGeom prst="rect">
               <a:avLst/>
@@ -5125,7 +5125,7 @@
                   <a:latin typeface="Helvetica"/>
                   <a:cs typeface="Helvetica"/>
                 </a:rPr>
-                <a:t>subHR per 0.1 ratio decline: 1.33 (1.02-1.72), p = 0.033  |  per IQR decline (Δ = 0.30): 2.31 (1.07-5.00)  |  IQR: [0.84, 1.14]</a:t>
+                <a:t>subHR per 0.1 ratio decline: 1.33 (1.02-1.72), p_Bonf = 0.199 (n = 6)  |  per IQR decline (Δ = 0.30): 2.31 (1.07-5.00)  |  IQR: [0.84, 1.14]</a:t>
               </a:r>
             </a:p>
           </p:txBody>

--- a/docs/pptx/auc3/jx-auc3-linsubhr-ratio-throm2.pptx
+++ b/docs/pptx/auc3/jx-auc3-linsubhr-ratio-throm2.pptx
@@ -2443,7 +2443,7 @@
           </p:nvSpPr>
           <p:spPr>
             <a:xfrm>
-              <a:off x="1615213" y="2073503"/>
+              <a:off x="1531834" y="2073503"/>
               <a:ext cx="0" cy="3649639"/>
             </a:xfrm>
             <a:custGeom>
@@ -2486,7 +2486,7 @@
           </p:nvSpPr>
           <p:spPr>
             <a:xfrm>
-              <a:off x="3387871" y="2073503"/>
+              <a:off x="3586410" y="2073503"/>
               <a:ext cx="0" cy="3649639"/>
             </a:xfrm>
             <a:custGeom>
@@ -2529,7 +2529,7 @@
           </p:nvSpPr>
           <p:spPr>
             <a:xfrm>
-              <a:off x="5160528" y="2073503"/>
+              <a:off x="5640985" y="2073503"/>
               <a:ext cx="0" cy="3649639"/>
             </a:xfrm>
             <a:custGeom>
@@ -2572,7 +2572,7 @@
           </p:nvSpPr>
           <p:spPr>
             <a:xfrm>
-              <a:off x="6933186" y="2073503"/>
+              <a:off x="7695561" y="2073503"/>
               <a:ext cx="0" cy="3649639"/>
             </a:xfrm>
             <a:custGeom>
@@ -2830,7 +2830,7 @@
           </p:nvSpPr>
           <p:spPr>
             <a:xfrm>
-              <a:off x="2501542" y="2073503"/>
+              <a:off x="2559122" y="2073503"/>
               <a:ext cx="0" cy="3649639"/>
             </a:xfrm>
             <a:custGeom>
@@ -2873,7 +2873,7 @@
           </p:nvSpPr>
           <p:spPr>
             <a:xfrm>
-              <a:off x="4274200" y="2073503"/>
+              <a:off x="4613698" y="2073503"/>
               <a:ext cx="0" cy="3649639"/>
             </a:xfrm>
             <a:custGeom>
@@ -2916,7 +2916,7 @@
           </p:nvSpPr>
           <p:spPr>
             <a:xfrm>
-              <a:off x="6046857" y="2073503"/>
+              <a:off x="6668273" y="2073503"/>
               <a:ext cx="0" cy="3649639"/>
             </a:xfrm>
             <a:custGeom>
@@ -2953,607 +2953,573 @@
         </p:sp>
         <p:sp>
           <p:nvSpPr>
-            <p:cNvPr id="20" name="pl20"/>
+            <p:cNvPr id="20" name="pg20"/>
             <p:cNvSpPr/>
             <p:nvPr/>
           </p:nvSpPr>
           <p:spPr>
             <a:xfrm>
-              <a:off x="7819515" y="2073503"/>
-              <a:ext cx="0" cy="3649639"/>
+              <a:off x="1172049" y="2073503"/>
+              <a:ext cx="7090630" cy="3416719"/>
             </a:xfrm>
             <a:custGeom>
               <a:avLst/>
               <a:pathLst>
-                <a:path w="0" h="3649639">
+                <a:path w="7090630" h="3416719">
                   <a:moveTo>
-                    <a:pt x="0" y="3649639"/>
+                    <a:pt x="1132129" y="0"/>
                   </a:moveTo>
                   <a:lnTo>
-                    <a:pt x="0" y="0"/>
-                  </a:lnTo>
-                  <a:lnTo>
-                    <a:pt x="0" y="0"/>
-                  </a:lnTo>
-                </a:path>
-              </a:pathLst>
-            </a:custGeom>
-            <a:ln w="13550" cap="flat">
-              <a:solidFill>
-                <a:srgbClr val="EBEBEB">
-                  <a:alpha val="100000"/>
-                </a:srgbClr>
-              </a:solidFill>
-              <a:prstDash val="solid"/>
-              <a:round/>
-            </a:ln>
-          </p:spPr>
-          <p:txBody>
-            <a:bodyPr/>
-            <a:lstStyle/>
-            <a:p/>
-          </p:txBody>
-        </p:sp>
-        <p:sp>
-          <p:nvSpPr>
-            <p:cNvPr id="21" name="pg21"/>
-            <p:cNvSpPr/>
-            <p:nvPr/>
-          </p:nvSpPr>
-          <p:spPr>
-            <a:xfrm>
-              <a:off x="817517" y="2073503"/>
-              <a:ext cx="7392041" cy="3416719"/>
-            </a:xfrm>
-            <a:custGeom>
-              <a:avLst/>
-              <a:pathLst>
-                <a:path w="7392041" h="3416719">
-                  <a:moveTo>
-                    <a:pt x="965908" y="0"/>
-                  </a:moveTo>
-                  <a:lnTo>
-                    <a:pt x="980824" y="32412"/>
-                  </a:lnTo>
-                  <a:lnTo>
-                    <a:pt x="1058068" y="192475"/>
-                  </a:lnTo>
-                  <a:lnTo>
-                    <a:pt x="1135311" y="345114"/>
-                  </a:lnTo>
-                  <a:lnTo>
-                    <a:pt x="1212555" y="490675"/>
-                  </a:lnTo>
-                  <a:lnTo>
-                    <a:pt x="1289799" y="629485"/>
-                  </a:lnTo>
-                  <a:lnTo>
-                    <a:pt x="1367042" y="761857"/>
-                  </a:lnTo>
-                  <a:lnTo>
-                    <a:pt x="1444286" y="888091"/>
-                  </a:lnTo>
-                  <a:lnTo>
-                    <a:pt x="1521529" y="1008470"/>
-                  </a:lnTo>
-                  <a:lnTo>
-                    <a:pt x="1598773" y="1123266"/>
-                  </a:lnTo>
-                  <a:lnTo>
-                    <a:pt x="1676016" y="1232738"/>
-                  </a:lnTo>
-                  <a:lnTo>
-                    <a:pt x="1753260" y="1337133"/>
-                  </a:lnTo>
-                  <a:lnTo>
-                    <a:pt x="1830504" y="1436687"/>
-                  </a:lnTo>
-                  <a:lnTo>
-                    <a:pt x="1907747" y="1531624"/>
-                  </a:lnTo>
-                  <a:lnTo>
-                    <a:pt x="1984991" y="1622157"/>
-                  </a:lnTo>
-                  <a:lnTo>
-                    <a:pt x="2062234" y="1708493"/>
-                  </a:lnTo>
-                  <a:lnTo>
-                    <a:pt x="2139478" y="1790824"/>
-                  </a:lnTo>
-                  <a:lnTo>
-                    <a:pt x="2216721" y="1869337"/>
-                  </a:lnTo>
-                  <a:lnTo>
-                    <a:pt x="2293965" y="1944208"/>
-                  </a:lnTo>
-                  <a:lnTo>
-                    <a:pt x="2371209" y="2015608"/>
-                  </a:lnTo>
-                  <a:lnTo>
-                    <a:pt x="2448452" y="2083696"/>
-                  </a:lnTo>
-                  <a:lnTo>
-                    <a:pt x="2525696" y="2148626"/>
-                  </a:lnTo>
-                  <a:lnTo>
-                    <a:pt x="2602939" y="2210545"/>
-                  </a:lnTo>
-                  <a:lnTo>
-                    <a:pt x="2680183" y="2269592"/>
-                  </a:lnTo>
-                  <a:lnTo>
-                    <a:pt x="2757426" y="2325901"/>
-                  </a:lnTo>
-                  <a:lnTo>
-                    <a:pt x="2834670" y="2379599"/>
-                  </a:lnTo>
-                  <a:lnTo>
-                    <a:pt x="2911914" y="2430806"/>
-                  </a:lnTo>
-                  <a:lnTo>
-                    <a:pt x="2989157" y="2479638"/>
-                  </a:lnTo>
-                  <a:lnTo>
-                    <a:pt x="3066401" y="2526206"/>
-                  </a:lnTo>
-                  <a:lnTo>
-                    <a:pt x="3143644" y="2570614"/>
-                  </a:lnTo>
-                  <a:lnTo>
-                    <a:pt x="3220888" y="2612962"/>
-                  </a:lnTo>
-                  <a:lnTo>
-                    <a:pt x="3298131" y="2653347"/>
-                  </a:lnTo>
-                  <a:lnTo>
-                    <a:pt x="3375375" y="2655877"/>
-                  </a:lnTo>
-                  <a:lnTo>
-                    <a:pt x="3452619" y="2657508"/>
-                  </a:lnTo>
-                  <a:lnTo>
-                    <a:pt x="3529862" y="2659135"/>
-                  </a:lnTo>
-                  <a:lnTo>
-                    <a:pt x="3607106" y="2660759"/>
-                  </a:lnTo>
-                  <a:lnTo>
-                    <a:pt x="3684349" y="2662379"/>
-                  </a:lnTo>
-                  <a:lnTo>
-                    <a:pt x="3761593" y="2663997"/>
-                  </a:lnTo>
-                  <a:lnTo>
-                    <a:pt x="3838836" y="2665611"/>
-                  </a:lnTo>
-                  <a:lnTo>
-                    <a:pt x="3916080" y="2667222"/>
-                  </a:lnTo>
-                  <a:lnTo>
-                    <a:pt x="3993324" y="2668830"/>
-                  </a:lnTo>
-                  <a:lnTo>
-                    <a:pt x="4070567" y="2670435"/>
-                  </a:lnTo>
-                  <a:lnTo>
-                    <a:pt x="4147811" y="2672036"/>
-                  </a:lnTo>
-                  <a:lnTo>
-                    <a:pt x="4225054" y="2673635"/>
-                  </a:lnTo>
-                  <a:lnTo>
-                    <a:pt x="4302298" y="2675230"/>
-                  </a:lnTo>
-                  <a:lnTo>
-                    <a:pt x="4379541" y="2676822"/>
-                  </a:lnTo>
-                  <a:lnTo>
-                    <a:pt x="4456785" y="2678411"/>
-                  </a:lnTo>
-                  <a:lnTo>
-                    <a:pt x="4534029" y="2679997"/>
-                  </a:lnTo>
-                  <a:lnTo>
-                    <a:pt x="4611272" y="2681580"/>
-                  </a:lnTo>
-                  <a:lnTo>
-                    <a:pt x="4688516" y="2683159"/>
-                  </a:lnTo>
-                  <a:lnTo>
-                    <a:pt x="4765759" y="2684736"/>
-                  </a:lnTo>
-                  <a:lnTo>
-                    <a:pt x="4843003" y="2686309"/>
-                  </a:lnTo>
-                  <a:lnTo>
-                    <a:pt x="4920246" y="2687880"/>
-                  </a:lnTo>
-                  <a:lnTo>
-                    <a:pt x="4997490" y="2689447"/>
-                  </a:lnTo>
-                  <a:lnTo>
-                    <a:pt x="5074734" y="2691011"/>
-                  </a:lnTo>
-                  <a:lnTo>
-                    <a:pt x="5151977" y="2692572"/>
-                  </a:lnTo>
-                  <a:lnTo>
-                    <a:pt x="5229221" y="2694130"/>
-                  </a:lnTo>
-                  <a:lnTo>
-                    <a:pt x="5306464" y="2695685"/>
-                  </a:lnTo>
-                  <a:lnTo>
-                    <a:pt x="5383708" y="2697237"/>
-                  </a:lnTo>
-                  <a:lnTo>
-                    <a:pt x="5460951" y="2698786"/>
-                  </a:lnTo>
-                  <a:lnTo>
-                    <a:pt x="5538195" y="2700332"/>
-                  </a:lnTo>
-                  <a:lnTo>
-                    <a:pt x="5615439" y="2701874"/>
-                  </a:lnTo>
-                  <a:lnTo>
-                    <a:pt x="5692682" y="2703414"/>
-                  </a:lnTo>
-                  <a:lnTo>
-                    <a:pt x="5769926" y="2704951"/>
-                  </a:lnTo>
-                  <a:lnTo>
-                    <a:pt x="5847169" y="2706484"/>
-                  </a:lnTo>
-                  <a:lnTo>
-                    <a:pt x="5924413" y="2708015"/>
-                  </a:lnTo>
-                  <a:lnTo>
-                    <a:pt x="6001656" y="2709542"/>
-                  </a:lnTo>
-                  <a:lnTo>
-                    <a:pt x="6078900" y="2711067"/>
-                  </a:lnTo>
-                  <a:lnTo>
-                    <a:pt x="6156144" y="2712589"/>
-                  </a:lnTo>
-                  <a:lnTo>
-                    <a:pt x="6233387" y="2714107"/>
-                  </a:lnTo>
-                  <a:lnTo>
-                    <a:pt x="6310631" y="2715623"/>
-                  </a:lnTo>
-                  <a:lnTo>
-                    <a:pt x="6387874" y="2717135"/>
-                  </a:lnTo>
-                  <a:lnTo>
-                    <a:pt x="6465118" y="2718645"/>
-                  </a:lnTo>
-                  <a:lnTo>
-                    <a:pt x="6542361" y="2720152"/>
-                  </a:lnTo>
-                  <a:lnTo>
-                    <a:pt x="6619605" y="2721655"/>
-                  </a:lnTo>
-                  <a:lnTo>
-                    <a:pt x="6696849" y="2723156"/>
-                  </a:lnTo>
-                  <a:lnTo>
-                    <a:pt x="6774092" y="2724654"/>
-                  </a:lnTo>
-                  <a:lnTo>
-                    <a:pt x="6851336" y="2726149"/>
-                  </a:lnTo>
-                  <a:lnTo>
-                    <a:pt x="6928579" y="2727640"/>
-                  </a:lnTo>
-                  <a:lnTo>
-                    <a:pt x="7005823" y="2729129"/>
-                  </a:lnTo>
-                  <a:lnTo>
-                    <a:pt x="7083066" y="2730615"/>
-                  </a:lnTo>
-                  <a:lnTo>
-                    <a:pt x="7160310" y="2732098"/>
-                  </a:lnTo>
-                  <a:lnTo>
-                    <a:pt x="7237554" y="2733579"/>
-                  </a:lnTo>
-                  <a:lnTo>
-                    <a:pt x="7314797" y="2735056"/>
-                  </a:lnTo>
-                  <a:lnTo>
-                    <a:pt x="7392041" y="2736530"/>
-                  </a:lnTo>
-                  <a:lnTo>
-                    <a:pt x="7392041" y="3416719"/>
-                  </a:lnTo>
-                  <a:lnTo>
-                    <a:pt x="7314797" y="3413460"/>
-                  </a:lnTo>
-                  <a:lnTo>
-                    <a:pt x="7237554" y="3410041"/>
-                  </a:lnTo>
-                  <a:lnTo>
-                    <a:pt x="7160310" y="3406457"/>
-                  </a:lnTo>
-                  <a:lnTo>
-                    <a:pt x="7083066" y="3402698"/>
-                  </a:lnTo>
-                  <a:lnTo>
-                    <a:pt x="7005823" y="3398757"/>
-                  </a:lnTo>
-                  <a:lnTo>
-                    <a:pt x="6928579" y="3394623"/>
-                  </a:lnTo>
-                  <a:lnTo>
-                    <a:pt x="6851336" y="3390289"/>
-                  </a:lnTo>
-                  <a:lnTo>
-                    <a:pt x="6774092" y="3385744"/>
-                  </a:lnTo>
-                  <a:lnTo>
-                    <a:pt x="6696849" y="3380978"/>
-                  </a:lnTo>
-                  <a:lnTo>
-                    <a:pt x="6619605" y="3375980"/>
-                  </a:lnTo>
-                  <a:lnTo>
-                    <a:pt x="6542361" y="3370739"/>
-                  </a:lnTo>
-                  <a:lnTo>
-                    <a:pt x="6465118" y="3365243"/>
-                  </a:lnTo>
-                  <a:lnTo>
-                    <a:pt x="6387874" y="3359480"/>
-                  </a:lnTo>
-                  <a:lnTo>
-                    <a:pt x="6310631" y="3353437"/>
-                  </a:lnTo>
-                  <a:lnTo>
-                    <a:pt x="6233387" y="3347099"/>
-                  </a:lnTo>
-                  <a:lnTo>
-                    <a:pt x="6156144" y="3340454"/>
-                  </a:lnTo>
-                  <a:lnTo>
-                    <a:pt x="6078900" y="3333485"/>
-                  </a:lnTo>
-                  <a:lnTo>
-                    <a:pt x="6001656" y="3326177"/>
-                  </a:lnTo>
-                  <a:lnTo>
-                    <a:pt x="5924413" y="3318515"/>
-                  </a:lnTo>
-                  <a:lnTo>
-                    <a:pt x="5847169" y="3310479"/>
-                  </a:lnTo>
-                  <a:lnTo>
-                    <a:pt x="5769926" y="3302052"/>
-                  </a:lnTo>
-                  <a:lnTo>
-                    <a:pt x="5692682" y="3293216"/>
-                  </a:lnTo>
-                  <a:lnTo>
-                    <a:pt x="5615439" y="3283950"/>
-                  </a:lnTo>
-                  <a:lnTo>
-                    <a:pt x="5538195" y="3274234"/>
-                  </a:lnTo>
-                  <a:lnTo>
-                    <a:pt x="5460951" y="3264044"/>
-                  </a:lnTo>
-                  <a:lnTo>
-                    <a:pt x="5383708" y="3253360"/>
-                  </a:lnTo>
-                  <a:lnTo>
-                    <a:pt x="5306464" y="3242156"/>
-                  </a:lnTo>
-                  <a:lnTo>
-                    <a:pt x="5229221" y="3230406"/>
-                  </a:lnTo>
-                  <a:lnTo>
-                    <a:pt x="5151977" y="3218086"/>
-                  </a:lnTo>
-                  <a:lnTo>
-                    <a:pt x="5074734" y="3205166"/>
-                  </a:lnTo>
-                  <a:lnTo>
-                    <a:pt x="4997490" y="3191618"/>
-                  </a:lnTo>
-                  <a:lnTo>
-                    <a:pt x="4920246" y="3177411"/>
-                  </a:lnTo>
-                  <a:lnTo>
-                    <a:pt x="4843003" y="3162513"/>
-                  </a:lnTo>
-                  <a:lnTo>
-                    <a:pt x="4765759" y="3146891"/>
-                  </a:lnTo>
-                  <a:lnTo>
-                    <a:pt x="4688516" y="3130509"/>
-                  </a:lnTo>
-                  <a:lnTo>
-                    <a:pt x="4611272" y="3113330"/>
-                  </a:lnTo>
-                  <a:lnTo>
-                    <a:pt x="4534029" y="3095315"/>
-                  </a:lnTo>
-                  <a:lnTo>
-                    <a:pt x="4456785" y="3076425"/>
-                  </a:lnTo>
-                  <a:lnTo>
-                    <a:pt x="4379541" y="3056616"/>
-                  </a:lnTo>
-                  <a:lnTo>
-                    <a:pt x="4302298" y="3035844"/>
-                  </a:lnTo>
-                  <a:lnTo>
-                    <a:pt x="4225054" y="3014061"/>
-                  </a:lnTo>
-                  <a:lnTo>
-                    <a:pt x="4147811" y="2991219"/>
-                  </a:lnTo>
-                  <a:lnTo>
-                    <a:pt x="4070567" y="2967266"/>
-                  </a:lnTo>
-                  <a:lnTo>
-                    <a:pt x="3993324" y="2942148"/>
-                  </a:lnTo>
-                  <a:lnTo>
-                    <a:pt x="3916080" y="2915809"/>
-                  </a:lnTo>
-                  <a:lnTo>
-                    <a:pt x="3838836" y="2888189"/>
-                  </a:lnTo>
-                  <a:lnTo>
-                    <a:pt x="3761593" y="2859225"/>
-                  </a:lnTo>
-                  <a:lnTo>
-                    <a:pt x="3684349" y="2828853"/>
-                  </a:lnTo>
-                  <a:lnTo>
-                    <a:pt x="3607106" y="2797004"/>
-                  </a:lnTo>
-                  <a:lnTo>
-                    <a:pt x="3529862" y="2763606"/>
-                  </a:lnTo>
-                  <a:lnTo>
-                    <a:pt x="3452619" y="2728584"/>
-                  </a:lnTo>
-                  <a:lnTo>
-                    <a:pt x="3375375" y="2691858"/>
-                  </a:lnTo>
-                  <a:lnTo>
-                    <a:pt x="3298131" y="2654244"/>
-                  </a:lnTo>
-                  <a:lnTo>
-                    <a:pt x="3220888" y="2652607"/>
-                  </a:lnTo>
-                  <a:lnTo>
-                    <a:pt x="3143644" y="2650967"/>
-                  </a:lnTo>
-                  <a:lnTo>
-                    <a:pt x="3066401" y="2649324"/>
-                  </a:lnTo>
-                  <a:lnTo>
-                    <a:pt x="2989157" y="2647678"/>
-                  </a:lnTo>
-                  <a:lnTo>
-                    <a:pt x="2911914" y="2646028"/>
-                  </a:lnTo>
-                  <a:lnTo>
-                    <a:pt x="2834670" y="2644375"/>
-                  </a:lnTo>
-                  <a:lnTo>
-                    <a:pt x="2757426" y="2642719"/>
-                  </a:lnTo>
-                  <a:lnTo>
-                    <a:pt x="2680183" y="2641060"/>
-                  </a:lnTo>
-                  <a:lnTo>
-                    <a:pt x="2602939" y="2639397"/>
-                  </a:lnTo>
-                  <a:lnTo>
-                    <a:pt x="2525696" y="2637731"/>
-                  </a:lnTo>
-                  <a:lnTo>
-                    <a:pt x="2448452" y="2636062"/>
-                  </a:lnTo>
-                  <a:lnTo>
-                    <a:pt x="2371209" y="2634389"/>
-                  </a:lnTo>
-                  <a:lnTo>
-                    <a:pt x="2293965" y="2632713"/>
-                  </a:lnTo>
-                  <a:lnTo>
-                    <a:pt x="2216721" y="2631034"/>
-                  </a:lnTo>
-                  <a:lnTo>
-                    <a:pt x="2139478" y="2629352"/>
-                  </a:lnTo>
-                  <a:lnTo>
-                    <a:pt x="2062234" y="2627666"/>
-                  </a:lnTo>
-                  <a:lnTo>
-                    <a:pt x="1984991" y="2625977"/>
-                  </a:lnTo>
-                  <a:lnTo>
-                    <a:pt x="1907747" y="2624284"/>
-                  </a:lnTo>
-                  <a:lnTo>
-                    <a:pt x="1830504" y="2622588"/>
-                  </a:lnTo>
-                  <a:lnTo>
-                    <a:pt x="1753260" y="2620889"/>
-                  </a:lnTo>
-                  <a:lnTo>
-                    <a:pt x="1676016" y="2619187"/>
-                  </a:lnTo>
-                  <a:lnTo>
-                    <a:pt x="1598773" y="2617481"/>
-                  </a:lnTo>
-                  <a:lnTo>
-                    <a:pt x="1521529" y="2615772"/>
-                  </a:lnTo>
-                  <a:lnTo>
-                    <a:pt x="1444286" y="2614059"/>
-                  </a:lnTo>
-                  <a:lnTo>
-                    <a:pt x="1367042" y="2612343"/>
-                  </a:lnTo>
-                  <a:lnTo>
-                    <a:pt x="1289799" y="2610624"/>
-                  </a:lnTo>
-                  <a:lnTo>
-                    <a:pt x="1212555" y="2608901"/>
-                  </a:lnTo>
-                  <a:lnTo>
-                    <a:pt x="1135311" y="2607175"/>
-                  </a:lnTo>
-                  <a:lnTo>
-                    <a:pt x="1058068" y="2605445"/>
-                  </a:lnTo>
-                  <a:lnTo>
-                    <a:pt x="980824" y="2603712"/>
-                  </a:lnTo>
-                  <a:lnTo>
-                    <a:pt x="903581" y="2601976"/>
-                  </a:lnTo>
-                  <a:lnTo>
-                    <a:pt x="826337" y="2600236"/>
-                  </a:lnTo>
-                  <a:lnTo>
-                    <a:pt x="749094" y="2598493"/>
-                  </a:lnTo>
-                  <a:lnTo>
-                    <a:pt x="671850" y="2596746"/>
-                  </a:lnTo>
-                  <a:lnTo>
-                    <a:pt x="594606" y="2594996"/>
-                  </a:lnTo>
-                  <a:lnTo>
-                    <a:pt x="517363" y="2593242"/>
-                  </a:lnTo>
-                  <a:lnTo>
-                    <a:pt x="440119" y="2591485"/>
-                  </a:lnTo>
-                  <a:lnTo>
-                    <a:pt x="362876" y="2589725"/>
-                  </a:lnTo>
-                  <a:lnTo>
-                    <a:pt x="285632" y="2587961"/>
-                  </a:lnTo>
-                  <a:lnTo>
-                    <a:pt x="208389" y="2586193"/>
-                  </a:lnTo>
-                  <a:lnTo>
-                    <a:pt x="131145" y="2584422"/>
-                  </a:lnTo>
-                  <a:lnTo>
-                    <a:pt x="53901" y="2582648"/>
-                  </a:lnTo>
-                  <a:lnTo>
-                    <a:pt x="0" y="2581407"/>
+                    <a:pt x="1145960" y="32412"/>
+                  </a:lnTo>
+                  <a:lnTo>
+                    <a:pt x="1217582" y="192475"/>
+                  </a:lnTo>
+                  <a:lnTo>
+                    <a:pt x="1289205" y="345114"/>
+                  </a:lnTo>
+                  <a:lnTo>
+                    <a:pt x="1360827" y="490675"/>
+                  </a:lnTo>
+                  <a:lnTo>
+                    <a:pt x="1432450" y="629485"/>
+                  </a:lnTo>
+                  <a:lnTo>
+                    <a:pt x="1504073" y="761857"/>
+                  </a:lnTo>
+                  <a:lnTo>
+                    <a:pt x="1575695" y="888091"/>
+                  </a:lnTo>
+                  <a:lnTo>
+                    <a:pt x="1647318" y="1008470"/>
+                  </a:lnTo>
+                  <a:lnTo>
+                    <a:pt x="1718940" y="1123266"/>
+                  </a:lnTo>
+                  <a:lnTo>
+                    <a:pt x="1790563" y="1232738"/>
+                  </a:lnTo>
+                  <a:lnTo>
+                    <a:pt x="1862185" y="1337133"/>
+                  </a:lnTo>
+                  <a:lnTo>
+                    <a:pt x="1933808" y="1436687"/>
+                  </a:lnTo>
+                  <a:lnTo>
+                    <a:pt x="2005430" y="1531624"/>
+                  </a:lnTo>
+                  <a:lnTo>
+                    <a:pt x="2077053" y="1622157"/>
+                  </a:lnTo>
+                  <a:lnTo>
+                    <a:pt x="2148675" y="1708493"/>
+                  </a:lnTo>
+                  <a:lnTo>
+                    <a:pt x="2220298" y="1790824"/>
+                  </a:lnTo>
+                  <a:lnTo>
+                    <a:pt x="2291920" y="1869337"/>
+                  </a:lnTo>
+                  <a:lnTo>
+                    <a:pt x="2363543" y="1944208"/>
+                  </a:lnTo>
+                  <a:lnTo>
+                    <a:pt x="2435165" y="2015608"/>
+                  </a:lnTo>
+                  <a:lnTo>
+                    <a:pt x="2506788" y="2083696"/>
+                  </a:lnTo>
+                  <a:lnTo>
+                    <a:pt x="2578410" y="2148626"/>
+                  </a:lnTo>
+                  <a:lnTo>
+                    <a:pt x="2650033" y="2210545"/>
+                  </a:lnTo>
+                  <a:lnTo>
+                    <a:pt x="2721655" y="2269592"/>
+                  </a:lnTo>
+                  <a:lnTo>
+                    <a:pt x="2793278" y="2325901"/>
+                  </a:lnTo>
+                  <a:lnTo>
+                    <a:pt x="2864901" y="2379599"/>
+                  </a:lnTo>
+                  <a:lnTo>
+                    <a:pt x="2936523" y="2430806"/>
+                  </a:lnTo>
+                  <a:lnTo>
+                    <a:pt x="3008146" y="2479638"/>
+                  </a:lnTo>
+                  <a:lnTo>
+                    <a:pt x="3079768" y="2526206"/>
+                  </a:lnTo>
+                  <a:lnTo>
+                    <a:pt x="3151391" y="2570614"/>
+                  </a:lnTo>
+                  <a:lnTo>
+                    <a:pt x="3223013" y="2612962"/>
+                  </a:lnTo>
+                  <a:lnTo>
+                    <a:pt x="3294636" y="2653347"/>
+                  </a:lnTo>
+                  <a:lnTo>
+                    <a:pt x="3366258" y="2655877"/>
+                  </a:lnTo>
+                  <a:lnTo>
+                    <a:pt x="3437881" y="2657508"/>
+                  </a:lnTo>
+                  <a:lnTo>
+                    <a:pt x="3509503" y="2659135"/>
+                  </a:lnTo>
+                  <a:lnTo>
+                    <a:pt x="3581126" y="2660759"/>
+                  </a:lnTo>
+                  <a:lnTo>
+                    <a:pt x="3652748" y="2662379"/>
+                  </a:lnTo>
+                  <a:lnTo>
+                    <a:pt x="3724371" y="2663997"/>
+                  </a:lnTo>
+                  <a:lnTo>
+                    <a:pt x="3795993" y="2665611"/>
+                  </a:lnTo>
+                  <a:lnTo>
+                    <a:pt x="3867616" y="2667222"/>
+                  </a:lnTo>
+                  <a:lnTo>
+                    <a:pt x="3939238" y="2668830"/>
+                  </a:lnTo>
+                  <a:lnTo>
+                    <a:pt x="4010861" y="2670435"/>
+                  </a:lnTo>
+                  <a:lnTo>
+                    <a:pt x="4082483" y="2672036"/>
+                  </a:lnTo>
+                  <a:lnTo>
+                    <a:pt x="4154106" y="2673635"/>
+                  </a:lnTo>
+                  <a:lnTo>
+                    <a:pt x="4225729" y="2675230"/>
+                  </a:lnTo>
+                  <a:lnTo>
+                    <a:pt x="4297351" y="2676822"/>
+                  </a:lnTo>
+                  <a:lnTo>
+                    <a:pt x="4368974" y="2678411"/>
+                  </a:lnTo>
+                  <a:lnTo>
+                    <a:pt x="4440596" y="2679997"/>
+                  </a:lnTo>
+                  <a:lnTo>
+                    <a:pt x="4512219" y="2681580"/>
+                  </a:lnTo>
+                  <a:lnTo>
+                    <a:pt x="4583841" y="2683159"/>
+                  </a:lnTo>
+                  <a:lnTo>
+                    <a:pt x="4655464" y="2684736"/>
+                  </a:lnTo>
+                  <a:lnTo>
+                    <a:pt x="4727086" y="2686309"/>
+                  </a:lnTo>
+                  <a:lnTo>
+                    <a:pt x="4798709" y="2687880"/>
+                  </a:lnTo>
+                  <a:lnTo>
+                    <a:pt x="4870331" y="2689447"/>
+                  </a:lnTo>
+                  <a:lnTo>
+                    <a:pt x="4941954" y="2691011"/>
+                  </a:lnTo>
+                  <a:lnTo>
+                    <a:pt x="5013576" y="2692572"/>
+                  </a:lnTo>
+                  <a:lnTo>
+                    <a:pt x="5085199" y="2694130"/>
+                  </a:lnTo>
+                  <a:lnTo>
+                    <a:pt x="5156821" y="2695685"/>
+                  </a:lnTo>
+                  <a:lnTo>
+                    <a:pt x="5228444" y="2697237"/>
+                  </a:lnTo>
+                  <a:lnTo>
+                    <a:pt x="5300066" y="2698786"/>
+                  </a:lnTo>
+                  <a:lnTo>
+                    <a:pt x="5371689" y="2700332"/>
+                  </a:lnTo>
+                  <a:lnTo>
+                    <a:pt x="5443311" y="2701874"/>
+                  </a:lnTo>
+                  <a:lnTo>
+                    <a:pt x="5514934" y="2703414"/>
+                  </a:lnTo>
+                  <a:lnTo>
+                    <a:pt x="5586557" y="2704951"/>
+                  </a:lnTo>
+                  <a:lnTo>
+                    <a:pt x="5658179" y="2706484"/>
+                  </a:lnTo>
+                  <a:lnTo>
+                    <a:pt x="5729802" y="2708015"/>
+                  </a:lnTo>
+                  <a:lnTo>
+                    <a:pt x="5801424" y="2709542"/>
+                  </a:lnTo>
+                  <a:lnTo>
+                    <a:pt x="5873047" y="2711067"/>
+                  </a:lnTo>
+                  <a:lnTo>
+                    <a:pt x="5944669" y="2712589"/>
+                  </a:lnTo>
+                  <a:lnTo>
+                    <a:pt x="6016292" y="2714107"/>
+                  </a:lnTo>
+                  <a:lnTo>
+                    <a:pt x="6087914" y="2715623"/>
+                  </a:lnTo>
+                  <a:lnTo>
+                    <a:pt x="6159537" y="2717135"/>
+                  </a:lnTo>
+                  <a:lnTo>
+                    <a:pt x="6231159" y="2718645"/>
+                  </a:lnTo>
+                  <a:lnTo>
+                    <a:pt x="6302782" y="2720152"/>
+                  </a:lnTo>
+                  <a:lnTo>
+                    <a:pt x="6374404" y="2721655"/>
+                  </a:lnTo>
+                  <a:lnTo>
+                    <a:pt x="6446027" y="2723156"/>
+                  </a:lnTo>
+                  <a:lnTo>
+                    <a:pt x="6517649" y="2724654"/>
+                  </a:lnTo>
+                  <a:lnTo>
+                    <a:pt x="6589272" y="2726149"/>
+                  </a:lnTo>
+                  <a:lnTo>
+                    <a:pt x="6660894" y="2727640"/>
+                  </a:lnTo>
+                  <a:lnTo>
+                    <a:pt x="6732517" y="2729129"/>
+                  </a:lnTo>
+                  <a:lnTo>
+                    <a:pt x="6804139" y="2730615"/>
+                  </a:lnTo>
+                  <a:lnTo>
+                    <a:pt x="6875762" y="2732098"/>
+                  </a:lnTo>
+                  <a:lnTo>
+                    <a:pt x="6947385" y="2733579"/>
+                  </a:lnTo>
+                  <a:lnTo>
+                    <a:pt x="7019007" y="2735056"/>
+                  </a:lnTo>
+                  <a:lnTo>
+                    <a:pt x="7090630" y="2736530"/>
+                  </a:lnTo>
+                  <a:lnTo>
+                    <a:pt x="7090630" y="3416719"/>
+                  </a:lnTo>
+                  <a:lnTo>
+                    <a:pt x="7019007" y="3413460"/>
+                  </a:lnTo>
+                  <a:lnTo>
+                    <a:pt x="6947385" y="3410041"/>
+                  </a:lnTo>
+                  <a:lnTo>
+                    <a:pt x="6875762" y="3406457"/>
+                  </a:lnTo>
+                  <a:lnTo>
+                    <a:pt x="6804139" y="3402698"/>
+                  </a:lnTo>
+                  <a:lnTo>
+                    <a:pt x="6732517" y="3398757"/>
+                  </a:lnTo>
+                  <a:lnTo>
+                    <a:pt x="6660894" y="3394623"/>
+                  </a:lnTo>
+                  <a:lnTo>
+                    <a:pt x="6589272" y="3390289"/>
+                  </a:lnTo>
+                  <a:lnTo>
+                    <a:pt x="6517649" y="3385744"/>
+                  </a:lnTo>
+                  <a:lnTo>
+                    <a:pt x="6446027" y="3380978"/>
+                  </a:lnTo>
+                  <a:lnTo>
+                    <a:pt x="6374404" y="3375980"/>
+                  </a:lnTo>
+                  <a:lnTo>
+                    <a:pt x="6302782" y="3370739"/>
+                  </a:lnTo>
+                  <a:lnTo>
+                    <a:pt x="6231159" y="3365243"/>
+                  </a:lnTo>
+                  <a:lnTo>
+                    <a:pt x="6159537" y="3359480"/>
+                  </a:lnTo>
+                  <a:lnTo>
+                    <a:pt x="6087914" y="3353437"/>
+                  </a:lnTo>
+                  <a:lnTo>
+                    <a:pt x="6016292" y="3347099"/>
+                  </a:lnTo>
+                  <a:lnTo>
+                    <a:pt x="5944669" y="3340454"/>
+                  </a:lnTo>
+                  <a:lnTo>
+                    <a:pt x="5873047" y="3333485"/>
+                  </a:lnTo>
+                  <a:lnTo>
+                    <a:pt x="5801424" y="3326177"/>
+                  </a:lnTo>
+                  <a:lnTo>
+                    <a:pt x="5729802" y="3318515"/>
+                  </a:lnTo>
+                  <a:lnTo>
+                    <a:pt x="5658179" y="3310479"/>
+                  </a:lnTo>
+                  <a:lnTo>
+                    <a:pt x="5586557" y="3302052"/>
+                  </a:lnTo>
+                  <a:lnTo>
+                    <a:pt x="5514934" y="3293216"/>
+                  </a:lnTo>
+                  <a:lnTo>
+                    <a:pt x="5443311" y="3283950"/>
+                  </a:lnTo>
+                  <a:lnTo>
+                    <a:pt x="5371689" y="3274234"/>
+                  </a:lnTo>
+                  <a:lnTo>
+                    <a:pt x="5300066" y="3264044"/>
+                  </a:lnTo>
+                  <a:lnTo>
+                    <a:pt x="5228444" y="3253360"/>
+                  </a:lnTo>
+                  <a:lnTo>
+                    <a:pt x="5156821" y="3242156"/>
+                  </a:lnTo>
+                  <a:lnTo>
+                    <a:pt x="5085199" y="3230406"/>
+                  </a:lnTo>
+                  <a:lnTo>
+                    <a:pt x="5013576" y="3218086"/>
+                  </a:lnTo>
+                  <a:lnTo>
+                    <a:pt x="4941954" y="3205166"/>
+                  </a:lnTo>
+                  <a:lnTo>
+                    <a:pt x="4870331" y="3191618"/>
+                  </a:lnTo>
+                  <a:lnTo>
+                    <a:pt x="4798709" y="3177411"/>
+                  </a:lnTo>
+                  <a:lnTo>
+                    <a:pt x="4727086" y="3162513"/>
+                  </a:lnTo>
+                  <a:lnTo>
+                    <a:pt x="4655464" y="3146891"/>
+                  </a:lnTo>
+                  <a:lnTo>
+                    <a:pt x="4583841" y="3130509"/>
+                  </a:lnTo>
+                  <a:lnTo>
+                    <a:pt x="4512219" y="3113330"/>
+                  </a:lnTo>
+                  <a:lnTo>
+                    <a:pt x="4440596" y="3095315"/>
+                  </a:lnTo>
+                  <a:lnTo>
+                    <a:pt x="4368974" y="3076425"/>
+                  </a:lnTo>
+                  <a:lnTo>
+                    <a:pt x="4297351" y="3056616"/>
+                  </a:lnTo>
+                  <a:lnTo>
+                    <a:pt x="4225729" y="3035844"/>
+                  </a:lnTo>
+                  <a:lnTo>
+                    <a:pt x="4154106" y="3014061"/>
+                  </a:lnTo>
+                  <a:lnTo>
+                    <a:pt x="4082483" y="2991219"/>
+                  </a:lnTo>
+                  <a:lnTo>
+                    <a:pt x="4010861" y="2967266"/>
+                  </a:lnTo>
+                  <a:lnTo>
+                    <a:pt x="3939238" y="2942148"/>
+                  </a:lnTo>
+                  <a:lnTo>
+                    <a:pt x="3867616" y="2915809"/>
+                  </a:lnTo>
+                  <a:lnTo>
+                    <a:pt x="3795993" y="2888189"/>
+                  </a:lnTo>
+                  <a:lnTo>
+                    <a:pt x="3724371" y="2859225"/>
+                  </a:lnTo>
+                  <a:lnTo>
+                    <a:pt x="3652748" y="2828853"/>
+                  </a:lnTo>
+                  <a:lnTo>
+                    <a:pt x="3581126" y="2797004"/>
+                  </a:lnTo>
+                  <a:lnTo>
+                    <a:pt x="3509503" y="2763606"/>
+                  </a:lnTo>
+                  <a:lnTo>
+                    <a:pt x="3437881" y="2728584"/>
+                  </a:lnTo>
+                  <a:lnTo>
+                    <a:pt x="3366258" y="2691858"/>
+                  </a:lnTo>
+                  <a:lnTo>
+                    <a:pt x="3294636" y="2654244"/>
+                  </a:lnTo>
+                  <a:lnTo>
+                    <a:pt x="3223013" y="2652607"/>
+                  </a:lnTo>
+                  <a:lnTo>
+                    <a:pt x="3151391" y="2650967"/>
+                  </a:lnTo>
+                  <a:lnTo>
+                    <a:pt x="3079768" y="2649324"/>
+                  </a:lnTo>
+                  <a:lnTo>
+                    <a:pt x="3008146" y="2647678"/>
+                  </a:lnTo>
+                  <a:lnTo>
+                    <a:pt x="2936523" y="2646028"/>
+                  </a:lnTo>
+                  <a:lnTo>
+                    <a:pt x="2864901" y="2644375"/>
+                  </a:lnTo>
+                  <a:lnTo>
+                    <a:pt x="2793278" y="2642719"/>
+                  </a:lnTo>
+                  <a:lnTo>
+                    <a:pt x="2721655" y="2641060"/>
+                  </a:lnTo>
+                  <a:lnTo>
+                    <a:pt x="2650033" y="2639397"/>
+                  </a:lnTo>
+                  <a:lnTo>
+                    <a:pt x="2578410" y="2637731"/>
+                  </a:lnTo>
+                  <a:lnTo>
+                    <a:pt x="2506788" y="2636062"/>
+                  </a:lnTo>
+                  <a:lnTo>
+                    <a:pt x="2435165" y="2634389"/>
+                  </a:lnTo>
+                  <a:lnTo>
+                    <a:pt x="2363543" y="2632713"/>
+                  </a:lnTo>
+                  <a:lnTo>
+                    <a:pt x="2291920" y="2631034"/>
+                  </a:lnTo>
+                  <a:lnTo>
+                    <a:pt x="2220298" y="2629352"/>
+                  </a:lnTo>
+                  <a:lnTo>
+                    <a:pt x="2148675" y="2627666"/>
+                  </a:lnTo>
+                  <a:lnTo>
+                    <a:pt x="2077053" y="2625977"/>
+                  </a:lnTo>
+                  <a:lnTo>
+                    <a:pt x="2005430" y="2624284"/>
+                  </a:lnTo>
+                  <a:lnTo>
+                    <a:pt x="1933808" y="2622588"/>
+                  </a:lnTo>
+                  <a:lnTo>
+                    <a:pt x="1862185" y="2620889"/>
+                  </a:lnTo>
+                  <a:lnTo>
+                    <a:pt x="1790563" y="2619187"/>
+                  </a:lnTo>
+                  <a:lnTo>
+                    <a:pt x="1718940" y="2617481"/>
+                  </a:lnTo>
+                  <a:lnTo>
+                    <a:pt x="1647318" y="2615772"/>
+                  </a:lnTo>
+                  <a:lnTo>
+                    <a:pt x="1575695" y="2614059"/>
+                  </a:lnTo>
+                  <a:lnTo>
+                    <a:pt x="1504073" y="2612343"/>
+                  </a:lnTo>
+                  <a:lnTo>
+                    <a:pt x="1432450" y="2610624"/>
+                  </a:lnTo>
+                  <a:lnTo>
+                    <a:pt x="1360827" y="2608901"/>
+                  </a:lnTo>
+                  <a:lnTo>
+                    <a:pt x="1289205" y="2607175"/>
+                  </a:lnTo>
+                  <a:lnTo>
+                    <a:pt x="1217582" y="2605445"/>
+                  </a:lnTo>
+                  <a:lnTo>
+                    <a:pt x="1145960" y="2603712"/>
+                  </a:lnTo>
+                  <a:lnTo>
+                    <a:pt x="1074337" y="2601976"/>
+                  </a:lnTo>
+                  <a:lnTo>
+                    <a:pt x="1002715" y="2600236"/>
+                  </a:lnTo>
+                  <a:lnTo>
+                    <a:pt x="931092" y="2598493"/>
+                  </a:lnTo>
+                  <a:lnTo>
+                    <a:pt x="859470" y="2596746"/>
+                  </a:lnTo>
+                  <a:lnTo>
+                    <a:pt x="787847" y="2594996"/>
+                  </a:lnTo>
+                  <a:lnTo>
+                    <a:pt x="716225" y="2593242"/>
+                  </a:lnTo>
+                  <a:lnTo>
+                    <a:pt x="644602" y="2591485"/>
+                  </a:lnTo>
+                  <a:lnTo>
+                    <a:pt x="572980" y="2589725"/>
+                  </a:lnTo>
+                  <a:lnTo>
+                    <a:pt x="501357" y="2587961"/>
+                  </a:lnTo>
+                  <a:lnTo>
+                    <a:pt x="429735" y="2586193"/>
+                  </a:lnTo>
+                  <a:lnTo>
+                    <a:pt x="358112" y="2584422"/>
+                  </a:lnTo>
+                  <a:lnTo>
+                    <a:pt x="286490" y="2582648"/>
+                  </a:lnTo>
+                  <a:lnTo>
+                    <a:pt x="214867" y="2580870"/>
+                  </a:lnTo>
+                  <a:lnTo>
+                    <a:pt x="143245" y="2579088"/>
+                  </a:lnTo>
+                  <a:lnTo>
+                    <a:pt x="71622" y="2577303"/>
+                  </a:lnTo>
+                  <a:lnTo>
+                    <a:pt x="0" y="2575515"/>
                   </a:lnTo>
                   <a:close/>
                 </a:path>
@@ -3573,273 +3539,598 @@
         </p:sp>
         <p:sp>
           <p:nvSpPr>
+            <p:cNvPr id="21" name="pl21"/>
+            <p:cNvSpPr/>
+            <p:nvPr/>
+          </p:nvSpPr>
+          <p:spPr>
+            <a:xfrm>
+              <a:off x="2304179" y="2073503"/>
+              <a:ext cx="5958500" cy="2736530"/>
+            </a:xfrm>
+            <a:custGeom>
+              <a:avLst/>
+              <a:pathLst>
+                <a:path w="5958500" h="2736530">
+                  <a:moveTo>
+                    <a:pt x="0" y="0"/>
+                  </a:moveTo>
+                  <a:lnTo>
+                    <a:pt x="13830" y="32412"/>
+                  </a:lnTo>
+                  <a:lnTo>
+                    <a:pt x="85453" y="192475"/>
+                  </a:lnTo>
+                  <a:lnTo>
+                    <a:pt x="157075" y="345114"/>
+                  </a:lnTo>
+                  <a:lnTo>
+                    <a:pt x="228698" y="490675"/>
+                  </a:lnTo>
+                  <a:lnTo>
+                    <a:pt x="300320" y="629485"/>
+                  </a:lnTo>
+                  <a:lnTo>
+                    <a:pt x="371943" y="761857"/>
+                  </a:lnTo>
+                  <a:lnTo>
+                    <a:pt x="443565" y="888091"/>
+                  </a:lnTo>
+                  <a:lnTo>
+                    <a:pt x="515188" y="1008470"/>
+                  </a:lnTo>
+                  <a:lnTo>
+                    <a:pt x="586810" y="1123266"/>
+                  </a:lnTo>
+                  <a:lnTo>
+                    <a:pt x="658433" y="1232738"/>
+                  </a:lnTo>
+                  <a:lnTo>
+                    <a:pt x="730055" y="1337133"/>
+                  </a:lnTo>
+                  <a:lnTo>
+                    <a:pt x="801678" y="1436687"/>
+                  </a:lnTo>
+                  <a:lnTo>
+                    <a:pt x="873300" y="1531624"/>
+                  </a:lnTo>
+                  <a:lnTo>
+                    <a:pt x="944923" y="1622157"/>
+                  </a:lnTo>
+                  <a:lnTo>
+                    <a:pt x="1016546" y="1708493"/>
+                  </a:lnTo>
+                  <a:lnTo>
+                    <a:pt x="1088168" y="1790824"/>
+                  </a:lnTo>
+                  <a:lnTo>
+                    <a:pt x="1159791" y="1869337"/>
+                  </a:lnTo>
+                  <a:lnTo>
+                    <a:pt x="1231413" y="1944208"/>
+                  </a:lnTo>
+                  <a:lnTo>
+                    <a:pt x="1303036" y="2015608"/>
+                  </a:lnTo>
+                  <a:lnTo>
+                    <a:pt x="1374658" y="2083696"/>
+                  </a:lnTo>
+                  <a:lnTo>
+                    <a:pt x="1446281" y="2148626"/>
+                  </a:lnTo>
+                  <a:lnTo>
+                    <a:pt x="1517903" y="2210545"/>
+                  </a:lnTo>
+                  <a:lnTo>
+                    <a:pt x="1589526" y="2269592"/>
+                  </a:lnTo>
+                  <a:lnTo>
+                    <a:pt x="1661148" y="2325901"/>
+                  </a:lnTo>
+                  <a:lnTo>
+                    <a:pt x="1732771" y="2379599"/>
+                  </a:lnTo>
+                  <a:lnTo>
+                    <a:pt x="1804393" y="2430806"/>
+                  </a:lnTo>
+                  <a:lnTo>
+                    <a:pt x="1876016" y="2479638"/>
+                  </a:lnTo>
+                  <a:lnTo>
+                    <a:pt x="1947638" y="2526206"/>
+                  </a:lnTo>
+                  <a:lnTo>
+                    <a:pt x="2019261" y="2570614"/>
+                  </a:lnTo>
+                  <a:lnTo>
+                    <a:pt x="2090883" y="2612962"/>
+                  </a:lnTo>
+                  <a:lnTo>
+                    <a:pt x="2162506" y="2653347"/>
+                  </a:lnTo>
+                  <a:lnTo>
+                    <a:pt x="2234128" y="2655877"/>
+                  </a:lnTo>
+                  <a:lnTo>
+                    <a:pt x="2305751" y="2657508"/>
+                  </a:lnTo>
+                  <a:lnTo>
+                    <a:pt x="2377374" y="2659135"/>
+                  </a:lnTo>
+                  <a:lnTo>
+                    <a:pt x="2448996" y="2660759"/>
+                  </a:lnTo>
+                  <a:lnTo>
+                    <a:pt x="2520619" y="2662379"/>
+                  </a:lnTo>
+                  <a:lnTo>
+                    <a:pt x="2592241" y="2663997"/>
+                  </a:lnTo>
+                  <a:lnTo>
+                    <a:pt x="2663864" y="2665611"/>
+                  </a:lnTo>
+                  <a:lnTo>
+                    <a:pt x="2735486" y="2667222"/>
+                  </a:lnTo>
+                  <a:lnTo>
+                    <a:pt x="2807109" y="2668830"/>
+                  </a:lnTo>
+                  <a:lnTo>
+                    <a:pt x="2878731" y="2670435"/>
+                  </a:lnTo>
+                  <a:lnTo>
+                    <a:pt x="2950354" y="2672036"/>
+                  </a:lnTo>
+                  <a:lnTo>
+                    <a:pt x="3021976" y="2673635"/>
+                  </a:lnTo>
+                  <a:lnTo>
+                    <a:pt x="3093599" y="2675230"/>
+                  </a:lnTo>
+                  <a:lnTo>
+                    <a:pt x="3165221" y="2676822"/>
+                  </a:lnTo>
+                  <a:lnTo>
+                    <a:pt x="3236844" y="2678411"/>
+                  </a:lnTo>
+                  <a:lnTo>
+                    <a:pt x="3308466" y="2679997"/>
+                  </a:lnTo>
+                  <a:lnTo>
+                    <a:pt x="3380089" y="2681580"/>
+                  </a:lnTo>
+                  <a:lnTo>
+                    <a:pt x="3451711" y="2683159"/>
+                  </a:lnTo>
+                  <a:lnTo>
+                    <a:pt x="3523334" y="2684736"/>
+                  </a:lnTo>
+                  <a:lnTo>
+                    <a:pt x="3594956" y="2686309"/>
+                  </a:lnTo>
+                  <a:lnTo>
+                    <a:pt x="3666579" y="2687880"/>
+                  </a:lnTo>
+                  <a:lnTo>
+                    <a:pt x="3738202" y="2689447"/>
+                  </a:lnTo>
+                  <a:lnTo>
+                    <a:pt x="3809824" y="2691011"/>
+                  </a:lnTo>
+                  <a:lnTo>
+                    <a:pt x="3881447" y="2692572"/>
+                  </a:lnTo>
+                  <a:lnTo>
+                    <a:pt x="3953069" y="2694130"/>
+                  </a:lnTo>
+                  <a:lnTo>
+                    <a:pt x="4024692" y="2695685"/>
+                  </a:lnTo>
+                  <a:lnTo>
+                    <a:pt x="4096314" y="2697237"/>
+                  </a:lnTo>
+                  <a:lnTo>
+                    <a:pt x="4167937" y="2698786"/>
+                  </a:lnTo>
+                  <a:lnTo>
+                    <a:pt x="4239559" y="2700332"/>
+                  </a:lnTo>
+                  <a:lnTo>
+                    <a:pt x="4311182" y="2701874"/>
+                  </a:lnTo>
+                  <a:lnTo>
+                    <a:pt x="4382804" y="2703414"/>
+                  </a:lnTo>
+                  <a:lnTo>
+                    <a:pt x="4454427" y="2704951"/>
+                  </a:lnTo>
+                  <a:lnTo>
+                    <a:pt x="4526049" y="2706484"/>
+                  </a:lnTo>
+                  <a:lnTo>
+                    <a:pt x="4597672" y="2708015"/>
+                  </a:lnTo>
+                  <a:lnTo>
+                    <a:pt x="4669294" y="2709542"/>
+                  </a:lnTo>
+                  <a:lnTo>
+                    <a:pt x="4740917" y="2711067"/>
+                  </a:lnTo>
+                  <a:lnTo>
+                    <a:pt x="4812539" y="2712589"/>
+                  </a:lnTo>
+                  <a:lnTo>
+                    <a:pt x="4884162" y="2714107"/>
+                  </a:lnTo>
+                  <a:lnTo>
+                    <a:pt x="4955784" y="2715623"/>
+                  </a:lnTo>
+                  <a:lnTo>
+                    <a:pt x="5027407" y="2717135"/>
+                  </a:lnTo>
+                  <a:lnTo>
+                    <a:pt x="5099030" y="2718645"/>
+                  </a:lnTo>
+                  <a:lnTo>
+                    <a:pt x="5170652" y="2720152"/>
+                  </a:lnTo>
+                  <a:lnTo>
+                    <a:pt x="5242275" y="2721655"/>
+                  </a:lnTo>
+                  <a:lnTo>
+                    <a:pt x="5313897" y="2723156"/>
+                  </a:lnTo>
+                  <a:lnTo>
+                    <a:pt x="5385520" y="2724654"/>
+                  </a:lnTo>
+                  <a:lnTo>
+                    <a:pt x="5457142" y="2726149"/>
+                  </a:lnTo>
+                  <a:lnTo>
+                    <a:pt x="5528765" y="2727640"/>
+                  </a:lnTo>
+                  <a:lnTo>
+                    <a:pt x="5600387" y="2729129"/>
+                  </a:lnTo>
+                  <a:lnTo>
+                    <a:pt x="5672010" y="2730615"/>
+                  </a:lnTo>
+                  <a:lnTo>
+                    <a:pt x="5743632" y="2732098"/>
+                  </a:lnTo>
+                  <a:lnTo>
+                    <a:pt x="5815255" y="2733579"/>
+                  </a:lnTo>
+                  <a:lnTo>
+                    <a:pt x="5886877" y="2735056"/>
+                  </a:lnTo>
+                  <a:lnTo>
+                    <a:pt x="5958500" y="2736530"/>
+                  </a:lnTo>
+                </a:path>
+              </a:pathLst>
+            </a:custGeom>
+          </p:spPr>
+          <p:txBody>
+            <a:bodyPr/>
+            <a:lstStyle/>
+            <a:p/>
+          </p:txBody>
+        </p:sp>
+        <p:sp>
+          <p:nvSpPr>
             <p:cNvPr id="22" name="pl22"/>
             <p:cNvSpPr/>
             <p:nvPr/>
           </p:nvSpPr>
           <p:spPr>
             <a:xfrm>
-              <a:off x="1783426" y="2073503"/>
-              <a:ext cx="6426132" cy="2736530"/>
+              <a:off x="1172049" y="4649018"/>
+              <a:ext cx="7090630" cy="841204"/>
             </a:xfrm>
             <a:custGeom>
               <a:avLst/>
               <a:pathLst>
-                <a:path w="6426132" h="2736530">
+                <a:path w="7090630" h="841204">
                   <a:moveTo>
+                    <a:pt x="7090630" y="841204"/>
+                  </a:moveTo>
+                  <a:lnTo>
+                    <a:pt x="7019007" y="837944"/>
+                  </a:lnTo>
+                  <a:lnTo>
+                    <a:pt x="6947385" y="834526"/>
+                  </a:lnTo>
+                  <a:lnTo>
+                    <a:pt x="6875762" y="830941"/>
+                  </a:lnTo>
+                  <a:lnTo>
+                    <a:pt x="6804139" y="827183"/>
+                  </a:lnTo>
+                  <a:lnTo>
+                    <a:pt x="6732517" y="823241"/>
+                  </a:lnTo>
+                  <a:lnTo>
+                    <a:pt x="6660894" y="819108"/>
+                  </a:lnTo>
+                  <a:lnTo>
+                    <a:pt x="6589272" y="814774"/>
+                  </a:lnTo>
+                  <a:lnTo>
+                    <a:pt x="6517649" y="810228"/>
+                  </a:lnTo>
+                  <a:lnTo>
+                    <a:pt x="6446027" y="805462"/>
+                  </a:lnTo>
+                  <a:lnTo>
+                    <a:pt x="6374404" y="800464"/>
+                  </a:lnTo>
+                  <a:lnTo>
+                    <a:pt x="6302782" y="795223"/>
+                  </a:lnTo>
+                  <a:lnTo>
+                    <a:pt x="6231159" y="789728"/>
+                  </a:lnTo>
+                  <a:lnTo>
+                    <a:pt x="6159537" y="783964"/>
+                  </a:lnTo>
+                  <a:lnTo>
+                    <a:pt x="6087914" y="777921"/>
+                  </a:lnTo>
+                  <a:lnTo>
+                    <a:pt x="6016292" y="771584"/>
+                  </a:lnTo>
+                  <a:lnTo>
+                    <a:pt x="5944669" y="764938"/>
+                  </a:lnTo>
+                  <a:lnTo>
+                    <a:pt x="5873047" y="757970"/>
+                  </a:lnTo>
+                  <a:lnTo>
+                    <a:pt x="5801424" y="750662"/>
+                  </a:lnTo>
+                  <a:lnTo>
+                    <a:pt x="5729802" y="742999"/>
+                  </a:lnTo>
+                  <a:lnTo>
+                    <a:pt x="5658179" y="734963"/>
+                  </a:lnTo>
+                  <a:lnTo>
+                    <a:pt x="5586557" y="726537"/>
+                  </a:lnTo>
+                  <a:lnTo>
+                    <a:pt x="5514934" y="717701"/>
+                  </a:lnTo>
+                  <a:lnTo>
+                    <a:pt x="5443311" y="708435"/>
+                  </a:lnTo>
+                  <a:lnTo>
+                    <a:pt x="5371689" y="698718"/>
+                  </a:lnTo>
+                  <a:lnTo>
+                    <a:pt x="5300066" y="688529"/>
+                  </a:lnTo>
+                  <a:lnTo>
+                    <a:pt x="5228444" y="677844"/>
+                  </a:lnTo>
+                  <a:lnTo>
+                    <a:pt x="5156821" y="666640"/>
+                  </a:lnTo>
+                  <a:lnTo>
+                    <a:pt x="5085199" y="654891"/>
+                  </a:lnTo>
+                  <a:lnTo>
+                    <a:pt x="5013576" y="642570"/>
+                  </a:lnTo>
+                  <a:lnTo>
+                    <a:pt x="4941954" y="629651"/>
+                  </a:lnTo>
+                  <a:lnTo>
+                    <a:pt x="4870331" y="616102"/>
+                  </a:lnTo>
+                  <a:lnTo>
+                    <a:pt x="4798709" y="601896"/>
+                  </a:lnTo>
+                  <a:lnTo>
+                    <a:pt x="4727086" y="586998"/>
+                  </a:lnTo>
+                  <a:lnTo>
+                    <a:pt x="4655464" y="571375"/>
+                  </a:lnTo>
+                  <a:lnTo>
+                    <a:pt x="4583841" y="554993"/>
+                  </a:lnTo>
+                  <a:lnTo>
+                    <a:pt x="4512219" y="537814"/>
+                  </a:lnTo>
+                  <a:lnTo>
+                    <a:pt x="4440596" y="519800"/>
+                  </a:lnTo>
+                  <a:lnTo>
+                    <a:pt x="4368974" y="500910"/>
+                  </a:lnTo>
+                  <a:lnTo>
+                    <a:pt x="4297351" y="481101"/>
+                  </a:lnTo>
+                  <a:lnTo>
+                    <a:pt x="4225729" y="460328"/>
+                  </a:lnTo>
+                  <a:lnTo>
+                    <a:pt x="4154106" y="438545"/>
+                  </a:lnTo>
+                  <a:lnTo>
+                    <a:pt x="4082483" y="415703"/>
+                  </a:lnTo>
+                  <a:lnTo>
+                    <a:pt x="4010861" y="391751"/>
+                  </a:lnTo>
+                  <a:lnTo>
+                    <a:pt x="3939238" y="366633"/>
+                  </a:lnTo>
+                  <a:lnTo>
+                    <a:pt x="3867616" y="340294"/>
+                  </a:lnTo>
+                  <a:lnTo>
+                    <a:pt x="3795993" y="312673"/>
+                  </a:lnTo>
+                  <a:lnTo>
+                    <a:pt x="3724371" y="283710"/>
+                  </a:lnTo>
+                  <a:lnTo>
+                    <a:pt x="3652748" y="253338"/>
+                  </a:lnTo>
+                  <a:lnTo>
+                    <a:pt x="3581126" y="221489"/>
+                  </a:lnTo>
+                  <a:lnTo>
+                    <a:pt x="3509503" y="188091"/>
+                  </a:lnTo>
+                  <a:lnTo>
+                    <a:pt x="3437881" y="153068"/>
+                  </a:lnTo>
+                  <a:lnTo>
+                    <a:pt x="3366258" y="116343"/>
+                  </a:lnTo>
+                  <a:lnTo>
+                    <a:pt x="3294636" y="78729"/>
+                  </a:lnTo>
+                  <a:lnTo>
+                    <a:pt x="3223013" y="77092"/>
+                  </a:lnTo>
+                  <a:lnTo>
+                    <a:pt x="3151391" y="75452"/>
+                  </a:lnTo>
+                  <a:lnTo>
+                    <a:pt x="3079768" y="73809"/>
+                  </a:lnTo>
+                  <a:lnTo>
+                    <a:pt x="3008146" y="72162"/>
+                  </a:lnTo>
+                  <a:lnTo>
+                    <a:pt x="2936523" y="70513"/>
+                  </a:lnTo>
+                  <a:lnTo>
+                    <a:pt x="2864901" y="68860"/>
+                  </a:lnTo>
+                  <a:lnTo>
+                    <a:pt x="2793278" y="67204"/>
+                  </a:lnTo>
+                  <a:lnTo>
+                    <a:pt x="2721655" y="65544"/>
+                  </a:lnTo>
+                  <a:lnTo>
+                    <a:pt x="2650033" y="63882"/>
+                  </a:lnTo>
+                  <a:lnTo>
+                    <a:pt x="2578410" y="62216"/>
+                  </a:lnTo>
+                  <a:lnTo>
+                    <a:pt x="2506788" y="60546"/>
+                  </a:lnTo>
+                  <a:lnTo>
+                    <a:pt x="2435165" y="58874"/>
+                  </a:lnTo>
+                  <a:lnTo>
+                    <a:pt x="2363543" y="57198"/>
+                  </a:lnTo>
+                  <a:lnTo>
+                    <a:pt x="2291920" y="55519"/>
+                  </a:lnTo>
+                  <a:lnTo>
+                    <a:pt x="2220298" y="53836"/>
+                  </a:lnTo>
+                  <a:lnTo>
+                    <a:pt x="2148675" y="52150"/>
+                  </a:lnTo>
+                  <a:lnTo>
+                    <a:pt x="2077053" y="50461"/>
+                  </a:lnTo>
+                  <a:lnTo>
+                    <a:pt x="2005430" y="48769"/>
+                  </a:lnTo>
+                  <a:lnTo>
+                    <a:pt x="1933808" y="47073"/>
+                  </a:lnTo>
+                  <a:lnTo>
+                    <a:pt x="1862185" y="45374"/>
+                  </a:lnTo>
+                  <a:lnTo>
+                    <a:pt x="1790563" y="43671"/>
+                  </a:lnTo>
+                  <a:lnTo>
+                    <a:pt x="1718940" y="41965"/>
+                  </a:lnTo>
+                  <a:lnTo>
+                    <a:pt x="1647318" y="40256"/>
+                  </a:lnTo>
+                  <a:lnTo>
+                    <a:pt x="1575695" y="38544"/>
+                  </a:lnTo>
+                  <a:lnTo>
+                    <a:pt x="1504073" y="36828"/>
+                  </a:lnTo>
+                  <a:lnTo>
+                    <a:pt x="1432450" y="35108"/>
+                  </a:lnTo>
+                  <a:lnTo>
+                    <a:pt x="1360827" y="33385"/>
+                  </a:lnTo>
+                  <a:lnTo>
+                    <a:pt x="1289205" y="31659"/>
+                  </a:lnTo>
+                  <a:lnTo>
+                    <a:pt x="1217582" y="29930"/>
+                  </a:lnTo>
+                  <a:lnTo>
+                    <a:pt x="1145960" y="28197"/>
+                  </a:lnTo>
+                  <a:lnTo>
+                    <a:pt x="1074337" y="26460"/>
+                  </a:lnTo>
+                  <a:lnTo>
+                    <a:pt x="1002715" y="24721"/>
+                  </a:lnTo>
+                  <a:lnTo>
+                    <a:pt x="931092" y="22977"/>
+                  </a:lnTo>
+                  <a:lnTo>
+                    <a:pt x="859470" y="21231"/>
+                  </a:lnTo>
+                  <a:lnTo>
+                    <a:pt x="787847" y="19480"/>
+                  </a:lnTo>
+                  <a:lnTo>
+                    <a:pt x="716225" y="17727"/>
+                  </a:lnTo>
+                  <a:lnTo>
+                    <a:pt x="644602" y="15970"/>
+                  </a:lnTo>
+                  <a:lnTo>
+                    <a:pt x="572980" y="14209"/>
+                  </a:lnTo>
+                  <a:lnTo>
+                    <a:pt x="501357" y="12445"/>
+                  </a:lnTo>
+                  <a:lnTo>
+                    <a:pt x="429735" y="10678"/>
+                  </a:lnTo>
+                  <a:lnTo>
+                    <a:pt x="358112" y="8907"/>
+                  </a:lnTo>
+                  <a:lnTo>
+                    <a:pt x="286490" y="7132"/>
+                  </a:lnTo>
+                  <a:lnTo>
+                    <a:pt x="214867" y="5354"/>
+                  </a:lnTo>
+                  <a:lnTo>
+                    <a:pt x="143245" y="3573"/>
+                  </a:lnTo>
+                  <a:lnTo>
+                    <a:pt x="71622" y="1788"/>
+                  </a:lnTo>
+                  <a:lnTo>
                     <a:pt x="0" y="0"/>
-                  </a:moveTo>
-                  <a:lnTo>
-                    <a:pt x="14916" y="32412"/>
-                  </a:lnTo>
-                  <a:lnTo>
-                    <a:pt x="92159" y="192475"/>
-                  </a:lnTo>
-                  <a:lnTo>
-                    <a:pt x="169403" y="345114"/>
-                  </a:lnTo>
-                  <a:lnTo>
-                    <a:pt x="246646" y="490675"/>
-                  </a:lnTo>
-                  <a:lnTo>
-                    <a:pt x="323890" y="629485"/>
-                  </a:lnTo>
-                  <a:lnTo>
-                    <a:pt x="401133" y="761857"/>
-                  </a:lnTo>
-                  <a:lnTo>
-                    <a:pt x="478377" y="888091"/>
-                  </a:lnTo>
-                  <a:lnTo>
-                    <a:pt x="555621" y="1008470"/>
-                  </a:lnTo>
-                  <a:lnTo>
-                    <a:pt x="632864" y="1123266"/>
-                  </a:lnTo>
-                  <a:lnTo>
-                    <a:pt x="710108" y="1232738"/>
-                  </a:lnTo>
-                  <a:lnTo>
-                    <a:pt x="787351" y="1337133"/>
-                  </a:lnTo>
-                  <a:lnTo>
-                    <a:pt x="864595" y="1436687"/>
-                  </a:lnTo>
-                  <a:lnTo>
-                    <a:pt x="941838" y="1531624"/>
-                  </a:lnTo>
-                  <a:lnTo>
-                    <a:pt x="1019082" y="1622157"/>
-                  </a:lnTo>
-                  <a:lnTo>
-                    <a:pt x="1096326" y="1708493"/>
-                  </a:lnTo>
-                  <a:lnTo>
-                    <a:pt x="1173569" y="1790824"/>
-                  </a:lnTo>
-                  <a:lnTo>
-                    <a:pt x="1250813" y="1869337"/>
-                  </a:lnTo>
-                  <a:lnTo>
-                    <a:pt x="1328056" y="1944208"/>
-                  </a:lnTo>
-                  <a:lnTo>
-                    <a:pt x="1405300" y="2015608"/>
-                  </a:lnTo>
-                  <a:lnTo>
-                    <a:pt x="1482543" y="2083696"/>
-                  </a:lnTo>
-                  <a:lnTo>
-                    <a:pt x="1559787" y="2148626"/>
-                  </a:lnTo>
-                  <a:lnTo>
-                    <a:pt x="1637031" y="2210545"/>
-                  </a:lnTo>
-                  <a:lnTo>
-                    <a:pt x="1714274" y="2269592"/>
-                  </a:lnTo>
-                  <a:lnTo>
-                    <a:pt x="1791518" y="2325901"/>
-                  </a:lnTo>
-                  <a:lnTo>
-                    <a:pt x="1868761" y="2379599"/>
-                  </a:lnTo>
-                  <a:lnTo>
-                    <a:pt x="1946005" y="2430806"/>
-                  </a:lnTo>
-                  <a:lnTo>
-                    <a:pt x="2023248" y="2479638"/>
-                  </a:lnTo>
-                  <a:lnTo>
-                    <a:pt x="2100492" y="2526206"/>
-                  </a:lnTo>
-                  <a:lnTo>
-                    <a:pt x="2177736" y="2570614"/>
-                  </a:lnTo>
-                  <a:lnTo>
-                    <a:pt x="2254979" y="2612962"/>
-                  </a:lnTo>
-                  <a:lnTo>
-                    <a:pt x="2332223" y="2653347"/>
-                  </a:lnTo>
-                  <a:lnTo>
-                    <a:pt x="2409466" y="2655877"/>
-                  </a:lnTo>
-                  <a:lnTo>
-                    <a:pt x="2486710" y="2657508"/>
-                  </a:lnTo>
-                  <a:lnTo>
-                    <a:pt x="2563953" y="2659135"/>
-                  </a:lnTo>
-                  <a:lnTo>
-                    <a:pt x="2641197" y="2660759"/>
-                  </a:lnTo>
-                  <a:lnTo>
-                    <a:pt x="2718441" y="2662379"/>
-                  </a:lnTo>
-                  <a:lnTo>
-                    <a:pt x="2795684" y="2663997"/>
-                  </a:lnTo>
-                  <a:lnTo>
-                    <a:pt x="2872928" y="2665611"/>
-                  </a:lnTo>
-                  <a:lnTo>
-                    <a:pt x="2950171" y="2667222"/>
-                  </a:lnTo>
-                  <a:lnTo>
-                    <a:pt x="3027415" y="2668830"/>
-                  </a:lnTo>
-                  <a:lnTo>
-                    <a:pt x="3104658" y="2670435"/>
-                  </a:lnTo>
-                  <a:lnTo>
-                    <a:pt x="3181902" y="2672036"/>
-                  </a:lnTo>
-                  <a:lnTo>
-                    <a:pt x="3259146" y="2673635"/>
-                  </a:lnTo>
-                  <a:lnTo>
-                    <a:pt x="3336389" y="2675230"/>
-                  </a:lnTo>
-                  <a:lnTo>
-                    <a:pt x="3413633" y="2676822"/>
-                  </a:lnTo>
-                  <a:lnTo>
-                    <a:pt x="3490876" y="2678411"/>
-                  </a:lnTo>
-                  <a:lnTo>
-                    <a:pt x="3568120" y="2679997"/>
-                  </a:lnTo>
-                  <a:lnTo>
-                    <a:pt x="3645364" y="2681580"/>
-                  </a:lnTo>
-                  <a:lnTo>
-                    <a:pt x="3722607" y="2683159"/>
-                  </a:lnTo>
-                  <a:lnTo>
-                    <a:pt x="3799851" y="2684736"/>
-                  </a:lnTo>
-                  <a:lnTo>
-                    <a:pt x="3877094" y="2686309"/>
-                  </a:lnTo>
-                  <a:lnTo>
-                    <a:pt x="3954338" y="2687880"/>
-                  </a:lnTo>
-                  <a:lnTo>
-                    <a:pt x="4031581" y="2689447"/>
-                  </a:lnTo>
-                  <a:lnTo>
-                    <a:pt x="4108825" y="2691011"/>
-                  </a:lnTo>
-                  <a:lnTo>
-                    <a:pt x="4186069" y="2692572"/>
-                  </a:lnTo>
-                  <a:lnTo>
-                    <a:pt x="4263312" y="2694130"/>
-                  </a:lnTo>
-                  <a:lnTo>
-                    <a:pt x="4340556" y="2695685"/>
-                  </a:lnTo>
-                  <a:lnTo>
-                    <a:pt x="4417799" y="2697237"/>
-                  </a:lnTo>
-                  <a:lnTo>
-                    <a:pt x="4495043" y="2698786"/>
-                  </a:lnTo>
-                  <a:lnTo>
-                    <a:pt x="4572286" y="2700332"/>
-                  </a:lnTo>
-                  <a:lnTo>
-                    <a:pt x="4649530" y="2701874"/>
-                  </a:lnTo>
-                  <a:lnTo>
-                    <a:pt x="4726774" y="2703414"/>
-                  </a:lnTo>
-                  <a:lnTo>
-                    <a:pt x="4804017" y="2704951"/>
-                  </a:lnTo>
-                  <a:lnTo>
-                    <a:pt x="4881261" y="2706484"/>
-                  </a:lnTo>
-                  <a:lnTo>
-                    <a:pt x="4958504" y="2708015"/>
-                  </a:lnTo>
-                  <a:lnTo>
-                    <a:pt x="5035748" y="2709542"/>
-                  </a:lnTo>
-                  <a:lnTo>
-                    <a:pt x="5112991" y="2711067"/>
-                  </a:lnTo>
-                  <a:lnTo>
-                    <a:pt x="5190235" y="2712589"/>
-                  </a:lnTo>
-                  <a:lnTo>
-                    <a:pt x="5267479" y="2714107"/>
-                  </a:lnTo>
-                  <a:lnTo>
-                    <a:pt x="5344722" y="2715623"/>
-                  </a:lnTo>
-                  <a:lnTo>
-                    <a:pt x="5421966" y="2717135"/>
-                  </a:lnTo>
-                  <a:lnTo>
-                    <a:pt x="5499209" y="2718645"/>
-                  </a:lnTo>
-                  <a:lnTo>
-                    <a:pt x="5576453" y="2720152"/>
-                  </a:lnTo>
-                  <a:lnTo>
-                    <a:pt x="5653696" y="2721655"/>
-                  </a:lnTo>
-                  <a:lnTo>
-                    <a:pt x="5730940" y="2723156"/>
-                  </a:lnTo>
-                  <a:lnTo>
-                    <a:pt x="5808184" y="2724654"/>
-                  </a:lnTo>
-                  <a:lnTo>
-                    <a:pt x="5885427" y="2726149"/>
-                  </a:lnTo>
-                  <a:lnTo>
-                    <a:pt x="5962671" y="2727640"/>
-                  </a:lnTo>
-                  <a:lnTo>
-                    <a:pt x="6039914" y="2729129"/>
-                  </a:lnTo>
-                  <a:lnTo>
-                    <a:pt x="6117158" y="2730615"/>
-                  </a:lnTo>
-                  <a:lnTo>
-                    <a:pt x="6194401" y="2732098"/>
-                  </a:lnTo>
-                  <a:lnTo>
-                    <a:pt x="6271645" y="2733579"/>
-                  </a:lnTo>
-                  <a:lnTo>
-                    <a:pt x="6348889" y="2735056"/>
-                  </a:lnTo>
-                  <a:lnTo>
-                    <a:pt x="6426132" y="2736530"/>
                   </a:lnTo>
                 </a:path>
               </a:pathLst>
@@ -3859,619 +4150,312 @@
           </p:nvSpPr>
           <p:spPr>
             <a:xfrm>
-              <a:off x="817517" y="4654910"/>
-              <a:ext cx="7392041" cy="835312"/>
+              <a:off x="1172049" y="2968569"/>
+              <a:ext cx="7090630" cy="2364886"/>
             </a:xfrm>
             <a:custGeom>
               <a:avLst/>
               <a:pathLst>
-                <a:path w="7392041" h="835312">
-                  <a:moveTo>
-                    <a:pt x="7392041" y="835312"/>
-                  </a:moveTo>
-                  <a:lnTo>
-                    <a:pt x="7314797" y="832052"/>
-                  </a:lnTo>
-                  <a:lnTo>
-                    <a:pt x="7237554" y="828634"/>
-                  </a:lnTo>
-                  <a:lnTo>
-                    <a:pt x="7160310" y="825049"/>
-                  </a:lnTo>
-                  <a:lnTo>
-                    <a:pt x="7083066" y="821290"/>
-                  </a:lnTo>
-                  <a:lnTo>
-                    <a:pt x="7005823" y="817349"/>
-                  </a:lnTo>
-                  <a:lnTo>
-                    <a:pt x="6928579" y="813216"/>
-                  </a:lnTo>
-                  <a:lnTo>
-                    <a:pt x="6851336" y="808881"/>
-                  </a:lnTo>
-                  <a:lnTo>
-                    <a:pt x="6774092" y="804336"/>
-                  </a:lnTo>
-                  <a:lnTo>
-                    <a:pt x="6696849" y="799570"/>
-                  </a:lnTo>
-                  <a:lnTo>
-                    <a:pt x="6619605" y="794572"/>
-                  </a:lnTo>
-                  <a:lnTo>
-                    <a:pt x="6542361" y="789331"/>
-                  </a:lnTo>
-                  <a:lnTo>
-                    <a:pt x="6465118" y="783835"/>
-                  </a:lnTo>
-                  <a:lnTo>
-                    <a:pt x="6387874" y="778072"/>
-                  </a:lnTo>
-                  <a:lnTo>
-                    <a:pt x="6310631" y="772029"/>
-                  </a:lnTo>
-                  <a:lnTo>
-                    <a:pt x="6233387" y="765692"/>
-                  </a:lnTo>
-                  <a:lnTo>
-                    <a:pt x="6156144" y="759046"/>
-                  </a:lnTo>
-                  <a:lnTo>
-                    <a:pt x="6078900" y="752077"/>
-                  </a:lnTo>
-                  <a:lnTo>
-                    <a:pt x="6001656" y="744770"/>
-                  </a:lnTo>
-                  <a:lnTo>
-                    <a:pt x="5924413" y="737107"/>
-                  </a:lnTo>
-                  <a:lnTo>
-                    <a:pt x="5847169" y="729071"/>
-                  </a:lnTo>
-                  <a:lnTo>
-                    <a:pt x="5769926" y="720645"/>
-                  </a:lnTo>
-                  <a:lnTo>
-                    <a:pt x="5692682" y="711808"/>
-                  </a:lnTo>
-                  <a:lnTo>
-                    <a:pt x="5615439" y="702543"/>
-                  </a:lnTo>
-                  <a:lnTo>
-                    <a:pt x="5538195" y="692826"/>
-                  </a:lnTo>
-                  <a:lnTo>
-                    <a:pt x="5460951" y="682637"/>
-                  </a:lnTo>
-                  <a:lnTo>
-                    <a:pt x="5383708" y="671952"/>
-                  </a:lnTo>
-                  <a:lnTo>
-                    <a:pt x="5306464" y="660748"/>
-                  </a:lnTo>
-                  <a:lnTo>
-                    <a:pt x="5229221" y="648999"/>
-                  </a:lnTo>
-                  <a:lnTo>
-                    <a:pt x="5151977" y="636678"/>
-                  </a:lnTo>
-                  <a:lnTo>
-                    <a:pt x="5074734" y="623758"/>
-                  </a:lnTo>
-                  <a:lnTo>
-                    <a:pt x="4997490" y="610210"/>
-                  </a:lnTo>
-                  <a:lnTo>
-                    <a:pt x="4920246" y="596003"/>
-                  </a:lnTo>
-                  <a:lnTo>
-                    <a:pt x="4843003" y="581105"/>
-                  </a:lnTo>
-                  <a:lnTo>
-                    <a:pt x="4765759" y="565483"/>
-                  </a:lnTo>
-                  <a:lnTo>
-                    <a:pt x="4688516" y="549101"/>
-                  </a:lnTo>
-                  <a:lnTo>
-                    <a:pt x="4611272" y="531922"/>
-                  </a:lnTo>
-                  <a:lnTo>
-                    <a:pt x="4534029" y="513908"/>
-                  </a:lnTo>
-                  <a:lnTo>
-                    <a:pt x="4456785" y="495017"/>
-                  </a:lnTo>
-                  <a:lnTo>
-                    <a:pt x="4379541" y="475208"/>
-                  </a:lnTo>
-                  <a:lnTo>
-                    <a:pt x="4302298" y="454436"/>
-                  </a:lnTo>
-                  <a:lnTo>
-                    <a:pt x="4225054" y="432653"/>
-                  </a:lnTo>
-                  <a:lnTo>
-                    <a:pt x="4147811" y="409811"/>
-                  </a:lnTo>
-                  <a:lnTo>
-                    <a:pt x="4070567" y="385858"/>
-                  </a:lnTo>
-                  <a:lnTo>
-                    <a:pt x="3993324" y="360741"/>
-                  </a:lnTo>
-                  <a:lnTo>
-                    <a:pt x="3916080" y="334401"/>
-                  </a:lnTo>
-                  <a:lnTo>
-                    <a:pt x="3838836" y="306781"/>
-                  </a:lnTo>
-                  <a:lnTo>
-                    <a:pt x="3761593" y="277818"/>
-                  </a:lnTo>
-                  <a:lnTo>
-                    <a:pt x="3684349" y="247446"/>
-                  </a:lnTo>
-                  <a:lnTo>
-                    <a:pt x="3607106" y="215596"/>
-                  </a:lnTo>
-                  <a:lnTo>
-                    <a:pt x="3529862" y="182198"/>
-                  </a:lnTo>
-                  <a:lnTo>
-                    <a:pt x="3452619" y="147176"/>
-                  </a:lnTo>
-                  <a:lnTo>
-                    <a:pt x="3375375" y="110451"/>
-                  </a:lnTo>
-                  <a:lnTo>
-                    <a:pt x="3298131" y="72836"/>
-                  </a:lnTo>
-                  <a:lnTo>
-                    <a:pt x="3220888" y="71200"/>
-                  </a:lnTo>
-                  <a:lnTo>
-                    <a:pt x="3143644" y="69560"/>
-                  </a:lnTo>
-                  <a:lnTo>
-                    <a:pt x="3066401" y="67917"/>
-                  </a:lnTo>
-                  <a:lnTo>
-                    <a:pt x="2989157" y="66270"/>
-                  </a:lnTo>
-                  <a:lnTo>
-                    <a:pt x="2911914" y="64621"/>
-                  </a:lnTo>
-                  <a:lnTo>
-                    <a:pt x="2834670" y="62968"/>
-                  </a:lnTo>
-                  <a:lnTo>
-                    <a:pt x="2757426" y="61311"/>
-                  </a:lnTo>
-                  <a:lnTo>
-                    <a:pt x="2680183" y="59652"/>
-                  </a:lnTo>
-                  <a:lnTo>
-                    <a:pt x="2602939" y="57989"/>
-                  </a:lnTo>
-                  <a:lnTo>
-                    <a:pt x="2525696" y="56323"/>
-                  </a:lnTo>
-                  <a:lnTo>
-                    <a:pt x="2448452" y="54654"/>
-                  </a:lnTo>
-                  <a:lnTo>
-                    <a:pt x="2371209" y="52981"/>
-                  </a:lnTo>
-                  <a:lnTo>
-                    <a:pt x="2293965" y="51306"/>
-                  </a:lnTo>
-                  <a:lnTo>
-                    <a:pt x="2216721" y="49626"/>
-                  </a:lnTo>
-                  <a:lnTo>
-                    <a:pt x="2139478" y="47944"/>
-                  </a:lnTo>
-                  <a:lnTo>
-                    <a:pt x="2062234" y="46258"/>
-                  </a:lnTo>
-                  <a:lnTo>
-                    <a:pt x="1984991" y="44569"/>
-                  </a:lnTo>
-                  <a:lnTo>
-                    <a:pt x="1907747" y="42877"/>
-                  </a:lnTo>
-                  <a:lnTo>
-                    <a:pt x="1830504" y="41181"/>
-                  </a:lnTo>
-                  <a:lnTo>
-                    <a:pt x="1753260" y="39482"/>
-                  </a:lnTo>
-                  <a:lnTo>
-                    <a:pt x="1676016" y="37779"/>
-                  </a:lnTo>
-                  <a:lnTo>
-                    <a:pt x="1598773" y="36073"/>
-                  </a:lnTo>
-                  <a:lnTo>
-                    <a:pt x="1521529" y="34364"/>
-                  </a:lnTo>
-                  <a:lnTo>
-                    <a:pt x="1444286" y="32651"/>
-                  </a:lnTo>
-                  <a:lnTo>
-                    <a:pt x="1367042" y="30935"/>
-                  </a:lnTo>
-                  <a:lnTo>
-                    <a:pt x="1289799" y="29216"/>
-                  </a:lnTo>
-                  <a:lnTo>
-                    <a:pt x="1212555" y="27493"/>
-                  </a:lnTo>
-                  <a:lnTo>
-                    <a:pt x="1135311" y="25767"/>
-                  </a:lnTo>
-                  <a:lnTo>
-                    <a:pt x="1058068" y="24038"/>
-                  </a:lnTo>
-                  <a:lnTo>
-                    <a:pt x="980824" y="22305"/>
-                  </a:lnTo>
-                  <a:lnTo>
-                    <a:pt x="903581" y="20568"/>
-                  </a:lnTo>
-                  <a:lnTo>
-                    <a:pt x="826337" y="18828"/>
-                  </a:lnTo>
-                  <a:lnTo>
-                    <a:pt x="749094" y="17085"/>
-                  </a:lnTo>
-                  <a:lnTo>
-                    <a:pt x="671850" y="15338"/>
-                  </a:lnTo>
-                  <a:lnTo>
-                    <a:pt x="594606" y="13588"/>
-                  </a:lnTo>
-                  <a:lnTo>
-                    <a:pt x="517363" y="11835"/>
-                  </a:lnTo>
-                  <a:lnTo>
-                    <a:pt x="440119" y="10078"/>
-                  </a:lnTo>
-                  <a:lnTo>
-                    <a:pt x="362876" y="8317"/>
-                  </a:lnTo>
-                  <a:lnTo>
-                    <a:pt x="285632" y="6553"/>
-                  </a:lnTo>
-                  <a:lnTo>
-                    <a:pt x="208389" y="4786"/>
-                  </a:lnTo>
-                  <a:lnTo>
-                    <a:pt x="131145" y="3015"/>
-                  </a:lnTo>
-                  <a:lnTo>
-                    <a:pt x="53901" y="1240"/>
-                  </a:lnTo>
-                  <a:lnTo>
-                    <a:pt x="0" y="0"/>
-                  </a:lnTo>
-                </a:path>
-              </a:pathLst>
-            </a:custGeom>
-          </p:spPr>
-          <p:txBody>
-            <a:bodyPr/>
-            <a:lstStyle/>
-            <a:p/>
-          </p:txBody>
-        </p:sp>
-        <p:sp>
-          <p:nvSpPr>
-            <p:cNvPr id="24" name="pl24"/>
-            <p:cNvSpPr/>
-            <p:nvPr/>
-          </p:nvSpPr>
-          <p:spPr>
-            <a:xfrm>
-              <a:off x="817517" y="3171406"/>
-              <a:ext cx="7392041" cy="2162049"/>
-            </a:xfrm>
-            <a:custGeom>
-              <a:avLst/>
-              <a:pathLst>
-                <a:path w="7392041" h="2162049">
+                <a:path w="7090630" h="2364886">
                   <a:moveTo>
                     <a:pt x="0" y="0"/>
                   </a:moveTo>
                   <a:lnTo>
-                    <a:pt x="53901" y="40968"/>
-                  </a:lnTo>
-                  <a:lnTo>
-                    <a:pt x="131145" y="98243"/>
-                  </a:lnTo>
-                  <a:lnTo>
-                    <a:pt x="208389" y="154120"/>
-                  </a:lnTo>
-                  <a:lnTo>
-                    <a:pt x="285632" y="208632"/>
-                  </a:lnTo>
-                  <a:lnTo>
-                    <a:pt x="362876" y="261812"/>
-                  </a:lnTo>
-                  <a:lnTo>
-                    <a:pt x="440119" y="313693"/>
-                  </a:lnTo>
-                  <a:lnTo>
-                    <a:pt x="517363" y="364307"/>
-                  </a:lnTo>
-                  <a:lnTo>
-                    <a:pt x="594606" y="413684"/>
-                  </a:lnTo>
-                  <a:lnTo>
-                    <a:pt x="671850" y="461856"/>
-                  </a:lnTo>
-                  <a:lnTo>
-                    <a:pt x="749094" y="508851"/>
-                  </a:lnTo>
-                  <a:lnTo>
-                    <a:pt x="826337" y="554698"/>
-                  </a:lnTo>
-                  <a:lnTo>
-                    <a:pt x="903581" y="599425"/>
-                  </a:lnTo>
-                  <a:lnTo>
-                    <a:pt x="980824" y="643060"/>
-                  </a:lnTo>
-                  <a:lnTo>
-                    <a:pt x="1058068" y="685629"/>
-                  </a:lnTo>
-                  <a:lnTo>
-                    <a:pt x="1135311" y="727158"/>
-                  </a:lnTo>
-                  <a:lnTo>
-                    <a:pt x="1212555" y="767673"/>
-                  </a:lnTo>
-                  <a:lnTo>
-                    <a:pt x="1289799" y="807198"/>
-                  </a:lnTo>
-                  <a:lnTo>
-                    <a:pt x="1367042" y="845757"/>
-                  </a:lnTo>
-                  <a:lnTo>
-                    <a:pt x="1444286" y="883375"/>
-                  </a:lnTo>
-                  <a:lnTo>
-                    <a:pt x="1521529" y="920074"/>
-                  </a:lnTo>
-                  <a:lnTo>
-                    <a:pt x="1598773" y="955877"/>
-                  </a:lnTo>
-                  <a:lnTo>
-                    <a:pt x="1676016" y="990805"/>
-                  </a:lnTo>
-                  <a:lnTo>
-                    <a:pt x="1753260" y="1024880"/>
-                  </a:lnTo>
-                  <a:lnTo>
-                    <a:pt x="1830504" y="1058122"/>
-                  </a:lnTo>
-                  <a:lnTo>
-                    <a:pt x="1907747" y="1090553"/>
-                  </a:lnTo>
-                  <a:lnTo>
-                    <a:pt x="1984991" y="1122192"/>
-                  </a:lnTo>
-                  <a:lnTo>
-                    <a:pt x="2062234" y="1153057"/>
-                  </a:lnTo>
-                  <a:lnTo>
-                    <a:pt x="2139478" y="1183169"/>
-                  </a:lnTo>
-                  <a:lnTo>
-                    <a:pt x="2216721" y="1212545"/>
-                  </a:lnTo>
-                  <a:lnTo>
-                    <a:pt x="2293965" y="1241204"/>
-                  </a:lnTo>
-                  <a:lnTo>
-                    <a:pt x="2371209" y="1269163"/>
-                  </a:lnTo>
-                  <a:lnTo>
-                    <a:pt x="2448452" y="1296439"/>
-                  </a:lnTo>
-                  <a:lnTo>
-                    <a:pt x="2525696" y="1323048"/>
-                  </a:lnTo>
-                  <a:lnTo>
-                    <a:pt x="2602939" y="1349008"/>
-                  </a:lnTo>
-                  <a:lnTo>
-                    <a:pt x="2680183" y="1374333"/>
-                  </a:lnTo>
-                  <a:lnTo>
-                    <a:pt x="2757426" y="1399040"/>
-                  </a:lnTo>
-                  <a:lnTo>
-                    <a:pt x="2834670" y="1423144"/>
-                  </a:lnTo>
-                  <a:lnTo>
-                    <a:pt x="2911914" y="1446658"/>
-                  </a:lnTo>
-                  <a:lnTo>
-                    <a:pt x="2989157" y="1469599"/>
-                  </a:lnTo>
-                  <a:lnTo>
-                    <a:pt x="3066401" y="1491979"/>
-                  </a:lnTo>
-                  <a:lnTo>
-                    <a:pt x="3143644" y="1513812"/>
-                  </a:lnTo>
-                  <a:lnTo>
-                    <a:pt x="3220888" y="1535112"/>
-                  </a:lnTo>
-                  <a:lnTo>
-                    <a:pt x="3298131" y="1555892"/>
-                  </a:lnTo>
-                  <a:lnTo>
-                    <a:pt x="3375375" y="1576164"/>
-                  </a:lnTo>
-                  <a:lnTo>
-                    <a:pt x="3452619" y="1595941"/>
-                  </a:lnTo>
-                  <a:lnTo>
-                    <a:pt x="3529862" y="1615235"/>
-                  </a:lnTo>
-                  <a:lnTo>
-                    <a:pt x="3607106" y="1634058"/>
-                  </a:lnTo>
-                  <a:lnTo>
-                    <a:pt x="3684349" y="1652421"/>
-                  </a:lnTo>
-                  <a:lnTo>
-                    <a:pt x="3761593" y="1670335"/>
-                  </a:lnTo>
-                  <a:lnTo>
-                    <a:pt x="3838836" y="1687812"/>
-                  </a:lnTo>
-                  <a:lnTo>
-                    <a:pt x="3916080" y="1704862"/>
-                  </a:lnTo>
-                  <a:lnTo>
-                    <a:pt x="3993324" y="1721496"/>
-                  </a:lnTo>
-                  <a:lnTo>
-                    <a:pt x="4070567" y="1737723"/>
-                  </a:lnTo>
-                  <a:lnTo>
-                    <a:pt x="4147811" y="1753554"/>
-                  </a:lnTo>
-                  <a:lnTo>
-                    <a:pt x="4225054" y="1768998"/>
-                  </a:lnTo>
-                  <a:lnTo>
-                    <a:pt x="4302298" y="1784065"/>
-                  </a:lnTo>
-                  <a:lnTo>
-                    <a:pt x="4379541" y="1798764"/>
-                  </a:lnTo>
-                  <a:lnTo>
-                    <a:pt x="4456785" y="1813104"/>
-                  </a:lnTo>
-                  <a:lnTo>
-                    <a:pt x="4534029" y="1827093"/>
-                  </a:lnTo>
-                  <a:lnTo>
-                    <a:pt x="4611272" y="1840741"/>
-                  </a:lnTo>
-                  <a:lnTo>
-                    <a:pt x="4688516" y="1854056"/>
-                  </a:lnTo>
-                  <a:lnTo>
-                    <a:pt x="4765759" y="1867045"/>
-                  </a:lnTo>
-                  <a:lnTo>
-                    <a:pt x="4843003" y="1879717"/>
-                  </a:lnTo>
-                  <a:lnTo>
-                    <a:pt x="4920246" y="1892080"/>
-                  </a:lnTo>
-                  <a:lnTo>
-                    <a:pt x="4997490" y="1904140"/>
-                  </a:lnTo>
-                  <a:lnTo>
-                    <a:pt x="5074734" y="1915906"/>
-                  </a:lnTo>
-                  <a:lnTo>
-                    <a:pt x="5151977" y="1927385"/>
-                  </a:lnTo>
-                  <a:lnTo>
-                    <a:pt x="5229221" y="1938583"/>
-                  </a:lnTo>
-                  <a:lnTo>
-                    <a:pt x="5306464" y="1949508"/>
-                  </a:lnTo>
-                  <a:lnTo>
-                    <a:pt x="5383708" y="1960166"/>
-                  </a:lnTo>
-                  <a:lnTo>
-                    <a:pt x="5460951" y="1970563"/>
-                  </a:lnTo>
-                  <a:lnTo>
-                    <a:pt x="5538195" y="1980707"/>
-                  </a:lnTo>
-                  <a:lnTo>
-                    <a:pt x="5615439" y="1990602"/>
-                  </a:lnTo>
-                  <a:lnTo>
-                    <a:pt x="5692682" y="2000256"/>
-                  </a:lnTo>
-                  <a:lnTo>
-                    <a:pt x="5769926" y="2009675"/>
-                  </a:lnTo>
-                  <a:lnTo>
-                    <a:pt x="5847169" y="2018863"/>
-                  </a:lnTo>
-                  <a:lnTo>
-                    <a:pt x="5924413" y="2027827"/>
-                  </a:lnTo>
-                  <a:lnTo>
-                    <a:pt x="6001656" y="2036572"/>
-                  </a:lnTo>
-                  <a:lnTo>
-                    <a:pt x="6078900" y="2045103"/>
-                  </a:lnTo>
-                  <a:lnTo>
-                    <a:pt x="6156144" y="2053426"/>
-                  </a:lnTo>
-                  <a:lnTo>
-                    <a:pt x="6233387" y="2061545"/>
-                  </a:lnTo>
-                  <a:lnTo>
-                    <a:pt x="6310631" y="2069466"/>
-                  </a:lnTo>
-                  <a:lnTo>
-                    <a:pt x="6387874" y="2077194"/>
-                  </a:lnTo>
-                  <a:lnTo>
-                    <a:pt x="6465118" y="2084733"/>
-                  </a:lnTo>
-                  <a:lnTo>
-                    <a:pt x="6542361" y="2092088"/>
-                  </a:lnTo>
-                  <a:lnTo>
-                    <a:pt x="6619605" y="2099263"/>
-                  </a:lnTo>
-                  <a:lnTo>
-                    <a:pt x="6696849" y="2106263"/>
-                  </a:lnTo>
-                  <a:lnTo>
-                    <a:pt x="6774092" y="2113092"/>
-                  </a:lnTo>
-                  <a:lnTo>
-                    <a:pt x="6851336" y="2119754"/>
-                  </a:lnTo>
-                  <a:lnTo>
-                    <a:pt x="6928579" y="2126254"/>
-                  </a:lnTo>
-                  <a:lnTo>
-                    <a:pt x="7005823" y="2132594"/>
-                  </a:lnTo>
-                  <a:lnTo>
-                    <a:pt x="7083066" y="2138780"/>
-                  </a:lnTo>
-                  <a:lnTo>
-                    <a:pt x="7160310" y="2144815"/>
-                  </a:lnTo>
-                  <a:lnTo>
-                    <a:pt x="7237554" y="2150702"/>
-                  </a:lnTo>
-                  <a:lnTo>
-                    <a:pt x="7314797" y="2156446"/>
-                  </a:lnTo>
-                  <a:lnTo>
-                    <a:pt x="7392041" y="2162049"/>
+                    <a:pt x="71622" y="63230"/>
+                  </a:lnTo>
+                  <a:lnTo>
+                    <a:pt x="143245" y="124916"/>
+                  </a:lnTo>
+                  <a:lnTo>
+                    <a:pt x="214867" y="185096"/>
+                  </a:lnTo>
+                  <a:lnTo>
+                    <a:pt x="286490" y="243805"/>
+                  </a:lnTo>
+                  <a:lnTo>
+                    <a:pt x="358112" y="301081"/>
+                  </a:lnTo>
+                  <a:lnTo>
+                    <a:pt x="429735" y="356957"/>
+                  </a:lnTo>
+                  <a:lnTo>
+                    <a:pt x="501357" y="411469"/>
+                  </a:lnTo>
+                  <a:lnTo>
+                    <a:pt x="572980" y="464649"/>
+                  </a:lnTo>
+                  <a:lnTo>
+                    <a:pt x="644602" y="516530"/>
+                  </a:lnTo>
+                  <a:lnTo>
+                    <a:pt x="716225" y="567144"/>
+                  </a:lnTo>
+                  <a:lnTo>
+                    <a:pt x="787847" y="616522"/>
+                  </a:lnTo>
+                  <a:lnTo>
+                    <a:pt x="859470" y="664693"/>
+                  </a:lnTo>
+                  <a:lnTo>
+                    <a:pt x="931092" y="711688"/>
+                  </a:lnTo>
+                  <a:lnTo>
+                    <a:pt x="1002715" y="757535"/>
+                  </a:lnTo>
+                  <a:lnTo>
+                    <a:pt x="1074337" y="802262"/>
+                  </a:lnTo>
+                  <a:lnTo>
+                    <a:pt x="1145960" y="845897"/>
+                  </a:lnTo>
+                  <a:lnTo>
+                    <a:pt x="1217582" y="888466"/>
+                  </a:lnTo>
+                  <a:lnTo>
+                    <a:pt x="1289205" y="929995"/>
+                  </a:lnTo>
+                  <a:lnTo>
+                    <a:pt x="1360827" y="970510"/>
+                  </a:lnTo>
+                  <a:lnTo>
+                    <a:pt x="1432450" y="1010035"/>
+                  </a:lnTo>
+                  <a:lnTo>
+                    <a:pt x="1504073" y="1048595"/>
+                  </a:lnTo>
+                  <a:lnTo>
+                    <a:pt x="1575695" y="1086212"/>
+                  </a:lnTo>
+                  <a:lnTo>
+                    <a:pt x="1647318" y="1122911"/>
+                  </a:lnTo>
+                  <a:lnTo>
+                    <a:pt x="1718940" y="1158714"/>
+                  </a:lnTo>
+                  <a:lnTo>
+                    <a:pt x="1790563" y="1193642"/>
+                  </a:lnTo>
+                  <a:lnTo>
+                    <a:pt x="1862185" y="1227717"/>
+                  </a:lnTo>
+                  <a:lnTo>
+                    <a:pt x="1933808" y="1260960"/>
+                  </a:lnTo>
+                  <a:lnTo>
+                    <a:pt x="2005430" y="1293390"/>
+                  </a:lnTo>
+                  <a:lnTo>
+                    <a:pt x="2077053" y="1325029"/>
+                  </a:lnTo>
+                  <a:lnTo>
+                    <a:pt x="2148675" y="1355894"/>
+                  </a:lnTo>
+                  <a:lnTo>
+                    <a:pt x="2220298" y="1386006"/>
+                  </a:lnTo>
+                  <a:lnTo>
+                    <a:pt x="2291920" y="1415383"/>
+                  </a:lnTo>
+                  <a:lnTo>
+                    <a:pt x="2363543" y="1444041"/>
+                  </a:lnTo>
+                  <a:lnTo>
+                    <a:pt x="2435165" y="1472000"/>
+                  </a:lnTo>
+                  <a:lnTo>
+                    <a:pt x="2506788" y="1499276"/>
+                  </a:lnTo>
+                  <a:lnTo>
+                    <a:pt x="2578410" y="1525885"/>
+                  </a:lnTo>
+                  <a:lnTo>
+                    <a:pt x="2650033" y="1551845"/>
+                  </a:lnTo>
+                  <a:lnTo>
+                    <a:pt x="2721655" y="1577171"/>
+                  </a:lnTo>
+                  <a:lnTo>
+                    <a:pt x="2793278" y="1601877"/>
+                  </a:lnTo>
+                  <a:lnTo>
+                    <a:pt x="2864901" y="1625981"/>
+                  </a:lnTo>
+                  <a:lnTo>
+                    <a:pt x="2936523" y="1649496"/>
+                  </a:lnTo>
+                  <a:lnTo>
+                    <a:pt x="3008146" y="1672436"/>
+                  </a:lnTo>
+                  <a:lnTo>
+                    <a:pt x="3079768" y="1694816"/>
+                  </a:lnTo>
+                  <a:lnTo>
+                    <a:pt x="3151391" y="1716649"/>
+                  </a:lnTo>
+                  <a:lnTo>
+                    <a:pt x="3223013" y="1737949"/>
+                  </a:lnTo>
+                  <a:lnTo>
+                    <a:pt x="3294636" y="1758729"/>
+                  </a:lnTo>
+                  <a:lnTo>
+                    <a:pt x="3366258" y="1779001"/>
+                  </a:lnTo>
+                  <a:lnTo>
+                    <a:pt x="3437881" y="1798778"/>
+                  </a:lnTo>
+                  <a:lnTo>
+                    <a:pt x="3509503" y="1818072"/>
+                  </a:lnTo>
+                  <a:lnTo>
+                    <a:pt x="3581126" y="1836895"/>
+                  </a:lnTo>
+                  <a:lnTo>
+                    <a:pt x="3652748" y="1855258"/>
+                  </a:lnTo>
+                  <a:lnTo>
+                    <a:pt x="3724371" y="1873173"/>
+                  </a:lnTo>
+                  <a:lnTo>
+                    <a:pt x="3795993" y="1890649"/>
+                  </a:lnTo>
+                  <a:lnTo>
+                    <a:pt x="3867616" y="1907699"/>
+                  </a:lnTo>
+                  <a:lnTo>
+                    <a:pt x="3939238" y="1924333"/>
+                  </a:lnTo>
+                  <a:lnTo>
+                    <a:pt x="4010861" y="1940560"/>
+                  </a:lnTo>
+                  <a:lnTo>
+                    <a:pt x="4082483" y="1956391"/>
+                  </a:lnTo>
+                  <a:lnTo>
+                    <a:pt x="4154106" y="1971835"/>
+                  </a:lnTo>
+                  <a:lnTo>
+                    <a:pt x="4225729" y="1986902"/>
+                  </a:lnTo>
+                  <a:lnTo>
+                    <a:pt x="4297351" y="2001601"/>
+                  </a:lnTo>
+                  <a:lnTo>
+                    <a:pt x="4368974" y="2015941"/>
+                  </a:lnTo>
+                  <a:lnTo>
+                    <a:pt x="4440596" y="2029930"/>
+                  </a:lnTo>
+                  <a:lnTo>
+                    <a:pt x="4512219" y="2043578"/>
+                  </a:lnTo>
+                  <a:lnTo>
+                    <a:pt x="4583841" y="2056893"/>
+                  </a:lnTo>
+                  <a:lnTo>
+                    <a:pt x="4655464" y="2069882"/>
+                  </a:lnTo>
+                  <a:lnTo>
+                    <a:pt x="4727086" y="2082554"/>
+                  </a:lnTo>
+                  <a:lnTo>
+                    <a:pt x="4798709" y="2094917"/>
+                  </a:lnTo>
+                  <a:lnTo>
+                    <a:pt x="4870331" y="2106977"/>
+                  </a:lnTo>
+                  <a:lnTo>
+                    <a:pt x="4941954" y="2118743"/>
+                  </a:lnTo>
+                  <a:lnTo>
+                    <a:pt x="5013576" y="2130222"/>
+                  </a:lnTo>
+                  <a:lnTo>
+                    <a:pt x="5085199" y="2141420"/>
+                  </a:lnTo>
+                  <a:lnTo>
+                    <a:pt x="5156821" y="2152345"/>
+                  </a:lnTo>
+                  <a:lnTo>
+                    <a:pt x="5228444" y="2163003"/>
+                  </a:lnTo>
+                  <a:lnTo>
+                    <a:pt x="5300066" y="2173400"/>
+                  </a:lnTo>
+                  <a:lnTo>
+                    <a:pt x="5371689" y="2183544"/>
+                  </a:lnTo>
+                  <a:lnTo>
+                    <a:pt x="5443311" y="2193440"/>
+                  </a:lnTo>
+                  <a:lnTo>
+                    <a:pt x="5514934" y="2203094"/>
+                  </a:lnTo>
+                  <a:lnTo>
+                    <a:pt x="5586557" y="2212512"/>
+                  </a:lnTo>
+                  <a:lnTo>
+                    <a:pt x="5658179" y="2221700"/>
+                  </a:lnTo>
+                  <a:lnTo>
+                    <a:pt x="5729802" y="2230664"/>
+                  </a:lnTo>
+                  <a:lnTo>
+                    <a:pt x="5801424" y="2239409"/>
+                  </a:lnTo>
+                  <a:lnTo>
+                    <a:pt x="5873047" y="2247940"/>
+                  </a:lnTo>
+                  <a:lnTo>
+                    <a:pt x="5944669" y="2256263"/>
+                  </a:lnTo>
+                  <a:lnTo>
+                    <a:pt x="6016292" y="2264382"/>
+                  </a:lnTo>
+                  <a:lnTo>
+                    <a:pt x="6087914" y="2272304"/>
+                  </a:lnTo>
+                  <a:lnTo>
+                    <a:pt x="6159537" y="2280031"/>
+                  </a:lnTo>
+                  <a:lnTo>
+                    <a:pt x="6231159" y="2287570"/>
+                  </a:lnTo>
+                  <a:lnTo>
+                    <a:pt x="6302782" y="2294925"/>
+                  </a:lnTo>
+                  <a:lnTo>
+                    <a:pt x="6374404" y="2302100"/>
+                  </a:lnTo>
+                  <a:lnTo>
+                    <a:pt x="6446027" y="2309100"/>
+                  </a:lnTo>
+                  <a:lnTo>
+                    <a:pt x="6517649" y="2315929"/>
+                  </a:lnTo>
+                  <a:lnTo>
+                    <a:pt x="6589272" y="2322591"/>
+                  </a:lnTo>
+                  <a:lnTo>
+                    <a:pt x="6660894" y="2329091"/>
+                  </a:lnTo>
+                  <a:lnTo>
+                    <a:pt x="6732517" y="2335432"/>
+                  </a:lnTo>
+                  <a:lnTo>
+                    <a:pt x="6804139" y="2341617"/>
+                  </a:lnTo>
+                  <a:lnTo>
+                    <a:pt x="6875762" y="2347652"/>
+                  </a:lnTo>
+                  <a:lnTo>
+                    <a:pt x="6947385" y="2353539"/>
+                  </a:lnTo>
+                  <a:lnTo>
+                    <a:pt x="7019007" y="2359283"/>
+                  </a:lnTo>
+                  <a:lnTo>
+                    <a:pt x="7090630" y="2364886"/>
                   </a:lnTo>
                 </a:path>
               </a:pathLst>
@@ -4494,7 +4478,7 @@
         </p:sp>
         <p:sp>
           <p:nvSpPr>
-            <p:cNvPr id="25" name="pl25"/>
+            <p:cNvPr id="24" name="pl24"/>
             <p:cNvSpPr/>
             <p:nvPr/>
           </p:nvSpPr>
@@ -4537,13 +4521,13 @@
         </p:sp>
         <p:sp>
           <p:nvSpPr>
-            <p:cNvPr id="26" name="pl26"/>
+            <p:cNvPr id="25" name="pl25"/>
             <p:cNvSpPr/>
             <p:nvPr/>
           </p:nvSpPr>
           <p:spPr>
             <a:xfrm>
-              <a:off x="4117484" y="2073503"/>
+              <a:off x="4468386" y="2073503"/>
               <a:ext cx="0" cy="3649639"/>
             </a:xfrm>
             <a:custGeom>
@@ -4580,7 +4564,7 @@
         </p:sp>
         <p:sp>
           <p:nvSpPr>
-            <p:cNvPr id="27" name="tx27"/>
+            <p:cNvPr id="26" name="tx26"/>
             <p:cNvSpPr/>
             <p:nvPr/>
           </p:nvSpPr>
@@ -4626,7 +4610,7 @@
         </p:sp>
         <p:sp>
           <p:nvSpPr>
-            <p:cNvPr id="28" name="tx28"/>
+            <p:cNvPr id="27" name="tx27"/>
             <p:cNvSpPr/>
             <p:nvPr/>
           </p:nvSpPr>
@@ -4672,7 +4656,7 @@
         </p:sp>
         <p:sp>
           <p:nvSpPr>
-            <p:cNvPr id="29" name="tx29"/>
+            <p:cNvPr id="28" name="tx28"/>
             <p:cNvSpPr/>
             <p:nvPr/>
           </p:nvSpPr>
@@ -4718,7 +4702,7 @@
         </p:sp>
         <p:sp>
           <p:nvSpPr>
-            <p:cNvPr id="30" name="tx30"/>
+            <p:cNvPr id="29" name="tx29"/>
             <p:cNvSpPr/>
             <p:nvPr/>
           </p:nvSpPr>
@@ -4764,7 +4748,7 @@
         </p:sp>
         <p:sp>
           <p:nvSpPr>
-            <p:cNvPr id="31" name="tx31"/>
+            <p:cNvPr id="30" name="tx30"/>
             <p:cNvSpPr/>
             <p:nvPr/>
           </p:nvSpPr>
@@ -4810,14 +4794,14 @@
         </p:sp>
         <p:sp>
           <p:nvSpPr>
-            <p:cNvPr id="32" name="tx32"/>
+            <p:cNvPr id="31" name="tx31"/>
             <p:cNvSpPr/>
             <p:nvPr/>
           </p:nvSpPr>
           <p:spPr>
             <a:xfrm>
-              <a:off x="2423864" y="5785772"/>
-              <a:ext cx="155356" cy="80101"/>
+              <a:off x="2478335" y="5785772"/>
+              <a:ext cx="161574" cy="80101"/>
             </a:xfrm>
             <a:prstGeom prst="rect">
               <a:avLst/>
@@ -4849,21 +4833,21 @@
                   <a:latin typeface="Helvetica"/>
                   <a:cs typeface="Helvetica"/>
                 </a:rPr>
-                <a:t>0.8</a:t>
+                <a:t>-25</a:t>
               </a:r>
             </a:p>
           </p:txBody>
         </p:sp>
         <p:sp>
           <p:nvSpPr>
-            <p:cNvPr id="33" name="tx33"/>
+            <p:cNvPr id="32" name="tx32"/>
             <p:cNvSpPr/>
             <p:nvPr/>
           </p:nvSpPr>
           <p:spPr>
             <a:xfrm>
-              <a:off x="4196521" y="5785772"/>
-              <a:ext cx="155356" cy="80101"/>
+              <a:off x="4582608" y="5785772"/>
+              <a:ext cx="62179" cy="80101"/>
             </a:xfrm>
             <a:prstGeom prst="rect">
               <a:avLst/>
@@ -4895,21 +4879,21 @@
                   <a:latin typeface="Helvetica"/>
                   <a:cs typeface="Helvetica"/>
                 </a:rPr>
-                <a:t>1.0</a:t>
+                <a:t>0</a:t>
               </a:r>
             </a:p>
           </p:txBody>
         </p:sp>
         <p:sp>
           <p:nvSpPr>
-            <p:cNvPr id="34" name="tx34"/>
+            <p:cNvPr id="33" name="tx33"/>
             <p:cNvSpPr/>
             <p:nvPr/>
           </p:nvSpPr>
           <p:spPr>
             <a:xfrm>
-              <a:off x="5969179" y="5785772"/>
-              <a:ext cx="155356" cy="80101"/>
+              <a:off x="6606094" y="5785772"/>
+              <a:ext cx="124358" cy="80101"/>
             </a:xfrm>
             <a:prstGeom prst="rect">
               <a:avLst/>
@@ -4941,67 +4925,21 @@
                   <a:latin typeface="Helvetica"/>
                   <a:cs typeface="Helvetica"/>
                 </a:rPr>
-                <a:t>1.2</a:t>
+                <a:t>25</a:t>
               </a:r>
             </a:p>
           </p:txBody>
         </p:sp>
         <p:sp>
           <p:nvSpPr>
-            <p:cNvPr id="35" name="tx35"/>
+            <p:cNvPr id="34" name="tx34"/>
             <p:cNvSpPr/>
             <p:nvPr/>
           </p:nvSpPr>
           <p:spPr>
             <a:xfrm>
-              <a:off x="7741836" y="5785772"/>
-              <a:ext cx="155356" cy="80101"/>
-            </a:xfrm>
-            <a:prstGeom prst="rect">
-              <a:avLst/>
-            </a:prstGeom>
-            <a:noFill/>
-          </p:spPr>
-          <p:txBody>
-            <a:bodyPr lIns="0" rIns="0" tIns="0" bIns="0" anchorCtr="1" anchor="ctr" wrap="none"/>
-            <a:lstStyle/>
-            <a:p>
-              <a:pPr algn="l" marL="0" marR="0" indent="0">
-                <a:lnSpc>
-                  <a:spcPts val="880"/>
-                </a:lnSpc>
-                <a:spcBef>
-                  <a:spcPts val="0"/>
-                </a:spcBef>
-                <a:spcAft>
-                  <a:spcPts val="0"/>
-                </a:spcAft>
-              </a:pPr>
-              <a:r>
-                <a:rPr sz="880">
-                  <a:solidFill>
-                    <a:srgbClr val="4D4D4D">
-                      <a:alpha val="100000"/>
-                    </a:srgbClr>
-                  </a:solidFill>
-                  <a:latin typeface="Helvetica"/>
-                  <a:cs typeface="Helvetica"/>
-                </a:rPr>
-                <a:t>1.4</a:t>
-              </a:r>
-            </a:p>
-          </p:txBody>
-        </p:sp>
-        <p:sp>
-          <p:nvSpPr>
-            <p:cNvPr id="36" name="tx36"/>
-            <p:cNvSpPr/>
-            <p:nvPr/>
-          </p:nvSpPr>
-          <p:spPr>
-            <a:xfrm>
-              <a:off x="3879271" y="5925448"/>
-              <a:ext cx="1676186" cy="100218"/>
+              <a:off x="2928340" y="5925448"/>
+              <a:ext cx="3578047" cy="100218"/>
             </a:xfrm>
             <a:prstGeom prst="rect">
               <a:avLst/>
@@ -5033,14 +4971,14 @@
                   <a:latin typeface="Helvetica"/>
                   <a:cs typeface="Helvetica"/>
                 </a:rPr>
-                <a:t>CKD-EPI Cr-Cys / CG ratio</a:t>
+                <a:t>eGFR difference (%): 100 × (CKD-EPI Cr-Cys − CG) / CG</a:t>
               </a:r>
             </a:p>
           </p:txBody>
         </p:sp>
         <p:sp>
           <p:nvSpPr>
-            <p:cNvPr id="37" name="tx37"/>
+            <p:cNvPr id="35" name="tx35"/>
             <p:cNvSpPr/>
             <p:nvPr/>
           </p:nvSpPr>
@@ -5086,14 +5024,14 @@
         </p:sp>
         <p:sp>
           <p:nvSpPr>
-            <p:cNvPr id="38" name="tx38"/>
+            <p:cNvPr id="36" name="tx36"/>
             <p:cNvSpPr/>
             <p:nvPr/>
           </p:nvSpPr>
           <p:spPr>
             <a:xfrm>
               <a:off x="817517" y="1896563"/>
-              <a:ext cx="6833128" cy="82021"/>
+              <a:ext cx="6985375" cy="82021"/>
             </a:xfrm>
             <a:prstGeom prst="rect">
               <a:avLst/>
@@ -5125,14 +5063,14 @@
                   <a:latin typeface="Helvetica"/>
                   <a:cs typeface="Helvetica"/>
                 </a:rPr>
-                <a:t>subHR per 0.1 ratio decline: 1.33 (1.02-1.72), p_Bonf = 0.199 (n = 6)  |  per IQR decline (Δ = 0.30): 2.31 (1.07-5.00)  |  IQR: [0.84, 1.14]</a:t>
+                <a:t>subHR per 10 % decline: 1.33 (1.02-1.72), p_Bonf = 0.199 (n = 6)  |  per IQR decline (Δ = 29.5 %): 2.31 (1.07-5.00)  |  IQR: [-15.6, 13.9] %</a:t>
               </a:r>
             </a:p>
           </p:txBody>
         </p:sp>
         <p:sp>
           <p:nvSpPr>
-            <p:cNvPr id="39" name="tx39"/>
+            <p:cNvPr id="37" name="tx37"/>
             <p:cNvSpPr/>
             <p:nvPr/>
           </p:nvSpPr>

--- a/docs/pptx/auc3/jx-auc3-linsubhr-ratio-throm2.pptx
+++ b/docs/pptx/auc3/jx-auc3-linsubhr-ratio-throm2.pptx
@@ -2265,34 +2265,26 @@
         </p:sp>
         <p:sp>
           <p:nvSpPr>
-            <p:cNvPr id="4" name="pl4"/>
+            <p:cNvPr id="4" name="rc4"/>
             <p:cNvSpPr/>
             <p:nvPr/>
           </p:nvSpPr>
           <p:spPr>
             <a:xfrm>
-              <a:off x="817517" y="5142518"/>
-              <a:ext cx="7799693" cy="0"/>
+              <a:off x="457200" y="1600200"/>
+              <a:ext cx="8229600" cy="4525962"/>
             </a:xfrm>
-            <a:custGeom>
+            <a:prstGeom prst="rect">
               <a:avLst/>
-              <a:pathLst>
-                <a:path w="7799693" h="0">
-                  <a:moveTo>
-                    <a:pt x="0" y="0"/>
-                  </a:moveTo>
-                  <a:lnTo>
-                    <a:pt x="7799693" y="0"/>
-                  </a:lnTo>
-                  <a:lnTo>
-                    <a:pt x="7799693" y="0"/>
-                  </a:lnTo>
-                </a:path>
-              </a:pathLst>
-            </a:custGeom>
-            <a:ln w="6775" cap="flat">
+            </a:prstGeom>
+            <a:solidFill>
+              <a:srgbClr val="FFFFFF">
+                <a:alpha val="100000"/>
+              </a:srgbClr>
+            </a:solidFill>
+            <a:ln w="13550" cap="rnd">
               <a:solidFill>
-                <a:srgbClr val="EBEBEB">
+                <a:srgbClr val="FFFFFF">
                   <a:alpha val="100000"/>
                 </a:srgbClr>
               </a:solidFill>
@@ -2314,21 +2306,21 @@
           </p:nvSpPr>
           <p:spPr>
             <a:xfrm>
-              <a:off x="817517" y="4313054"/>
-              <a:ext cx="7799693" cy="0"/>
+              <a:off x="887106" y="3250627"/>
+              <a:ext cx="7660515" cy="0"/>
             </a:xfrm>
             <a:custGeom>
               <a:avLst/>
               <a:pathLst>
-                <a:path w="7799693" h="0">
+                <a:path w="7660515" h="0">
                   <a:moveTo>
                     <a:pt x="0" y="0"/>
                   </a:moveTo>
                   <a:lnTo>
-                    <a:pt x="7799693" y="0"/>
-                  </a:lnTo>
-                  <a:lnTo>
-                    <a:pt x="7799693" y="0"/>
+                    <a:pt x="7660515" y="0"/>
+                  </a:lnTo>
+                  <a:lnTo>
+                    <a:pt x="7660515" y="0"/>
                   </a:lnTo>
                 </a:path>
               </a:pathLst>
@@ -2357,21 +2349,21 @@
           </p:nvSpPr>
           <p:spPr>
             <a:xfrm>
-              <a:off x="817517" y="3483591"/>
-              <a:ext cx="7799693" cy="0"/>
+              <a:off x="887106" y="2951293"/>
+              <a:ext cx="7660515" cy="0"/>
             </a:xfrm>
             <a:custGeom>
               <a:avLst/>
               <a:pathLst>
-                <a:path w="7799693" h="0">
+                <a:path w="7660515" h="0">
                   <a:moveTo>
                     <a:pt x="0" y="0"/>
                   </a:moveTo>
                   <a:lnTo>
-                    <a:pt x="7799693" y="0"/>
-                  </a:lnTo>
-                  <a:lnTo>
-                    <a:pt x="7799693" y="0"/>
+                    <a:pt x="7660515" y="0"/>
+                  </a:lnTo>
+                  <a:lnTo>
+                    <a:pt x="7660515" y="0"/>
                   </a:lnTo>
                 </a:path>
               </a:pathLst>
@@ -2400,21 +2392,21 @@
           </p:nvSpPr>
           <p:spPr>
             <a:xfrm>
-              <a:off x="817517" y="2654127"/>
-              <a:ext cx="7799693" cy="0"/>
+              <a:off x="887106" y="2651959"/>
+              <a:ext cx="7660515" cy="0"/>
             </a:xfrm>
             <a:custGeom>
               <a:avLst/>
               <a:pathLst>
-                <a:path w="7799693" h="0">
+                <a:path w="7660515" h="0">
                   <a:moveTo>
                     <a:pt x="0" y="0"/>
                   </a:moveTo>
                   <a:lnTo>
-                    <a:pt x="7799693" y="0"/>
-                  </a:lnTo>
-                  <a:lnTo>
-                    <a:pt x="7799693" y="0"/>
+                    <a:pt x="7660515" y="0"/>
+                  </a:lnTo>
+                  <a:lnTo>
+                    <a:pt x="7660515" y="0"/>
                   </a:lnTo>
                 </a:path>
               </a:pathLst>
@@ -2443,21 +2435,21 @@
           </p:nvSpPr>
           <p:spPr>
             <a:xfrm>
-              <a:off x="1531834" y="2073503"/>
-              <a:ext cx="0" cy="3649639"/>
+              <a:off x="887106" y="2352625"/>
+              <a:ext cx="7660515" cy="0"/>
             </a:xfrm>
             <a:custGeom>
               <a:avLst/>
               <a:pathLst>
-                <a:path w="0" h="3649639">
+                <a:path w="7660515" h="0">
                   <a:moveTo>
-                    <a:pt x="0" y="3649639"/>
+                    <a:pt x="0" y="0"/>
                   </a:moveTo>
                   <a:lnTo>
-                    <a:pt x="0" y="0"/>
-                  </a:lnTo>
-                  <a:lnTo>
-                    <a:pt x="0" y="0"/>
+                    <a:pt x="7660515" y="0"/>
+                  </a:lnTo>
+                  <a:lnTo>
+                    <a:pt x="7660515" y="0"/>
                   </a:lnTo>
                 </a:path>
               </a:pathLst>
@@ -2486,15 +2478,15 @@
           </p:nvSpPr>
           <p:spPr>
             <a:xfrm>
-              <a:off x="3586410" y="2073503"/>
-              <a:ext cx="0" cy="3649639"/>
+              <a:off x="1588677" y="2143092"/>
+              <a:ext cx="0" cy="1317069"/>
             </a:xfrm>
             <a:custGeom>
               <a:avLst/>
               <a:pathLst>
-                <a:path w="0" h="3649639">
+                <a:path w="0" h="1317069">
                   <a:moveTo>
-                    <a:pt x="0" y="3649639"/>
+                    <a:pt x="0" y="1317069"/>
                   </a:moveTo>
                   <a:lnTo>
                     <a:pt x="0" y="0"/>
@@ -2529,15 +2521,15 @@
           </p:nvSpPr>
           <p:spPr>
             <a:xfrm>
-              <a:off x="5640985" y="2073503"/>
-              <a:ext cx="0" cy="3649639"/>
+              <a:off x="3606590" y="2143092"/>
+              <a:ext cx="0" cy="1317069"/>
             </a:xfrm>
             <a:custGeom>
               <a:avLst/>
               <a:pathLst>
-                <a:path w="0" h="3649639">
+                <a:path w="0" h="1317069">
                   <a:moveTo>
-                    <a:pt x="0" y="3649639"/>
+                    <a:pt x="0" y="1317069"/>
                   </a:moveTo>
                   <a:lnTo>
                     <a:pt x="0" y="0"/>
@@ -2572,15 +2564,15 @@
           </p:nvSpPr>
           <p:spPr>
             <a:xfrm>
-              <a:off x="7695561" y="2073503"/>
-              <a:ext cx="0" cy="3649639"/>
+              <a:off x="5624504" y="2143092"/>
+              <a:ext cx="0" cy="1317069"/>
             </a:xfrm>
             <a:custGeom>
               <a:avLst/>
               <a:pathLst>
-                <a:path w="0" h="3649639">
+                <a:path w="0" h="1317069">
                   <a:moveTo>
-                    <a:pt x="0" y="3649639"/>
+                    <a:pt x="0" y="1317069"/>
                   </a:moveTo>
                   <a:lnTo>
                     <a:pt x="0" y="0"/>
@@ -2615,26 +2607,26 @@
           </p:nvSpPr>
           <p:spPr>
             <a:xfrm>
-              <a:off x="817517" y="5557249"/>
-              <a:ext cx="7799693" cy="0"/>
+              <a:off x="7642418" y="2143092"/>
+              <a:ext cx="0" cy="1317069"/>
             </a:xfrm>
             <a:custGeom>
               <a:avLst/>
               <a:pathLst>
-                <a:path w="7799693" h="0">
+                <a:path w="0" h="1317069">
                   <a:moveTo>
+                    <a:pt x="0" y="1317069"/>
+                  </a:moveTo>
+                  <a:lnTo>
                     <a:pt x="0" y="0"/>
-                  </a:moveTo>
-                  <a:lnTo>
-                    <a:pt x="7799693" y="0"/>
-                  </a:lnTo>
-                  <a:lnTo>
-                    <a:pt x="7799693" y="0"/>
+                  </a:lnTo>
+                  <a:lnTo>
+                    <a:pt x="0" y="0"/>
                   </a:lnTo>
                 </a:path>
               </a:pathLst>
             </a:custGeom>
-            <a:ln w="13550" cap="flat">
+            <a:ln w="6775" cap="flat">
               <a:solidFill>
                 <a:srgbClr val="EBEBEB">
                   <a:alpha val="100000"/>
@@ -2658,21 +2650,21 @@
           </p:nvSpPr>
           <p:spPr>
             <a:xfrm>
-              <a:off x="817517" y="4727786"/>
-              <a:ext cx="7799693" cy="0"/>
+              <a:off x="887106" y="3400294"/>
+              <a:ext cx="7660515" cy="0"/>
             </a:xfrm>
             <a:custGeom>
               <a:avLst/>
               <a:pathLst>
-                <a:path w="7799693" h="0">
+                <a:path w="7660515" h="0">
                   <a:moveTo>
                     <a:pt x="0" y="0"/>
                   </a:moveTo>
                   <a:lnTo>
-                    <a:pt x="7799693" y="0"/>
-                  </a:lnTo>
-                  <a:lnTo>
-                    <a:pt x="7799693" y="0"/>
+                    <a:pt x="7660515" y="0"/>
+                  </a:lnTo>
+                  <a:lnTo>
+                    <a:pt x="7660515" y="0"/>
                   </a:lnTo>
                 </a:path>
               </a:pathLst>
@@ -2701,21 +2693,21 @@
           </p:nvSpPr>
           <p:spPr>
             <a:xfrm>
-              <a:off x="817517" y="3898322"/>
-              <a:ext cx="7799693" cy="0"/>
+              <a:off x="887106" y="3100960"/>
+              <a:ext cx="7660515" cy="0"/>
             </a:xfrm>
             <a:custGeom>
               <a:avLst/>
               <a:pathLst>
-                <a:path w="7799693" h="0">
+                <a:path w="7660515" h="0">
                   <a:moveTo>
                     <a:pt x="0" y="0"/>
                   </a:moveTo>
                   <a:lnTo>
-                    <a:pt x="7799693" y="0"/>
-                  </a:lnTo>
-                  <a:lnTo>
-                    <a:pt x="7799693" y="0"/>
+                    <a:pt x="7660515" y="0"/>
+                  </a:lnTo>
+                  <a:lnTo>
+                    <a:pt x="7660515" y="0"/>
                   </a:lnTo>
                 </a:path>
               </a:pathLst>
@@ -2744,21 +2736,21 @@
           </p:nvSpPr>
           <p:spPr>
             <a:xfrm>
-              <a:off x="817517" y="3068859"/>
-              <a:ext cx="7799693" cy="0"/>
+              <a:off x="887106" y="2801626"/>
+              <a:ext cx="7660515" cy="0"/>
             </a:xfrm>
             <a:custGeom>
               <a:avLst/>
               <a:pathLst>
-                <a:path w="7799693" h="0">
+                <a:path w="7660515" h="0">
                   <a:moveTo>
                     <a:pt x="0" y="0"/>
                   </a:moveTo>
                   <a:lnTo>
-                    <a:pt x="7799693" y="0"/>
-                  </a:lnTo>
-                  <a:lnTo>
-                    <a:pt x="7799693" y="0"/>
+                    <a:pt x="7660515" y="0"/>
+                  </a:lnTo>
+                  <a:lnTo>
+                    <a:pt x="7660515" y="0"/>
                   </a:lnTo>
                 </a:path>
               </a:pathLst>
@@ -2787,21 +2779,21 @@
           </p:nvSpPr>
           <p:spPr>
             <a:xfrm>
-              <a:off x="817517" y="2239395"/>
-              <a:ext cx="7799693" cy="0"/>
+              <a:off x="887106" y="2502292"/>
+              <a:ext cx="7660515" cy="0"/>
             </a:xfrm>
             <a:custGeom>
               <a:avLst/>
               <a:pathLst>
-                <a:path w="7799693" h="0">
+                <a:path w="7660515" h="0">
                   <a:moveTo>
                     <a:pt x="0" y="0"/>
                   </a:moveTo>
                   <a:lnTo>
-                    <a:pt x="7799693" y="0"/>
-                  </a:lnTo>
-                  <a:lnTo>
-                    <a:pt x="7799693" y="0"/>
+                    <a:pt x="7660515" y="0"/>
+                  </a:lnTo>
+                  <a:lnTo>
+                    <a:pt x="7660515" y="0"/>
                   </a:lnTo>
                 </a:path>
               </a:pathLst>
@@ -2830,21 +2822,21 @@
           </p:nvSpPr>
           <p:spPr>
             <a:xfrm>
-              <a:off x="2559122" y="2073503"/>
-              <a:ext cx="0" cy="3649639"/>
+              <a:off x="887106" y="2202958"/>
+              <a:ext cx="7660515" cy="0"/>
             </a:xfrm>
             <a:custGeom>
               <a:avLst/>
               <a:pathLst>
-                <a:path w="0" h="3649639">
+                <a:path w="7660515" h="0">
                   <a:moveTo>
-                    <a:pt x="0" y="3649639"/>
+                    <a:pt x="0" y="0"/>
                   </a:moveTo>
                   <a:lnTo>
-                    <a:pt x="0" y="0"/>
-                  </a:lnTo>
-                  <a:lnTo>
-                    <a:pt x="0" y="0"/>
+                    <a:pt x="7660515" y="0"/>
+                  </a:lnTo>
+                  <a:lnTo>
+                    <a:pt x="7660515" y="0"/>
                   </a:lnTo>
                 </a:path>
               </a:pathLst>
@@ -2873,15 +2865,15 @@
           </p:nvSpPr>
           <p:spPr>
             <a:xfrm>
-              <a:off x="4613698" y="2073503"/>
-              <a:ext cx="0" cy="3649639"/>
+              <a:off x="2597634" y="2143092"/>
+              <a:ext cx="0" cy="1317069"/>
             </a:xfrm>
             <a:custGeom>
               <a:avLst/>
               <a:pathLst>
-                <a:path w="0" h="3649639">
+                <a:path w="0" h="1317069">
                   <a:moveTo>
-                    <a:pt x="0" y="3649639"/>
+                    <a:pt x="0" y="1317069"/>
                   </a:moveTo>
                   <a:lnTo>
                     <a:pt x="0" y="0"/>
@@ -2916,15 +2908,15 @@
           </p:nvSpPr>
           <p:spPr>
             <a:xfrm>
-              <a:off x="6668273" y="2073503"/>
-              <a:ext cx="0" cy="3649639"/>
+              <a:off x="4615547" y="2143092"/>
+              <a:ext cx="0" cy="1317069"/>
             </a:xfrm>
             <a:custGeom>
               <a:avLst/>
               <a:pathLst>
-                <a:path w="0" h="3649639">
+                <a:path w="0" h="1317069">
                   <a:moveTo>
-                    <a:pt x="0" y="3649639"/>
+                    <a:pt x="0" y="1317069"/>
                   </a:moveTo>
                   <a:lnTo>
                     <a:pt x="0" y="0"/>
@@ -2953,573 +2945,616 @@
         </p:sp>
         <p:sp>
           <p:nvSpPr>
-            <p:cNvPr id="20" name="pg20"/>
+            <p:cNvPr id="20" name="pl20"/>
             <p:cNvSpPr/>
             <p:nvPr/>
           </p:nvSpPr>
           <p:spPr>
             <a:xfrm>
-              <a:off x="1172049" y="2073503"/>
-              <a:ext cx="7090630" cy="3416719"/>
+              <a:off x="6633461" y="2143092"/>
+              <a:ext cx="0" cy="1317069"/>
             </a:xfrm>
             <a:custGeom>
               <a:avLst/>
               <a:pathLst>
-                <a:path w="7090630" h="3416719">
+                <a:path w="0" h="1317069">
                   <a:moveTo>
-                    <a:pt x="1132129" y="0"/>
+                    <a:pt x="0" y="1317069"/>
                   </a:moveTo>
                   <a:lnTo>
-                    <a:pt x="1145960" y="32412"/>
-                  </a:lnTo>
-                  <a:lnTo>
-                    <a:pt x="1217582" y="192475"/>
-                  </a:lnTo>
-                  <a:lnTo>
-                    <a:pt x="1289205" y="345114"/>
-                  </a:lnTo>
-                  <a:lnTo>
-                    <a:pt x="1360827" y="490675"/>
-                  </a:lnTo>
-                  <a:lnTo>
-                    <a:pt x="1432450" y="629485"/>
-                  </a:lnTo>
-                  <a:lnTo>
-                    <a:pt x="1504073" y="761857"/>
-                  </a:lnTo>
-                  <a:lnTo>
-                    <a:pt x="1575695" y="888091"/>
-                  </a:lnTo>
-                  <a:lnTo>
-                    <a:pt x="1647318" y="1008470"/>
-                  </a:lnTo>
-                  <a:lnTo>
-                    <a:pt x="1718940" y="1123266"/>
-                  </a:lnTo>
-                  <a:lnTo>
-                    <a:pt x="1790563" y="1232738"/>
-                  </a:lnTo>
-                  <a:lnTo>
-                    <a:pt x="1862185" y="1337133"/>
-                  </a:lnTo>
-                  <a:lnTo>
-                    <a:pt x="1933808" y="1436687"/>
-                  </a:lnTo>
-                  <a:lnTo>
-                    <a:pt x="2005430" y="1531624"/>
-                  </a:lnTo>
-                  <a:lnTo>
-                    <a:pt x="2077053" y="1622157"/>
-                  </a:lnTo>
-                  <a:lnTo>
-                    <a:pt x="2148675" y="1708493"/>
-                  </a:lnTo>
-                  <a:lnTo>
-                    <a:pt x="2220298" y="1790824"/>
-                  </a:lnTo>
-                  <a:lnTo>
-                    <a:pt x="2291920" y="1869337"/>
-                  </a:lnTo>
-                  <a:lnTo>
-                    <a:pt x="2363543" y="1944208"/>
-                  </a:lnTo>
-                  <a:lnTo>
-                    <a:pt x="2435165" y="2015608"/>
-                  </a:lnTo>
-                  <a:lnTo>
-                    <a:pt x="2506788" y="2083696"/>
-                  </a:lnTo>
-                  <a:lnTo>
-                    <a:pt x="2578410" y="2148626"/>
-                  </a:lnTo>
-                  <a:lnTo>
-                    <a:pt x="2650033" y="2210545"/>
-                  </a:lnTo>
-                  <a:lnTo>
-                    <a:pt x="2721655" y="2269592"/>
-                  </a:lnTo>
-                  <a:lnTo>
-                    <a:pt x="2793278" y="2325901"/>
-                  </a:lnTo>
-                  <a:lnTo>
-                    <a:pt x="2864901" y="2379599"/>
-                  </a:lnTo>
-                  <a:lnTo>
-                    <a:pt x="2936523" y="2430806"/>
-                  </a:lnTo>
-                  <a:lnTo>
-                    <a:pt x="3008146" y="2479638"/>
-                  </a:lnTo>
-                  <a:lnTo>
-                    <a:pt x="3079768" y="2526206"/>
-                  </a:lnTo>
-                  <a:lnTo>
-                    <a:pt x="3151391" y="2570614"/>
-                  </a:lnTo>
-                  <a:lnTo>
-                    <a:pt x="3223013" y="2612962"/>
-                  </a:lnTo>
-                  <a:lnTo>
-                    <a:pt x="3294636" y="2653347"/>
-                  </a:lnTo>
-                  <a:lnTo>
-                    <a:pt x="3366258" y="2655877"/>
-                  </a:lnTo>
-                  <a:lnTo>
-                    <a:pt x="3437881" y="2657508"/>
-                  </a:lnTo>
-                  <a:lnTo>
-                    <a:pt x="3509503" y="2659135"/>
-                  </a:lnTo>
-                  <a:lnTo>
-                    <a:pt x="3581126" y="2660759"/>
-                  </a:lnTo>
-                  <a:lnTo>
-                    <a:pt x="3652748" y="2662379"/>
-                  </a:lnTo>
-                  <a:lnTo>
-                    <a:pt x="3724371" y="2663997"/>
-                  </a:lnTo>
-                  <a:lnTo>
-                    <a:pt x="3795993" y="2665611"/>
-                  </a:lnTo>
-                  <a:lnTo>
-                    <a:pt x="3867616" y="2667222"/>
-                  </a:lnTo>
-                  <a:lnTo>
-                    <a:pt x="3939238" y="2668830"/>
-                  </a:lnTo>
-                  <a:lnTo>
-                    <a:pt x="4010861" y="2670435"/>
-                  </a:lnTo>
-                  <a:lnTo>
-                    <a:pt x="4082483" y="2672036"/>
-                  </a:lnTo>
-                  <a:lnTo>
-                    <a:pt x="4154106" y="2673635"/>
-                  </a:lnTo>
-                  <a:lnTo>
-                    <a:pt x="4225729" y="2675230"/>
-                  </a:lnTo>
-                  <a:lnTo>
-                    <a:pt x="4297351" y="2676822"/>
-                  </a:lnTo>
-                  <a:lnTo>
-                    <a:pt x="4368974" y="2678411"/>
-                  </a:lnTo>
-                  <a:lnTo>
-                    <a:pt x="4440596" y="2679997"/>
-                  </a:lnTo>
-                  <a:lnTo>
-                    <a:pt x="4512219" y="2681580"/>
-                  </a:lnTo>
-                  <a:lnTo>
-                    <a:pt x="4583841" y="2683159"/>
-                  </a:lnTo>
-                  <a:lnTo>
-                    <a:pt x="4655464" y="2684736"/>
-                  </a:lnTo>
-                  <a:lnTo>
-                    <a:pt x="4727086" y="2686309"/>
-                  </a:lnTo>
-                  <a:lnTo>
-                    <a:pt x="4798709" y="2687880"/>
-                  </a:lnTo>
-                  <a:lnTo>
-                    <a:pt x="4870331" y="2689447"/>
-                  </a:lnTo>
-                  <a:lnTo>
-                    <a:pt x="4941954" y="2691011"/>
-                  </a:lnTo>
-                  <a:lnTo>
-                    <a:pt x="5013576" y="2692572"/>
-                  </a:lnTo>
-                  <a:lnTo>
-                    <a:pt x="5085199" y="2694130"/>
-                  </a:lnTo>
-                  <a:lnTo>
-                    <a:pt x="5156821" y="2695685"/>
-                  </a:lnTo>
-                  <a:lnTo>
-                    <a:pt x="5228444" y="2697237"/>
-                  </a:lnTo>
-                  <a:lnTo>
-                    <a:pt x="5300066" y="2698786"/>
-                  </a:lnTo>
-                  <a:lnTo>
-                    <a:pt x="5371689" y="2700332"/>
-                  </a:lnTo>
-                  <a:lnTo>
-                    <a:pt x="5443311" y="2701874"/>
-                  </a:lnTo>
-                  <a:lnTo>
-                    <a:pt x="5514934" y="2703414"/>
-                  </a:lnTo>
-                  <a:lnTo>
-                    <a:pt x="5586557" y="2704951"/>
-                  </a:lnTo>
-                  <a:lnTo>
-                    <a:pt x="5658179" y="2706484"/>
-                  </a:lnTo>
-                  <a:lnTo>
-                    <a:pt x="5729802" y="2708015"/>
-                  </a:lnTo>
-                  <a:lnTo>
-                    <a:pt x="5801424" y="2709542"/>
-                  </a:lnTo>
-                  <a:lnTo>
-                    <a:pt x="5873047" y="2711067"/>
-                  </a:lnTo>
-                  <a:lnTo>
-                    <a:pt x="5944669" y="2712589"/>
-                  </a:lnTo>
-                  <a:lnTo>
-                    <a:pt x="6016292" y="2714107"/>
-                  </a:lnTo>
-                  <a:lnTo>
-                    <a:pt x="6087914" y="2715623"/>
-                  </a:lnTo>
-                  <a:lnTo>
-                    <a:pt x="6159537" y="2717135"/>
-                  </a:lnTo>
-                  <a:lnTo>
-                    <a:pt x="6231159" y="2718645"/>
-                  </a:lnTo>
-                  <a:lnTo>
-                    <a:pt x="6302782" y="2720152"/>
-                  </a:lnTo>
-                  <a:lnTo>
-                    <a:pt x="6374404" y="2721655"/>
-                  </a:lnTo>
-                  <a:lnTo>
-                    <a:pt x="6446027" y="2723156"/>
-                  </a:lnTo>
-                  <a:lnTo>
-                    <a:pt x="6517649" y="2724654"/>
-                  </a:lnTo>
-                  <a:lnTo>
-                    <a:pt x="6589272" y="2726149"/>
-                  </a:lnTo>
-                  <a:lnTo>
-                    <a:pt x="6660894" y="2727640"/>
-                  </a:lnTo>
-                  <a:lnTo>
-                    <a:pt x="6732517" y="2729129"/>
-                  </a:lnTo>
-                  <a:lnTo>
-                    <a:pt x="6804139" y="2730615"/>
-                  </a:lnTo>
-                  <a:lnTo>
-                    <a:pt x="6875762" y="2732098"/>
-                  </a:lnTo>
-                  <a:lnTo>
-                    <a:pt x="6947385" y="2733579"/>
-                  </a:lnTo>
-                  <a:lnTo>
-                    <a:pt x="7019007" y="2735056"/>
-                  </a:lnTo>
-                  <a:lnTo>
-                    <a:pt x="7090630" y="2736530"/>
-                  </a:lnTo>
-                  <a:lnTo>
-                    <a:pt x="7090630" y="3416719"/>
-                  </a:lnTo>
-                  <a:lnTo>
-                    <a:pt x="7019007" y="3413460"/>
-                  </a:lnTo>
-                  <a:lnTo>
-                    <a:pt x="6947385" y="3410041"/>
-                  </a:lnTo>
-                  <a:lnTo>
-                    <a:pt x="6875762" y="3406457"/>
-                  </a:lnTo>
-                  <a:lnTo>
-                    <a:pt x="6804139" y="3402698"/>
-                  </a:lnTo>
-                  <a:lnTo>
-                    <a:pt x="6732517" y="3398757"/>
-                  </a:lnTo>
-                  <a:lnTo>
-                    <a:pt x="6660894" y="3394623"/>
-                  </a:lnTo>
-                  <a:lnTo>
-                    <a:pt x="6589272" y="3390289"/>
-                  </a:lnTo>
-                  <a:lnTo>
-                    <a:pt x="6517649" y="3385744"/>
-                  </a:lnTo>
-                  <a:lnTo>
-                    <a:pt x="6446027" y="3380978"/>
-                  </a:lnTo>
-                  <a:lnTo>
-                    <a:pt x="6374404" y="3375980"/>
-                  </a:lnTo>
-                  <a:lnTo>
-                    <a:pt x="6302782" y="3370739"/>
-                  </a:lnTo>
-                  <a:lnTo>
-                    <a:pt x="6231159" y="3365243"/>
-                  </a:lnTo>
-                  <a:lnTo>
-                    <a:pt x="6159537" y="3359480"/>
-                  </a:lnTo>
-                  <a:lnTo>
-                    <a:pt x="6087914" y="3353437"/>
-                  </a:lnTo>
-                  <a:lnTo>
-                    <a:pt x="6016292" y="3347099"/>
-                  </a:lnTo>
-                  <a:lnTo>
-                    <a:pt x="5944669" y="3340454"/>
-                  </a:lnTo>
-                  <a:lnTo>
-                    <a:pt x="5873047" y="3333485"/>
-                  </a:lnTo>
-                  <a:lnTo>
-                    <a:pt x="5801424" y="3326177"/>
-                  </a:lnTo>
-                  <a:lnTo>
-                    <a:pt x="5729802" y="3318515"/>
-                  </a:lnTo>
-                  <a:lnTo>
-                    <a:pt x="5658179" y="3310479"/>
-                  </a:lnTo>
-                  <a:lnTo>
-                    <a:pt x="5586557" y="3302052"/>
-                  </a:lnTo>
-                  <a:lnTo>
-                    <a:pt x="5514934" y="3293216"/>
-                  </a:lnTo>
-                  <a:lnTo>
-                    <a:pt x="5443311" y="3283950"/>
-                  </a:lnTo>
-                  <a:lnTo>
-                    <a:pt x="5371689" y="3274234"/>
-                  </a:lnTo>
-                  <a:lnTo>
-                    <a:pt x="5300066" y="3264044"/>
-                  </a:lnTo>
-                  <a:lnTo>
-                    <a:pt x="5228444" y="3253360"/>
-                  </a:lnTo>
-                  <a:lnTo>
-                    <a:pt x="5156821" y="3242156"/>
-                  </a:lnTo>
-                  <a:lnTo>
-                    <a:pt x="5085199" y="3230406"/>
-                  </a:lnTo>
-                  <a:lnTo>
-                    <a:pt x="5013576" y="3218086"/>
-                  </a:lnTo>
-                  <a:lnTo>
-                    <a:pt x="4941954" y="3205166"/>
-                  </a:lnTo>
-                  <a:lnTo>
-                    <a:pt x="4870331" y="3191618"/>
-                  </a:lnTo>
-                  <a:lnTo>
-                    <a:pt x="4798709" y="3177411"/>
-                  </a:lnTo>
-                  <a:lnTo>
-                    <a:pt x="4727086" y="3162513"/>
-                  </a:lnTo>
-                  <a:lnTo>
-                    <a:pt x="4655464" y="3146891"/>
-                  </a:lnTo>
-                  <a:lnTo>
-                    <a:pt x="4583841" y="3130509"/>
-                  </a:lnTo>
-                  <a:lnTo>
-                    <a:pt x="4512219" y="3113330"/>
-                  </a:lnTo>
-                  <a:lnTo>
-                    <a:pt x="4440596" y="3095315"/>
-                  </a:lnTo>
-                  <a:lnTo>
-                    <a:pt x="4368974" y="3076425"/>
-                  </a:lnTo>
-                  <a:lnTo>
-                    <a:pt x="4297351" y="3056616"/>
-                  </a:lnTo>
-                  <a:lnTo>
-                    <a:pt x="4225729" y="3035844"/>
-                  </a:lnTo>
-                  <a:lnTo>
-                    <a:pt x="4154106" y="3014061"/>
-                  </a:lnTo>
-                  <a:lnTo>
-                    <a:pt x="4082483" y="2991219"/>
-                  </a:lnTo>
-                  <a:lnTo>
-                    <a:pt x="4010861" y="2967266"/>
-                  </a:lnTo>
-                  <a:lnTo>
-                    <a:pt x="3939238" y="2942148"/>
-                  </a:lnTo>
-                  <a:lnTo>
-                    <a:pt x="3867616" y="2915809"/>
-                  </a:lnTo>
-                  <a:lnTo>
-                    <a:pt x="3795993" y="2888189"/>
-                  </a:lnTo>
-                  <a:lnTo>
-                    <a:pt x="3724371" y="2859225"/>
-                  </a:lnTo>
-                  <a:lnTo>
-                    <a:pt x="3652748" y="2828853"/>
-                  </a:lnTo>
-                  <a:lnTo>
-                    <a:pt x="3581126" y="2797004"/>
-                  </a:lnTo>
-                  <a:lnTo>
-                    <a:pt x="3509503" y="2763606"/>
-                  </a:lnTo>
-                  <a:lnTo>
-                    <a:pt x="3437881" y="2728584"/>
-                  </a:lnTo>
-                  <a:lnTo>
-                    <a:pt x="3366258" y="2691858"/>
-                  </a:lnTo>
-                  <a:lnTo>
-                    <a:pt x="3294636" y="2654244"/>
-                  </a:lnTo>
-                  <a:lnTo>
-                    <a:pt x="3223013" y="2652607"/>
-                  </a:lnTo>
-                  <a:lnTo>
-                    <a:pt x="3151391" y="2650967"/>
-                  </a:lnTo>
-                  <a:lnTo>
-                    <a:pt x="3079768" y="2649324"/>
-                  </a:lnTo>
-                  <a:lnTo>
-                    <a:pt x="3008146" y="2647678"/>
-                  </a:lnTo>
-                  <a:lnTo>
-                    <a:pt x="2936523" y="2646028"/>
-                  </a:lnTo>
-                  <a:lnTo>
-                    <a:pt x="2864901" y="2644375"/>
-                  </a:lnTo>
-                  <a:lnTo>
-                    <a:pt x="2793278" y="2642719"/>
-                  </a:lnTo>
-                  <a:lnTo>
-                    <a:pt x="2721655" y="2641060"/>
-                  </a:lnTo>
-                  <a:lnTo>
-                    <a:pt x="2650033" y="2639397"/>
-                  </a:lnTo>
-                  <a:lnTo>
-                    <a:pt x="2578410" y="2637731"/>
-                  </a:lnTo>
-                  <a:lnTo>
-                    <a:pt x="2506788" y="2636062"/>
-                  </a:lnTo>
-                  <a:lnTo>
-                    <a:pt x="2435165" y="2634389"/>
-                  </a:lnTo>
-                  <a:lnTo>
-                    <a:pt x="2363543" y="2632713"/>
-                  </a:lnTo>
-                  <a:lnTo>
-                    <a:pt x="2291920" y="2631034"/>
-                  </a:lnTo>
-                  <a:lnTo>
-                    <a:pt x="2220298" y="2629352"/>
-                  </a:lnTo>
-                  <a:lnTo>
-                    <a:pt x="2148675" y="2627666"/>
-                  </a:lnTo>
-                  <a:lnTo>
-                    <a:pt x="2077053" y="2625977"/>
-                  </a:lnTo>
-                  <a:lnTo>
-                    <a:pt x="2005430" y="2624284"/>
-                  </a:lnTo>
-                  <a:lnTo>
-                    <a:pt x="1933808" y="2622588"/>
-                  </a:lnTo>
-                  <a:lnTo>
-                    <a:pt x="1862185" y="2620889"/>
-                  </a:lnTo>
-                  <a:lnTo>
-                    <a:pt x="1790563" y="2619187"/>
-                  </a:lnTo>
-                  <a:lnTo>
-                    <a:pt x="1718940" y="2617481"/>
-                  </a:lnTo>
-                  <a:lnTo>
-                    <a:pt x="1647318" y="2615772"/>
-                  </a:lnTo>
-                  <a:lnTo>
-                    <a:pt x="1575695" y="2614059"/>
-                  </a:lnTo>
-                  <a:lnTo>
-                    <a:pt x="1504073" y="2612343"/>
-                  </a:lnTo>
-                  <a:lnTo>
-                    <a:pt x="1432450" y="2610624"/>
-                  </a:lnTo>
-                  <a:lnTo>
-                    <a:pt x="1360827" y="2608901"/>
-                  </a:lnTo>
-                  <a:lnTo>
-                    <a:pt x="1289205" y="2607175"/>
-                  </a:lnTo>
-                  <a:lnTo>
-                    <a:pt x="1217582" y="2605445"/>
-                  </a:lnTo>
-                  <a:lnTo>
-                    <a:pt x="1145960" y="2603712"/>
-                  </a:lnTo>
-                  <a:lnTo>
-                    <a:pt x="1074337" y="2601976"/>
-                  </a:lnTo>
-                  <a:lnTo>
-                    <a:pt x="1002715" y="2600236"/>
-                  </a:lnTo>
-                  <a:lnTo>
-                    <a:pt x="931092" y="2598493"/>
-                  </a:lnTo>
-                  <a:lnTo>
-                    <a:pt x="859470" y="2596746"/>
-                  </a:lnTo>
-                  <a:lnTo>
-                    <a:pt x="787847" y="2594996"/>
-                  </a:lnTo>
-                  <a:lnTo>
-                    <a:pt x="716225" y="2593242"/>
-                  </a:lnTo>
-                  <a:lnTo>
-                    <a:pt x="644602" y="2591485"/>
-                  </a:lnTo>
-                  <a:lnTo>
-                    <a:pt x="572980" y="2589725"/>
-                  </a:lnTo>
-                  <a:lnTo>
-                    <a:pt x="501357" y="2587961"/>
-                  </a:lnTo>
-                  <a:lnTo>
-                    <a:pt x="429735" y="2586193"/>
-                  </a:lnTo>
-                  <a:lnTo>
-                    <a:pt x="358112" y="2584422"/>
-                  </a:lnTo>
-                  <a:lnTo>
-                    <a:pt x="286490" y="2582648"/>
-                  </a:lnTo>
-                  <a:lnTo>
-                    <a:pt x="214867" y="2580870"/>
-                  </a:lnTo>
-                  <a:lnTo>
-                    <a:pt x="143245" y="2579088"/>
-                  </a:lnTo>
-                  <a:lnTo>
-                    <a:pt x="71622" y="2577303"/>
-                  </a:lnTo>
-                  <a:lnTo>
-                    <a:pt x="0" y="2575515"/>
+                    <a:pt x="0" y="0"/>
+                  </a:lnTo>
+                  <a:lnTo>
+                    <a:pt x="0" y="0"/>
+                  </a:lnTo>
+                </a:path>
+              </a:pathLst>
+            </a:custGeom>
+            <a:ln w="13550" cap="flat">
+              <a:solidFill>
+                <a:srgbClr val="EBEBEB">
+                  <a:alpha val="100000"/>
+                </a:srgbClr>
+              </a:solidFill>
+              <a:prstDash val="solid"/>
+              <a:round/>
+            </a:ln>
+          </p:spPr>
+          <p:txBody>
+            <a:bodyPr/>
+            <a:lstStyle/>
+            <a:p/>
+          </p:txBody>
+        </p:sp>
+        <p:sp>
+          <p:nvSpPr>
+            <p:cNvPr id="21" name="pg21"/>
+            <p:cNvSpPr/>
+            <p:nvPr/>
+          </p:nvSpPr>
+          <p:spPr>
+            <a:xfrm>
+              <a:off x="1235312" y="2143092"/>
+              <a:ext cx="6964104" cy="1233013"/>
+            </a:xfrm>
+            <a:custGeom>
+              <a:avLst/>
+              <a:pathLst>
+                <a:path w="6964104" h="1233013">
+                  <a:moveTo>
+                    <a:pt x="1111927" y="0"/>
+                  </a:moveTo>
+                  <a:lnTo>
+                    <a:pt x="1125511" y="11696"/>
+                  </a:lnTo>
+                  <a:lnTo>
+                    <a:pt x="1195856" y="69459"/>
+                  </a:lnTo>
+                  <a:lnTo>
+                    <a:pt x="1266200" y="124543"/>
+                  </a:lnTo>
+                  <a:lnTo>
+                    <a:pt x="1336545" y="177073"/>
+                  </a:lnTo>
+                  <a:lnTo>
+                    <a:pt x="1406889" y="227166"/>
+                  </a:lnTo>
+                  <a:lnTo>
+                    <a:pt x="1477234" y="274936"/>
+                  </a:lnTo>
+                  <a:lnTo>
+                    <a:pt x="1547578" y="320491"/>
+                  </a:lnTo>
+                  <a:lnTo>
+                    <a:pt x="1617923" y="363933"/>
+                  </a:lnTo>
+                  <a:lnTo>
+                    <a:pt x="1688267" y="405360"/>
+                  </a:lnTo>
+                  <a:lnTo>
+                    <a:pt x="1758612" y="444866"/>
+                  </a:lnTo>
+                  <a:lnTo>
+                    <a:pt x="1828956" y="482540"/>
+                  </a:lnTo>
+                  <a:lnTo>
+                    <a:pt x="1899301" y="518466"/>
+                  </a:lnTo>
+                  <a:lnTo>
+                    <a:pt x="1969645" y="552727"/>
+                  </a:lnTo>
+                  <a:lnTo>
+                    <a:pt x="2039990" y="585398"/>
+                  </a:lnTo>
+                  <a:lnTo>
+                    <a:pt x="2110334" y="616554"/>
+                  </a:lnTo>
+                  <a:lnTo>
+                    <a:pt x="2180679" y="646266"/>
+                  </a:lnTo>
+                  <a:lnTo>
+                    <a:pt x="2251023" y="674599"/>
+                  </a:lnTo>
+                  <a:lnTo>
+                    <a:pt x="2321368" y="701619"/>
+                  </a:lnTo>
+                  <a:lnTo>
+                    <a:pt x="2391712" y="727385"/>
+                  </a:lnTo>
+                  <a:lnTo>
+                    <a:pt x="2462057" y="751956"/>
+                  </a:lnTo>
+                  <a:lnTo>
+                    <a:pt x="2532401" y="775388"/>
+                  </a:lnTo>
+                  <a:lnTo>
+                    <a:pt x="2602746" y="797733"/>
+                  </a:lnTo>
+                  <a:lnTo>
+                    <a:pt x="2673090" y="819042"/>
+                  </a:lnTo>
+                  <a:lnTo>
+                    <a:pt x="2743435" y="839363"/>
+                  </a:lnTo>
+                  <a:lnTo>
+                    <a:pt x="2813779" y="858741"/>
+                  </a:lnTo>
+                  <a:lnTo>
+                    <a:pt x="2884124" y="877220"/>
+                  </a:lnTo>
+                  <a:lnTo>
+                    <a:pt x="2954468" y="894843"/>
+                  </a:lnTo>
+                  <a:lnTo>
+                    <a:pt x="3024813" y="911648"/>
+                  </a:lnTo>
+                  <a:lnTo>
+                    <a:pt x="3095157" y="927674"/>
+                  </a:lnTo>
+                  <a:lnTo>
+                    <a:pt x="3165502" y="942956"/>
+                  </a:lnTo>
+                  <a:lnTo>
+                    <a:pt x="3235846" y="957530"/>
+                  </a:lnTo>
+                  <a:lnTo>
+                    <a:pt x="3306191" y="958443"/>
+                  </a:lnTo>
+                  <a:lnTo>
+                    <a:pt x="3376535" y="959032"/>
+                  </a:lnTo>
+                  <a:lnTo>
+                    <a:pt x="3446880" y="959619"/>
+                  </a:lnTo>
+                  <a:lnTo>
+                    <a:pt x="3517224" y="960205"/>
+                  </a:lnTo>
+                  <a:lnTo>
+                    <a:pt x="3587569" y="960790"/>
+                  </a:lnTo>
+                  <a:lnTo>
+                    <a:pt x="3657913" y="961373"/>
+                  </a:lnTo>
+                  <a:lnTo>
+                    <a:pt x="3728257" y="961956"/>
+                  </a:lnTo>
+                  <a:lnTo>
+                    <a:pt x="3798602" y="962537"/>
+                  </a:lnTo>
+                  <a:lnTo>
+                    <a:pt x="3868946" y="963118"/>
+                  </a:lnTo>
+                  <a:lnTo>
+                    <a:pt x="3939291" y="963697"/>
+                  </a:lnTo>
+                  <a:lnTo>
+                    <a:pt x="4009635" y="964275"/>
+                  </a:lnTo>
+                  <a:lnTo>
+                    <a:pt x="4079980" y="964852"/>
+                  </a:lnTo>
+                  <a:lnTo>
+                    <a:pt x="4150324" y="965427"/>
+                  </a:lnTo>
+                  <a:lnTo>
+                    <a:pt x="4220669" y="966002"/>
+                  </a:lnTo>
+                  <a:lnTo>
+                    <a:pt x="4291013" y="966575"/>
+                  </a:lnTo>
+                  <a:lnTo>
+                    <a:pt x="4361358" y="967148"/>
+                  </a:lnTo>
+                  <a:lnTo>
+                    <a:pt x="4431702" y="967719"/>
+                  </a:lnTo>
+                  <a:lnTo>
+                    <a:pt x="4502047" y="968289"/>
+                  </a:lnTo>
+                  <a:lnTo>
+                    <a:pt x="4572391" y="968858"/>
+                  </a:lnTo>
+                  <a:lnTo>
+                    <a:pt x="4642736" y="969426"/>
+                  </a:lnTo>
+                  <a:lnTo>
+                    <a:pt x="4713080" y="969992"/>
+                  </a:lnTo>
+                  <a:lnTo>
+                    <a:pt x="4783425" y="970558"/>
+                  </a:lnTo>
+                  <a:lnTo>
+                    <a:pt x="4853769" y="971122"/>
+                  </a:lnTo>
+                  <a:lnTo>
+                    <a:pt x="4924114" y="971686"/>
+                  </a:lnTo>
+                  <a:lnTo>
+                    <a:pt x="4994458" y="972248"/>
+                  </a:lnTo>
+                  <a:lnTo>
+                    <a:pt x="5064803" y="972809"/>
+                  </a:lnTo>
+                  <a:lnTo>
+                    <a:pt x="5135147" y="973369"/>
+                  </a:lnTo>
+                  <a:lnTo>
+                    <a:pt x="5205492" y="973928"/>
+                  </a:lnTo>
+                  <a:lnTo>
+                    <a:pt x="5275836" y="974486"/>
+                  </a:lnTo>
+                  <a:lnTo>
+                    <a:pt x="5346181" y="975043"/>
+                  </a:lnTo>
+                  <a:lnTo>
+                    <a:pt x="5416525" y="975598"/>
+                  </a:lnTo>
+                  <a:lnTo>
+                    <a:pt x="5486870" y="976153"/>
+                  </a:lnTo>
+                  <a:lnTo>
+                    <a:pt x="5557214" y="976706"/>
+                  </a:lnTo>
+                  <a:lnTo>
+                    <a:pt x="5627559" y="977259"/>
+                  </a:lnTo>
+                  <a:lnTo>
+                    <a:pt x="5697903" y="977810"/>
+                  </a:lnTo>
+                  <a:lnTo>
+                    <a:pt x="5768248" y="978360"/>
+                  </a:lnTo>
+                  <a:lnTo>
+                    <a:pt x="5838592" y="978909"/>
+                  </a:lnTo>
+                  <a:lnTo>
+                    <a:pt x="5908937" y="979457"/>
+                  </a:lnTo>
+                  <a:lnTo>
+                    <a:pt x="5979281" y="980004"/>
+                  </a:lnTo>
+                  <a:lnTo>
+                    <a:pt x="6049626" y="980550"/>
+                  </a:lnTo>
+                  <a:lnTo>
+                    <a:pt x="6119970" y="981095"/>
+                  </a:lnTo>
+                  <a:lnTo>
+                    <a:pt x="6190315" y="981638"/>
+                  </a:lnTo>
+                  <a:lnTo>
+                    <a:pt x="6260659" y="982181"/>
+                  </a:lnTo>
+                  <a:lnTo>
+                    <a:pt x="6331004" y="982723"/>
+                  </a:lnTo>
+                  <a:lnTo>
+                    <a:pt x="6401348" y="983263"/>
+                  </a:lnTo>
+                  <a:lnTo>
+                    <a:pt x="6471693" y="983803"/>
+                  </a:lnTo>
+                  <a:lnTo>
+                    <a:pt x="6542037" y="984341"/>
+                  </a:lnTo>
+                  <a:lnTo>
+                    <a:pt x="6612382" y="984878"/>
+                  </a:lnTo>
+                  <a:lnTo>
+                    <a:pt x="6682726" y="985415"/>
+                  </a:lnTo>
+                  <a:lnTo>
+                    <a:pt x="6753071" y="985950"/>
+                  </a:lnTo>
+                  <a:lnTo>
+                    <a:pt x="6823415" y="986484"/>
+                  </a:lnTo>
+                  <a:lnTo>
+                    <a:pt x="6893760" y="987017"/>
+                  </a:lnTo>
+                  <a:lnTo>
+                    <a:pt x="6964104" y="987549"/>
+                  </a:lnTo>
+                  <a:lnTo>
+                    <a:pt x="6964104" y="1233013"/>
+                  </a:lnTo>
+                  <a:lnTo>
+                    <a:pt x="6893760" y="1231837"/>
+                  </a:lnTo>
+                  <a:lnTo>
+                    <a:pt x="6823415" y="1230603"/>
+                  </a:lnTo>
+                  <a:lnTo>
+                    <a:pt x="6753071" y="1229310"/>
+                  </a:lnTo>
+                  <a:lnTo>
+                    <a:pt x="6682726" y="1227953"/>
+                  </a:lnTo>
+                  <a:lnTo>
+                    <a:pt x="6612382" y="1226531"/>
+                  </a:lnTo>
+                  <a:lnTo>
+                    <a:pt x="6542037" y="1225039"/>
+                  </a:lnTo>
+                  <a:lnTo>
+                    <a:pt x="6471693" y="1223475"/>
+                  </a:lnTo>
+                  <a:lnTo>
+                    <a:pt x="6401348" y="1221835"/>
+                  </a:lnTo>
+                  <a:lnTo>
+                    <a:pt x="6331004" y="1220115"/>
+                  </a:lnTo>
+                  <a:lnTo>
+                    <a:pt x="6260659" y="1218311"/>
+                  </a:lnTo>
+                  <a:lnTo>
+                    <a:pt x="6190315" y="1216420"/>
+                  </a:lnTo>
+                  <a:lnTo>
+                    <a:pt x="6119970" y="1214437"/>
+                  </a:lnTo>
+                  <a:lnTo>
+                    <a:pt x="6049626" y="1212357"/>
+                  </a:lnTo>
+                  <a:lnTo>
+                    <a:pt x="5979281" y="1210176"/>
+                  </a:lnTo>
+                  <a:lnTo>
+                    <a:pt x="5908937" y="1207889"/>
+                  </a:lnTo>
+                  <a:lnTo>
+                    <a:pt x="5838592" y="1205491"/>
+                  </a:lnTo>
+                  <a:lnTo>
+                    <a:pt x="5768248" y="1202976"/>
+                  </a:lnTo>
+                  <a:lnTo>
+                    <a:pt x="5697903" y="1200339"/>
+                  </a:lnTo>
+                  <a:lnTo>
+                    <a:pt x="5627559" y="1197573"/>
+                  </a:lnTo>
+                  <a:lnTo>
+                    <a:pt x="5557214" y="1194674"/>
+                  </a:lnTo>
+                  <a:lnTo>
+                    <a:pt x="5486870" y="1191633"/>
+                  </a:lnTo>
+                  <a:lnTo>
+                    <a:pt x="5416525" y="1188444"/>
+                  </a:lnTo>
+                  <a:lnTo>
+                    <a:pt x="5346181" y="1185100"/>
+                  </a:lnTo>
+                  <a:lnTo>
+                    <a:pt x="5275836" y="1181594"/>
+                  </a:lnTo>
+                  <a:lnTo>
+                    <a:pt x="5205492" y="1177917"/>
+                  </a:lnTo>
+                  <a:lnTo>
+                    <a:pt x="5135147" y="1174061"/>
+                  </a:lnTo>
+                  <a:lnTo>
+                    <a:pt x="5064803" y="1170017"/>
+                  </a:lnTo>
+                  <a:lnTo>
+                    <a:pt x="4994458" y="1165777"/>
+                  </a:lnTo>
+                  <a:lnTo>
+                    <a:pt x="4924114" y="1161331"/>
+                  </a:lnTo>
+                  <a:lnTo>
+                    <a:pt x="4853769" y="1156669"/>
+                  </a:lnTo>
+                  <a:lnTo>
+                    <a:pt x="4783425" y="1151780"/>
+                  </a:lnTo>
+                  <a:lnTo>
+                    <a:pt x="4713080" y="1146653"/>
+                  </a:lnTo>
+                  <a:lnTo>
+                    <a:pt x="4642736" y="1141276"/>
+                  </a:lnTo>
+                  <a:lnTo>
+                    <a:pt x="4572391" y="1135639"/>
+                  </a:lnTo>
+                  <a:lnTo>
+                    <a:pt x="4502047" y="1129727"/>
+                  </a:lnTo>
+                  <a:lnTo>
+                    <a:pt x="4431702" y="1123527"/>
+                  </a:lnTo>
+                  <a:lnTo>
+                    <a:pt x="4361358" y="1117026"/>
+                  </a:lnTo>
+                  <a:lnTo>
+                    <a:pt x="4291013" y="1110209"/>
+                  </a:lnTo>
+                  <a:lnTo>
+                    <a:pt x="4220669" y="1103060"/>
+                  </a:lnTo>
+                  <a:lnTo>
+                    <a:pt x="4150324" y="1095564"/>
+                  </a:lnTo>
+                  <a:lnTo>
+                    <a:pt x="4079980" y="1087703"/>
+                  </a:lnTo>
+                  <a:lnTo>
+                    <a:pt x="4009635" y="1079460"/>
+                  </a:lnTo>
+                  <a:lnTo>
+                    <a:pt x="3939291" y="1070816"/>
+                  </a:lnTo>
+                  <a:lnTo>
+                    <a:pt x="3868946" y="1061752"/>
+                  </a:lnTo>
+                  <a:lnTo>
+                    <a:pt x="3798602" y="1052247"/>
+                  </a:lnTo>
+                  <a:lnTo>
+                    <a:pt x="3728257" y="1042279"/>
+                  </a:lnTo>
+                  <a:lnTo>
+                    <a:pt x="3657913" y="1031827"/>
+                  </a:lnTo>
+                  <a:lnTo>
+                    <a:pt x="3587569" y="1020866"/>
+                  </a:lnTo>
+                  <a:lnTo>
+                    <a:pt x="3517224" y="1009373"/>
+                  </a:lnTo>
+                  <a:lnTo>
+                    <a:pt x="3446880" y="997320"/>
+                  </a:lnTo>
+                  <a:lnTo>
+                    <a:pt x="3376535" y="984681"/>
+                  </a:lnTo>
+                  <a:lnTo>
+                    <a:pt x="3306191" y="971428"/>
+                  </a:lnTo>
+                  <a:lnTo>
+                    <a:pt x="3235846" y="957854"/>
+                  </a:lnTo>
+                  <a:lnTo>
+                    <a:pt x="3165502" y="957263"/>
+                  </a:lnTo>
+                  <a:lnTo>
+                    <a:pt x="3095157" y="956671"/>
+                  </a:lnTo>
+                  <a:lnTo>
+                    <a:pt x="3024813" y="956078"/>
+                  </a:lnTo>
+                  <a:lnTo>
+                    <a:pt x="2954468" y="955484"/>
+                  </a:lnTo>
+                  <a:lnTo>
+                    <a:pt x="2884124" y="954889"/>
+                  </a:lnTo>
+                  <a:lnTo>
+                    <a:pt x="2813779" y="954293"/>
+                  </a:lnTo>
+                  <a:lnTo>
+                    <a:pt x="2743435" y="953695"/>
+                  </a:lnTo>
+                  <a:lnTo>
+                    <a:pt x="2673090" y="953096"/>
+                  </a:lnTo>
+                  <a:lnTo>
+                    <a:pt x="2602746" y="952496"/>
+                  </a:lnTo>
+                  <a:lnTo>
+                    <a:pt x="2532401" y="951895"/>
+                  </a:lnTo>
+                  <a:lnTo>
+                    <a:pt x="2462057" y="951292"/>
+                  </a:lnTo>
+                  <a:lnTo>
+                    <a:pt x="2391712" y="950689"/>
+                  </a:lnTo>
+                  <a:lnTo>
+                    <a:pt x="2321368" y="950084"/>
+                  </a:lnTo>
+                  <a:lnTo>
+                    <a:pt x="2251023" y="949478"/>
+                  </a:lnTo>
+                  <a:lnTo>
+                    <a:pt x="2180679" y="948871"/>
+                  </a:lnTo>
+                  <a:lnTo>
+                    <a:pt x="2110334" y="948262"/>
+                  </a:lnTo>
+                  <a:lnTo>
+                    <a:pt x="2039990" y="947653"/>
+                  </a:lnTo>
+                  <a:lnTo>
+                    <a:pt x="1969645" y="947042"/>
+                  </a:lnTo>
+                  <a:lnTo>
+                    <a:pt x="1899301" y="946430"/>
+                  </a:lnTo>
+                  <a:lnTo>
+                    <a:pt x="1828956" y="945817"/>
+                  </a:lnTo>
+                  <a:lnTo>
+                    <a:pt x="1758612" y="945203"/>
+                  </a:lnTo>
+                  <a:lnTo>
+                    <a:pt x="1688267" y="944587"/>
+                  </a:lnTo>
+                  <a:lnTo>
+                    <a:pt x="1617923" y="943970"/>
+                  </a:lnTo>
+                  <a:lnTo>
+                    <a:pt x="1547578" y="943352"/>
+                  </a:lnTo>
+                  <a:lnTo>
+                    <a:pt x="1477234" y="942733"/>
+                  </a:lnTo>
+                  <a:lnTo>
+                    <a:pt x="1406889" y="942112"/>
+                  </a:lnTo>
+                  <a:lnTo>
+                    <a:pt x="1336545" y="941491"/>
+                  </a:lnTo>
+                  <a:lnTo>
+                    <a:pt x="1266200" y="940868"/>
+                  </a:lnTo>
+                  <a:lnTo>
+                    <a:pt x="1195856" y="940244"/>
+                  </a:lnTo>
+                  <a:lnTo>
+                    <a:pt x="1125511" y="939618"/>
+                  </a:lnTo>
+                  <a:lnTo>
+                    <a:pt x="1055167" y="938992"/>
+                  </a:lnTo>
+                  <a:lnTo>
+                    <a:pt x="984822" y="938364"/>
+                  </a:lnTo>
+                  <a:lnTo>
+                    <a:pt x="914478" y="937735"/>
+                  </a:lnTo>
+                  <a:lnTo>
+                    <a:pt x="844133" y="937104"/>
+                  </a:lnTo>
+                  <a:lnTo>
+                    <a:pt x="773789" y="936473"/>
+                  </a:lnTo>
+                  <a:lnTo>
+                    <a:pt x="703444" y="935840"/>
+                  </a:lnTo>
+                  <a:lnTo>
+                    <a:pt x="633100" y="935206"/>
+                  </a:lnTo>
+                  <a:lnTo>
+                    <a:pt x="562755" y="934570"/>
+                  </a:lnTo>
+                  <a:lnTo>
+                    <a:pt x="492411" y="933934"/>
+                  </a:lnTo>
+                  <a:lnTo>
+                    <a:pt x="422066" y="933296"/>
+                  </a:lnTo>
+                  <a:lnTo>
+                    <a:pt x="351722" y="932657"/>
+                  </a:lnTo>
+                  <a:lnTo>
+                    <a:pt x="281377" y="932017"/>
+                  </a:lnTo>
+                  <a:lnTo>
+                    <a:pt x="211033" y="931375"/>
+                  </a:lnTo>
+                  <a:lnTo>
+                    <a:pt x="140688" y="930732"/>
+                  </a:lnTo>
+                  <a:lnTo>
+                    <a:pt x="70344" y="930088"/>
+                  </a:lnTo>
+                  <a:lnTo>
+                    <a:pt x="0" y="929442"/>
                   </a:lnTo>
                   <a:close/>
                 </a:path>
@@ -3539,598 +3574,273 @@
         </p:sp>
         <p:sp>
           <p:nvSpPr>
-            <p:cNvPr id="21" name="pl21"/>
-            <p:cNvSpPr/>
-            <p:nvPr/>
-          </p:nvSpPr>
-          <p:spPr>
-            <a:xfrm>
-              <a:off x="2304179" y="2073503"/>
-              <a:ext cx="5958500" cy="2736530"/>
-            </a:xfrm>
-            <a:custGeom>
-              <a:avLst/>
-              <a:pathLst>
-                <a:path w="5958500" h="2736530">
-                  <a:moveTo>
-                    <a:pt x="0" y="0"/>
-                  </a:moveTo>
-                  <a:lnTo>
-                    <a:pt x="13830" y="32412"/>
-                  </a:lnTo>
-                  <a:lnTo>
-                    <a:pt x="85453" y="192475"/>
-                  </a:lnTo>
-                  <a:lnTo>
-                    <a:pt x="157075" y="345114"/>
-                  </a:lnTo>
-                  <a:lnTo>
-                    <a:pt x="228698" y="490675"/>
-                  </a:lnTo>
-                  <a:lnTo>
-                    <a:pt x="300320" y="629485"/>
-                  </a:lnTo>
-                  <a:lnTo>
-                    <a:pt x="371943" y="761857"/>
-                  </a:lnTo>
-                  <a:lnTo>
-                    <a:pt x="443565" y="888091"/>
-                  </a:lnTo>
-                  <a:lnTo>
-                    <a:pt x="515188" y="1008470"/>
-                  </a:lnTo>
-                  <a:lnTo>
-                    <a:pt x="586810" y="1123266"/>
-                  </a:lnTo>
-                  <a:lnTo>
-                    <a:pt x="658433" y="1232738"/>
-                  </a:lnTo>
-                  <a:lnTo>
-                    <a:pt x="730055" y="1337133"/>
-                  </a:lnTo>
-                  <a:lnTo>
-                    <a:pt x="801678" y="1436687"/>
-                  </a:lnTo>
-                  <a:lnTo>
-                    <a:pt x="873300" y="1531624"/>
-                  </a:lnTo>
-                  <a:lnTo>
-                    <a:pt x="944923" y="1622157"/>
-                  </a:lnTo>
-                  <a:lnTo>
-                    <a:pt x="1016546" y="1708493"/>
-                  </a:lnTo>
-                  <a:lnTo>
-                    <a:pt x="1088168" y="1790824"/>
-                  </a:lnTo>
-                  <a:lnTo>
-                    <a:pt x="1159791" y="1869337"/>
-                  </a:lnTo>
-                  <a:lnTo>
-                    <a:pt x="1231413" y="1944208"/>
-                  </a:lnTo>
-                  <a:lnTo>
-                    <a:pt x="1303036" y="2015608"/>
-                  </a:lnTo>
-                  <a:lnTo>
-                    <a:pt x="1374658" y="2083696"/>
-                  </a:lnTo>
-                  <a:lnTo>
-                    <a:pt x="1446281" y="2148626"/>
-                  </a:lnTo>
-                  <a:lnTo>
-                    <a:pt x="1517903" y="2210545"/>
-                  </a:lnTo>
-                  <a:lnTo>
-                    <a:pt x="1589526" y="2269592"/>
-                  </a:lnTo>
-                  <a:lnTo>
-                    <a:pt x="1661148" y="2325901"/>
-                  </a:lnTo>
-                  <a:lnTo>
-                    <a:pt x="1732771" y="2379599"/>
-                  </a:lnTo>
-                  <a:lnTo>
-                    <a:pt x="1804393" y="2430806"/>
-                  </a:lnTo>
-                  <a:lnTo>
-                    <a:pt x="1876016" y="2479638"/>
-                  </a:lnTo>
-                  <a:lnTo>
-                    <a:pt x="1947638" y="2526206"/>
-                  </a:lnTo>
-                  <a:lnTo>
-                    <a:pt x="2019261" y="2570614"/>
-                  </a:lnTo>
-                  <a:lnTo>
-                    <a:pt x="2090883" y="2612962"/>
-                  </a:lnTo>
-                  <a:lnTo>
-                    <a:pt x="2162506" y="2653347"/>
-                  </a:lnTo>
-                  <a:lnTo>
-                    <a:pt x="2234128" y="2655877"/>
-                  </a:lnTo>
-                  <a:lnTo>
-                    <a:pt x="2305751" y="2657508"/>
-                  </a:lnTo>
-                  <a:lnTo>
-                    <a:pt x="2377374" y="2659135"/>
-                  </a:lnTo>
-                  <a:lnTo>
-                    <a:pt x="2448996" y="2660759"/>
-                  </a:lnTo>
-                  <a:lnTo>
-                    <a:pt x="2520619" y="2662379"/>
-                  </a:lnTo>
-                  <a:lnTo>
-                    <a:pt x="2592241" y="2663997"/>
-                  </a:lnTo>
-                  <a:lnTo>
-                    <a:pt x="2663864" y="2665611"/>
-                  </a:lnTo>
-                  <a:lnTo>
-                    <a:pt x="2735486" y="2667222"/>
-                  </a:lnTo>
-                  <a:lnTo>
-                    <a:pt x="2807109" y="2668830"/>
-                  </a:lnTo>
-                  <a:lnTo>
-                    <a:pt x="2878731" y="2670435"/>
-                  </a:lnTo>
-                  <a:lnTo>
-                    <a:pt x="2950354" y="2672036"/>
-                  </a:lnTo>
-                  <a:lnTo>
-                    <a:pt x="3021976" y="2673635"/>
-                  </a:lnTo>
-                  <a:lnTo>
-                    <a:pt x="3093599" y="2675230"/>
-                  </a:lnTo>
-                  <a:lnTo>
-                    <a:pt x="3165221" y="2676822"/>
-                  </a:lnTo>
-                  <a:lnTo>
-                    <a:pt x="3236844" y="2678411"/>
-                  </a:lnTo>
-                  <a:lnTo>
-                    <a:pt x="3308466" y="2679997"/>
-                  </a:lnTo>
-                  <a:lnTo>
-                    <a:pt x="3380089" y="2681580"/>
-                  </a:lnTo>
-                  <a:lnTo>
-                    <a:pt x="3451711" y="2683159"/>
-                  </a:lnTo>
-                  <a:lnTo>
-                    <a:pt x="3523334" y="2684736"/>
-                  </a:lnTo>
-                  <a:lnTo>
-                    <a:pt x="3594956" y="2686309"/>
-                  </a:lnTo>
-                  <a:lnTo>
-                    <a:pt x="3666579" y="2687880"/>
-                  </a:lnTo>
-                  <a:lnTo>
-                    <a:pt x="3738202" y="2689447"/>
-                  </a:lnTo>
-                  <a:lnTo>
-                    <a:pt x="3809824" y="2691011"/>
-                  </a:lnTo>
-                  <a:lnTo>
-                    <a:pt x="3881447" y="2692572"/>
-                  </a:lnTo>
-                  <a:lnTo>
-                    <a:pt x="3953069" y="2694130"/>
-                  </a:lnTo>
-                  <a:lnTo>
-                    <a:pt x="4024692" y="2695685"/>
-                  </a:lnTo>
-                  <a:lnTo>
-                    <a:pt x="4096314" y="2697237"/>
-                  </a:lnTo>
-                  <a:lnTo>
-                    <a:pt x="4167937" y="2698786"/>
-                  </a:lnTo>
-                  <a:lnTo>
-                    <a:pt x="4239559" y="2700332"/>
-                  </a:lnTo>
-                  <a:lnTo>
-                    <a:pt x="4311182" y="2701874"/>
-                  </a:lnTo>
-                  <a:lnTo>
-                    <a:pt x="4382804" y="2703414"/>
-                  </a:lnTo>
-                  <a:lnTo>
-                    <a:pt x="4454427" y="2704951"/>
-                  </a:lnTo>
-                  <a:lnTo>
-                    <a:pt x="4526049" y="2706484"/>
-                  </a:lnTo>
-                  <a:lnTo>
-                    <a:pt x="4597672" y="2708015"/>
-                  </a:lnTo>
-                  <a:lnTo>
-                    <a:pt x="4669294" y="2709542"/>
-                  </a:lnTo>
-                  <a:lnTo>
-                    <a:pt x="4740917" y="2711067"/>
-                  </a:lnTo>
-                  <a:lnTo>
-                    <a:pt x="4812539" y="2712589"/>
-                  </a:lnTo>
-                  <a:lnTo>
-                    <a:pt x="4884162" y="2714107"/>
-                  </a:lnTo>
-                  <a:lnTo>
-                    <a:pt x="4955784" y="2715623"/>
-                  </a:lnTo>
-                  <a:lnTo>
-                    <a:pt x="5027407" y="2717135"/>
-                  </a:lnTo>
-                  <a:lnTo>
-                    <a:pt x="5099030" y="2718645"/>
-                  </a:lnTo>
-                  <a:lnTo>
-                    <a:pt x="5170652" y="2720152"/>
-                  </a:lnTo>
-                  <a:lnTo>
-                    <a:pt x="5242275" y="2721655"/>
-                  </a:lnTo>
-                  <a:lnTo>
-                    <a:pt x="5313897" y="2723156"/>
-                  </a:lnTo>
-                  <a:lnTo>
-                    <a:pt x="5385520" y="2724654"/>
-                  </a:lnTo>
-                  <a:lnTo>
-                    <a:pt x="5457142" y="2726149"/>
-                  </a:lnTo>
-                  <a:lnTo>
-                    <a:pt x="5528765" y="2727640"/>
-                  </a:lnTo>
-                  <a:lnTo>
-                    <a:pt x="5600387" y="2729129"/>
-                  </a:lnTo>
-                  <a:lnTo>
-                    <a:pt x="5672010" y="2730615"/>
-                  </a:lnTo>
-                  <a:lnTo>
-                    <a:pt x="5743632" y="2732098"/>
-                  </a:lnTo>
-                  <a:lnTo>
-                    <a:pt x="5815255" y="2733579"/>
-                  </a:lnTo>
-                  <a:lnTo>
-                    <a:pt x="5886877" y="2735056"/>
-                  </a:lnTo>
-                  <a:lnTo>
-                    <a:pt x="5958500" y="2736530"/>
-                  </a:lnTo>
-                </a:path>
-              </a:pathLst>
-            </a:custGeom>
-          </p:spPr>
-          <p:txBody>
-            <a:bodyPr/>
-            <a:lstStyle/>
-            <a:p/>
-          </p:txBody>
-        </p:sp>
-        <p:sp>
-          <p:nvSpPr>
             <p:cNvPr id="22" name="pl22"/>
             <p:cNvSpPr/>
             <p:nvPr/>
           </p:nvSpPr>
           <p:spPr>
             <a:xfrm>
-              <a:off x="1172049" y="4649018"/>
-              <a:ext cx="7090630" cy="841204"/>
+              <a:off x="2347240" y="2143092"/>
+              <a:ext cx="5852176" cy="987549"/>
             </a:xfrm>
             <a:custGeom>
               <a:avLst/>
               <a:pathLst>
-                <a:path w="7090630" h="841204">
+                <a:path w="5852176" h="987549">
                   <a:moveTo>
-                    <a:pt x="7090630" y="841204"/>
+                    <a:pt x="0" y="0"/>
                   </a:moveTo>
                   <a:lnTo>
-                    <a:pt x="7019007" y="837944"/>
-                  </a:lnTo>
-                  <a:lnTo>
-                    <a:pt x="6947385" y="834526"/>
-                  </a:lnTo>
-                  <a:lnTo>
-                    <a:pt x="6875762" y="830941"/>
-                  </a:lnTo>
-                  <a:lnTo>
-                    <a:pt x="6804139" y="827183"/>
-                  </a:lnTo>
-                  <a:lnTo>
-                    <a:pt x="6732517" y="823241"/>
-                  </a:lnTo>
-                  <a:lnTo>
-                    <a:pt x="6660894" y="819108"/>
-                  </a:lnTo>
-                  <a:lnTo>
-                    <a:pt x="6589272" y="814774"/>
-                  </a:lnTo>
-                  <a:lnTo>
-                    <a:pt x="6517649" y="810228"/>
-                  </a:lnTo>
-                  <a:lnTo>
-                    <a:pt x="6446027" y="805462"/>
-                  </a:lnTo>
-                  <a:lnTo>
-                    <a:pt x="6374404" y="800464"/>
-                  </a:lnTo>
-                  <a:lnTo>
-                    <a:pt x="6302782" y="795223"/>
-                  </a:lnTo>
-                  <a:lnTo>
-                    <a:pt x="6231159" y="789728"/>
-                  </a:lnTo>
-                  <a:lnTo>
-                    <a:pt x="6159537" y="783964"/>
-                  </a:lnTo>
-                  <a:lnTo>
-                    <a:pt x="6087914" y="777921"/>
-                  </a:lnTo>
-                  <a:lnTo>
-                    <a:pt x="6016292" y="771584"/>
-                  </a:lnTo>
-                  <a:lnTo>
-                    <a:pt x="5944669" y="764938"/>
-                  </a:lnTo>
-                  <a:lnTo>
-                    <a:pt x="5873047" y="757970"/>
-                  </a:lnTo>
-                  <a:lnTo>
-                    <a:pt x="5801424" y="750662"/>
-                  </a:lnTo>
-                  <a:lnTo>
-                    <a:pt x="5729802" y="742999"/>
-                  </a:lnTo>
-                  <a:lnTo>
-                    <a:pt x="5658179" y="734963"/>
-                  </a:lnTo>
-                  <a:lnTo>
-                    <a:pt x="5586557" y="726537"/>
-                  </a:lnTo>
-                  <a:lnTo>
-                    <a:pt x="5514934" y="717701"/>
-                  </a:lnTo>
-                  <a:lnTo>
-                    <a:pt x="5443311" y="708435"/>
-                  </a:lnTo>
-                  <a:lnTo>
-                    <a:pt x="5371689" y="698718"/>
-                  </a:lnTo>
-                  <a:lnTo>
-                    <a:pt x="5300066" y="688529"/>
-                  </a:lnTo>
-                  <a:lnTo>
-                    <a:pt x="5228444" y="677844"/>
-                  </a:lnTo>
-                  <a:lnTo>
-                    <a:pt x="5156821" y="666640"/>
-                  </a:lnTo>
-                  <a:lnTo>
-                    <a:pt x="5085199" y="654891"/>
-                  </a:lnTo>
-                  <a:lnTo>
-                    <a:pt x="5013576" y="642570"/>
-                  </a:lnTo>
-                  <a:lnTo>
-                    <a:pt x="4941954" y="629651"/>
-                  </a:lnTo>
-                  <a:lnTo>
-                    <a:pt x="4870331" y="616102"/>
-                  </a:lnTo>
-                  <a:lnTo>
-                    <a:pt x="4798709" y="601896"/>
-                  </a:lnTo>
-                  <a:lnTo>
-                    <a:pt x="4727086" y="586998"/>
-                  </a:lnTo>
-                  <a:lnTo>
-                    <a:pt x="4655464" y="571375"/>
-                  </a:lnTo>
-                  <a:lnTo>
-                    <a:pt x="4583841" y="554993"/>
-                  </a:lnTo>
-                  <a:lnTo>
-                    <a:pt x="4512219" y="537814"/>
-                  </a:lnTo>
-                  <a:lnTo>
-                    <a:pt x="4440596" y="519800"/>
-                  </a:lnTo>
-                  <a:lnTo>
-                    <a:pt x="4368974" y="500910"/>
-                  </a:lnTo>
-                  <a:lnTo>
-                    <a:pt x="4297351" y="481101"/>
-                  </a:lnTo>
-                  <a:lnTo>
-                    <a:pt x="4225729" y="460328"/>
-                  </a:lnTo>
-                  <a:lnTo>
-                    <a:pt x="4154106" y="438545"/>
-                  </a:lnTo>
-                  <a:lnTo>
-                    <a:pt x="4082483" y="415703"/>
-                  </a:lnTo>
-                  <a:lnTo>
-                    <a:pt x="4010861" y="391751"/>
-                  </a:lnTo>
-                  <a:lnTo>
-                    <a:pt x="3939238" y="366633"/>
-                  </a:lnTo>
-                  <a:lnTo>
-                    <a:pt x="3867616" y="340294"/>
-                  </a:lnTo>
-                  <a:lnTo>
-                    <a:pt x="3795993" y="312673"/>
-                  </a:lnTo>
-                  <a:lnTo>
-                    <a:pt x="3724371" y="283710"/>
-                  </a:lnTo>
-                  <a:lnTo>
-                    <a:pt x="3652748" y="253338"/>
-                  </a:lnTo>
-                  <a:lnTo>
-                    <a:pt x="3581126" y="221489"/>
-                  </a:lnTo>
-                  <a:lnTo>
-                    <a:pt x="3509503" y="188091"/>
-                  </a:lnTo>
-                  <a:lnTo>
-                    <a:pt x="3437881" y="153068"/>
-                  </a:lnTo>
-                  <a:lnTo>
-                    <a:pt x="3366258" y="116343"/>
-                  </a:lnTo>
-                  <a:lnTo>
-                    <a:pt x="3294636" y="78729"/>
-                  </a:lnTo>
-                  <a:lnTo>
-                    <a:pt x="3223013" y="77092"/>
-                  </a:lnTo>
-                  <a:lnTo>
-                    <a:pt x="3151391" y="75452"/>
-                  </a:lnTo>
-                  <a:lnTo>
-                    <a:pt x="3079768" y="73809"/>
-                  </a:lnTo>
-                  <a:lnTo>
-                    <a:pt x="3008146" y="72162"/>
-                  </a:lnTo>
-                  <a:lnTo>
-                    <a:pt x="2936523" y="70513"/>
-                  </a:lnTo>
-                  <a:lnTo>
-                    <a:pt x="2864901" y="68860"/>
-                  </a:lnTo>
-                  <a:lnTo>
-                    <a:pt x="2793278" y="67204"/>
-                  </a:lnTo>
-                  <a:lnTo>
-                    <a:pt x="2721655" y="65544"/>
-                  </a:lnTo>
-                  <a:lnTo>
-                    <a:pt x="2650033" y="63882"/>
-                  </a:lnTo>
-                  <a:lnTo>
-                    <a:pt x="2578410" y="62216"/>
-                  </a:lnTo>
-                  <a:lnTo>
-                    <a:pt x="2506788" y="60546"/>
-                  </a:lnTo>
-                  <a:lnTo>
-                    <a:pt x="2435165" y="58874"/>
-                  </a:lnTo>
-                  <a:lnTo>
-                    <a:pt x="2363543" y="57198"/>
-                  </a:lnTo>
-                  <a:lnTo>
-                    <a:pt x="2291920" y="55519"/>
-                  </a:lnTo>
-                  <a:lnTo>
-                    <a:pt x="2220298" y="53836"/>
-                  </a:lnTo>
-                  <a:lnTo>
-                    <a:pt x="2148675" y="52150"/>
-                  </a:lnTo>
-                  <a:lnTo>
-                    <a:pt x="2077053" y="50461"/>
-                  </a:lnTo>
-                  <a:lnTo>
-                    <a:pt x="2005430" y="48769"/>
-                  </a:lnTo>
-                  <a:lnTo>
-                    <a:pt x="1933808" y="47073"/>
-                  </a:lnTo>
-                  <a:lnTo>
-                    <a:pt x="1862185" y="45374"/>
-                  </a:lnTo>
-                  <a:lnTo>
-                    <a:pt x="1790563" y="43671"/>
-                  </a:lnTo>
-                  <a:lnTo>
-                    <a:pt x="1718940" y="41965"/>
-                  </a:lnTo>
-                  <a:lnTo>
-                    <a:pt x="1647318" y="40256"/>
-                  </a:lnTo>
-                  <a:lnTo>
-                    <a:pt x="1575695" y="38544"/>
-                  </a:lnTo>
-                  <a:lnTo>
-                    <a:pt x="1504073" y="36828"/>
-                  </a:lnTo>
-                  <a:lnTo>
-                    <a:pt x="1432450" y="35108"/>
-                  </a:lnTo>
-                  <a:lnTo>
-                    <a:pt x="1360827" y="33385"/>
-                  </a:lnTo>
-                  <a:lnTo>
-                    <a:pt x="1289205" y="31659"/>
-                  </a:lnTo>
-                  <a:lnTo>
-                    <a:pt x="1217582" y="29930"/>
-                  </a:lnTo>
-                  <a:lnTo>
-                    <a:pt x="1145960" y="28197"/>
-                  </a:lnTo>
-                  <a:lnTo>
-                    <a:pt x="1074337" y="26460"/>
-                  </a:lnTo>
-                  <a:lnTo>
-                    <a:pt x="1002715" y="24721"/>
-                  </a:lnTo>
-                  <a:lnTo>
-                    <a:pt x="931092" y="22977"/>
-                  </a:lnTo>
-                  <a:lnTo>
-                    <a:pt x="859470" y="21231"/>
-                  </a:lnTo>
-                  <a:lnTo>
-                    <a:pt x="787847" y="19480"/>
-                  </a:lnTo>
-                  <a:lnTo>
-                    <a:pt x="716225" y="17727"/>
-                  </a:lnTo>
-                  <a:lnTo>
-                    <a:pt x="644602" y="15970"/>
-                  </a:lnTo>
-                  <a:lnTo>
-                    <a:pt x="572980" y="14209"/>
-                  </a:lnTo>
-                  <a:lnTo>
-                    <a:pt x="501357" y="12445"/>
-                  </a:lnTo>
-                  <a:lnTo>
-                    <a:pt x="429735" y="10678"/>
-                  </a:lnTo>
-                  <a:lnTo>
-                    <a:pt x="358112" y="8907"/>
-                  </a:lnTo>
-                  <a:lnTo>
-                    <a:pt x="286490" y="7132"/>
-                  </a:lnTo>
-                  <a:lnTo>
-                    <a:pt x="214867" y="5354"/>
-                  </a:lnTo>
-                  <a:lnTo>
-                    <a:pt x="143245" y="3573"/>
-                  </a:lnTo>
-                  <a:lnTo>
-                    <a:pt x="71622" y="1788"/>
-                  </a:lnTo>
-                  <a:lnTo>
-                    <a:pt x="0" y="0"/>
+                    <a:pt x="13583" y="11696"/>
+                  </a:lnTo>
+                  <a:lnTo>
+                    <a:pt x="83928" y="69459"/>
+                  </a:lnTo>
+                  <a:lnTo>
+                    <a:pt x="154272" y="124543"/>
+                  </a:lnTo>
+                  <a:lnTo>
+                    <a:pt x="224617" y="177073"/>
+                  </a:lnTo>
+                  <a:lnTo>
+                    <a:pt x="294961" y="227166"/>
+                  </a:lnTo>
+                  <a:lnTo>
+                    <a:pt x="365306" y="274936"/>
+                  </a:lnTo>
+                  <a:lnTo>
+                    <a:pt x="435650" y="320491"/>
+                  </a:lnTo>
+                  <a:lnTo>
+                    <a:pt x="505995" y="363933"/>
+                  </a:lnTo>
+                  <a:lnTo>
+                    <a:pt x="576339" y="405360"/>
+                  </a:lnTo>
+                  <a:lnTo>
+                    <a:pt x="646684" y="444866"/>
+                  </a:lnTo>
+                  <a:lnTo>
+                    <a:pt x="717028" y="482540"/>
+                  </a:lnTo>
+                  <a:lnTo>
+                    <a:pt x="787373" y="518466"/>
+                  </a:lnTo>
+                  <a:lnTo>
+                    <a:pt x="857717" y="552727"/>
+                  </a:lnTo>
+                  <a:lnTo>
+                    <a:pt x="928062" y="585398"/>
+                  </a:lnTo>
+                  <a:lnTo>
+                    <a:pt x="998406" y="616554"/>
+                  </a:lnTo>
+                  <a:lnTo>
+                    <a:pt x="1068751" y="646266"/>
+                  </a:lnTo>
+                  <a:lnTo>
+                    <a:pt x="1139095" y="674599"/>
+                  </a:lnTo>
+                  <a:lnTo>
+                    <a:pt x="1209440" y="701619"/>
+                  </a:lnTo>
+                  <a:lnTo>
+                    <a:pt x="1279784" y="727385"/>
+                  </a:lnTo>
+                  <a:lnTo>
+                    <a:pt x="1350129" y="751956"/>
+                  </a:lnTo>
+                  <a:lnTo>
+                    <a:pt x="1420473" y="775388"/>
+                  </a:lnTo>
+                  <a:lnTo>
+                    <a:pt x="1490818" y="797733"/>
+                  </a:lnTo>
+                  <a:lnTo>
+                    <a:pt x="1561162" y="819042"/>
+                  </a:lnTo>
+                  <a:lnTo>
+                    <a:pt x="1631507" y="839363"/>
+                  </a:lnTo>
+                  <a:lnTo>
+                    <a:pt x="1701851" y="858741"/>
+                  </a:lnTo>
+                  <a:lnTo>
+                    <a:pt x="1772196" y="877220"/>
+                  </a:lnTo>
+                  <a:lnTo>
+                    <a:pt x="1842540" y="894843"/>
+                  </a:lnTo>
+                  <a:lnTo>
+                    <a:pt x="1912885" y="911648"/>
+                  </a:lnTo>
+                  <a:lnTo>
+                    <a:pt x="1983229" y="927674"/>
+                  </a:lnTo>
+                  <a:lnTo>
+                    <a:pt x="2053574" y="942956"/>
+                  </a:lnTo>
+                  <a:lnTo>
+                    <a:pt x="2123918" y="957530"/>
+                  </a:lnTo>
+                  <a:lnTo>
+                    <a:pt x="2194263" y="958443"/>
+                  </a:lnTo>
+                  <a:lnTo>
+                    <a:pt x="2264607" y="959032"/>
+                  </a:lnTo>
+                  <a:lnTo>
+                    <a:pt x="2334952" y="959619"/>
+                  </a:lnTo>
+                  <a:lnTo>
+                    <a:pt x="2405296" y="960205"/>
+                  </a:lnTo>
+                  <a:lnTo>
+                    <a:pt x="2475641" y="960790"/>
+                  </a:lnTo>
+                  <a:lnTo>
+                    <a:pt x="2545985" y="961373"/>
+                  </a:lnTo>
+                  <a:lnTo>
+                    <a:pt x="2616330" y="961956"/>
+                  </a:lnTo>
+                  <a:lnTo>
+                    <a:pt x="2686674" y="962537"/>
+                  </a:lnTo>
+                  <a:lnTo>
+                    <a:pt x="2757019" y="963118"/>
+                  </a:lnTo>
+                  <a:lnTo>
+                    <a:pt x="2827363" y="963697"/>
+                  </a:lnTo>
+                  <a:lnTo>
+                    <a:pt x="2897707" y="964275"/>
+                  </a:lnTo>
+                  <a:lnTo>
+                    <a:pt x="2968052" y="964852"/>
+                  </a:lnTo>
+                  <a:lnTo>
+                    <a:pt x="3038396" y="965427"/>
+                  </a:lnTo>
+                  <a:lnTo>
+                    <a:pt x="3108741" y="966002"/>
+                  </a:lnTo>
+                  <a:lnTo>
+                    <a:pt x="3179085" y="966575"/>
+                  </a:lnTo>
+                  <a:lnTo>
+                    <a:pt x="3249430" y="967148"/>
+                  </a:lnTo>
+                  <a:lnTo>
+                    <a:pt x="3319774" y="967719"/>
+                  </a:lnTo>
+                  <a:lnTo>
+                    <a:pt x="3390119" y="968289"/>
+                  </a:lnTo>
+                  <a:lnTo>
+                    <a:pt x="3460463" y="968858"/>
+                  </a:lnTo>
+                  <a:lnTo>
+                    <a:pt x="3530808" y="969426"/>
+                  </a:lnTo>
+                  <a:lnTo>
+                    <a:pt x="3601152" y="969992"/>
+                  </a:lnTo>
+                  <a:lnTo>
+                    <a:pt x="3671497" y="970558"/>
+                  </a:lnTo>
+                  <a:lnTo>
+                    <a:pt x="3741841" y="971122"/>
+                  </a:lnTo>
+                  <a:lnTo>
+                    <a:pt x="3812186" y="971686"/>
+                  </a:lnTo>
+                  <a:lnTo>
+                    <a:pt x="3882530" y="972248"/>
+                  </a:lnTo>
+                  <a:lnTo>
+                    <a:pt x="3952875" y="972809"/>
+                  </a:lnTo>
+                  <a:lnTo>
+                    <a:pt x="4023219" y="973369"/>
+                  </a:lnTo>
+                  <a:lnTo>
+                    <a:pt x="4093564" y="973928"/>
+                  </a:lnTo>
+                  <a:lnTo>
+                    <a:pt x="4163908" y="974486"/>
+                  </a:lnTo>
+                  <a:lnTo>
+                    <a:pt x="4234253" y="975043"/>
+                  </a:lnTo>
+                  <a:lnTo>
+                    <a:pt x="4304597" y="975598"/>
+                  </a:lnTo>
+                  <a:lnTo>
+                    <a:pt x="4374942" y="976153"/>
+                  </a:lnTo>
+                  <a:lnTo>
+                    <a:pt x="4445286" y="976706"/>
+                  </a:lnTo>
+                  <a:lnTo>
+                    <a:pt x="4515631" y="977259"/>
+                  </a:lnTo>
+                  <a:lnTo>
+                    <a:pt x="4585975" y="977810"/>
+                  </a:lnTo>
+                  <a:lnTo>
+                    <a:pt x="4656320" y="978360"/>
+                  </a:lnTo>
+                  <a:lnTo>
+                    <a:pt x="4726664" y="978909"/>
+                  </a:lnTo>
+                  <a:lnTo>
+                    <a:pt x="4797009" y="979457"/>
+                  </a:lnTo>
+                  <a:lnTo>
+                    <a:pt x="4867353" y="980004"/>
+                  </a:lnTo>
+                  <a:lnTo>
+                    <a:pt x="4937698" y="980550"/>
+                  </a:lnTo>
+                  <a:lnTo>
+                    <a:pt x="5008042" y="981095"/>
+                  </a:lnTo>
+                  <a:lnTo>
+                    <a:pt x="5078387" y="981638"/>
+                  </a:lnTo>
+                  <a:lnTo>
+                    <a:pt x="5148731" y="982181"/>
+                  </a:lnTo>
+                  <a:lnTo>
+                    <a:pt x="5219076" y="982723"/>
+                  </a:lnTo>
+                  <a:lnTo>
+                    <a:pt x="5289420" y="983263"/>
+                  </a:lnTo>
+                  <a:lnTo>
+                    <a:pt x="5359765" y="983803"/>
+                  </a:lnTo>
+                  <a:lnTo>
+                    <a:pt x="5430109" y="984341"/>
+                  </a:lnTo>
+                  <a:lnTo>
+                    <a:pt x="5500454" y="984878"/>
+                  </a:lnTo>
+                  <a:lnTo>
+                    <a:pt x="5570798" y="985415"/>
+                  </a:lnTo>
+                  <a:lnTo>
+                    <a:pt x="5641143" y="985950"/>
+                  </a:lnTo>
+                  <a:lnTo>
+                    <a:pt x="5711487" y="986484"/>
+                  </a:lnTo>
+                  <a:lnTo>
+                    <a:pt x="5781832" y="987017"/>
+                  </a:lnTo>
+                  <a:lnTo>
+                    <a:pt x="5852176" y="987549"/>
                   </a:lnTo>
                 </a:path>
               </a:pathLst>
@@ -4150,312 +3860,637 @@
           </p:nvSpPr>
           <p:spPr>
             <a:xfrm>
-              <a:off x="1172049" y="2968569"/>
-              <a:ext cx="7090630" cy="2364886"/>
+              <a:off x="1235312" y="3072535"/>
+              <a:ext cx="6964104" cy="303570"/>
             </a:xfrm>
             <a:custGeom>
               <a:avLst/>
               <a:pathLst>
-                <a:path w="7090630" h="2364886">
+                <a:path w="6964104" h="303570">
+                  <a:moveTo>
+                    <a:pt x="6964104" y="303570"/>
+                  </a:moveTo>
+                  <a:lnTo>
+                    <a:pt x="6893760" y="302394"/>
+                  </a:lnTo>
+                  <a:lnTo>
+                    <a:pt x="6823415" y="301160"/>
+                  </a:lnTo>
+                  <a:lnTo>
+                    <a:pt x="6753071" y="299867"/>
+                  </a:lnTo>
+                  <a:lnTo>
+                    <a:pt x="6682726" y="298510"/>
+                  </a:lnTo>
+                  <a:lnTo>
+                    <a:pt x="6612382" y="297088"/>
+                  </a:lnTo>
+                  <a:lnTo>
+                    <a:pt x="6542037" y="295596"/>
+                  </a:lnTo>
+                  <a:lnTo>
+                    <a:pt x="6471693" y="294032"/>
+                  </a:lnTo>
+                  <a:lnTo>
+                    <a:pt x="6401348" y="292392"/>
+                  </a:lnTo>
+                  <a:lnTo>
+                    <a:pt x="6331004" y="290672"/>
+                  </a:lnTo>
+                  <a:lnTo>
+                    <a:pt x="6260659" y="288868"/>
+                  </a:lnTo>
+                  <a:lnTo>
+                    <a:pt x="6190315" y="286977"/>
+                  </a:lnTo>
+                  <a:lnTo>
+                    <a:pt x="6119970" y="284994"/>
+                  </a:lnTo>
+                  <a:lnTo>
+                    <a:pt x="6049626" y="282914"/>
+                  </a:lnTo>
+                  <a:lnTo>
+                    <a:pt x="5979281" y="280733"/>
+                  </a:lnTo>
+                  <a:lnTo>
+                    <a:pt x="5908937" y="278446"/>
+                  </a:lnTo>
+                  <a:lnTo>
+                    <a:pt x="5838592" y="276048"/>
+                  </a:lnTo>
+                  <a:lnTo>
+                    <a:pt x="5768248" y="273533"/>
+                  </a:lnTo>
+                  <a:lnTo>
+                    <a:pt x="5697903" y="270896"/>
+                  </a:lnTo>
+                  <a:lnTo>
+                    <a:pt x="5627559" y="268131"/>
+                  </a:lnTo>
+                  <a:lnTo>
+                    <a:pt x="5557214" y="265231"/>
+                  </a:lnTo>
+                  <a:lnTo>
+                    <a:pt x="5486870" y="262190"/>
+                  </a:lnTo>
+                  <a:lnTo>
+                    <a:pt x="5416525" y="259001"/>
+                  </a:lnTo>
+                  <a:lnTo>
+                    <a:pt x="5346181" y="255657"/>
+                  </a:lnTo>
+                  <a:lnTo>
+                    <a:pt x="5275836" y="252151"/>
+                  </a:lnTo>
+                  <a:lnTo>
+                    <a:pt x="5205492" y="248474"/>
+                  </a:lnTo>
+                  <a:lnTo>
+                    <a:pt x="5135147" y="244618"/>
+                  </a:lnTo>
+                  <a:lnTo>
+                    <a:pt x="5064803" y="240574"/>
+                  </a:lnTo>
+                  <a:lnTo>
+                    <a:pt x="4994458" y="236334"/>
+                  </a:lnTo>
+                  <a:lnTo>
+                    <a:pt x="4924114" y="231888"/>
+                  </a:lnTo>
+                  <a:lnTo>
+                    <a:pt x="4853769" y="227226"/>
+                  </a:lnTo>
+                  <a:lnTo>
+                    <a:pt x="4783425" y="222337"/>
+                  </a:lnTo>
+                  <a:lnTo>
+                    <a:pt x="4713080" y="217210"/>
+                  </a:lnTo>
+                  <a:lnTo>
+                    <a:pt x="4642736" y="211833"/>
+                  </a:lnTo>
+                  <a:lnTo>
+                    <a:pt x="4572391" y="206196"/>
+                  </a:lnTo>
+                  <a:lnTo>
+                    <a:pt x="4502047" y="200284"/>
+                  </a:lnTo>
+                  <a:lnTo>
+                    <a:pt x="4431702" y="194084"/>
+                  </a:lnTo>
+                  <a:lnTo>
+                    <a:pt x="4361358" y="187583"/>
+                  </a:lnTo>
+                  <a:lnTo>
+                    <a:pt x="4291013" y="180766"/>
+                  </a:lnTo>
+                  <a:lnTo>
+                    <a:pt x="4220669" y="173618"/>
+                  </a:lnTo>
+                  <a:lnTo>
+                    <a:pt x="4150324" y="166121"/>
+                  </a:lnTo>
+                  <a:lnTo>
+                    <a:pt x="4079980" y="158260"/>
+                  </a:lnTo>
+                  <a:lnTo>
+                    <a:pt x="4009635" y="150017"/>
+                  </a:lnTo>
+                  <a:lnTo>
+                    <a:pt x="3939291" y="141373"/>
+                  </a:lnTo>
+                  <a:lnTo>
+                    <a:pt x="3868946" y="132309"/>
+                  </a:lnTo>
+                  <a:lnTo>
+                    <a:pt x="3798602" y="122804"/>
+                  </a:lnTo>
+                  <a:lnTo>
+                    <a:pt x="3728257" y="112836"/>
+                  </a:lnTo>
+                  <a:lnTo>
+                    <a:pt x="3657913" y="102384"/>
+                  </a:lnTo>
+                  <a:lnTo>
+                    <a:pt x="3587569" y="91423"/>
+                  </a:lnTo>
+                  <a:lnTo>
+                    <a:pt x="3517224" y="79930"/>
+                  </a:lnTo>
+                  <a:lnTo>
+                    <a:pt x="3446880" y="67877"/>
+                  </a:lnTo>
+                  <a:lnTo>
+                    <a:pt x="3376535" y="55238"/>
+                  </a:lnTo>
+                  <a:lnTo>
+                    <a:pt x="3306191" y="41985"/>
+                  </a:lnTo>
+                  <a:lnTo>
+                    <a:pt x="3235846" y="28411"/>
+                  </a:lnTo>
+                  <a:lnTo>
+                    <a:pt x="3165502" y="27820"/>
+                  </a:lnTo>
+                  <a:lnTo>
+                    <a:pt x="3095157" y="27229"/>
+                  </a:lnTo>
+                  <a:lnTo>
+                    <a:pt x="3024813" y="26636"/>
+                  </a:lnTo>
+                  <a:lnTo>
+                    <a:pt x="2954468" y="26041"/>
+                  </a:lnTo>
+                  <a:lnTo>
+                    <a:pt x="2884124" y="25446"/>
+                  </a:lnTo>
+                  <a:lnTo>
+                    <a:pt x="2813779" y="24850"/>
+                  </a:lnTo>
+                  <a:lnTo>
+                    <a:pt x="2743435" y="24252"/>
+                  </a:lnTo>
+                  <a:lnTo>
+                    <a:pt x="2673090" y="23653"/>
+                  </a:lnTo>
+                  <a:lnTo>
+                    <a:pt x="2602746" y="23053"/>
+                  </a:lnTo>
+                  <a:lnTo>
+                    <a:pt x="2532401" y="22452"/>
+                  </a:lnTo>
+                  <a:lnTo>
+                    <a:pt x="2462057" y="21849"/>
+                  </a:lnTo>
+                  <a:lnTo>
+                    <a:pt x="2391712" y="21246"/>
+                  </a:lnTo>
+                  <a:lnTo>
+                    <a:pt x="2321368" y="20641"/>
+                  </a:lnTo>
+                  <a:lnTo>
+                    <a:pt x="2251023" y="20035"/>
+                  </a:lnTo>
+                  <a:lnTo>
+                    <a:pt x="2180679" y="19428"/>
+                  </a:lnTo>
+                  <a:lnTo>
+                    <a:pt x="2110334" y="18820"/>
+                  </a:lnTo>
+                  <a:lnTo>
+                    <a:pt x="2039990" y="18210"/>
+                  </a:lnTo>
+                  <a:lnTo>
+                    <a:pt x="1969645" y="17599"/>
+                  </a:lnTo>
+                  <a:lnTo>
+                    <a:pt x="1899301" y="16987"/>
+                  </a:lnTo>
+                  <a:lnTo>
+                    <a:pt x="1828956" y="16374"/>
+                  </a:lnTo>
+                  <a:lnTo>
+                    <a:pt x="1758612" y="15760"/>
+                  </a:lnTo>
+                  <a:lnTo>
+                    <a:pt x="1688267" y="15144"/>
+                  </a:lnTo>
+                  <a:lnTo>
+                    <a:pt x="1617923" y="14527"/>
+                  </a:lnTo>
+                  <a:lnTo>
+                    <a:pt x="1547578" y="13909"/>
+                  </a:lnTo>
+                  <a:lnTo>
+                    <a:pt x="1477234" y="13290"/>
+                  </a:lnTo>
+                  <a:lnTo>
+                    <a:pt x="1406889" y="12669"/>
+                  </a:lnTo>
+                  <a:lnTo>
+                    <a:pt x="1336545" y="12048"/>
+                  </a:lnTo>
+                  <a:lnTo>
+                    <a:pt x="1266200" y="11425"/>
+                  </a:lnTo>
+                  <a:lnTo>
+                    <a:pt x="1195856" y="10801"/>
+                  </a:lnTo>
+                  <a:lnTo>
+                    <a:pt x="1125511" y="10175"/>
+                  </a:lnTo>
+                  <a:lnTo>
+                    <a:pt x="1055167" y="9549"/>
+                  </a:lnTo>
+                  <a:lnTo>
+                    <a:pt x="984822" y="8921"/>
+                  </a:lnTo>
+                  <a:lnTo>
+                    <a:pt x="914478" y="8292"/>
+                  </a:lnTo>
+                  <a:lnTo>
+                    <a:pt x="844133" y="7661"/>
+                  </a:lnTo>
+                  <a:lnTo>
+                    <a:pt x="773789" y="7030"/>
+                  </a:lnTo>
+                  <a:lnTo>
+                    <a:pt x="703444" y="6397"/>
+                  </a:lnTo>
+                  <a:lnTo>
+                    <a:pt x="633100" y="5763"/>
+                  </a:lnTo>
+                  <a:lnTo>
+                    <a:pt x="562755" y="5127"/>
+                  </a:lnTo>
+                  <a:lnTo>
+                    <a:pt x="492411" y="4491"/>
+                  </a:lnTo>
+                  <a:lnTo>
+                    <a:pt x="422066" y="3853"/>
+                  </a:lnTo>
+                  <a:lnTo>
+                    <a:pt x="351722" y="3214"/>
+                  </a:lnTo>
+                  <a:lnTo>
+                    <a:pt x="281377" y="2574"/>
+                  </a:lnTo>
+                  <a:lnTo>
+                    <a:pt x="211033" y="1932"/>
+                  </a:lnTo>
+                  <a:lnTo>
+                    <a:pt x="140688" y="1289"/>
+                  </a:lnTo>
+                  <a:lnTo>
+                    <a:pt x="70344" y="645"/>
+                  </a:lnTo>
+                  <a:lnTo>
+                    <a:pt x="0" y="0"/>
+                  </a:lnTo>
+                </a:path>
+              </a:pathLst>
+            </a:custGeom>
+          </p:spPr>
+          <p:txBody>
+            <a:bodyPr/>
+            <a:lstStyle/>
+            <a:p/>
+          </p:txBody>
+        </p:sp>
+        <p:sp>
+          <p:nvSpPr>
+            <p:cNvPr id="24" name="pl24"/>
+            <p:cNvSpPr/>
+            <p:nvPr/>
+          </p:nvSpPr>
+          <p:spPr>
+            <a:xfrm>
+              <a:off x="1235312" y="2466100"/>
+              <a:ext cx="6964104" cy="853431"/>
+            </a:xfrm>
+            <a:custGeom>
+              <a:avLst/>
+              <a:pathLst>
+                <a:path w="6964104" h="853431">
                   <a:moveTo>
                     <a:pt x="0" y="0"/>
                   </a:moveTo>
                   <a:lnTo>
-                    <a:pt x="71622" y="63230"/>
-                  </a:lnTo>
-                  <a:lnTo>
-                    <a:pt x="143245" y="124916"/>
-                  </a:lnTo>
-                  <a:lnTo>
-                    <a:pt x="214867" y="185096"/>
-                  </a:lnTo>
-                  <a:lnTo>
-                    <a:pt x="286490" y="243805"/>
-                  </a:lnTo>
-                  <a:lnTo>
-                    <a:pt x="358112" y="301081"/>
-                  </a:lnTo>
-                  <a:lnTo>
-                    <a:pt x="429735" y="356957"/>
-                  </a:lnTo>
-                  <a:lnTo>
-                    <a:pt x="501357" y="411469"/>
-                  </a:lnTo>
-                  <a:lnTo>
-                    <a:pt x="572980" y="464649"/>
-                  </a:lnTo>
-                  <a:lnTo>
-                    <a:pt x="644602" y="516530"/>
-                  </a:lnTo>
-                  <a:lnTo>
-                    <a:pt x="716225" y="567144"/>
-                  </a:lnTo>
-                  <a:lnTo>
-                    <a:pt x="787847" y="616522"/>
-                  </a:lnTo>
-                  <a:lnTo>
-                    <a:pt x="859470" y="664693"/>
-                  </a:lnTo>
-                  <a:lnTo>
-                    <a:pt x="931092" y="711688"/>
-                  </a:lnTo>
-                  <a:lnTo>
-                    <a:pt x="1002715" y="757535"/>
-                  </a:lnTo>
-                  <a:lnTo>
-                    <a:pt x="1074337" y="802262"/>
-                  </a:lnTo>
-                  <a:lnTo>
-                    <a:pt x="1145960" y="845897"/>
-                  </a:lnTo>
-                  <a:lnTo>
-                    <a:pt x="1217582" y="888466"/>
-                  </a:lnTo>
-                  <a:lnTo>
-                    <a:pt x="1289205" y="929995"/>
-                  </a:lnTo>
-                  <a:lnTo>
-                    <a:pt x="1360827" y="970510"/>
-                  </a:lnTo>
-                  <a:lnTo>
-                    <a:pt x="1432450" y="1010035"/>
-                  </a:lnTo>
-                  <a:lnTo>
-                    <a:pt x="1504073" y="1048595"/>
-                  </a:lnTo>
-                  <a:lnTo>
-                    <a:pt x="1575695" y="1086212"/>
-                  </a:lnTo>
-                  <a:lnTo>
-                    <a:pt x="1647318" y="1122911"/>
-                  </a:lnTo>
-                  <a:lnTo>
-                    <a:pt x="1718940" y="1158714"/>
-                  </a:lnTo>
-                  <a:lnTo>
-                    <a:pt x="1790563" y="1193642"/>
-                  </a:lnTo>
-                  <a:lnTo>
-                    <a:pt x="1862185" y="1227717"/>
-                  </a:lnTo>
-                  <a:lnTo>
-                    <a:pt x="1933808" y="1260960"/>
-                  </a:lnTo>
-                  <a:lnTo>
-                    <a:pt x="2005430" y="1293390"/>
-                  </a:lnTo>
-                  <a:lnTo>
-                    <a:pt x="2077053" y="1325029"/>
-                  </a:lnTo>
-                  <a:lnTo>
-                    <a:pt x="2148675" y="1355894"/>
-                  </a:lnTo>
-                  <a:lnTo>
-                    <a:pt x="2220298" y="1386006"/>
-                  </a:lnTo>
-                  <a:lnTo>
-                    <a:pt x="2291920" y="1415383"/>
-                  </a:lnTo>
-                  <a:lnTo>
-                    <a:pt x="2363543" y="1444041"/>
-                  </a:lnTo>
-                  <a:lnTo>
-                    <a:pt x="2435165" y="1472000"/>
-                  </a:lnTo>
-                  <a:lnTo>
-                    <a:pt x="2506788" y="1499276"/>
-                  </a:lnTo>
-                  <a:lnTo>
-                    <a:pt x="2578410" y="1525885"/>
-                  </a:lnTo>
-                  <a:lnTo>
-                    <a:pt x="2650033" y="1551845"/>
-                  </a:lnTo>
-                  <a:lnTo>
-                    <a:pt x="2721655" y="1577171"/>
-                  </a:lnTo>
-                  <a:lnTo>
-                    <a:pt x="2793278" y="1601877"/>
-                  </a:lnTo>
-                  <a:lnTo>
-                    <a:pt x="2864901" y="1625981"/>
-                  </a:lnTo>
-                  <a:lnTo>
-                    <a:pt x="2936523" y="1649496"/>
-                  </a:lnTo>
-                  <a:lnTo>
-                    <a:pt x="3008146" y="1672436"/>
-                  </a:lnTo>
-                  <a:lnTo>
-                    <a:pt x="3079768" y="1694816"/>
-                  </a:lnTo>
-                  <a:lnTo>
-                    <a:pt x="3151391" y="1716649"/>
-                  </a:lnTo>
-                  <a:lnTo>
-                    <a:pt x="3223013" y="1737949"/>
-                  </a:lnTo>
-                  <a:lnTo>
-                    <a:pt x="3294636" y="1758729"/>
-                  </a:lnTo>
-                  <a:lnTo>
-                    <a:pt x="3366258" y="1779001"/>
-                  </a:lnTo>
-                  <a:lnTo>
-                    <a:pt x="3437881" y="1798778"/>
-                  </a:lnTo>
-                  <a:lnTo>
-                    <a:pt x="3509503" y="1818072"/>
-                  </a:lnTo>
-                  <a:lnTo>
-                    <a:pt x="3581126" y="1836895"/>
-                  </a:lnTo>
-                  <a:lnTo>
-                    <a:pt x="3652748" y="1855258"/>
-                  </a:lnTo>
-                  <a:lnTo>
-                    <a:pt x="3724371" y="1873173"/>
-                  </a:lnTo>
-                  <a:lnTo>
-                    <a:pt x="3795993" y="1890649"/>
-                  </a:lnTo>
-                  <a:lnTo>
-                    <a:pt x="3867616" y="1907699"/>
-                  </a:lnTo>
-                  <a:lnTo>
-                    <a:pt x="3939238" y="1924333"/>
-                  </a:lnTo>
-                  <a:lnTo>
-                    <a:pt x="4010861" y="1940560"/>
-                  </a:lnTo>
-                  <a:lnTo>
-                    <a:pt x="4082483" y="1956391"/>
-                  </a:lnTo>
-                  <a:lnTo>
-                    <a:pt x="4154106" y="1971835"/>
-                  </a:lnTo>
-                  <a:lnTo>
-                    <a:pt x="4225729" y="1986902"/>
-                  </a:lnTo>
-                  <a:lnTo>
-                    <a:pt x="4297351" y="2001601"/>
-                  </a:lnTo>
-                  <a:lnTo>
-                    <a:pt x="4368974" y="2015941"/>
-                  </a:lnTo>
-                  <a:lnTo>
-                    <a:pt x="4440596" y="2029930"/>
-                  </a:lnTo>
-                  <a:lnTo>
-                    <a:pt x="4512219" y="2043578"/>
-                  </a:lnTo>
-                  <a:lnTo>
-                    <a:pt x="4583841" y="2056893"/>
-                  </a:lnTo>
-                  <a:lnTo>
-                    <a:pt x="4655464" y="2069882"/>
-                  </a:lnTo>
-                  <a:lnTo>
-                    <a:pt x="4727086" y="2082554"/>
-                  </a:lnTo>
-                  <a:lnTo>
-                    <a:pt x="4798709" y="2094917"/>
-                  </a:lnTo>
-                  <a:lnTo>
-                    <a:pt x="4870331" y="2106977"/>
-                  </a:lnTo>
-                  <a:lnTo>
-                    <a:pt x="4941954" y="2118743"/>
-                  </a:lnTo>
-                  <a:lnTo>
-                    <a:pt x="5013576" y="2130222"/>
-                  </a:lnTo>
-                  <a:lnTo>
-                    <a:pt x="5085199" y="2141420"/>
-                  </a:lnTo>
-                  <a:lnTo>
-                    <a:pt x="5156821" y="2152345"/>
-                  </a:lnTo>
-                  <a:lnTo>
-                    <a:pt x="5228444" y="2163003"/>
-                  </a:lnTo>
-                  <a:lnTo>
-                    <a:pt x="5300066" y="2173400"/>
-                  </a:lnTo>
-                  <a:lnTo>
-                    <a:pt x="5371689" y="2183544"/>
-                  </a:lnTo>
-                  <a:lnTo>
-                    <a:pt x="5443311" y="2193440"/>
-                  </a:lnTo>
-                  <a:lnTo>
-                    <a:pt x="5514934" y="2203094"/>
-                  </a:lnTo>
-                  <a:lnTo>
-                    <a:pt x="5586557" y="2212512"/>
-                  </a:lnTo>
-                  <a:lnTo>
-                    <a:pt x="5658179" y="2221700"/>
-                  </a:lnTo>
-                  <a:lnTo>
-                    <a:pt x="5729802" y="2230664"/>
-                  </a:lnTo>
-                  <a:lnTo>
-                    <a:pt x="5801424" y="2239409"/>
-                  </a:lnTo>
-                  <a:lnTo>
-                    <a:pt x="5873047" y="2247940"/>
-                  </a:lnTo>
-                  <a:lnTo>
-                    <a:pt x="5944669" y="2256263"/>
-                  </a:lnTo>
-                  <a:lnTo>
-                    <a:pt x="6016292" y="2264382"/>
-                  </a:lnTo>
-                  <a:lnTo>
-                    <a:pt x="6087914" y="2272304"/>
-                  </a:lnTo>
-                  <a:lnTo>
-                    <a:pt x="6159537" y="2280031"/>
-                  </a:lnTo>
-                  <a:lnTo>
-                    <a:pt x="6231159" y="2287570"/>
-                  </a:lnTo>
-                  <a:lnTo>
-                    <a:pt x="6302782" y="2294925"/>
-                  </a:lnTo>
-                  <a:lnTo>
-                    <a:pt x="6374404" y="2302100"/>
-                  </a:lnTo>
-                  <a:lnTo>
-                    <a:pt x="6446027" y="2309100"/>
-                  </a:lnTo>
-                  <a:lnTo>
-                    <a:pt x="6517649" y="2315929"/>
-                  </a:lnTo>
-                  <a:lnTo>
-                    <a:pt x="6589272" y="2322591"/>
-                  </a:lnTo>
-                  <a:lnTo>
-                    <a:pt x="6660894" y="2329091"/>
-                  </a:lnTo>
-                  <a:lnTo>
-                    <a:pt x="6732517" y="2335432"/>
-                  </a:lnTo>
-                  <a:lnTo>
-                    <a:pt x="6804139" y="2341617"/>
-                  </a:lnTo>
-                  <a:lnTo>
-                    <a:pt x="6875762" y="2347652"/>
-                  </a:lnTo>
-                  <a:lnTo>
-                    <a:pt x="6947385" y="2353539"/>
-                  </a:lnTo>
-                  <a:lnTo>
-                    <a:pt x="7019007" y="2359283"/>
-                  </a:lnTo>
-                  <a:lnTo>
-                    <a:pt x="7090630" y="2364886"/>
+                    <a:pt x="70344" y="22818"/>
+                  </a:lnTo>
+                  <a:lnTo>
+                    <a:pt x="140688" y="45079"/>
+                  </a:lnTo>
+                  <a:lnTo>
+                    <a:pt x="211033" y="66796"/>
+                  </a:lnTo>
+                  <a:lnTo>
+                    <a:pt x="281377" y="87983"/>
+                  </a:lnTo>
+                  <a:lnTo>
+                    <a:pt x="351722" y="108653"/>
+                  </a:lnTo>
+                  <a:lnTo>
+                    <a:pt x="422066" y="128817"/>
+                  </a:lnTo>
+                  <a:lnTo>
+                    <a:pt x="492411" y="148489"/>
+                  </a:lnTo>
+                  <a:lnTo>
+                    <a:pt x="562755" y="167681"/>
+                  </a:lnTo>
+                  <a:lnTo>
+                    <a:pt x="633100" y="186403"/>
+                  </a:lnTo>
+                  <a:lnTo>
+                    <a:pt x="703444" y="204669"/>
+                  </a:lnTo>
+                  <a:lnTo>
+                    <a:pt x="773789" y="222488"/>
+                  </a:lnTo>
+                  <a:lnTo>
+                    <a:pt x="844133" y="239872"/>
+                  </a:lnTo>
+                  <a:lnTo>
+                    <a:pt x="914478" y="256831"/>
+                  </a:lnTo>
+                  <a:lnTo>
+                    <a:pt x="984822" y="273376"/>
+                  </a:lnTo>
+                  <a:lnTo>
+                    <a:pt x="1055167" y="289517"/>
+                  </a:lnTo>
+                  <a:lnTo>
+                    <a:pt x="1125511" y="305264"/>
+                  </a:lnTo>
+                  <a:lnTo>
+                    <a:pt x="1195856" y="320626"/>
+                  </a:lnTo>
+                  <a:lnTo>
+                    <a:pt x="1266200" y="335613"/>
+                  </a:lnTo>
+                  <a:lnTo>
+                    <a:pt x="1336545" y="350234"/>
+                  </a:lnTo>
+                  <a:lnTo>
+                    <a:pt x="1406889" y="364498"/>
+                  </a:lnTo>
+                  <a:lnTo>
+                    <a:pt x="1477234" y="378413"/>
+                  </a:lnTo>
+                  <a:lnTo>
+                    <a:pt x="1547578" y="391988"/>
+                  </a:lnTo>
+                  <a:lnTo>
+                    <a:pt x="1617923" y="405232"/>
+                  </a:lnTo>
+                  <a:lnTo>
+                    <a:pt x="1688267" y="418152"/>
+                  </a:lnTo>
+                  <a:lnTo>
+                    <a:pt x="1758612" y="430757"/>
+                  </a:lnTo>
+                  <a:lnTo>
+                    <a:pt x="1828956" y="443054"/>
+                  </a:lnTo>
+                  <a:lnTo>
+                    <a:pt x="1899301" y="455050"/>
+                  </a:lnTo>
+                  <a:lnTo>
+                    <a:pt x="1969645" y="466754"/>
+                  </a:lnTo>
+                  <a:lnTo>
+                    <a:pt x="2039990" y="478171"/>
+                  </a:lnTo>
+                  <a:lnTo>
+                    <a:pt x="2110334" y="489310"/>
+                  </a:lnTo>
+                  <a:lnTo>
+                    <a:pt x="2180679" y="500177"/>
+                  </a:lnTo>
+                  <a:lnTo>
+                    <a:pt x="2251023" y="510778"/>
+                  </a:lnTo>
+                  <a:lnTo>
+                    <a:pt x="2321368" y="521120"/>
+                  </a:lnTo>
+                  <a:lnTo>
+                    <a:pt x="2391712" y="531210"/>
+                  </a:lnTo>
+                  <a:lnTo>
+                    <a:pt x="2462057" y="541053"/>
+                  </a:lnTo>
+                  <a:lnTo>
+                    <a:pt x="2532401" y="550656"/>
+                  </a:lnTo>
+                  <a:lnTo>
+                    <a:pt x="2602746" y="560024"/>
+                  </a:lnTo>
+                  <a:lnTo>
+                    <a:pt x="2673090" y="569163"/>
+                  </a:lnTo>
+                  <a:lnTo>
+                    <a:pt x="2743435" y="578080"/>
+                  </a:lnTo>
+                  <a:lnTo>
+                    <a:pt x="2813779" y="586778"/>
+                  </a:lnTo>
+                  <a:lnTo>
+                    <a:pt x="2884124" y="595264"/>
+                  </a:lnTo>
+                  <a:lnTo>
+                    <a:pt x="2954468" y="603542"/>
+                  </a:lnTo>
+                  <a:lnTo>
+                    <a:pt x="3024813" y="611619"/>
+                  </a:lnTo>
+                  <a:lnTo>
+                    <a:pt x="3095157" y="619498"/>
+                  </a:lnTo>
+                  <a:lnTo>
+                    <a:pt x="3165502" y="627185"/>
+                  </a:lnTo>
+                  <a:lnTo>
+                    <a:pt x="3235846" y="634684"/>
+                  </a:lnTo>
+                  <a:lnTo>
+                    <a:pt x="3306191" y="641999"/>
+                  </a:lnTo>
+                  <a:lnTo>
+                    <a:pt x="3376535" y="649136"/>
+                  </a:lnTo>
+                  <a:lnTo>
+                    <a:pt x="3446880" y="656099"/>
+                  </a:lnTo>
+                  <a:lnTo>
+                    <a:pt x="3517224" y="662892"/>
+                  </a:lnTo>
+                  <a:lnTo>
+                    <a:pt x="3587569" y="669519"/>
+                  </a:lnTo>
+                  <a:lnTo>
+                    <a:pt x="3657913" y="675984"/>
+                  </a:lnTo>
+                  <a:lnTo>
+                    <a:pt x="3728257" y="682291"/>
+                  </a:lnTo>
+                  <a:lnTo>
+                    <a:pt x="3798602" y="688443"/>
+                  </a:lnTo>
+                  <a:lnTo>
+                    <a:pt x="3868946" y="694446"/>
+                  </a:lnTo>
+                  <a:lnTo>
+                    <a:pt x="3939291" y="700302"/>
+                  </a:lnTo>
+                  <a:lnTo>
+                    <a:pt x="4009635" y="706015"/>
+                  </a:lnTo>
+                  <a:lnTo>
+                    <a:pt x="4079980" y="711589"/>
+                  </a:lnTo>
+                  <a:lnTo>
+                    <a:pt x="4150324" y="717026"/>
+                  </a:lnTo>
+                  <a:lnTo>
+                    <a:pt x="4220669" y="722330"/>
+                  </a:lnTo>
+                  <a:lnTo>
+                    <a:pt x="4291013" y="727505"/>
+                  </a:lnTo>
+                  <a:lnTo>
+                    <a:pt x="4361358" y="732554"/>
+                  </a:lnTo>
+                  <a:lnTo>
+                    <a:pt x="4431702" y="737479"/>
+                  </a:lnTo>
+                  <a:lnTo>
+                    <a:pt x="4502047" y="742284"/>
+                  </a:lnTo>
+                  <a:lnTo>
+                    <a:pt x="4572391" y="746971"/>
+                  </a:lnTo>
+                  <a:lnTo>
+                    <a:pt x="4642736" y="751545"/>
+                  </a:lnTo>
+                  <a:lnTo>
+                    <a:pt x="4713080" y="756006"/>
+                  </a:lnTo>
+                  <a:lnTo>
+                    <a:pt x="4783425" y="760358"/>
+                  </a:lnTo>
+                  <a:lnTo>
+                    <a:pt x="4853769" y="764604"/>
+                  </a:lnTo>
+                  <a:lnTo>
+                    <a:pt x="4924114" y="768747"/>
+                  </a:lnTo>
+                  <a:lnTo>
+                    <a:pt x="4994458" y="772788"/>
+                  </a:lnTo>
+                  <a:lnTo>
+                    <a:pt x="5064803" y="776730"/>
+                  </a:lnTo>
+                  <a:lnTo>
+                    <a:pt x="5135147" y="780576"/>
+                  </a:lnTo>
+                  <a:lnTo>
+                    <a:pt x="5205492" y="784329"/>
+                  </a:lnTo>
+                  <a:lnTo>
+                    <a:pt x="5275836" y="787989"/>
+                  </a:lnTo>
+                  <a:lnTo>
+                    <a:pt x="5346181" y="791560"/>
+                  </a:lnTo>
+                  <a:lnTo>
+                    <a:pt x="5416525" y="795044"/>
+                  </a:lnTo>
+                  <a:lnTo>
+                    <a:pt x="5486870" y="798443"/>
+                  </a:lnTo>
+                  <a:lnTo>
+                    <a:pt x="5557214" y="801759"/>
+                  </a:lnTo>
+                  <a:lnTo>
+                    <a:pt x="5627559" y="804994"/>
+                  </a:lnTo>
+                  <a:lnTo>
+                    <a:pt x="5697903" y="808150"/>
+                  </a:lnTo>
+                  <a:lnTo>
+                    <a:pt x="5768248" y="811228"/>
+                  </a:lnTo>
+                  <a:lnTo>
+                    <a:pt x="5838592" y="814232"/>
+                  </a:lnTo>
+                  <a:lnTo>
+                    <a:pt x="5908937" y="817162"/>
+                  </a:lnTo>
+                  <a:lnTo>
+                    <a:pt x="5979281" y="820021"/>
+                  </a:lnTo>
+                  <a:lnTo>
+                    <a:pt x="6049626" y="822809"/>
+                  </a:lnTo>
+                  <a:lnTo>
+                    <a:pt x="6119970" y="825530"/>
+                  </a:lnTo>
+                  <a:lnTo>
+                    <a:pt x="6190315" y="828184"/>
+                  </a:lnTo>
+                  <a:lnTo>
+                    <a:pt x="6260659" y="830774"/>
+                  </a:lnTo>
+                  <a:lnTo>
+                    <a:pt x="6331004" y="833300"/>
+                  </a:lnTo>
+                  <a:lnTo>
+                    <a:pt x="6401348" y="835764"/>
+                  </a:lnTo>
+                  <a:lnTo>
+                    <a:pt x="6471693" y="838168"/>
+                  </a:lnTo>
+                  <a:lnTo>
+                    <a:pt x="6542037" y="840514"/>
+                  </a:lnTo>
+                  <a:lnTo>
+                    <a:pt x="6612382" y="842802"/>
+                  </a:lnTo>
+                  <a:lnTo>
+                    <a:pt x="6682726" y="845034"/>
+                  </a:lnTo>
+                  <a:lnTo>
+                    <a:pt x="6753071" y="847212"/>
+                  </a:lnTo>
+                  <a:lnTo>
+                    <a:pt x="6823415" y="849337"/>
+                  </a:lnTo>
+                  <a:lnTo>
+                    <a:pt x="6893760" y="851409"/>
+                  </a:lnTo>
+                  <a:lnTo>
+                    <a:pt x="6964104" y="853431"/>
                   </a:lnTo>
                 </a:path>
               </a:pathLst>
@@ -4478,27 +4513,27 @@
         </p:sp>
         <p:sp>
           <p:nvSpPr>
-            <p:cNvPr id="24" name="pl24"/>
+            <p:cNvPr id="25" name="pl25"/>
             <p:cNvSpPr/>
             <p:nvPr/>
           </p:nvSpPr>
           <p:spPr>
             <a:xfrm>
-              <a:off x="817517" y="4727786"/>
-              <a:ext cx="7799693" cy="0"/>
+              <a:off x="887106" y="3100960"/>
+              <a:ext cx="7660515" cy="0"/>
             </a:xfrm>
             <a:custGeom>
               <a:avLst/>
               <a:pathLst>
-                <a:path w="7799693" h="0">
+                <a:path w="7660515" h="0">
                   <a:moveTo>
                     <a:pt x="0" y="0"/>
                   </a:moveTo>
                   <a:lnTo>
-                    <a:pt x="7799693" y="0"/>
-                  </a:lnTo>
-                  <a:lnTo>
-                    <a:pt x="7799693" y="0"/>
+                    <a:pt x="7660515" y="0"/>
+                  </a:lnTo>
+                  <a:lnTo>
+                    <a:pt x="7660515" y="0"/>
                   </a:lnTo>
                 </a:path>
               </a:pathLst>
@@ -4521,21 +4556,21 @@
         </p:sp>
         <p:sp>
           <p:nvSpPr>
-            <p:cNvPr id="25" name="pl25"/>
+            <p:cNvPr id="26" name="pl26"/>
             <p:cNvSpPr/>
             <p:nvPr/>
           </p:nvSpPr>
           <p:spPr>
             <a:xfrm>
-              <a:off x="4468386" y="2073503"/>
-              <a:ext cx="0" cy="3649639"/>
+              <a:off x="4472829" y="2143092"/>
+              <a:ext cx="0" cy="1317069"/>
             </a:xfrm>
             <a:custGeom>
               <a:avLst/>
               <a:pathLst>
-                <a:path w="0" h="3649639">
+                <a:path w="0" h="1317069">
                   <a:moveTo>
-                    <a:pt x="0" y="3649639"/>
+                    <a:pt x="0" y="1317069"/>
                   </a:moveTo>
                   <a:lnTo>
                     <a:pt x="0" y="0"/>
@@ -4564,13 +4599,13 @@
         </p:sp>
         <p:sp>
           <p:nvSpPr>
-            <p:cNvPr id="26" name="tx26"/>
+            <p:cNvPr id="27" name="tx27"/>
             <p:cNvSpPr/>
             <p:nvPr/>
           </p:nvSpPr>
           <p:spPr>
             <a:xfrm>
-              <a:off x="692708" y="5517199"/>
+              <a:off x="762297" y="3360243"/>
               <a:ext cx="62179" cy="80101"/>
             </a:xfrm>
             <a:prstGeom prst="rect">
@@ -4610,13 +4645,13 @@
         </p:sp>
         <p:sp>
           <p:nvSpPr>
-            <p:cNvPr id="27" name="tx27"/>
+            <p:cNvPr id="28" name="tx28"/>
             <p:cNvSpPr/>
             <p:nvPr/>
           </p:nvSpPr>
           <p:spPr>
             <a:xfrm>
-              <a:off x="692708" y="4687735"/>
+              <a:off x="762297" y="3060909"/>
               <a:ext cx="62179" cy="80101"/>
             </a:xfrm>
             <a:prstGeom prst="rect">
@@ -4656,13 +4691,13 @@
         </p:sp>
         <p:sp>
           <p:nvSpPr>
-            <p:cNvPr id="28" name="tx28"/>
+            <p:cNvPr id="29" name="tx29"/>
             <p:cNvSpPr/>
             <p:nvPr/>
           </p:nvSpPr>
           <p:spPr>
             <a:xfrm>
-              <a:off x="692708" y="3858272"/>
+              <a:off x="762297" y="2761575"/>
               <a:ext cx="62179" cy="80101"/>
             </a:xfrm>
             <a:prstGeom prst="rect">
@@ -4702,13 +4737,13 @@
         </p:sp>
         <p:sp>
           <p:nvSpPr>
-            <p:cNvPr id="29" name="tx29"/>
+            <p:cNvPr id="30" name="tx30"/>
             <p:cNvSpPr/>
             <p:nvPr/>
           </p:nvSpPr>
           <p:spPr>
             <a:xfrm>
-              <a:off x="692708" y="3028808"/>
+              <a:off x="762297" y="2462242"/>
               <a:ext cx="62179" cy="80101"/>
             </a:xfrm>
             <a:prstGeom prst="rect">
@@ -4748,13 +4783,13 @@
         </p:sp>
         <p:sp>
           <p:nvSpPr>
-            <p:cNvPr id="30" name="tx30"/>
+            <p:cNvPr id="31" name="tx31"/>
             <p:cNvSpPr/>
             <p:nvPr/>
           </p:nvSpPr>
           <p:spPr>
             <a:xfrm>
-              <a:off x="692708" y="2199345"/>
+              <a:off x="762297" y="2162908"/>
               <a:ext cx="62179" cy="80101"/>
             </a:xfrm>
             <a:prstGeom prst="rect">
@@ -4794,13 +4829,13 @@
         </p:sp>
         <p:sp>
           <p:nvSpPr>
-            <p:cNvPr id="31" name="tx31"/>
+            <p:cNvPr id="32" name="tx32"/>
             <p:cNvSpPr/>
             <p:nvPr/>
           </p:nvSpPr>
           <p:spPr>
             <a:xfrm>
-              <a:off x="2478335" y="5785772"/>
+              <a:off x="2516846" y="3522791"/>
               <a:ext cx="161574" cy="80101"/>
             </a:xfrm>
             <a:prstGeom prst="rect">
@@ -4840,13 +4875,13 @@
         </p:sp>
         <p:sp>
           <p:nvSpPr>
-            <p:cNvPr id="32" name="tx32"/>
+            <p:cNvPr id="33" name="tx33"/>
             <p:cNvSpPr/>
             <p:nvPr/>
           </p:nvSpPr>
           <p:spPr>
             <a:xfrm>
-              <a:off x="4582608" y="5785772"/>
+              <a:off x="4584458" y="3522791"/>
               <a:ext cx="62179" cy="80101"/>
             </a:xfrm>
             <a:prstGeom prst="rect">
@@ -4886,13 +4921,13 @@
         </p:sp>
         <p:sp>
           <p:nvSpPr>
-            <p:cNvPr id="33" name="tx33"/>
+            <p:cNvPr id="34" name="tx34"/>
             <p:cNvSpPr/>
             <p:nvPr/>
           </p:nvSpPr>
           <p:spPr>
             <a:xfrm>
-              <a:off x="6606094" y="5785772"/>
+              <a:off x="6571282" y="3522791"/>
               <a:ext cx="124358" cy="80101"/>
             </a:xfrm>
             <a:prstGeom prst="rect">
@@ -4932,13 +4967,13 @@
         </p:sp>
         <p:sp>
           <p:nvSpPr>
-            <p:cNvPr id="34" name="tx34"/>
+            <p:cNvPr id="35" name="tx35"/>
             <p:cNvSpPr/>
             <p:nvPr/>
           </p:nvSpPr>
           <p:spPr>
             <a:xfrm>
-              <a:off x="2928340" y="5925448"/>
+              <a:off x="2928340" y="3662467"/>
               <a:ext cx="3578047" cy="100218"/>
             </a:xfrm>
             <a:prstGeom prst="rect">
@@ -4978,13 +5013,13 @@
         </p:sp>
         <p:sp>
           <p:nvSpPr>
-            <p:cNvPr id="35" name="tx35"/>
+            <p:cNvPr id="36" name="tx36"/>
             <p:cNvSpPr/>
             <p:nvPr/>
           </p:nvSpPr>
           <p:spPr>
             <a:xfrm rot="-5400000">
-              <a:off x="68446" y="3848213"/>
+              <a:off x="138035" y="2751517"/>
               <a:ext cx="1016904" cy="100218"/>
             </a:xfrm>
             <a:prstGeom prst="rect">
@@ -5024,13 +5059,13 @@
         </p:sp>
         <p:sp>
           <p:nvSpPr>
-            <p:cNvPr id="36" name="tx36"/>
+            <p:cNvPr id="37" name="tx37"/>
             <p:cNvSpPr/>
             <p:nvPr/>
           </p:nvSpPr>
           <p:spPr>
             <a:xfrm>
-              <a:off x="817517" y="1896563"/>
+              <a:off x="887106" y="1966152"/>
               <a:ext cx="6985375" cy="82021"/>
             </a:xfrm>
             <a:prstGeom prst="rect">
@@ -5070,13 +5105,3656 @@
         </p:sp>
         <p:sp>
           <p:nvSpPr>
-            <p:cNvPr id="37" name="tx37"/>
+            <p:cNvPr id="38" name="tx38"/>
             <p:cNvSpPr/>
             <p:nvPr/>
           </p:nvSpPr>
           <p:spPr>
             <a:xfrm>
-              <a:off x="817517" y="1669789"/>
+              <a:off x="887106" y="1739378"/>
+              <a:ext cx="3732672" cy="120152"/>
+            </a:xfrm>
+            <a:prstGeom prst="rect">
+              <a:avLst/>
+            </a:prstGeom>
+            <a:noFill/>
+          </p:spPr>
+          <p:txBody>
+            <a:bodyPr lIns="0" rIns="0" tIns="0" bIns="0" anchorCtr="1" anchor="ctr" wrap="none"/>
+            <a:lstStyle/>
+            <a:p>
+              <a:pPr algn="l" marL="0" marR="0" indent="0">
+                <a:lnSpc>
+                  <a:spcPts val="1320"/>
+                </a:lnSpc>
+                <a:spcBef>
+                  <a:spcPts val="0"/>
+                </a:spcBef>
+                <a:spcAft>
+                  <a:spcPts val="0"/>
+                </a:spcAft>
+              </a:pPr>
+              <a:r>
+                <a:rPr sz="1320">
+                  <a:solidFill>
+                    <a:srgbClr val="000000">
+                      <a:alpha val="100000"/>
+                    </a:srgbClr>
+                  </a:solidFill>
+                  <a:latin typeface="Helvetica"/>
+                  <a:cs typeface="Helvetica"/>
+                </a:rPr>
+                <a:t>Thrombocytopenia Grade 2 (Carboplatin AUC ≥ 3)</a:t>
+              </a:r>
+            </a:p>
+          </p:txBody>
+        </p:sp>
+        <p:sp>
+          <p:nvSpPr>
+            <p:cNvPr id="39" name="pl39"/>
+            <p:cNvSpPr/>
+            <p:nvPr/>
+          </p:nvSpPr>
+          <p:spPr>
+            <a:xfrm>
+              <a:off x="887106" y="5444019"/>
+              <a:ext cx="7660515" cy="0"/>
+            </a:xfrm>
+            <a:custGeom>
+              <a:avLst/>
+              <a:pathLst>
+                <a:path w="7660515" h="0">
+                  <a:moveTo>
+                    <a:pt x="0" y="0"/>
+                  </a:moveTo>
+                  <a:lnTo>
+                    <a:pt x="7660515" y="0"/>
+                  </a:lnTo>
+                  <a:lnTo>
+                    <a:pt x="7660515" y="0"/>
+                  </a:lnTo>
+                </a:path>
+              </a:pathLst>
+            </a:custGeom>
+            <a:ln w="6775" cap="flat">
+              <a:solidFill>
+                <a:srgbClr val="EBEBEB">
+                  <a:alpha val="100000"/>
+                </a:srgbClr>
+              </a:solidFill>
+              <a:prstDash val="solid"/>
+              <a:round/>
+            </a:ln>
+          </p:spPr>
+          <p:txBody>
+            <a:bodyPr/>
+            <a:lstStyle/>
+            <a:p/>
+          </p:txBody>
+        </p:sp>
+        <p:sp>
+          <p:nvSpPr>
+            <p:cNvPr id="40" name="pl40"/>
+            <p:cNvSpPr/>
+            <p:nvPr/>
+          </p:nvSpPr>
+          <p:spPr>
+            <a:xfrm>
+              <a:off x="887106" y="5144686"/>
+              <a:ext cx="7660515" cy="0"/>
+            </a:xfrm>
+            <a:custGeom>
+              <a:avLst/>
+              <a:pathLst>
+                <a:path w="7660515" h="0">
+                  <a:moveTo>
+                    <a:pt x="0" y="0"/>
+                  </a:moveTo>
+                  <a:lnTo>
+                    <a:pt x="7660515" y="0"/>
+                  </a:lnTo>
+                  <a:lnTo>
+                    <a:pt x="7660515" y="0"/>
+                  </a:lnTo>
+                </a:path>
+              </a:pathLst>
+            </a:custGeom>
+            <a:ln w="6775" cap="flat">
+              <a:solidFill>
+                <a:srgbClr val="EBEBEB">
+                  <a:alpha val="100000"/>
+                </a:srgbClr>
+              </a:solidFill>
+              <a:prstDash val="solid"/>
+              <a:round/>
+            </a:ln>
+          </p:spPr>
+          <p:txBody>
+            <a:bodyPr/>
+            <a:lstStyle/>
+            <a:p/>
+          </p:txBody>
+        </p:sp>
+        <p:sp>
+          <p:nvSpPr>
+            <p:cNvPr id="41" name="pl41"/>
+            <p:cNvSpPr/>
+            <p:nvPr/>
+          </p:nvSpPr>
+          <p:spPr>
+            <a:xfrm>
+              <a:off x="887106" y="4845352"/>
+              <a:ext cx="7660515" cy="0"/>
+            </a:xfrm>
+            <a:custGeom>
+              <a:avLst/>
+              <a:pathLst>
+                <a:path w="7660515" h="0">
+                  <a:moveTo>
+                    <a:pt x="0" y="0"/>
+                  </a:moveTo>
+                  <a:lnTo>
+                    <a:pt x="7660515" y="0"/>
+                  </a:lnTo>
+                  <a:lnTo>
+                    <a:pt x="7660515" y="0"/>
+                  </a:lnTo>
+                </a:path>
+              </a:pathLst>
+            </a:custGeom>
+            <a:ln w="6775" cap="flat">
+              <a:solidFill>
+                <a:srgbClr val="EBEBEB">
+                  <a:alpha val="100000"/>
+                </a:srgbClr>
+              </a:solidFill>
+              <a:prstDash val="solid"/>
+              <a:round/>
+            </a:ln>
+          </p:spPr>
+          <p:txBody>
+            <a:bodyPr/>
+            <a:lstStyle/>
+            <a:p/>
+          </p:txBody>
+        </p:sp>
+        <p:sp>
+          <p:nvSpPr>
+            <p:cNvPr id="42" name="pl42"/>
+            <p:cNvSpPr/>
+            <p:nvPr/>
+          </p:nvSpPr>
+          <p:spPr>
+            <a:xfrm>
+              <a:off x="887106" y="4546018"/>
+              <a:ext cx="7660515" cy="0"/>
+            </a:xfrm>
+            <a:custGeom>
+              <a:avLst/>
+              <a:pathLst>
+                <a:path w="7660515" h="0">
+                  <a:moveTo>
+                    <a:pt x="0" y="0"/>
+                  </a:moveTo>
+                  <a:lnTo>
+                    <a:pt x="7660515" y="0"/>
+                  </a:lnTo>
+                  <a:lnTo>
+                    <a:pt x="7660515" y="0"/>
+                  </a:lnTo>
+                </a:path>
+              </a:pathLst>
+            </a:custGeom>
+            <a:ln w="6775" cap="flat">
+              <a:solidFill>
+                <a:srgbClr val="EBEBEB">
+                  <a:alpha val="100000"/>
+                </a:srgbClr>
+              </a:solidFill>
+              <a:prstDash val="solid"/>
+              <a:round/>
+            </a:ln>
+          </p:spPr>
+          <p:txBody>
+            <a:bodyPr/>
+            <a:lstStyle/>
+            <a:p/>
+          </p:txBody>
+        </p:sp>
+        <p:sp>
+          <p:nvSpPr>
+            <p:cNvPr id="43" name="pl43"/>
+            <p:cNvSpPr/>
+            <p:nvPr/>
+          </p:nvSpPr>
+          <p:spPr>
+            <a:xfrm>
+              <a:off x="983303" y="4336484"/>
+              <a:ext cx="0" cy="1317069"/>
+            </a:xfrm>
+            <a:custGeom>
+              <a:avLst/>
+              <a:pathLst>
+                <a:path w="0" h="1317069">
+                  <a:moveTo>
+                    <a:pt x="0" y="1317069"/>
+                  </a:moveTo>
+                  <a:lnTo>
+                    <a:pt x="0" y="0"/>
+                  </a:lnTo>
+                  <a:lnTo>
+                    <a:pt x="0" y="0"/>
+                  </a:lnTo>
+                </a:path>
+              </a:pathLst>
+            </a:custGeom>
+            <a:ln w="6775" cap="flat">
+              <a:solidFill>
+                <a:srgbClr val="EBEBEB">
+                  <a:alpha val="100000"/>
+                </a:srgbClr>
+              </a:solidFill>
+              <a:prstDash val="solid"/>
+              <a:round/>
+            </a:ln>
+          </p:spPr>
+          <p:txBody>
+            <a:bodyPr/>
+            <a:lstStyle/>
+            <a:p/>
+          </p:txBody>
+        </p:sp>
+        <p:sp>
+          <p:nvSpPr>
+            <p:cNvPr id="44" name="pl44"/>
+            <p:cNvSpPr/>
+            <p:nvPr/>
+          </p:nvSpPr>
+          <p:spPr>
+            <a:xfrm>
+              <a:off x="1790468" y="4336484"/>
+              <a:ext cx="0" cy="1317069"/>
+            </a:xfrm>
+            <a:custGeom>
+              <a:avLst/>
+              <a:pathLst>
+                <a:path w="0" h="1317069">
+                  <a:moveTo>
+                    <a:pt x="0" y="1317069"/>
+                  </a:moveTo>
+                  <a:lnTo>
+                    <a:pt x="0" y="0"/>
+                  </a:lnTo>
+                  <a:lnTo>
+                    <a:pt x="0" y="0"/>
+                  </a:lnTo>
+                </a:path>
+              </a:pathLst>
+            </a:custGeom>
+            <a:ln w="6775" cap="flat">
+              <a:solidFill>
+                <a:srgbClr val="EBEBEB">
+                  <a:alpha val="100000"/>
+                </a:srgbClr>
+              </a:solidFill>
+              <a:prstDash val="solid"/>
+              <a:round/>
+            </a:ln>
+          </p:spPr>
+          <p:txBody>
+            <a:bodyPr/>
+            <a:lstStyle/>
+            <a:p/>
+          </p:txBody>
+        </p:sp>
+        <p:sp>
+          <p:nvSpPr>
+            <p:cNvPr id="45" name="pl45"/>
+            <p:cNvSpPr/>
+            <p:nvPr/>
+          </p:nvSpPr>
+          <p:spPr>
+            <a:xfrm>
+              <a:off x="2597634" y="4336484"/>
+              <a:ext cx="0" cy="1317069"/>
+            </a:xfrm>
+            <a:custGeom>
+              <a:avLst/>
+              <a:pathLst>
+                <a:path w="0" h="1317069">
+                  <a:moveTo>
+                    <a:pt x="0" y="1317069"/>
+                  </a:moveTo>
+                  <a:lnTo>
+                    <a:pt x="0" y="0"/>
+                  </a:lnTo>
+                  <a:lnTo>
+                    <a:pt x="0" y="0"/>
+                  </a:lnTo>
+                </a:path>
+              </a:pathLst>
+            </a:custGeom>
+            <a:ln w="6775" cap="flat">
+              <a:solidFill>
+                <a:srgbClr val="EBEBEB">
+                  <a:alpha val="100000"/>
+                </a:srgbClr>
+              </a:solidFill>
+              <a:prstDash val="solid"/>
+              <a:round/>
+            </a:ln>
+          </p:spPr>
+          <p:txBody>
+            <a:bodyPr/>
+            <a:lstStyle/>
+            <a:p/>
+          </p:txBody>
+        </p:sp>
+        <p:sp>
+          <p:nvSpPr>
+            <p:cNvPr id="46" name="pl46"/>
+            <p:cNvSpPr/>
+            <p:nvPr/>
+          </p:nvSpPr>
+          <p:spPr>
+            <a:xfrm>
+              <a:off x="3404799" y="4336484"/>
+              <a:ext cx="0" cy="1317069"/>
+            </a:xfrm>
+            <a:custGeom>
+              <a:avLst/>
+              <a:pathLst>
+                <a:path w="0" h="1317069">
+                  <a:moveTo>
+                    <a:pt x="0" y="1317069"/>
+                  </a:moveTo>
+                  <a:lnTo>
+                    <a:pt x="0" y="0"/>
+                  </a:lnTo>
+                  <a:lnTo>
+                    <a:pt x="0" y="0"/>
+                  </a:lnTo>
+                </a:path>
+              </a:pathLst>
+            </a:custGeom>
+            <a:ln w="6775" cap="flat">
+              <a:solidFill>
+                <a:srgbClr val="EBEBEB">
+                  <a:alpha val="100000"/>
+                </a:srgbClr>
+              </a:solidFill>
+              <a:prstDash val="solid"/>
+              <a:round/>
+            </a:ln>
+          </p:spPr>
+          <p:txBody>
+            <a:bodyPr/>
+            <a:lstStyle/>
+            <a:p/>
+          </p:txBody>
+        </p:sp>
+        <p:sp>
+          <p:nvSpPr>
+            <p:cNvPr id="47" name="pl47"/>
+            <p:cNvSpPr/>
+            <p:nvPr/>
+          </p:nvSpPr>
+          <p:spPr>
+            <a:xfrm>
+              <a:off x="4211965" y="4336484"/>
+              <a:ext cx="0" cy="1317069"/>
+            </a:xfrm>
+            <a:custGeom>
+              <a:avLst/>
+              <a:pathLst>
+                <a:path w="0" h="1317069">
+                  <a:moveTo>
+                    <a:pt x="0" y="1317069"/>
+                  </a:moveTo>
+                  <a:lnTo>
+                    <a:pt x="0" y="0"/>
+                  </a:lnTo>
+                  <a:lnTo>
+                    <a:pt x="0" y="0"/>
+                  </a:lnTo>
+                </a:path>
+              </a:pathLst>
+            </a:custGeom>
+            <a:ln w="6775" cap="flat">
+              <a:solidFill>
+                <a:srgbClr val="EBEBEB">
+                  <a:alpha val="100000"/>
+                </a:srgbClr>
+              </a:solidFill>
+              <a:prstDash val="solid"/>
+              <a:round/>
+            </a:ln>
+          </p:spPr>
+          <p:txBody>
+            <a:bodyPr/>
+            <a:lstStyle/>
+            <a:p/>
+          </p:txBody>
+        </p:sp>
+        <p:sp>
+          <p:nvSpPr>
+            <p:cNvPr id="48" name="pl48"/>
+            <p:cNvSpPr/>
+            <p:nvPr/>
+          </p:nvSpPr>
+          <p:spPr>
+            <a:xfrm>
+              <a:off x="5019130" y="4336484"/>
+              <a:ext cx="0" cy="1317069"/>
+            </a:xfrm>
+            <a:custGeom>
+              <a:avLst/>
+              <a:pathLst>
+                <a:path w="0" h="1317069">
+                  <a:moveTo>
+                    <a:pt x="0" y="1317069"/>
+                  </a:moveTo>
+                  <a:lnTo>
+                    <a:pt x="0" y="0"/>
+                  </a:lnTo>
+                  <a:lnTo>
+                    <a:pt x="0" y="0"/>
+                  </a:lnTo>
+                </a:path>
+              </a:pathLst>
+            </a:custGeom>
+            <a:ln w="6775" cap="flat">
+              <a:solidFill>
+                <a:srgbClr val="EBEBEB">
+                  <a:alpha val="100000"/>
+                </a:srgbClr>
+              </a:solidFill>
+              <a:prstDash val="solid"/>
+              <a:round/>
+            </a:ln>
+          </p:spPr>
+          <p:txBody>
+            <a:bodyPr/>
+            <a:lstStyle/>
+            <a:p/>
+          </p:txBody>
+        </p:sp>
+        <p:sp>
+          <p:nvSpPr>
+            <p:cNvPr id="49" name="pl49"/>
+            <p:cNvSpPr/>
+            <p:nvPr/>
+          </p:nvSpPr>
+          <p:spPr>
+            <a:xfrm>
+              <a:off x="5826296" y="4336484"/>
+              <a:ext cx="0" cy="1317069"/>
+            </a:xfrm>
+            <a:custGeom>
+              <a:avLst/>
+              <a:pathLst>
+                <a:path w="0" h="1317069">
+                  <a:moveTo>
+                    <a:pt x="0" y="1317069"/>
+                  </a:moveTo>
+                  <a:lnTo>
+                    <a:pt x="0" y="0"/>
+                  </a:lnTo>
+                  <a:lnTo>
+                    <a:pt x="0" y="0"/>
+                  </a:lnTo>
+                </a:path>
+              </a:pathLst>
+            </a:custGeom>
+            <a:ln w="6775" cap="flat">
+              <a:solidFill>
+                <a:srgbClr val="EBEBEB">
+                  <a:alpha val="100000"/>
+                </a:srgbClr>
+              </a:solidFill>
+              <a:prstDash val="solid"/>
+              <a:round/>
+            </a:ln>
+          </p:spPr>
+          <p:txBody>
+            <a:bodyPr/>
+            <a:lstStyle/>
+            <a:p/>
+          </p:txBody>
+        </p:sp>
+        <p:sp>
+          <p:nvSpPr>
+            <p:cNvPr id="50" name="pl50"/>
+            <p:cNvSpPr/>
+            <p:nvPr/>
+          </p:nvSpPr>
+          <p:spPr>
+            <a:xfrm>
+              <a:off x="6633461" y="4336484"/>
+              <a:ext cx="0" cy="1317069"/>
+            </a:xfrm>
+            <a:custGeom>
+              <a:avLst/>
+              <a:pathLst>
+                <a:path w="0" h="1317069">
+                  <a:moveTo>
+                    <a:pt x="0" y="1317069"/>
+                  </a:moveTo>
+                  <a:lnTo>
+                    <a:pt x="0" y="0"/>
+                  </a:lnTo>
+                  <a:lnTo>
+                    <a:pt x="0" y="0"/>
+                  </a:lnTo>
+                </a:path>
+              </a:pathLst>
+            </a:custGeom>
+            <a:ln w="6775" cap="flat">
+              <a:solidFill>
+                <a:srgbClr val="EBEBEB">
+                  <a:alpha val="100000"/>
+                </a:srgbClr>
+              </a:solidFill>
+              <a:prstDash val="solid"/>
+              <a:round/>
+            </a:ln>
+          </p:spPr>
+          <p:txBody>
+            <a:bodyPr/>
+            <a:lstStyle/>
+            <a:p/>
+          </p:txBody>
+        </p:sp>
+        <p:sp>
+          <p:nvSpPr>
+            <p:cNvPr id="51" name="pl51"/>
+            <p:cNvSpPr/>
+            <p:nvPr/>
+          </p:nvSpPr>
+          <p:spPr>
+            <a:xfrm>
+              <a:off x="7440627" y="4336484"/>
+              <a:ext cx="0" cy="1317069"/>
+            </a:xfrm>
+            <a:custGeom>
+              <a:avLst/>
+              <a:pathLst>
+                <a:path w="0" h="1317069">
+                  <a:moveTo>
+                    <a:pt x="0" y="1317069"/>
+                  </a:moveTo>
+                  <a:lnTo>
+                    <a:pt x="0" y="0"/>
+                  </a:lnTo>
+                  <a:lnTo>
+                    <a:pt x="0" y="0"/>
+                  </a:lnTo>
+                </a:path>
+              </a:pathLst>
+            </a:custGeom>
+            <a:ln w="6775" cap="flat">
+              <a:solidFill>
+                <a:srgbClr val="EBEBEB">
+                  <a:alpha val="100000"/>
+                </a:srgbClr>
+              </a:solidFill>
+              <a:prstDash val="solid"/>
+              <a:round/>
+            </a:ln>
+          </p:spPr>
+          <p:txBody>
+            <a:bodyPr/>
+            <a:lstStyle/>
+            <a:p/>
+          </p:txBody>
+        </p:sp>
+        <p:sp>
+          <p:nvSpPr>
+            <p:cNvPr id="52" name="pl52"/>
+            <p:cNvSpPr/>
+            <p:nvPr/>
+          </p:nvSpPr>
+          <p:spPr>
+            <a:xfrm>
+              <a:off x="8247792" y="4336484"/>
+              <a:ext cx="0" cy="1317069"/>
+            </a:xfrm>
+            <a:custGeom>
+              <a:avLst/>
+              <a:pathLst>
+                <a:path w="0" h="1317069">
+                  <a:moveTo>
+                    <a:pt x="0" y="1317069"/>
+                  </a:moveTo>
+                  <a:lnTo>
+                    <a:pt x="0" y="0"/>
+                  </a:lnTo>
+                  <a:lnTo>
+                    <a:pt x="0" y="0"/>
+                  </a:lnTo>
+                </a:path>
+              </a:pathLst>
+            </a:custGeom>
+            <a:ln w="6775" cap="flat">
+              <a:solidFill>
+                <a:srgbClr val="EBEBEB">
+                  <a:alpha val="100000"/>
+                </a:srgbClr>
+              </a:solidFill>
+              <a:prstDash val="solid"/>
+              <a:round/>
+            </a:ln>
+          </p:spPr>
+          <p:txBody>
+            <a:bodyPr/>
+            <a:lstStyle/>
+            <a:p/>
+          </p:txBody>
+        </p:sp>
+        <p:sp>
+          <p:nvSpPr>
+            <p:cNvPr id="53" name="pl53"/>
+            <p:cNvSpPr/>
+            <p:nvPr/>
+          </p:nvSpPr>
+          <p:spPr>
+            <a:xfrm>
+              <a:off x="887106" y="5593686"/>
+              <a:ext cx="7660515" cy="0"/>
+            </a:xfrm>
+            <a:custGeom>
+              <a:avLst/>
+              <a:pathLst>
+                <a:path w="7660515" h="0">
+                  <a:moveTo>
+                    <a:pt x="0" y="0"/>
+                  </a:moveTo>
+                  <a:lnTo>
+                    <a:pt x="7660515" y="0"/>
+                  </a:lnTo>
+                  <a:lnTo>
+                    <a:pt x="7660515" y="0"/>
+                  </a:lnTo>
+                </a:path>
+              </a:pathLst>
+            </a:custGeom>
+            <a:ln w="13550" cap="flat">
+              <a:solidFill>
+                <a:srgbClr val="EBEBEB">
+                  <a:alpha val="100000"/>
+                </a:srgbClr>
+              </a:solidFill>
+              <a:prstDash val="solid"/>
+              <a:round/>
+            </a:ln>
+          </p:spPr>
+          <p:txBody>
+            <a:bodyPr/>
+            <a:lstStyle/>
+            <a:p/>
+          </p:txBody>
+        </p:sp>
+        <p:sp>
+          <p:nvSpPr>
+            <p:cNvPr id="54" name="pl54"/>
+            <p:cNvSpPr/>
+            <p:nvPr/>
+          </p:nvSpPr>
+          <p:spPr>
+            <a:xfrm>
+              <a:off x="887106" y="5294352"/>
+              <a:ext cx="7660515" cy="0"/>
+            </a:xfrm>
+            <a:custGeom>
+              <a:avLst/>
+              <a:pathLst>
+                <a:path w="7660515" h="0">
+                  <a:moveTo>
+                    <a:pt x="0" y="0"/>
+                  </a:moveTo>
+                  <a:lnTo>
+                    <a:pt x="7660515" y="0"/>
+                  </a:lnTo>
+                  <a:lnTo>
+                    <a:pt x="7660515" y="0"/>
+                  </a:lnTo>
+                </a:path>
+              </a:pathLst>
+            </a:custGeom>
+            <a:ln w="13550" cap="flat">
+              <a:solidFill>
+                <a:srgbClr val="EBEBEB">
+                  <a:alpha val="100000"/>
+                </a:srgbClr>
+              </a:solidFill>
+              <a:prstDash val="solid"/>
+              <a:round/>
+            </a:ln>
+          </p:spPr>
+          <p:txBody>
+            <a:bodyPr/>
+            <a:lstStyle/>
+            <a:p/>
+          </p:txBody>
+        </p:sp>
+        <p:sp>
+          <p:nvSpPr>
+            <p:cNvPr id="55" name="pl55"/>
+            <p:cNvSpPr/>
+            <p:nvPr/>
+          </p:nvSpPr>
+          <p:spPr>
+            <a:xfrm>
+              <a:off x="887106" y="4995019"/>
+              <a:ext cx="7660515" cy="0"/>
+            </a:xfrm>
+            <a:custGeom>
+              <a:avLst/>
+              <a:pathLst>
+                <a:path w="7660515" h="0">
+                  <a:moveTo>
+                    <a:pt x="0" y="0"/>
+                  </a:moveTo>
+                  <a:lnTo>
+                    <a:pt x="7660515" y="0"/>
+                  </a:lnTo>
+                  <a:lnTo>
+                    <a:pt x="7660515" y="0"/>
+                  </a:lnTo>
+                </a:path>
+              </a:pathLst>
+            </a:custGeom>
+            <a:ln w="13550" cap="flat">
+              <a:solidFill>
+                <a:srgbClr val="EBEBEB">
+                  <a:alpha val="100000"/>
+                </a:srgbClr>
+              </a:solidFill>
+              <a:prstDash val="solid"/>
+              <a:round/>
+            </a:ln>
+          </p:spPr>
+          <p:txBody>
+            <a:bodyPr/>
+            <a:lstStyle/>
+            <a:p/>
+          </p:txBody>
+        </p:sp>
+        <p:sp>
+          <p:nvSpPr>
+            <p:cNvPr id="56" name="pl56"/>
+            <p:cNvSpPr/>
+            <p:nvPr/>
+          </p:nvSpPr>
+          <p:spPr>
+            <a:xfrm>
+              <a:off x="887106" y="4695685"/>
+              <a:ext cx="7660515" cy="0"/>
+            </a:xfrm>
+            <a:custGeom>
+              <a:avLst/>
+              <a:pathLst>
+                <a:path w="7660515" h="0">
+                  <a:moveTo>
+                    <a:pt x="0" y="0"/>
+                  </a:moveTo>
+                  <a:lnTo>
+                    <a:pt x="7660515" y="0"/>
+                  </a:lnTo>
+                  <a:lnTo>
+                    <a:pt x="7660515" y="0"/>
+                  </a:lnTo>
+                </a:path>
+              </a:pathLst>
+            </a:custGeom>
+            <a:ln w="13550" cap="flat">
+              <a:solidFill>
+                <a:srgbClr val="EBEBEB">
+                  <a:alpha val="100000"/>
+                </a:srgbClr>
+              </a:solidFill>
+              <a:prstDash val="solid"/>
+              <a:round/>
+            </a:ln>
+          </p:spPr>
+          <p:txBody>
+            <a:bodyPr/>
+            <a:lstStyle/>
+            <a:p/>
+          </p:txBody>
+        </p:sp>
+        <p:sp>
+          <p:nvSpPr>
+            <p:cNvPr id="57" name="pl57"/>
+            <p:cNvSpPr/>
+            <p:nvPr/>
+          </p:nvSpPr>
+          <p:spPr>
+            <a:xfrm>
+              <a:off x="887106" y="4396351"/>
+              <a:ext cx="7660515" cy="0"/>
+            </a:xfrm>
+            <a:custGeom>
+              <a:avLst/>
+              <a:pathLst>
+                <a:path w="7660515" h="0">
+                  <a:moveTo>
+                    <a:pt x="0" y="0"/>
+                  </a:moveTo>
+                  <a:lnTo>
+                    <a:pt x="7660515" y="0"/>
+                  </a:lnTo>
+                  <a:lnTo>
+                    <a:pt x="7660515" y="0"/>
+                  </a:lnTo>
+                </a:path>
+              </a:pathLst>
+            </a:custGeom>
+            <a:ln w="13550" cap="flat">
+              <a:solidFill>
+                <a:srgbClr val="EBEBEB">
+                  <a:alpha val="100000"/>
+                </a:srgbClr>
+              </a:solidFill>
+              <a:prstDash val="solid"/>
+              <a:round/>
+            </a:ln>
+          </p:spPr>
+          <p:txBody>
+            <a:bodyPr/>
+            <a:lstStyle/>
+            <a:p/>
+          </p:txBody>
+        </p:sp>
+        <p:sp>
+          <p:nvSpPr>
+            <p:cNvPr id="58" name="pl58"/>
+            <p:cNvSpPr/>
+            <p:nvPr/>
+          </p:nvSpPr>
+          <p:spPr>
+            <a:xfrm>
+              <a:off x="1386885" y="4336484"/>
+              <a:ext cx="0" cy="1317069"/>
+            </a:xfrm>
+            <a:custGeom>
+              <a:avLst/>
+              <a:pathLst>
+                <a:path w="0" h="1317069">
+                  <a:moveTo>
+                    <a:pt x="0" y="1317069"/>
+                  </a:moveTo>
+                  <a:lnTo>
+                    <a:pt x="0" y="0"/>
+                  </a:lnTo>
+                  <a:lnTo>
+                    <a:pt x="0" y="0"/>
+                  </a:lnTo>
+                </a:path>
+              </a:pathLst>
+            </a:custGeom>
+            <a:ln w="13550" cap="flat">
+              <a:solidFill>
+                <a:srgbClr val="EBEBEB">
+                  <a:alpha val="100000"/>
+                </a:srgbClr>
+              </a:solidFill>
+              <a:prstDash val="solid"/>
+              <a:round/>
+            </a:ln>
+          </p:spPr>
+          <p:txBody>
+            <a:bodyPr/>
+            <a:lstStyle/>
+            <a:p/>
+          </p:txBody>
+        </p:sp>
+        <p:sp>
+          <p:nvSpPr>
+            <p:cNvPr id="59" name="pl59"/>
+            <p:cNvSpPr/>
+            <p:nvPr/>
+          </p:nvSpPr>
+          <p:spPr>
+            <a:xfrm>
+              <a:off x="2194051" y="4336484"/>
+              <a:ext cx="0" cy="1317069"/>
+            </a:xfrm>
+            <a:custGeom>
+              <a:avLst/>
+              <a:pathLst>
+                <a:path w="0" h="1317069">
+                  <a:moveTo>
+                    <a:pt x="0" y="1317069"/>
+                  </a:moveTo>
+                  <a:lnTo>
+                    <a:pt x="0" y="0"/>
+                  </a:lnTo>
+                  <a:lnTo>
+                    <a:pt x="0" y="0"/>
+                  </a:lnTo>
+                </a:path>
+              </a:pathLst>
+            </a:custGeom>
+            <a:ln w="13550" cap="flat">
+              <a:solidFill>
+                <a:srgbClr val="EBEBEB">
+                  <a:alpha val="100000"/>
+                </a:srgbClr>
+              </a:solidFill>
+              <a:prstDash val="solid"/>
+              <a:round/>
+            </a:ln>
+          </p:spPr>
+          <p:txBody>
+            <a:bodyPr/>
+            <a:lstStyle/>
+            <a:p/>
+          </p:txBody>
+        </p:sp>
+        <p:sp>
+          <p:nvSpPr>
+            <p:cNvPr id="60" name="pl60"/>
+            <p:cNvSpPr/>
+            <p:nvPr/>
+          </p:nvSpPr>
+          <p:spPr>
+            <a:xfrm>
+              <a:off x="3001216" y="4336484"/>
+              <a:ext cx="0" cy="1317069"/>
+            </a:xfrm>
+            <a:custGeom>
+              <a:avLst/>
+              <a:pathLst>
+                <a:path w="0" h="1317069">
+                  <a:moveTo>
+                    <a:pt x="0" y="1317069"/>
+                  </a:moveTo>
+                  <a:lnTo>
+                    <a:pt x="0" y="0"/>
+                  </a:lnTo>
+                  <a:lnTo>
+                    <a:pt x="0" y="0"/>
+                  </a:lnTo>
+                </a:path>
+              </a:pathLst>
+            </a:custGeom>
+            <a:ln w="13550" cap="flat">
+              <a:solidFill>
+                <a:srgbClr val="EBEBEB">
+                  <a:alpha val="100000"/>
+                </a:srgbClr>
+              </a:solidFill>
+              <a:prstDash val="solid"/>
+              <a:round/>
+            </a:ln>
+          </p:spPr>
+          <p:txBody>
+            <a:bodyPr/>
+            <a:lstStyle/>
+            <a:p/>
+          </p:txBody>
+        </p:sp>
+        <p:sp>
+          <p:nvSpPr>
+            <p:cNvPr id="61" name="pl61"/>
+            <p:cNvSpPr/>
+            <p:nvPr/>
+          </p:nvSpPr>
+          <p:spPr>
+            <a:xfrm>
+              <a:off x="3808382" y="4336484"/>
+              <a:ext cx="0" cy="1317069"/>
+            </a:xfrm>
+            <a:custGeom>
+              <a:avLst/>
+              <a:pathLst>
+                <a:path w="0" h="1317069">
+                  <a:moveTo>
+                    <a:pt x="0" y="1317069"/>
+                  </a:moveTo>
+                  <a:lnTo>
+                    <a:pt x="0" y="0"/>
+                  </a:lnTo>
+                  <a:lnTo>
+                    <a:pt x="0" y="0"/>
+                  </a:lnTo>
+                </a:path>
+              </a:pathLst>
+            </a:custGeom>
+            <a:ln w="13550" cap="flat">
+              <a:solidFill>
+                <a:srgbClr val="EBEBEB">
+                  <a:alpha val="100000"/>
+                </a:srgbClr>
+              </a:solidFill>
+              <a:prstDash val="solid"/>
+              <a:round/>
+            </a:ln>
+          </p:spPr>
+          <p:txBody>
+            <a:bodyPr/>
+            <a:lstStyle/>
+            <a:p/>
+          </p:txBody>
+        </p:sp>
+        <p:sp>
+          <p:nvSpPr>
+            <p:cNvPr id="62" name="pl62"/>
+            <p:cNvSpPr/>
+            <p:nvPr/>
+          </p:nvSpPr>
+          <p:spPr>
+            <a:xfrm>
+              <a:off x="4615547" y="4336484"/>
+              <a:ext cx="0" cy="1317069"/>
+            </a:xfrm>
+            <a:custGeom>
+              <a:avLst/>
+              <a:pathLst>
+                <a:path w="0" h="1317069">
+                  <a:moveTo>
+                    <a:pt x="0" y="1317069"/>
+                  </a:moveTo>
+                  <a:lnTo>
+                    <a:pt x="0" y="0"/>
+                  </a:lnTo>
+                  <a:lnTo>
+                    <a:pt x="0" y="0"/>
+                  </a:lnTo>
+                </a:path>
+              </a:pathLst>
+            </a:custGeom>
+            <a:ln w="13550" cap="flat">
+              <a:solidFill>
+                <a:srgbClr val="EBEBEB">
+                  <a:alpha val="100000"/>
+                </a:srgbClr>
+              </a:solidFill>
+              <a:prstDash val="solid"/>
+              <a:round/>
+            </a:ln>
+          </p:spPr>
+          <p:txBody>
+            <a:bodyPr/>
+            <a:lstStyle/>
+            <a:p/>
+          </p:txBody>
+        </p:sp>
+        <p:sp>
+          <p:nvSpPr>
+            <p:cNvPr id="63" name="pl63"/>
+            <p:cNvSpPr/>
+            <p:nvPr/>
+          </p:nvSpPr>
+          <p:spPr>
+            <a:xfrm>
+              <a:off x="5422713" y="4336484"/>
+              <a:ext cx="0" cy="1317069"/>
+            </a:xfrm>
+            <a:custGeom>
+              <a:avLst/>
+              <a:pathLst>
+                <a:path w="0" h="1317069">
+                  <a:moveTo>
+                    <a:pt x="0" y="1317069"/>
+                  </a:moveTo>
+                  <a:lnTo>
+                    <a:pt x="0" y="0"/>
+                  </a:lnTo>
+                  <a:lnTo>
+                    <a:pt x="0" y="0"/>
+                  </a:lnTo>
+                </a:path>
+              </a:pathLst>
+            </a:custGeom>
+            <a:ln w="13550" cap="flat">
+              <a:solidFill>
+                <a:srgbClr val="EBEBEB">
+                  <a:alpha val="100000"/>
+                </a:srgbClr>
+              </a:solidFill>
+              <a:prstDash val="solid"/>
+              <a:round/>
+            </a:ln>
+          </p:spPr>
+          <p:txBody>
+            <a:bodyPr/>
+            <a:lstStyle/>
+            <a:p/>
+          </p:txBody>
+        </p:sp>
+        <p:sp>
+          <p:nvSpPr>
+            <p:cNvPr id="64" name="pl64"/>
+            <p:cNvSpPr/>
+            <p:nvPr/>
+          </p:nvSpPr>
+          <p:spPr>
+            <a:xfrm>
+              <a:off x="6229878" y="4336484"/>
+              <a:ext cx="0" cy="1317069"/>
+            </a:xfrm>
+            <a:custGeom>
+              <a:avLst/>
+              <a:pathLst>
+                <a:path w="0" h="1317069">
+                  <a:moveTo>
+                    <a:pt x="0" y="1317069"/>
+                  </a:moveTo>
+                  <a:lnTo>
+                    <a:pt x="0" y="0"/>
+                  </a:lnTo>
+                  <a:lnTo>
+                    <a:pt x="0" y="0"/>
+                  </a:lnTo>
+                </a:path>
+              </a:pathLst>
+            </a:custGeom>
+            <a:ln w="13550" cap="flat">
+              <a:solidFill>
+                <a:srgbClr val="EBEBEB">
+                  <a:alpha val="100000"/>
+                </a:srgbClr>
+              </a:solidFill>
+              <a:prstDash val="solid"/>
+              <a:round/>
+            </a:ln>
+          </p:spPr>
+          <p:txBody>
+            <a:bodyPr/>
+            <a:lstStyle/>
+            <a:p/>
+          </p:txBody>
+        </p:sp>
+        <p:sp>
+          <p:nvSpPr>
+            <p:cNvPr id="65" name="pl65"/>
+            <p:cNvSpPr/>
+            <p:nvPr/>
+          </p:nvSpPr>
+          <p:spPr>
+            <a:xfrm>
+              <a:off x="7037044" y="4336484"/>
+              <a:ext cx="0" cy="1317069"/>
+            </a:xfrm>
+            <a:custGeom>
+              <a:avLst/>
+              <a:pathLst>
+                <a:path w="0" h="1317069">
+                  <a:moveTo>
+                    <a:pt x="0" y="1317069"/>
+                  </a:moveTo>
+                  <a:lnTo>
+                    <a:pt x="0" y="0"/>
+                  </a:lnTo>
+                  <a:lnTo>
+                    <a:pt x="0" y="0"/>
+                  </a:lnTo>
+                </a:path>
+              </a:pathLst>
+            </a:custGeom>
+            <a:ln w="13550" cap="flat">
+              <a:solidFill>
+                <a:srgbClr val="EBEBEB">
+                  <a:alpha val="100000"/>
+                </a:srgbClr>
+              </a:solidFill>
+              <a:prstDash val="solid"/>
+              <a:round/>
+            </a:ln>
+          </p:spPr>
+          <p:txBody>
+            <a:bodyPr/>
+            <a:lstStyle/>
+            <a:p/>
+          </p:txBody>
+        </p:sp>
+        <p:sp>
+          <p:nvSpPr>
+            <p:cNvPr id="66" name="pl66"/>
+            <p:cNvSpPr/>
+            <p:nvPr/>
+          </p:nvSpPr>
+          <p:spPr>
+            <a:xfrm>
+              <a:off x="7844209" y="4336484"/>
+              <a:ext cx="0" cy="1317069"/>
+            </a:xfrm>
+            <a:custGeom>
+              <a:avLst/>
+              <a:pathLst>
+                <a:path w="0" h="1317069">
+                  <a:moveTo>
+                    <a:pt x="0" y="1317069"/>
+                  </a:moveTo>
+                  <a:lnTo>
+                    <a:pt x="0" y="0"/>
+                  </a:lnTo>
+                  <a:lnTo>
+                    <a:pt x="0" y="0"/>
+                  </a:lnTo>
+                </a:path>
+              </a:pathLst>
+            </a:custGeom>
+            <a:ln w="13550" cap="flat">
+              <a:solidFill>
+                <a:srgbClr val="EBEBEB">
+                  <a:alpha val="100000"/>
+                </a:srgbClr>
+              </a:solidFill>
+              <a:prstDash val="solid"/>
+              <a:round/>
+            </a:ln>
+          </p:spPr>
+          <p:txBody>
+            <a:bodyPr/>
+            <a:lstStyle/>
+            <a:p/>
+          </p:txBody>
+        </p:sp>
+        <p:sp>
+          <p:nvSpPr>
+            <p:cNvPr id="67" name="pg67"/>
+            <p:cNvSpPr/>
+            <p:nvPr/>
+          </p:nvSpPr>
+          <p:spPr>
+            <a:xfrm>
+              <a:off x="1235312" y="4336484"/>
+              <a:ext cx="6964104" cy="1233013"/>
+            </a:xfrm>
+            <a:custGeom>
+              <a:avLst/>
+              <a:pathLst>
+                <a:path w="6964104" h="1233013">
+                  <a:moveTo>
+                    <a:pt x="1111927" y="0"/>
+                  </a:moveTo>
+                  <a:lnTo>
+                    <a:pt x="1125511" y="11696"/>
+                  </a:lnTo>
+                  <a:lnTo>
+                    <a:pt x="1195856" y="69459"/>
+                  </a:lnTo>
+                  <a:lnTo>
+                    <a:pt x="1266200" y="124543"/>
+                  </a:lnTo>
+                  <a:lnTo>
+                    <a:pt x="1336545" y="177073"/>
+                  </a:lnTo>
+                  <a:lnTo>
+                    <a:pt x="1406889" y="227166"/>
+                  </a:lnTo>
+                  <a:lnTo>
+                    <a:pt x="1477234" y="274936"/>
+                  </a:lnTo>
+                  <a:lnTo>
+                    <a:pt x="1547578" y="320491"/>
+                  </a:lnTo>
+                  <a:lnTo>
+                    <a:pt x="1617923" y="363933"/>
+                  </a:lnTo>
+                  <a:lnTo>
+                    <a:pt x="1688267" y="405360"/>
+                  </a:lnTo>
+                  <a:lnTo>
+                    <a:pt x="1758612" y="444866"/>
+                  </a:lnTo>
+                  <a:lnTo>
+                    <a:pt x="1828956" y="482540"/>
+                  </a:lnTo>
+                  <a:lnTo>
+                    <a:pt x="1899301" y="518466"/>
+                  </a:lnTo>
+                  <a:lnTo>
+                    <a:pt x="1969645" y="552727"/>
+                  </a:lnTo>
+                  <a:lnTo>
+                    <a:pt x="2039990" y="585398"/>
+                  </a:lnTo>
+                  <a:lnTo>
+                    <a:pt x="2110334" y="616554"/>
+                  </a:lnTo>
+                  <a:lnTo>
+                    <a:pt x="2180679" y="646266"/>
+                  </a:lnTo>
+                  <a:lnTo>
+                    <a:pt x="2251023" y="674599"/>
+                  </a:lnTo>
+                  <a:lnTo>
+                    <a:pt x="2321368" y="701619"/>
+                  </a:lnTo>
+                  <a:lnTo>
+                    <a:pt x="2391712" y="727385"/>
+                  </a:lnTo>
+                  <a:lnTo>
+                    <a:pt x="2462057" y="751956"/>
+                  </a:lnTo>
+                  <a:lnTo>
+                    <a:pt x="2532401" y="775388"/>
+                  </a:lnTo>
+                  <a:lnTo>
+                    <a:pt x="2602746" y="797733"/>
+                  </a:lnTo>
+                  <a:lnTo>
+                    <a:pt x="2673090" y="819042"/>
+                  </a:lnTo>
+                  <a:lnTo>
+                    <a:pt x="2743435" y="839363"/>
+                  </a:lnTo>
+                  <a:lnTo>
+                    <a:pt x="2813779" y="858741"/>
+                  </a:lnTo>
+                  <a:lnTo>
+                    <a:pt x="2884124" y="877220"/>
+                  </a:lnTo>
+                  <a:lnTo>
+                    <a:pt x="2954468" y="894843"/>
+                  </a:lnTo>
+                  <a:lnTo>
+                    <a:pt x="3024813" y="911648"/>
+                  </a:lnTo>
+                  <a:lnTo>
+                    <a:pt x="3095157" y="927674"/>
+                  </a:lnTo>
+                  <a:lnTo>
+                    <a:pt x="3165502" y="942956"/>
+                  </a:lnTo>
+                  <a:lnTo>
+                    <a:pt x="3235846" y="957530"/>
+                  </a:lnTo>
+                  <a:lnTo>
+                    <a:pt x="3306191" y="958443"/>
+                  </a:lnTo>
+                  <a:lnTo>
+                    <a:pt x="3376535" y="959032"/>
+                  </a:lnTo>
+                  <a:lnTo>
+                    <a:pt x="3446880" y="959619"/>
+                  </a:lnTo>
+                  <a:lnTo>
+                    <a:pt x="3517224" y="960205"/>
+                  </a:lnTo>
+                  <a:lnTo>
+                    <a:pt x="3587569" y="960790"/>
+                  </a:lnTo>
+                  <a:lnTo>
+                    <a:pt x="3657913" y="961373"/>
+                  </a:lnTo>
+                  <a:lnTo>
+                    <a:pt x="3728257" y="961956"/>
+                  </a:lnTo>
+                  <a:lnTo>
+                    <a:pt x="3798602" y="962537"/>
+                  </a:lnTo>
+                  <a:lnTo>
+                    <a:pt x="3868946" y="963118"/>
+                  </a:lnTo>
+                  <a:lnTo>
+                    <a:pt x="3939291" y="963697"/>
+                  </a:lnTo>
+                  <a:lnTo>
+                    <a:pt x="4009635" y="964275"/>
+                  </a:lnTo>
+                  <a:lnTo>
+                    <a:pt x="4079980" y="964852"/>
+                  </a:lnTo>
+                  <a:lnTo>
+                    <a:pt x="4150324" y="965427"/>
+                  </a:lnTo>
+                  <a:lnTo>
+                    <a:pt x="4220669" y="966002"/>
+                  </a:lnTo>
+                  <a:lnTo>
+                    <a:pt x="4291013" y="966575"/>
+                  </a:lnTo>
+                  <a:lnTo>
+                    <a:pt x="4361358" y="967148"/>
+                  </a:lnTo>
+                  <a:lnTo>
+                    <a:pt x="4431702" y="967719"/>
+                  </a:lnTo>
+                  <a:lnTo>
+                    <a:pt x="4502047" y="968289"/>
+                  </a:lnTo>
+                  <a:lnTo>
+                    <a:pt x="4572391" y="968858"/>
+                  </a:lnTo>
+                  <a:lnTo>
+                    <a:pt x="4642736" y="969426"/>
+                  </a:lnTo>
+                  <a:lnTo>
+                    <a:pt x="4713080" y="969992"/>
+                  </a:lnTo>
+                  <a:lnTo>
+                    <a:pt x="4783425" y="970558"/>
+                  </a:lnTo>
+                  <a:lnTo>
+                    <a:pt x="4853769" y="971122"/>
+                  </a:lnTo>
+                  <a:lnTo>
+                    <a:pt x="4924114" y="971686"/>
+                  </a:lnTo>
+                  <a:lnTo>
+                    <a:pt x="4994458" y="972248"/>
+                  </a:lnTo>
+                  <a:lnTo>
+                    <a:pt x="5064803" y="972809"/>
+                  </a:lnTo>
+                  <a:lnTo>
+                    <a:pt x="5135147" y="973369"/>
+                  </a:lnTo>
+                  <a:lnTo>
+                    <a:pt x="5205492" y="973928"/>
+                  </a:lnTo>
+                  <a:lnTo>
+                    <a:pt x="5275836" y="974486"/>
+                  </a:lnTo>
+                  <a:lnTo>
+                    <a:pt x="5346181" y="975043"/>
+                  </a:lnTo>
+                  <a:lnTo>
+                    <a:pt x="5416525" y="975598"/>
+                  </a:lnTo>
+                  <a:lnTo>
+                    <a:pt x="5486870" y="976153"/>
+                  </a:lnTo>
+                  <a:lnTo>
+                    <a:pt x="5557214" y="976706"/>
+                  </a:lnTo>
+                  <a:lnTo>
+                    <a:pt x="5627559" y="977259"/>
+                  </a:lnTo>
+                  <a:lnTo>
+                    <a:pt x="5697903" y="977810"/>
+                  </a:lnTo>
+                  <a:lnTo>
+                    <a:pt x="5768248" y="978360"/>
+                  </a:lnTo>
+                  <a:lnTo>
+                    <a:pt x="5838592" y="978909"/>
+                  </a:lnTo>
+                  <a:lnTo>
+                    <a:pt x="5908937" y="979457"/>
+                  </a:lnTo>
+                  <a:lnTo>
+                    <a:pt x="5979281" y="980004"/>
+                  </a:lnTo>
+                  <a:lnTo>
+                    <a:pt x="6049626" y="980550"/>
+                  </a:lnTo>
+                  <a:lnTo>
+                    <a:pt x="6119970" y="981095"/>
+                  </a:lnTo>
+                  <a:lnTo>
+                    <a:pt x="6190315" y="981638"/>
+                  </a:lnTo>
+                  <a:lnTo>
+                    <a:pt x="6260659" y="982181"/>
+                  </a:lnTo>
+                  <a:lnTo>
+                    <a:pt x="6331004" y="982723"/>
+                  </a:lnTo>
+                  <a:lnTo>
+                    <a:pt x="6401348" y="983263"/>
+                  </a:lnTo>
+                  <a:lnTo>
+                    <a:pt x="6471693" y="983803"/>
+                  </a:lnTo>
+                  <a:lnTo>
+                    <a:pt x="6542037" y="984341"/>
+                  </a:lnTo>
+                  <a:lnTo>
+                    <a:pt x="6612382" y="984878"/>
+                  </a:lnTo>
+                  <a:lnTo>
+                    <a:pt x="6682726" y="985415"/>
+                  </a:lnTo>
+                  <a:lnTo>
+                    <a:pt x="6753071" y="985950"/>
+                  </a:lnTo>
+                  <a:lnTo>
+                    <a:pt x="6823415" y="986484"/>
+                  </a:lnTo>
+                  <a:lnTo>
+                    <a:pt x="6893760" y="987017"/>
+                  </a:lnTo>
+                  <a:lnTo>
+                    <a:pt x="6964104" y="987549"/>
+                  </a:lnTo>
+                  <a:lnTo>
+                    <a:pt x="6964104" y="1233013"/>
+                  </a:lnTo>
+                  <a:lnTo>
+                    <a:pt x="6893760" y="1231837"/>
+                  </a:lnTo>
+                  <a:lnTo>
+                    <a:pt x="6823415" y="1230603"/>
+                  </a:lnTo>
+                  <a:lnTo>
+                    <a:pt x="6753071" y="1229310"/>
+                  </a:lnTo>
+                  <a:lnTo>
+                    <a:pt x="6682726" y="1227953"/>
+                  </a:lnTo>
+                  <a:lnTo>
+                    <a:pt x="6612382" y="1226531"/>
+                  </a:lnTo>
+                  <a:lnTo>
+                    <a:pt x="6542037" y="1225039"/>
+                  </a:lnTo>
+                  <a:lnTo>
+                    <a:pt x="6471693" y="1223475"/>
+                  </a:lnTo>
+                  <a:lnTo>
+                    <a:pt x="6401348" y="1221835"/>
+                  </a:lnTo>
+                  <a:lnTo>
+                    <a:pt x="6331004" y="1220115"/>
+                  </a:lnTo>
+                  <a:lnTo>
+                    <a:pt x="6260659" y="1218311"/>
+                  </a:lnTo>
+                  <a:lnTo>
+                    <a:pt x="6190315" y="1216420"/>
+                  </a:lnTo>
+                  <a:lnTo>
+                    <a:pt x="6119970" y="1214437"/>
+                  </a:lnTo>
+                  <a:lnTo>
+                    <a:pt x="6049626" y="1212357"/>
+                  </a:lnTo>
+                  <a:lnTo>
+                    <a:pt x="5979281" y="1210176"/>
+                  </a:lnTo>
+                  <a:lnTo>
+                    <a:pt x="5908937" y="1207889"/>
+                  </a:lnTo>
+                  <a:lnTo>
+                    <a:pt x="5838592" y="1205491"/>
+                  </a:lnTo>
+                  <a:lnTo>
+                    <a:pt x="5768248" y="1202976"/>
+                  </a:lnTo>
+                  <a:lnTo>
+                    <a:pt x="5697903" y="1200339"/>
+                  </a:lnTo>
+                  <a:lnTo>
+                    <a:pt x="5627559" y="1197573"/>
+                  </a:lnTo>
+                  <a:lnTo>
+                    <a:pt x="5557214" y="1194674"/>
+                  </a:lnTo>
+                  <a:lnTo>
+                    <a:pt x="5486870" y="1191633"/>
+                  </a:lnTo>
+                  <a:lnTo>
+                    <a:pt x="5416525" y="1188444"/>
+                  </a:lnTo>
+                  <a:lnTo>
+                    <a:pt x="5346181" y="1185100"/>
+                  </a:lnTo>
+                  <a:lnTo>
+                    <a:pt x="5275836" y="1181594"/>
+                  </a:lnTo>
+                  <a:lnTo>
+                    <a:pt x="5205492" y="1177917"/>
+                  </a:lnTo>
+                  <a:lnTo>
+                    <a:pt x="5135147" y="1174061"/>
+                  </a:lnTo>
+                  <a:lnTo>
+                    <a:pt x="5064803" y="1170017"/>
+                  </a:lnTo>
+                  <a:lnTo>
+                    <a:pt x="4994458" y="1165777"/>
+                  </a:lnTo>
+                  <a:lnTo>
+                    <a:pt x="4924114" y="1161331"/>
+                  </a:lnTo>
+                  <a:lnTo>
+                    <a:pt x="4853769" y="1156669"/>
+                  </a:lnTo>
+                  <a:lnTo>
+                    <a:pt x="4783425" y="1151780"/>
+                  </a:lnTo>
+                  <a:lnTo>
+                    <a:pt x="4713080" y="1146653"/>
+                  </a:lnTo>
+                  <a:lnTo>
+                    <a:pt x="4642736" y="1141276"/>
+                  </a:lnTo>
+                  <a:lnTo>
+                    <a:pt x="4572391" y="1135639"/>
+                  </a:lnTo>
+                  <a:lnTo>
+                    <a:pt x="4502047" y="1129727"/>
+                  </a:lnTo>
+                  <a:lnTo>
+                    <a:pt x="4431702" y="1123527"/>
+                  </a:lnTo>
+                  <a:lnTo>
+                    <a:pt x="4361358" y="1117026"/>
+                  </a:lnTo>
+                  <a:lnTo>
+                    <a:pt x="4291013" y="1110209"/>
+                  </a:lnTo>
+                  <a:lnTo>
+                    <a:pt x="4220669" y="1103060"/>
+                  </a:lnTo>
+                  <a:lnTo>
+                    <a:pt x="4150324" y="1095564"/>
+                  </a:lnTo>
+                  <a:lnTo>
+                    <a:pt x="4079980" y="1087703"/>
+                  </a:lnTo>
+                  <a:lnTo>
+                    <a:pt x="4009635" y="1079460"/>
+                  </a:lnTo>
+                  <a:lnTo>
+                    <a:pt x="3939291" y="1070816"/>
+                  </a:lnTo>
+                  <a:lnTo>
+                    <a:pt x="3868946" y="1061752"/>
+                  </a:lnTo>
+                  <a:lnTo>
+                    <a:pt x="3798602" y="1052247"/>
+                  </a:lnTo>
+                  <a:lnTo>
+                    <a:pt x="3728257" y="1042279"/>
+                  </a:lnTo>
+                  <a:lnTo>
+                    <a:pt x="3657913" y="1031827"/>
+                  </a:lnTo>
+                  <a:lnTo>
+                    <a:pt x="3587569" y="1020866"/>
+                  </a:lnTo>
+                  <a:lnTo>
+                    <a:pt x="3517224" y="1009373"/>
+                  </a:lnTo>
+                  <a:lnTo>
+                    <a:pt x="3446880" y="997320"/>
+                  </a:lnTo>
+                  <a:lnTo>
+                    <a:pt x="3376535" y="984681"/>
+                  </a:lnTo>
+                  <a:lnTo>
+                    <a:pt x="3306191" y="971428"/>
+                  </a:lnTo>
+                  <a:lnTo>
+                    <a:pt x="3235846" y="957854"/>
+                  </a:lnTo>
+                  <a:lnTo>
+                    <a:pt x="3165502" y="957263"/>
+                  </a:lnTo>
+                  <a:lnTo>
+                    <a:pt x="3095157" y="956671"/>
+                  </a:lnTo>
+                  <a:lnTo>
+                    <a:pt x="3024813" y="956078"/>
+                  </a:lnTo>
+                  <a:lnTo>
+                    <a:pt x="2954468" y="955484"/>
+                  </a:lnTo>
+                  <a:lnTo>
+                    <a:pt x="2884124" y="954889"/>
+                  </a:lnTo>
+                  <a:lnTo>
+                    <a:pt x="2813779" y="954293"/>
+                  </a:lnTo>
+                  <a:lnTo>
+                    <a:pt x="2743435" y="953695"/>
+                  </a:lnTo>
+                  <a:lnTo>
+                    <a:pt x="2673090" y="953096"/>
+                  </a:lnTo>
+                  <a:lnTo>
+                    <a:pt x="2602746" y="952496"/>
+                  </a:lnTo>
+                  <a:lnTo>
+                    <a:pt x="2532401" y="951895"/>
+                  </a:lnTo>
+                  <a:lnTo>
+                    <a:pt x="2462057" y="951292"/>
+                  </a:lnTo>
+                  <a:lnTo>
+                    <a:pt x="2391712" y="950689"/>
+                  </a:lnTo>
+                  <a:lnTo>
+                    <a:pt x="2321368" y="950084"/>
+                  </a:lnTo>
+                  <a:lnTo>
+                    <a:pt x="2251023" y="949478"/>
+                  </a:lnTo>
+                  <a:lnTo>
+                    <a:pt x="2180679" y="948871"/>
+                  </a:lnTo>
+                  <a:lnTo>
+                    <a:pt x="2110334" y="948262"/>
+                  </a:lnTo>
+                  <a:lnTo>
+                    <a:pt x="2039990" y="947653"/>
+                  </a:lnTo>
+                  <a:lnTo>
+                    <a:pt x="1969645" y="947042"/>
+                  </a:lnTo>
+                  <a:lnTo>
+                    <a:pt x="1899301" y="946430"/>
+                  </a:lnTo>
+                  <a:lnTo>
+                    <a:pt x="1828956" y="945817"/>
+                  </a:lnTo>
+                  <a:lnTo>
+                    <a:pt x="1758612" y="945203"/>
+                  </a:lnTo>
+                  <a:lnTo>
+                    <a:pt x="1688267" y="944587"/>
+                  </a:lnTo>
+                  <a:lnTo>
+                    <a:pt x="1617923" y="943970"/>
+                  </a:lnTo>
+                  <a:lnTo>
+                    <a:pt x="1547578" y="943352"/>
+                  </a:lnTo>
+                  <a:lnTo>
+                    <a:pt x="1477234" y="942733"/>
+                  </a:lnTo>
+                  <a:lnTo>
+                    <a:pt x="1406889" y="942112"/>
+                  </a:lnTo>
+                  <a:lnTo>
+                    <a:pt x="1336545" y="941491"/>
+                  </a:lnTo>
+                  <a:lnTo>
+                    <a:pt x="1266200" y="940868"/>
+                  </a:lnTo>
+                  <a:lnTo>
+                    <a:pt x="1195856" y="940244"/>
+                  </a:lnTo>
+                  <a:lnTo>
+                    <a:pt x="1125511" y="939618"/>
+                  </a:lnTo>
+                  <a:lnTo>
+                    <a:pt x="1055167" y="938992"/>
+                  </a:lnTo>
+                  <a:lnTo>
+                    <a:pt x="984822" y="938364"/>
+                  </a:lnTo>
+                  <a:lnTo>
+                    <a:pt x="914478" y="937735"/>
+                  </a:lnTo>
+                  <a:lnTo>
+                    <a:pt x="844133" y="937104"/>
+                  </a:lnTo>
+                  <a:lnTo>
+                    <a:pt x="773789" y="936473"/>
+                  </a:lnTo>
+                  <a:lnTo>
+                    <a:pt x="703444" y="935840"/>
+                  </a:lnTo>
+                  <a:lnTo>
+                    <a:pt x="633100" y="935206"/>
+                  </a:lnTo>
+                  <a:lnTo>
+                    <a:pt x="562755" y="934570"/>
+                  </a:lnTo>
+                  <a:lnTo>
+                    <a:pt x="492411" y="933934"/>
+                  </a:lnTo>
+                  <a:lnTo>
+                    <a:pt x="422066" y="933296"/>
+                  </a:lnTo>
+                  <a:lnTo>
+                    <a:pt x="351722" y="932657"/>
+                  </a:lnTo>
+                  <a:lnTo>
+                    <a:pt x="281377" y="932017"/>
+                  </a:lnTo>
+                  <a:lnTo>
+                    <a:pt x="211033" y="931375"/>
+                  </a:lnTo>
+                  <a:lnTo>
+                    <a:pt x="140688" y="930732"/>
+                  </a:lnTo>
+                  <a:lnTo>
+                    <a:pt x="70344" y="930088"/>
+                  </a:lnTo>
+                  <a:lnTo>
+                    <a:pt x="0" y="929442"/>
+                  </a:lnTo>
+                  <a:close/>
+                </a:path>
+              </a:pathLst>
+            </a:custGeom>
+            <a:solidFill>
+              <a:srgbClr val="FF8C00">
+                <a:alpha val="20000"/>
+              </a:srgbClr>
+            </a:solidFill>
+          </p:spPr>
+          <p:txBody>
+            <a:bodyPr/>
+            <a:lstStyle/>
+            <a:p/>
+          </p:txBody>
+        </p:sp>
+        <p:sp>
+          <p:nvSpPr>
+            <p:cNvPr id="68" name="pl68"/>
+            <p:cNvSpPr/>
+            <p:nvPr/>
+          </p:nvSpPr>
+          <p:spPr>
+            <a:xfrm>
+              <a:off x="2347240" y="4336484"/>
+              <a:ext cx="5852176" cy="987549"/>
+            </a:xfrm>
+            <a:custGeom>
+              <a:avLst/>
+              <a:pathLst>
+                <a:path w="5852176" h="987549">
+                  <a:moveTo>
+                    <a:pt x="0" y="0"/>
+                  </a:moveTo>
+                  <a:lnTo>
+                    <a:pt x="13583" y="11696"/>
+                  </a:lnTo>
+                  <a:lnTo>
+                    <a:pt x="83928" y="69459"/>
+                  </a:lnTo>
+                  <a:lnTo>
+                    <a:pt x="154272" y="124543"/>
+                  </a:lnTo>
+                  <a:lnTo>
+                    <a:pt x="224617" y="177073"/>
+                  </a:lnTo>
+                  <a:lnTo>
+                    <a:pt x="294961" y="227166"/>
+                  </a:lnTo>
+                  <a:lnTo>
+                    <a:pt x="365306" y="274936"/>
+                  </a:lnTo>
+                  <a:lnTo>
+                    <a:pt x="435650" y="320491"/>
+                  </a:lnTo>
+                  <a:lnTo>
+                    <a:pt x="505995" y="363933"/>
+                  </a:lnTo>
+                  <a:lnTo>
+                    <a:pt x="576339" y="405360"/>
+                  </a:lnTo>
+                  <a:lnTo>
+                    <a:pt x="646684" y="444866"/>
+                  </a:lnTo>
+                  <a:lnTo>
+                    <a:pt x="717028" y="482540"/>
+                  </a:lnTo>
+                  <a:lnTo>
+                    <a:pt x="787373" y="518466"/>
+                  </a:lnTo>
+                  <a:lnTo>
+                    <a:pt x="857717" y="552727"/>
+                  </a:lnTo>
+                  <a:lnTo>
+                    <a:pt x="928062" y="585398"/>
+                  </a:lnTo>
+                  <a:lnTo>
+                    <a:pt x="998406" y="616554"/>
+                  </a:lnTo>
+                  <a:lnTo>
+                    <a:pt x="1068751" y="646266"/>
+                  </a:lnTo>
+                  <a:lnTo>
+                    <a:pt x="1139095" y="674599"/>
+                  </a:lnTo>
+                  <a:lnTo>
+                    <a:pt x="1209440" y="701619"/>
+                  </a:lnTo>
+                  <a:lnTo>
+                    <a:pt x="1279784" y="727385"/>
+                  </a:lnTo>
+                  <a:lnTo>
+                    <a:pt x="1350129" y="751956"/>
+                  </a:lnTo>
+                  <a:lnTo>
+                    <a:pt x="1420473" y="775388"/>
+                  </a:lnTo>
+                  <a:lnTo>
+                    <a:pt x="1490818" y="797733"/>
+                  </a:lnTo>
+                  <a:lnTo>
+                    <a:pt x="1561162" y="819042"/>
+                  </a:lnTo>
+                  <a:lnTo>
+                    <a:pt x="1631507" y="839363"/>
+                  </a:lnTo>
+                  <a:lnTo>
+                    <a:pt x="1701851" y="858741"/>
+                  </a:lnTo>
+                  <a:lnTo>
+                    <a:pt x="1772196" y="877220"/>
+                  </a:lnTo>
+                  <a:lnTo>
+                    <a:pt x="1842540" y="894843"/>
+                  </a:lnTo>
+                  <a:lnTo>
+                    <a:pt x="1912885" y="911648"/>
+                  </a:lnTo>
+                  <a:lnTo>
+                    <a:pt x="1983229" y="927674"/>
+                  </a:lnTo>
+                  <a:lnTo>
+                    <a:pt x="2053574" y="942956"/>
+                  </a:lnTo>
+                  <a:lnTo>
+                    <a:pt x="2123918" y="957530"/>
+                  </a:lnTo>
+                  <a:lnTo>
+                    <a:pt x="2194263" y="958443"/>
+                  </a:lnTo>
+                  <a:lnTo>
+                    <a:pt x="2264607" y="959032"/>
+                  </a:lnTo>
+                  <a:lnTo>
+                    <a:pt x="2334952" y="959619"/>
+                  </a:lnTo>
+                  <a:lnTo>
+                    <a:pt x="2405296" y="960205"/>
+                  </a:lnTo>
+                  <a:lnTo>
+                    <a:pt x="2475641" y="960790"/>
+                  </a:lnTo>
+                  <a:lnTo>
+                    <a:pt x="2545985" y="961373"/>
+                  </a:lnTo>
+                  <a:lnTo>
+                    <a:pt x="2616330" y="961956"/>
+                  </a:lnTo>
+                  <a:lnTo>
+                    <a:pt x="2686674" y="962537"/>
+                  </a:lnTo>
+                  <a:lnTo>
+                    <a:pt x="2757019" y="963118"/>
+                  </a:lnTo>
+                  <a:lnTo>
+                    <a:pt x="2827363" y="963697"/>
+                  </a:lnTo>
+                  <a:lnTo>
+                    <a:pt x="2897707" y="964275"/>
+                  </a:lnTo>
+                  <a:lnTo>
+                    <a:pt x="2968052" y="964852"/>
+                  </a:lnTo>
+                  <a:lnTo>
+                    <a:pt x="3038396" y="965427"/>
+                  </a:lnTo>
+                  <a:lnTo>
+                    <a:pt x="3108741" y="966002"/>
+                  </a:lnTo>
+                  <a:lnTo>
+                    <a:pt x="3179085" y="966575"/>
+                  </a:lnTo>
+                  <a:lnTo>
+                    <a:pt x="3249430" y="967148"/>
+                  </a:lnTo>
+                  <a:lnTo>
+                    <a:pt x="3319774" y="967719"/>
+                  </a:lnTo>
+                  <a:lnTo>
+                    <a:pt x="3390119" y="968289"/>
+                  </a:lnTo>
+                  <a:lnTo>
+                    <a:pt x="3460463" y="968858"/>
+                  </a:lnTo>
+                  <a:lnTo>
+                    <a:pt x="3530808" y="969426"/>
+                  </a:lnTo>
+                  <a:lnTo>
+                    <a:pt x="3601152" y="969992"/>
+                  </a:lnTo>
+                  <a:lnTo>
+                    <a:pt x="3671497" y="970558"/>
+                  </a:lnTo>
+                  <a:lnTo>
+                    <a:pt x="3741841" y="971122"/>
+                  </a:lnTo>
+                  <a:lnTo>
+                    <a:pt x="3812186" y="971686"/>
+                  </a:lnTo>
+                  <a:lnTo>
+                    <a:pt x="3882530" y="972248"/>
+                  </a:lnTo>
+                  <a:lnTo>
+                    <a:pt x="3952875" y="972809"/>
+                  </a:lnTo>
+                  <a:lnTo>
+                    <a:pt x="4023219" y="973369"/>
+                  </a:lnTo>
+                  <a:lnTo>
+                    <a:pt x="4093564" y="973928"/>
+                  </a:lnTo>
+                  <a:lnTo>
+                    <a:pt x="4163908" y="974486"/>
+                  </a:lnTo>
+                  <a:lnTo>
+                    <a:pt x="4234253" y="975043"/>
+                  </a:lnTo>
+                  <a:lnTo>
+                    <a:pt x="4304597" y="975598"/>
+                  </a:lnTo>
+                  <a:lnTo>
+                    <a:pt x="4374942" y="976153"/>
+                  </a:lnTo>
+                  <a:lnTo>
+                    <a:pt x="4445286" y="976706"/>
+                  </a:lnTo>
+                  <a:lnTo>
+                    <a:pt x="4515631" y="977259"/>
+                  </a:lnTo>
+                  <a:lnTo>
+                    <a:pt x="4585975" y="977810"/>
+                  </a:lnTo>
+                  <a:lnTo>
+                    <a:pt x="4656320" y="978360"/>
+                  </a:lnTo>
+                  <a:lnTo>
+                    <a:pt x="4726664" y="978909"/>
+                  </a:lnTo>
+                  <a:lnTo>
+                    <a:pt x="4797009" y="979457"/>
+                  </a:lnTo>
+                  <a:lnTo>
+                    <a:pt x="4867353" y="980004"/>
+                  </a:lnTo>
+                  <a:lnTo>
+                    <a:pt x="4937698" y="980550"/>
+                  </a:lnTo>
+                  <a:lnTo>
+                    <a:pt x="5008042" y="981095"/>
+                  </a:lnTo>
+                  <a:lnTo>
+                    <a:pt x="5078387" y="981638"/>
+                  </a:lnTo>
+                  <a:lnTo>
+                    <a:pt x="5148731" y="982181"/>
+                  </a:lnTo>
+                  <a:lnTo>
+                    <a:pt x="5219076" y="982723"/>
+                  </a:lnTo>
+                  <a:lnTo>
+                    <a:pt x="5289420" y="983263"/>
+                  </a:lnTo>
+                  <a:lnTo>
+                    <a:pt x="5359765" y="983803"/>
+                  </a:lnTo>
+                  <a:lnTo>
+                    <a:pt x="5430109" y="984341"/>
+                  </a:lnTo>
+                  <a:lnTo>
+                    <a:pt x="5500454" y="984878"/>
+                  </a:lnTo>
+                  <a:lnTo>
+                    <a:pt x="5570798" y="985415"/>
+                  </a:lnTo>
+                  <a:lnTo>
+                    <a:pt x="5641143" y="985950"/>
+                  </a:lnTo>
+                  <a:lnTo>
+                    <a:pt x="5711487" y="986484"/>
+                  </a:lnTo>
+                  <a:lnTo>
+                    <a:pt x="5781832" y="987017"/>
+                  </a:lnTo>
+                  <a:lnTo>
+                    <a:pt x="5852176" y="987549"/>
+                  </a:lnTo>
+                </a:path>
+              </a:pathLst>
+            </a:custGeom>
+          </p:spPr>
+          <p:txBody>
+            <a:bodyPr/>
+            <a:lstStyle/>
+            <a:p/>
+          </p:txBody>
+        </p:sp>
+        <p:sp>
+          <p:nvSpPr>
+            <p:cNvPr id="69" name="pl69"/>
+            <p:cNvSpPr/>
+            <p:nvPr/>
+          </p:nvSpPr>
+          <p:spPr>
+            <a:xfrm>
+              <a:off x="1235312" y="5265927"/>
+              <a:ext cx="6964104" cy="303570"/>
+            </a:xfrm>
+            <a:custGeom>
+              <a:avLst/>
+              <a:pathLst>
+                <a:path w="6964104" h="303570">
+                  <a:moveTo>
+                    <a:pt x="6964104" y="303570"/>
+                  </a:moveTo>
+                  <a:lnTo>
+                    <a:pt x="6893760" y="302394"/>
+                  </a:lnTo>
+                  <a:lnTo>
+                    <a:pt x="6823415" y="301160"/>
+                  </a:lnTo>
+                  <a:lnTo>
+                    <a:pt x="6753071" y="299867"/>
+                  </a:lnTo>
+                  <a:lnTo>
+                    <a:pt x="6682726" y="298510"/>
+                  </a:lnTo>
+                  <a:lnTo>
+                    <a:pt x="6612382" y="297088"/>
+                  </a:lnTo>
+                  <a:lnTo>
+                    <a:pt x="6542037" y="295596"/>
+                  </a:lnTo>
+                  <a:lnTo>
+                    <a:pt x="6471693" y="294032"/>
+                  </a:lnTo>
+                  <a:lnTo>
+                    <a:pt x="6401348" y="292392"/>
+                  </a:lnTo>
+                  <a:lnTo>
+                    <a:pt x="6331004" y="290672"/>
+                  </a:lnTo>
+                  <a:lnTo>
+                    <a:pt x="6260659" y="288868"/>
+                  </a:lnTo>
+                  <a:lnTo>
+                    <a:pt x="6190315" y="286977"/>
+                  </a:lnTo>
+                  <a:lnTo>
+                    <a:pt x="6119970" y="284994"/>
+                  </a:lnTo>
+                  <a:lnTo>
+                    <a:pt x="6049626" y="282914"/>
+                  </a:lnTo>
+                  <a:lnTo>
+                    <a:pt x="5979281" y="280733"/>
+                  </a:lnTo>
+                  <a:lnTo>
+                    <a:pt x="5908937" y="278446"/>
+                  </a:lnTo>
+                  <a:lnTo>
+                    <a:pt x="5838592" y="276048"/>
+                  </a:lnTo>
+                  <a:lnTo>
+                    <a:pt x="5768248" y="273533"/>
+                  </a:lnTo>
+                  <a:lnTo>
+                    <a:pt x="5697903" y="270896"/>
+                  </a:lnTo>
+                  <a:lnTo>
+                    <a:pt x="5627559" y="268131"/>
+                  </a:lnTo>
+                  <a:lnTo>
+                    <a:pt x="5557214" y="265231"/>
+                  </a:lnTo>
+                  <a:lnTo>
+                    <a:pt x="5486870" y="262190"/>
+                  </a:lnTo>
+                  <a:lnTo>
+                    <a:pt x="5416525" y="259001"/>
+                  </a:lnTo>
+                  <a:lnTo>
+                    <a:pt x="5346181" y="255657"/>
+                  </a:lnTo>
+                  <a:lnTo>
+                    <a:pt x="5275836" y="252151"/>
+                  </a:lnTo>
+                  <a:lnTo>
+                    <a:pt x="5205492" y="248474"/>
+                  </a:lnTo>
+                  <a:lnTo>
+                    <a:pt x="5135147" y="244618"/>
+                  </a:lnTo>
+                  <a:lnTo>
+                    <a:pt x="5064803" y="240574"/>
+                  </a:lnTo>
+                  <a:lnTo>
+                    <a:pt x="4994458" y="236334"/>
+                  </a:lnTo>
+                  <a:lnTo>
+                    <a:pt x="4924114" y="231888"/>
+                  </a:lnTo>
+                  <a:lnTo>
+                    <a:pt x="4853769" y="227226"/>
+                  </a:lnTo>
+                  <a:lnTo>
+                    <a:pt x="4783425" y="222337"/>
+                  </a:lnTo>
+                  <a:lnTo>
+                    <a:pt x="4713080" y="217210"/>
+                  </a:lnTo>
+                  <a:lnTo>
+                    <a:pt x="4642736" y="211833"/>
+                  </a:lnTo>
+                  <a:lnTo>
+                    <a:pt x="4572391" y="206196"/>
+                  </a:lnTo>
+                  <a:lnTo>
+                    <a:pt x="4502047" y="200284"/>
+                  </a:lnTo>
+                  <a:lnTo>
+                    <a:pt x="4431702" y="194084"/>
+                  </a:lnTo>
+                  <a:lnTo>
+                    <a:pt x="4361358" y="187583"/>
+                  </a:lnTo>
+                  <a:lnTo>
+                    <a:pt x="4291013" y="180766"/>
+                  </a:lnTo>
+                  <a:lnTo>
+                    <a:pt x="4220669" y="173618"/>
+                  </a:lnTo>
+                  <a:lnTo>
+                    <a:pt x="4150324" y="166121"/>
+                  </a:lnTo>
+                  <a:lnTo>
+                    <a:pt x="4079980" y="158260"/>
+                  </a:lnTo>
+                  <a:lnTo>
+                    <a:pt x="4009635" y="150017"/>
+                  </a:lnTo>
+                  <a:lnTo>
+                    <a:pt x="3939291" y="141373"/>
+                  </a:lnTo>
+                  <a:lnTo>
+                    <a:pt x="3868946" y="132309"/>
+                  </a:lnTo>
+                  <a:lnTo>
+                    <a:pt x="3798602" y="122804"/>
+                  </a:lnTo>
+                  <a:lnTo>
+                    <a:pt x="3728257" y="112836"/>
+                  </a:lnTo>
+                  <a:lnTo>
+                    <a:pt x="3657913" y="102384"/>
+                  </a:lnTo>
+                  <a:lnTo>
+                    <a:pt x="3587569" y="91423"/>
+                  </a:lnTo>
+                  <a:lnTo>
+                    <a:pt x="3517224" y="79930"/>
+                  </a:lnTo>
+                  <a:lnTo>
+                    <a:pt x="3446880" y="67877"/>
+                  </a:lnTo>
+                  <a:lnTo>
+                    <a:pt x="3376535" y="55238"/>
+                  </a:lnTo>
+                  <a:lnTo>
+                    <a:pt x="3306191" y="41985"/>
+                  </a:lnTo>
+                  <a:lnTo>
+                    <a:pt x="3235846" y="28411"/>
+                  </a:lnTo>
+                  <a:lnTo>
+                    <a:pt x="3165502" y="27820"/>
+                  </a:lnTo>
+                  <a:lnTo>
+                    <a:pt x="3095157" y="27229"/>
+                  </a:lnTo>
+                  <a:lnTo>
+                    <a:pt x="3024813" y="26636"/>
+                  </a:lnTo>
+                  <a:lnTo>
+                    <a:pt x="2954468" y="26041"/>
+                  </a:lnTo>
+                  <a:lnTo>
+                    <a:pt x="2884124" y="25446"/>
+                  </a:lnTo>
+                  <a:lnTo>
+                    <a:pt x="2813779" y="24850"/>
+                  </a:lnTo>
+                  <a:lnTo>
+                    <a:pt x="2743435" y="24252"/>
+                  </a:lnTo>
+                  <a:lnTo>
+                    <a:pt x="2673090" y="23653"/>
+                  </a:lnTo>
+                  <a:lnTo>
+                    <a:pt x="2602746" y="23053"/>
+                  </a:lnTo>
+                  <a:lnTo>
+                    <a:pt x="2532401" y="22452"/>
+                  </a:lnTo>
+                  <a:lnTo>
+                    <a:pt x="2462057" y="21849"/>
+                  </a:lnTo>
+                  <a:lnTo>
+                    <a:pt x="2391712" y="21246"/>
+                  </a:lnTo>
+                  <a:lnTo>
+                    <a:pt x="2321368" y="20641"/>
+                  </a:lnTo>
+                  <a:lnTo>
+                    <a:pt x="2251023" y="20035"/>
+                  </a:lnTo>
+                  <a:lnTo>
+                    <a:pt x="2180679" y="19428"/>
+                  </a:lnTo>
+                  <a:lnTo>
+                    <a:pt x="2110334" y="18820"/>
+                  </a:lnTo>
+                  <a:lnTo>
+                    <a:pt x="2039990" y="18210"/>
+                  </a:lnTo>
+                  <a:lnTo>
+                    <a:pt x="1969645" y="17599"/>
+                  </a:lnTo>
+                  <a:lnTo>
+                    <a:pt x="1899301" y="16987"/>
+                  </a:lnTo>
+                  <a:lnTo>
+                    <a:pt x="1828956" y="16374"/>
+                  </a:lnTo>
+                  <a:lnTo>
+                    <a:pt x="1758612" y="15760"/>
+                  </a:lnTo>
+                  <a:lnTo>
+                    <a:pt x="1688267" y="15144"/>
+                  </a:lnTo>
+                  <a:lnTo>
+                    <a:pt x="1617923" y="14527"/>
+                  </a:lnTo>
+                  <a:lnTo>
+                    <a:pt x="1547578" y="13909"/>
+                  </a:lnTo>
+                  <a:lnTo>
+                    <a:pt x="1477234" y="13290"/>
+                  </a:lnTo>
+                  <a:lnTo>
+                    <a:pt x="1406889" y="12669"/>
+                  </a:lnTo>
+                  <a:lnTo>
+                    <a:pt x="1336545" y="12048"/>
+                  </a:lnTo>
+                  <a:lnTo>
+                    <a:pt x="1266200" y="11425"/>
+                  </a:lnTo>
+                  <a:lnTo>
+                    <a:pt x="1195856" y="10801"/>
+                  </a:lnTo>
+                  <a:lnTo>
+                    <a:pt x="1125511" y="10175"/>
+                  </a:lnTo>
+                  <a:lnTo>
+                    <a:pt x="1055167" y="9549"/>
+                  </a:lnTo>
+                  <a:lnTo>
+                    <a:pt x="984822" y="8921"/>
+                  </a:lnTo>
+                  <a:lnTo>
+                    <a:pt x="914478" y="8292"/>
+                  </a:lnTo>
+                  <a:lnTo>
+                    <a:pt x="844133" y="7661"/>
+                  </a:lnTo>
+                  <a:lnTo>
+                    <a:pt x="773789" y="7030"/>
+                  </a:lnTo>
+                  <a:lnTo>
+                    <a:pt x="703444" y="6397"/>
+                  </a:lnTo>
+                  <a:lnTo>
+                    <a:pt x="633100" y="5763"/>
+                  </a:lnTo>
+                  <a:lnTo>
+                    <a:pt x="562755" y="5127"/>
+                  </a:lnTo>
+                  <a:lnTo>
+                    <a:pt x="492411" y="4491"/>
+                  </a:lnTo>
+                  <a:lnTo>
+                    <a:pt x="422066" y="3853"/>
+                  </a:lnTo>
+                  <a:lnTo>
+                    <a:pt x="351722" y="3214"/>
+                  </a:lnTo>
+                  <a:lnTo>
+                    <a:pt x="281377" y="2574"/>
+                  </a:lnTo>
+                  <a:lnTo>
+                    <a:pt x="211033" y="1932"/>
+                  </a:lnTo>
+                  <a:lnTo>
+                    <a:pt x="140688" y="1289"/>
+                  </a:lnTo>
+                  <a:lnTo>
+                    <a:pt x="70344" y="645"/>
+                  </a:lnTo>
+                  <a:lnTo>
+                    <a:pt x="0" y="0"/>
+                  </a:lnTo>
+                </a:path>
+              </a:pathLst>
+            </a:custGeom>
+          </p:spPr>
+          <p:txBody>
+            <a:bodyPr/>
+            <a:lstStyle/>
+            <a:p/>
+          </p:txBody>
+        </p:sp>
+        <p:sp>
+          <p:nvSpPr>
+            <p:cNvPr id="70" name="pl70"/>
+            <p:cNvSpPr/>
+            <p:nvPr/>
+          </p:nvSpPr>
+          <p:spPr>
+            <a:xfrm>
+              <a:off x="1235312" y="4659492"/>
+              <a:ext cx="6964104" cy="853431"/>
+            </a:xfrm>
+            <a:custGeom>
+              <a:avLst/>
+              <a:pathLst>
+                <a:path w="6964104" h="853431">
+                  <a:moveTo>
+                    <a:pt x="0" y="0"/>
+                  </a:moveTo>
+                  <a:lnTo>
+                    <a:pt x="70344" y="22818"/>
+                  </a:lnTo>
+                  <a:lnTo>
+                    <a:pt x="140688" y="45079"/>
+                  </a:lnTo>
+                  <a:lnTo>
+                    <a:pt x="211033" y="66796"/>
+                  </a:lnTo>
+                  <a:lnTo>
+                    <a:pt x="281377" y="87983"/>
+                  </a:lnTo>
+                  <a:lnTo>
+                    <a:pt x="351722" y="108653"/>
+                  </a:lnTo>
+                  <a:lnTo>
+                    <a:pt x="422066" y="128817"/>
+                  </a:lnTo>
+                  <a:lnTo>
+                    <a:pt x="492411" y="148489"/>
+                  </a:lnTo>
+                  <a:lnTo>
+                    <a:pt x="562755" y="167681"/>
+                  </a:lnTo>
+                  <a:lnTo>
+                    <a:pt x="633100" y="186403"/>
+                  </a:lnTo>
+                  <a:lnTo>
+                    <a:pt x="703444" y="204669"/>
+                  </a:lnTo>
+                  <a:lnTo>
+                    <a:pt x="773789" y="222488"/>
+                  </a:lnTo>
+                  <a:lnTo>
+                    <a:pt x="844133" y="239872"/>
+                  </a:lnTo>
+                  <a:lnTo>
+                    <a:pt x="914478" y="256831"/>
+                  </a:lnTo>
+                  <a:lnTo>
+                    <a:pt x="984822" y="273376"/>
+                  </a:lnTo>
+                  <a:lnTo>
+                    <a:pt x="1055167" y="289517"/>
+                  </a:lnTo>
+                  <a:lnTo>
+                    <a:pt x="1125511" y="305264"/>
+                  </a:lnTo>
+                  <a:lnTo>
+                    <a:pt x="1195856" y="320626"/>
+                  </a:lnTo>
+                  <a:lnTo>
+                    <a:pt x="1266200" y="335613"/>
+                  </a:lnTo>
+                  <a:lnTo>
+                    <a:pt x="1336545" y="350234"/>
+                  </a:lnTo>
+                  <a:lnTo>
+                    <a:pt x="1406889" y="364498"/>
+                  </a:lnTo>
+                  <a:lnTo>
+                    <a:pt x="1477234" y="378413"/>
+                  </a:lnTo>
+                  <a:lnTo>
+                    <a:pt x="1547578" y="391988"/>
+                  </a:lnTo>
+                  <a:lnTo>
+                    <a:pt x="1617923" y="405232"/>
+                  </a:lnTo>
+                  <a:lnTo>
+                    <a:pt x="1688267" y="418152"/>
+                  </a:lnTo>
+                  <a:lnTo>
+                    <a:pt x="1758612" y="430757"/>
+                  </a:lnTo>
+                  <a:lnTo>
+                    <a:pt x="1828956" y="443054"/>
+                  </a:lnTo>
+                  <a:lnTo>
+                    <a:pt x="1899301" y="455050"/>
+                  </a:lnTo>
+                  <a:lnTo>
+                    <a:pt x="1969645" y="466754"/>
+                  </a:lnTo>
+                  <a:lnTo>
+                    <a:pt x="2039990" y="478171"/>
+                  </a:lnTo>
+                  <a:lnTo>
+                    <a:pt x="2110334" y="489310"/>
+                  </a:lnTo>
+                  <a:lnTo>
+                    <a:pt x="2180679" y="500177"/>
+                  </a:lnTo>
+                  <a:lnTo>
+                    <a:pt x="2251023" y="510778"/>
+                  </a:lnTo>
+                  <a:lnTo>
+                    <a:pt x="2321368" y="521120"/>
+                  </a:lnTo>
+                  <a:lnTo>
+                    <a:pt x="2391712" y="531210"/>
+                  </a:lnTo>
+                  <a:lnTo>
+                    <a:pt x="2462057" y="541053"/>
+                  </a:lnTo>
+                  <a:lnTo>
+                    <a:pt x="2532401" y="550656"/>
+                  </a:lnTo>
+                  <a:lnTo>
+                    <a:pt x="2602746" y="560024"/>
+                  </a:lnTo>
+                  <a:lnTo>
+                    <a:pt x="2673090" y="569163"/>
+                  </a:lnTo>
+                  <a:lnTo>
+                    <a:pt x="2743435" y="578080"/>
+                  </a:lnTo>
+                  <a:lnTo>
+                    <a:pt x="2813779" y="586778"/>
+                  </a:lnTo>
+                  <a:lnTo>
+                    <a:pt x="2884124" y="595264"/>
+                  </a:lnTo>
+                  <a:lnTo>
+                    <a:pt x="2954468" y="603542"/>
+                  </a:lnTo>
+                  <a:lnTo>
+                    <a:pt x="3024813" y="611619"/>
+                  </a:lnTo>
+                  <a:lnTo>
+                    <a:pt x="3095157" y="619498"/>
+                  </a:lnTo>
+                  <a:lnTo>
+                    <a:pt x="3165502" y="627185"/>
+                  </a:lnTo>
+                  <a:lnTo>
+                    <a:pt x="3235846" y="634684"/>
+                  </a:lnTo>
+                  <a:lnTo>
+                    <a:pt x="3306191" y="641999"/>
+                  </a:lnTo>
+                  <a:lnTo>
+                    <a:pt x="3376535" y="649136"/>
+                  </a:lnTo>
+                  <a:lnTo>
+                    <a:pt x="3446880" y="656099"/>
+                  </a:lnTo>
+                  <a:lnTo>
+                    <a:pt x="3517224" y="662892"/>
+                  </a:lnTo>
+                  <a:lnTo>
+                    <a:pt x="3587569" y="669519"/>
+                  </a:lnTo>
+                  <a:lnTo>
+                    <a:pt x="3657913" y="675984"/>
+                  </a:lnTo>
+                  <a:lnTo>
+                    <a:pt x="3728257" y="682291"/>
+                  </a:lnTo>
+                  <a:lnTo>
+                    <a:pt x="3798602" y="688443"/>
+                  </a:lnTo>
+                  <a:lnTo>
+                    <a:pt x="3868946" y="694446"/>
+                  </a:lnTo>
+                  <a:lnTo>
+                    <a:pt x="3939291" y="700302"/>
+                  </a:lnTo>
+                  <a:lnTo>
+                    <a:pt x="4009635" y="706015"/>
+                  </a:lnTo>
+                  <a:lnTo>
+                    <a:pt x="4079980" y="711589"/>
+                  </a:lnTo>
+                  <a:lnTo>
+                    <a:pt x="4150324" y="717026"/>
+                  </a:lnTo>
+                  <a:lnTo>
+                    <a:pt x="4220669" y="722330"/>
+                  </a:lnTo>
+                  <a:lnTo>
+                    <a:pt x="4291013" y="727505"/>
+                  </a:lnTo>
+                  <a:lnTo>
+                    <a:pt x="4361358" y="732554"/>
+                  </a:lnTo>
+                  <a:lnTo>
+                    <a:pt x="4431702" y="737479"/>
+                  </a:lnTo>
+                  <a:lnTo>
+                    <a:pt x="4502047" y="742284"/>
+                  </a:lnTo>
+                  <a:lnTo>
+                    <a:pt x="4572391" y="746971"/>
+                  </a:lnTo>
+                  <a:lnTo>
+                    <a:pt x="4642736" y="751545"/>
+                  </a:lnTo>
+                  <a:lnTo>
+                    <a:pt x="4713080" y="756006"/>
+                  </a:lnTo>
+                  <a:lnTo>
+                    <a:pt x="4783425" y="760358"/>
+                  </a:lnTo>
+                  <a:lnTo>
+                    <a:pt x="4853769" y="764604"/>
+                  </a:lnTo>
+                  <a:lnTo>
+                    <a:pt x="4924114" y="768747"/>
+                  </a:lnTo>
+                  <a:lnTo>
+                    <a:pt x="4994458" y="772788"/>
+                  </a:lnTo>
+                  <a:lnTo>
+                    <a:pt x="5064803" y="776730"/>
+                  </a:lnTo>
+                  <a:lnTo>
+                    <a:pt x="5135147" y="780576"/>
+                  </a:lnTo>
+                  <a:lnTo>
+                    <a:pt x="5205492" y="784329"/>
+                  </a:lnTo>
+                  <a:lnTo>
+                    <a:pt x="5275836" y="787989"/>
+                  </a:lnTo>
+                  <a:lnTo>
+                    <a:pt x="5346181" y="791560"/>
+                  </a:lnTo>
+                  <a:lnTo>
+                    <a:pt x="5416525" y="795044"/>
+                  </a:lnTo>
+                  <a:lnTo>
+                    <a:pt x="5486870" y="798443"/>
+                  </a:lnTo>
+                  <a:lnTo>
+                    <a:pt x="5557214" y="801759"/>
+                  </a:lnTo>
+                  <a:lnTo>
+                    <a:pt x="5627559" y="804994"/>
+                  </a:lnTo>
+                  <a:lnTo>
+                    <a:pt x="5697903" y="808150"/>
+                  </a:lnTo>
+                  <a:lnTo>
+                    <a:pt x="5768248" y="811228"/>
+                  </a:lnTo>
+                  <a:lnTo>
+                    <a:pt x="5838592" y="814232"/>
+                  </a:lnTo>
+                  <a:lnTo>
+                    <a:pt x="5908937" y="817162"/>
+                  </a:lnTo>
+                  <a:lnTo>
+                    <a:pt x="5979281" y="820021"/>
+                  </a:lnTo>
+                  <a:lnTo>
+                    <a:pt x="6049626" y="822809"/>
+                  </a:lnTo>
+                  <a:lnTo>
+                    <a:pt x="6119970" y="825530"/>
+                  </a:lnTo>
+                  <a:lnTo>
+                    <a:pt x="6190315" y="828184"/>
+                  </a:lnTo>
+                  <a:lnTo>
+                    <a:pt x="6260659" y="830774"/>
+                  </a:lnTo>
+                  <a:lnTo>
+                    <a:pt x="6331004" y="833300"/>
+                  </a:lnTo>
+                  <a:lnTo>
+                    <a:pt x="6401348" y="835764"/>
+                  </a:lnTo>
+                  <a:lnTo>
+                    <a:pt x="6471693" y="838168"/>
+                  </a:lnTo>
+                  <a:lnTo>
+                    <a:pt x="6542037" y="840514"/>
+                  </a:lnTo>
+                  <a:lnTo>
+                    <a:pt x="6612382" y="842802"/>
+                  </a:lnTo>
+                  <a:lnTo>
+                    <a:pt x="6682726" y="845034"/>
+                  </a:lnTo>
+                  <a:lnTo>
+                    <a:pt x="6753071" y="847212"/>
+                  </a:lnTo>
+                  <a:lnTo>
+                    <a:pt x="6823415" y="849337"/>
+                  </a:lnTo>
+                  <a:lnTo>
+                    <a:pt x="6893760" y="851409"/>
+                  </a:lnTo>
+                  <a:lnTo>
+                    <a:pt x="6964104" y="853431"/>
+                  </a:lnTo>
+                </a:path>
+              </a:pathLst>
+            </a:custGeom>
+            <a:ln w="27101" cap="flat">
+              <a:solidFill>
+                <a:srgbClr val="FF8C00">
+                  <a:alpha val="100000"/>
+                </a:srgbClr>
+              </a:solidFill>
+              <a:prstDash val="solid"/>
+              <a:round/>
+            </a:ln>
+          </p:spPr>
+          <p:txBody>
+            <a:bodyPr/>
+            <a:lstStyle/>
+            <a:p/>
+          </p:txBody>
+        </p:sp>
+        <p:sp>
+          <p:nvSpPr>
+            <p:cNvPr id="71" name="pl71"/>
+            <p:cNvSpPr/>
+            <p:nvPr/>
+          </p:nvSpPr>
+          <p:spPr>
+            <a:xfrm>
+              <a:off x="887106" y="5294352"/>
+              <a:ext cx="7660515" cy="0"/>
+            </a:xfrm>
+            <a:custGeom>
+              <a:avLst/>
+              <a:pathLst>
+                <a:path w="7660515" h="0">
+                  <a:moveTo>
+                    <a:pt x="0" y="0"/>
+                  </a:moveTo>
+                  <a:lnTo>
+                    <a:pt x="7660515" y="0"/>
+                  </a:lnTo>
+                  <a:lnTo>
+                    <a:pt x="7660515" y="0"/>
+                  </a:lnTo>
+                </a:path>
+              </a:pathLst>
+            </a:custGeom>
+            <a:ln w="13550" cap="flat">
+              <a:solidFill>
+                <a:srgbClr val="7F7F7F">
+                  <a:alpha val="100000"/>
+                </a:srgbClr>
+              </a:solidFill>
+              <a:prstDash val="dash"/>
+              <a:round/>
+            </a:ln>
+          </p:spPr>
+          <p:txBody>
+            <a:bodyPr/>
+            <a:lstStyle/>
+            <a:p/>
+          </p:txBody>
+        </p:sp>
+        <p:sp>
+          <p:nvSpPr>
+            <p:cNvPr id="72" name="pl72"/>
+            <p:cNvSpPr/>
+            <p:nvPr/>
+          </p:nvSpPr>
+          <p:spPr>
+            <a:xfrm>
+              <a:off x="4472829" y="4336484"/>
+              <a:ext cx="0" cy="1317069"/>
+            </a:xfrm>
+            <a:custGeom>
+              <a:avLst/>
+              <a:pathLst>
+                <a:path w="0" h="1317069">
+                  <a:moveTo>
+                    <a:pt x="0" y="1317069"/>
+                  </a:moveTo>
+                  <a:lnTo>
+                    <a:pt x="0" y="0"/>
+                  </a:lnTo>
+                  <a:lnTo>
+                    <a:pt x="0" y="0"/>
+                  </a:lnTo>
+                </a:path>
+              </a:pathLst>
+            </a:custGeom>
+            <a:ln w="13550" cap="flat">
+              <a:solidFill>
+                <a:srgbClr val="666666">
+                  <a:alpha val="100000"/>
+                </a:srgbClr>
+              </a:solidFill>
+              <a:prstDash val="dot"/>
+              <a:round/>
+            </a:ln>
+          </p:spPr>
+          <p:txBody>
+            <a:bodyPr/>
+            <a:lstStyle/>
+            <a:p/>
+          </p:txBody>
+        </p:sp>
+        <p:sp>
+          <p:nvSpPr>
+            <p:cNvPr id="73" name="tx73"/>
+            <p:cNvSpPr/>
+            <p:nvPr/>
+          </p:nvSpPr>
+          <p:spPr>
+            <a:xfrm>
+              <a:off x="762297" y="5553636"/>
+              <a:ext cx="62179" cy="80101"/>
+            </a:xfrm>
+            <a:prstGeom prst="rect">
+              <a:avLst/>
+            </a:prstGeom>
+            <a:noFill/>
+          </p:spPr>
+          <p:txBody>
+            <a:bodyPr lIns="0" rIns="0" tIns="0" bIns="0" anchorCtr="1" anchor="ctr" wrap="none"/>
+            <a:lstStyle/>
+            <a:p>
+              <a:pPr algn="l" marL="0" marR="0" indent="0">
+                <a:lnSpc>
+                  <a:spcPts val="880"/>
+                </a:lnSpc>
+                <a:spcBef>
+                  <a:spcPts val="0"/>
+                </a:spcBef>
+                <a:spcAft>
+                  <a:spcPts val="0"/>
+                </a:spcAft>
+              </a:pPr>
+              <a:r>
+                <a:rPr sz="880">
+                  <a:solidFill>
+                    <a:srgbClr val="4D4D4D">
+                      <a:alpha val="100000"/>
+                    </a:srgbClr>
+                  </a:solidFill>
+                  <a:latin typeface="Helvetica"/>
+                  <a:cs typeface="Helvetica"/>
+                </a:rPr>
+                <a:t>0</a:t>
+              </a:r>
+            </a:p>
+          </p:txBody>
+        </p:sp>
+        <p:sp>
+          <p:nvSpPr>
+            <p:cNvPr id="74" name="tx74"/>
+            <p:cNvSpPr/>
+            <p:nvPr/>
+          </p:nvSpPr>
+          <p:spPr>
+            <a:xfrm>
+              <a:off x="762297" y="5254302"/>
+              <a:ext cx="62179" cy="80101"/>
+            </a:xfrm>
+            <a:prstGeom prst="rect">
+              <a:avLst/>
+            </a:prstGeom>
+            <a:noFill/>
+          </p:spPr>
+          <p:txBody>
+            <a:bodyPr lIns="0" rIns="0" tIns="0" bIns="0" anchorCtr="1" anchor="ctr" wrap="none"/>
+            <a:lstStyle/>
+            <a:p>
+              <a:pPr algn="l" marL="0" marR="0" indent="0">
+                <a:lnSpc>
+                  <a:spcPts val="880"/>
+                </a:lnSpc>
+                <a:spcBef>
+                  <a:spcPts val="0"/>
+                </a:spcBef>
+                <a:spcAft>
+                  <a:spcPts val="0"/>
+                </a:spcAft>
+              </a:pPr>
+              <a:r>
+                <a:rPr sz="880">
+                  <a:solidFill>
+                    <a:srgbClr val="4D4D4D">
+                      <a:alpha val="100000"/>
+                    </a:srgbClr>
+                  </a:solidFill>
+                  <a:latin typeface="Helvetica"/>
+                  <a:cs typeface="Helvetica"/>
+                </a:rPr>
+                <a:t>1</a:t>
+              </a:r>
+            </a:p>
+          </p:txBody>
+        </p:sp>
+        <p:sp>
+          <p:nvSpPr>
+            <p:cNvPr id="75" name="tx75"/>
+            <p:cNvSpPr/>
+            <p:nvPr/>
+          </p:nvSpPr>
+          <p:spPr>
+            <a:xfrm>
+              <a:off x="762297" y="4954968"/>
+              <a:ext cx="62179" cy="80101"/>
+            </a:xfrm>
+            <a:prstGeom prst="rect">
+              <a:avLst/>
+            </a:prstGeom>
+            <a:noFill/>
+          </p:spPr>
+          <p:txBody>
+            <a:bodyPr lIns="0" rIns="0" tIns="0" bIns="0" anchorCtr="1" anchor="ctr" wrap="none"/>
+            <a:lstStyle/>
+            <a:p>
+              <a:pPr algn="l" marL="0" marR="0" indent="0">
+                <a:lnSpc>
+                  <a:spcPts val="880"/>
+                </a:lnSpc>
+                <a:spcBef>
+                  <a:spcPts val="0"/>
+                </a:spcBef>
+                <a:spcAft>
+                  <a:spcPts val="0"/>
+                </a:spcAft>
+              </a:pPr>
+              <a:r>
+                <a:rPr sz="880">
+                  <a:solidFill>
+                    <a:srgbClr val="4D4D4D">
+                      <a:alpha val="100000"/>
+                    </a:srgbClr>
+                  </a:solidFill>
+                  <a:latin typeface="Helvetica"/>
+                  <a:cs typeface="Helvetica"/>
+                </a:rPr>
+                <a:t>2</a:t>
+              </a:r>
+            </a:p>
+          </p:txBody>
+        </p:sp>
+        <p:sp>
+          <p:nvSpPr>
+            <p:cNvPr id="76" name="tx76"/>
+            <p:cNvSpPr/>
+            <p:nvPr/>
+          </p:nvSpPr>
+          <p:spPr>
+            <a:xfrm>
+              <a:off x="762297" y="4655634"/>
+              <a:ext cx="62179" cy="80101"/>
+            </a:xfrm>
+            <a:prstGeom prst="rect">
+              <a:avLst/>
+            </a:prstGeom>
+            <a:noFill/>
+          </p:spPr>
+          <p:txBody>
+            <a:bodyPr lIns="0" rIns="0" tIns="0" bIns="0" anchorCtr="1" anchor="ctr" wrap="none"/>
+            <a:lstStyle/>
+            <a:p>
+              <a:pPr algn="l" marL="0" marR="0" indent="0">
+                <a:lnSpc>
+                  <a:spcPts val="880"/>
+                </a:lnSpc>
+                <a:spcBef>
+                  <a:spcPts val="0"/>
+                </a:spcBef>
+                <a:spcAft>
+                  <a:spcPts val="0"/>
+                </a:spcAft>
+              </a:pPr>
+              <a:r>
+                <a:rPr sz="880">
+                  <a:solidFill>
+                    <a:srgbClr val="4D4D4D">
+                      <a:alpha val="100000"/>
+                    </a:srgbClr>
+                  </a:solidFill>
+                  <a:latin typeface="Helvetica"/>
+                  <a:cs typeface="Helvetica"/>
+                </a:rPr>
+                <a:t>3</a:t>
+              </a:r>
+            </a:p>
+          </p:txBody>
+        </p:sp>
+        <p:sp>
+          <p:nvSpPr>
+            <p:cNvPr id="77" name="tx77"/>
+            <p:cNvSpPr/>
+            <p:nvPr/>
+          </p:nvSpPr>
+          <p:spPr>
+            <a:xfrm>
+              <a:off x="762297" y="4356300"/>
+              <a:ext cx="62179" cy="80101"/>
+            </a:xfrm>
+            <a:prstGeom prst="rect">
+              <a:avLst/>
+            </a:prstGeom>
+            <a:noFill/>
+          </p:spPr>
+          <p:txBody>
+            <a:bodyPr lIns="0" rIns="0" tIns="0" bIns="0" anchorCtr="1" anchor="ctr" wrap="none"/>
+            <a:lstStyle/>
+            <a:p>
+              <a:pPr algn="l" marL="0" marR="0" indent="0">
+                <a:lnSpc>
+                  <a:spcPts val="880"/>
+                </a:lnSpc>
+                <a:spcBef>
+                  <a:spcPts val="0"/>
+                </a:spcBef>
+                <a:spcAft>
+                  <a:spcPts val="0"/>
+                </a:spcAft>
+              </a:pPr>
+              <a:r>
+                <a:rPr sz="880">
+                  <a:solidFill>
+                    <a:srgbClr val="4D4D4D">
+                      <a:alpha val="100000"/>
+                    </a:srgbClr>
+                  </a:solidFill>
+                  <a:latin typeface="Helvetica"/>
+                  <a:cs typeface="Helvetica"/>
+                </a:rPr>
+                <a:t>4</a:t>
+              </a:r>
+            </a:p>
+          </p:txBody>
+        </p:sp>
+        <p:sp>
+          <p:nvSpPr>
+            <p:cNvPr id="78" name="tx78"/>
+            <p:cNvSpPr/>
+            <p:nvPr/>
+          </p:nvSpPr>
+          <p:spPr>
+            <a:xfrm>
+              <a:off x="1306098" y="5716183"/>
+              <a:ext cx="161574" cy="80101"/>
+            </a:xfrm>
+            <a:prstGeom prst="rect">
+              <a:avLst/>
+            </a:prstGeom>
+            <a:noFill/>
+          </p:spPr>
+          <p:txBody>
+            <a:bodyPr lIns="0" rIns="0" tIns="0" bIns="0" anchorCtr="1" anchor="ctr" wrap="none"/>
+            <a:lstStyle/>
+            <a:p>
+              <a:pPr algn="l" marL="0" marR="0" indent="0">
+                <a:lnSpc>
+                  <a:spcPts val="880"/>
+                </a:lnSpc>
+                <a:spcBef>
+                  <a:spcPts val="0"/>
+                </a:spcBef>
+                <a:spcAft>
+                  <a:spcPts val="0"/>
+                </a:spcAft>
+              </a:pPr>
+              <a:r>
+                <a:rPr sz="880">
+                  <a:solidFill>
+                    <a:srgbClr val="4D4D4D">
+                      <a:alpha val="100000"/>
+                    </a:srgbClr>
+                  </a:solidFill>
+                  <a:latin typeface="Helvetica"/>
+                  <a:cs typeface="Helvetica"/>
+                </a:rPr>
+                <a:t>-40</a:t>
+              </a:r>
+            </a:p>
+          </p:txBody>
+        </p:sp>
+        <p:sp>
+          <p:nvSpPr>
+            <p:cNvPr id="79" name="tx79"/>
+            <p:cNvSpPr/>
+            <p:nvPr/>
+          </p:nvSpPr>
+          <p:spPr>
+            <a:xfrm>
+              <a:off x="2113264" y="5716183"/>
+              <a:ext cx="161574" cy="80101"/>
+            </a:xfrm>
+            <a:prstGeom prst="rect">
+              <a:avLst/>
+            </a:prstGeom>
+            <a:noFill/>
+          </p:spPr>
+          <p:txBody>
+            <a:bodyPr lIns="0" rIns="0" tIns="0" bIns="0" anchorCtr="1" anchor="ctr" wrap="none"/>
+            <a:lstStyle/>
+            <a:p>
+              <a:pPr algn="l" marL="0" marR="0" indent="0">
+                <a:lnSpc>
+                  <a:spcPts val="880"/>
+                </a:lnSpc>
+                <a:spcBef>
+                  <a:spcPts val="0"/>
+                </a:spcBef>
+                <a:spcAft>
+                  <a:spcPts val="0"/>
+                </a:spcAft>
+              </a:pPr>
+              <a:r>
+                <a:rPr sz="880">
+                  <a:solidFill>
+                    <a:srgbClr val="4D4D4D">
+                      <a:alpha val="100000"/>
+                    </a:srgbClr>
+                  </a:solidFill>
+                  <a:latin typeface="Helvetica"/>
+                  <a:cs typeface="Helvetica"/>
+                </a:rPr>
+                <a:t>-30</a:t>
+              </a:r>
+            </a:p>
+          </p:txBody>
+        </p:sp>
+        <p:sp>
+          <p:nvSpPr>
+            <p:cNvPr id="80" name="tx80"/>
+            <p:cNvSpPr/>
+            <p:nvPr/>
+          </p:nvSpPr>
+          <p:spPr>
+            <a:xfrm>
+              <a:off x="2920429" y="5716183"/>
+              <a:ext cx="161574" cy="80101"/>
+            </a:xfrm>
+            <a:prstGeom prst="rect">
+              <a:avLst/>
+            </a:prstGeom>
+            <a:noFill/>
+          </p:spPr>
+          <p:txBody>
+            <a:bodyPr lIns="0" rIns="0" tIns="0" bIns="0" anchorCtr="1" anchor="ctr" wrap="none"/>
+            <a:lstStyle/>
+            <a:p>
+              <a:pPr algn="l" marL="0" marR="0" indent="0">
+                <a:lnSpc>
+                  <a:spcPts val="880"/>
+                </a:lnSpc>
+                <a:spcBef>
+                  <a:spcPts val="0"/>
+                </a:spcBef>
+                <a:spcAft>
+                  <a:spcPts val="0"/>
+                </a:spcAft>
+              </a:pPr>
+              <a:r>
+                <a:rPr sz="880">
+                  <a:solidFill>
+                    <a:srgbClr val="4D4D4D">
+                      <a:alpha val="100000"/>
+                    </a:srgbClr>
+                  </a:solidFill>
+                  <a:latin typeface="Helvetica"/>
+                  <a:cs typeface="Helvetica"/>
+                </a:rPr>
+                <a:t>-20</a:t>
+              </a:r>
+            </a:p>
+          </p:txBody>
+        </p:sp>
+        <p:sp>
+          <p:nvSpPr>
+            <p:cNvPr id="81" name="tx81"/>
+            <p:cNvSpPr/>
+            <p:nvPr/>
+          </p:nvSpPr>
+          <p:spPr>
+            <a:xfrm>
+              <a:off x="3727595" y="5716183"/>
+              <a:ext cx="161574" cy="80101"/>
+            </a:xfrm>
+            <a:prstGeom prst="rect">
+              <a:avLst/>
+            </a:prstGeom>
+            <a:noFill/>
+          </p:spPr>
+          <p:txBody>
+            <a:bodyPr lIns="0" rIns="0" tIns="0" bIns="0" anchorCtr="1" anchor="ctr" wrap="none"/>
+            <a:lstStyle/>
+            <a:p>
+              <a:pPr algn="l" marL="0" marR="0" indent="0">
+                <a:lnSpc>
+                  <a:spcPts val="880"/>
+                </a:lnSpc>
+                <a:spcBef>
+                  <a:spcPts val="0"/>
+                </a:spcBef>
+                <a:spcAft>
+                  <a:spcPts val="0"/>
+                </a:spcAft>
+              </a:pPr>
+              <a:r>
+                <a:rPr sz="880">
+                  <a:solidFill>
+                    <a:srgbClr val="4D4D4D">
+                      <a:alpha val="100000"/>
+                    </a:srgbClr>
+                  </a:solidFill>
+                  <a:latin typeface="Helvetica"/>
+                  <a:cs typeface="Helvetica"/>
+                </a:rPr>
+                <a:t>-10</a:t>
+              </a:r>
+            </a:p>
+          </p:txBody>
+        </p:sp>
+        <p:sp>
+          <p:nvSpPr>
+            <p:cNvPr id="82" name="tx82"/>
+            <p:cNvSpPr/>
+            <p:nvPr/>
+          </p:nvSpPr>
+          <p:spPr>
+            <a:xfrm>
+              <a:off x="4584458" y="5716183"/>
+              <a:ext cx="62179" cy="80101"/>
+            </a:xfrm>
+            <a:prstGeom prst="rect">
+              <a:avLst/>
+            </a:prstGeom>
+            <a:noFill/>
+          </p:spPr>
+          <p:txBody>
+            <a:bodyPr lIns="0" rIns="0" tIns="0" bIns="0" anchorCtr="1" anchor="ctr" wrap="none"/>
+            <a:lstStyle/>
+            <a:p>
+              <a:pPr algn="l" marL="0" marR="0" indent="0">
+                <a:lnSpc>
+                  <a:spcPts val="880"/>
+                </a:lnSpc>
+                <a:spcBef>
+                  <a:spcPts val="0"/>
+                </a:spcBef>
+                <a:spcAft>
+                  <a:spcPts val="0"/>
+                </a:spcAft>
+              </a:pPr>
+              <a:r>
+                <a:rPr sz="880">
+                  <a:solidFill>
+                    <a:srgbClr val="4D4D4D">
+                      <a:alpha val="100000"/>
+                    </a:srgbClr>
+                  </a:solidFill>
+                  <a:latin typeface="Helvetica"/>
+                  <a:cs typeface="Helvetica"/>
+                </a:rPr>
+                <a:t>0</a:t>
+              </a:r>
+            </a:p>
+          </p:txBody>
+        </p:sp>
+        <p:sp>
+          <p:nvSpPr>
+            <p:cNvPr id="83" name="tx83"/>
+            <p:cNvSpPr/>
+            <p:nvPr/>
+          </p:nvSpPr>
+          <p:spPr>
+            <a:xfrm>
+              <a:off x="5360534" y="5716183"/>
+              <a:ext cx="124358" cy="80101"/>
+            </a:xfrm>
+            <a:prstGeom prst="rect">
+              <a:avLst/>
+            </a:prstGeom>
+            <a:noFill/>
+          </p:spPr>
+          <p:txBody>
+            <a:bodyPr lIns="0" rIns="0" tIns="0" bIns="0" anchorCtr="1" anchor="ctr" wrap="none"/>
+            <a:lstStyle/>
+            <a:p>
+              <a:pPr algn="l" marL="0" marR="0" indent="0">
+                <a:lnSpc>
+                  <a:spcPts val="880"/>
+                </a:lnSpc>
+                <a:spcBef>
+                  <a:spcPts val="0"/>
+                </a:spcBef>
+                <a:spcAft>
+                  <a:spcPts val="0"/>
+                </a:spcAft>
+              </a:pPr>
+              <a:r>
+                <a:rPr sz="880">
+                  <a:solidFill>
+                    <a:srgbClr val="4D4D4D">
+                      <a:alpha val="100000"/>
+                    </a:srgbClr>
+                  </a:solidFill>
+                  <a:latin typeface="Helvetica"/>
+                  <a:cs typeface="Helvetica"/>
+                </a:rPr>
+                <a:t>10</a:t>
+              </a:r>
+            </a:p>
+          </p:txBody>
+        </p:sp>
+        <p:sp>
+          <p:nvSpPr>
+            <p:cNvPr id="84" name="tx84"/>
+            <p:cNvSpPr/>
+            <p:nvPr/>
+          </p:nvSpPr>
+          <p:spPr>
+            <a:xfrm>
+              <a:off x="6167699" y="5716183"/>
+              <a:ext cx="124358" cy="80101"/>
+            </a:xfrm>
+            <a:prstGeom prst="rect">
+              <a:avLst/>
+            </a:prstGeom>
+            <a:noFill/>
+          </p:spPr>
+          <p:txBody>
+            <a:bodyPr lIns="0" rIns="0" tIns="0" bIns="0" anchorCtr="1" anchor="ctr" wrap="none"/>
+            <a:lstStyle/>
+            <a:p>
+              <a:pPr algn="l" marL="0" marR="0" indent="0">
+                <a:lnSpc>
+                  <a:spcPts val="880"/>
+                </a:lnSpc>
+                <a:spcBef>
+                  <a:spcPts val="0"/>
+                </a:spcBef>
+                <a:spcAft>
+                  <a:spcPts val="0"/>
+                </a:spcAft>
+              </a:pPr>
+              <a:r>
+                <a:rPr sz="880">
+                  <a:solidFill>
+                    <a:srgbClr val="4D4D4D">
+                      <a:alpha val="100000"/>
+                    </a:srgbClr>
+                  </a:solidFill>
+                  <a:latin typeface="Helvetica"/>
+                  <a:cs typeface="Helvetica"/>
+                </a:rPr>
+                <a:t>20</a:t>
+              </a:r>
+            </a:p>
+          </p:txBody>
+        </p:sp>
+        <p:sp>
+          <p:nvSpPr>
+            <p:cNvPr id="85" name="tx85"/>
+            <p:cNvSpPr/>
+            <p:nvPr/>
+          </p:nvSpPr>
+          <p:spPr>
+            <a:xfrm>
+              <a:off x="6974865" y="5716183"/>
+              <a:ext cx="124358" cy="80101"/>
+            </a:xfrm>
+            <a:prstGeom prst="rect">
+              <a:avLst/>
+            </a:prstGeom>
+            <a:noFill/>
+          </p:spPr>
+          <p:txBody>
+            <a:bodyPr lIns="0" rIns="0" tIns="0" bIns="0" anchorCtr="1" anchor="ctr" wrap="none"/>
+            <a:lstStyle/>
+            <a:p>
+              <a:pPr algn="l" marL="0" marR="0" indent="0">
+                <a:lnSpc>
+                  <a:spcPts val="880"/>
+                </a:lnSpc>
+                <a:spcBef>
+                  <a:spcPts val="0"/>
+                </a:spcBef>
+                <a:spcAft>
+                  <a:spcPts val="0"/>
+                </a:spcAft>
+              </a:pPr>
+              <a:r>
+                <a:rPr sz="880">
+                  <a:solidFill>
+                    <a:srgbClr val="4D4D4D">
+                      <a:alpha val="100000"/>
+                    </a:srgbClr>
+                  </a:solidFill>
+                  <a:latin typeface="Helvetica"/>
+                  <a:cs typeface="Helvetica"/>
+                </a:rPr>
+                <a:t>30</a:t>
+              </a:r>
+            </a:p>
+          </p:txBody>
+        </p:sp>
+        <p:sp>
+          <p:nvSpPr>
+            <p:cNvPr id="86" name="tx86"/>
+            <p:cNvSpPr/>
+            <p:nvPr/>
+          </p:nvSpPr>
+          <p:spPr>
+            <a:xfrm>
+              <a:off x="7782030" y="5716183"/>
+              <a:ext cx="124358" cy="80101"/>
+            </a:xfrm>
+            <a:prstGeom prst="rect">
+              <a:avLst/>
+            </a:prstGeom>
+            <a:noFill/>
+          </p:spPr>
+          <p:txBody>
+            <a:bodyPr lIns="0" rIns="0" tIns="0" bIns="0" anchorCtr="1" anchor="ctr" wrap="none"/>
+            <a:lstStyle/>
+            <a:p>
+              <a:pPr algn="l" marL="0" marR="0" indent="0">
+                <a:lnSpc>
+                  <a:spcPts val="880"/>
+                </a:lnSpc>
+                <a:spcBef>
+                  <a:spcPts val="0"/>
+                </a:spcBef>
+                <a:spcAft>
+                  <a:spcPts val="0"/>
+                </a:spcAft>
+              </a:pPr>
+              <a:r>
+                <a:rPr sz="880">
+                  <a:solidFill>
+                    <a:srgbClr val="4D4D4D">
+                      <a:alpha val="100000"/>
+                    </a:srgbClr>
+                  </a:solidFill>
+                  <a:latin typeface="Helvetica"/>
+                  <a:cs typeface="Helvetica"/>
+                </a:rPr>
+                <a:t>40</a:t>
+              </a:r>
+            </a:p>
+          </p:txBody>
+        </p:sp>
+        <p:sp>
+          <p:nvSpPr>
+            <p:cNvPr id="87" name="tx87"/>
+            <p:cNvSpPr/>
+            <p:nvPr/>
+          </p:nvSpPr>
+          <p:spPr>
+            <a:xfrm>
+              <a:off x="2928340" y="5855859"/>
+              <a:ext cx="3578047" cy="100218"/>
+            </a:xfrm>
+            <a:prstGeom prst="rect">
+              <a:avLst/>
+            </a:prstGeom>
+            <a:noFill/>
+          </p:spPr>
+          <p:txBody>
+            <a:bodyPr lIns="0" rIns="0" tIns="0" bIns="0" anchorCtr="1" anchor="ctr" wrap="none"/>
+            <a:lstStyle/>
+            <a:p>
+              <a:pPr algn="l" marL="0" marR="0" indent="0">
+                <a:lnSpc>
+                  <a:spcPts val="1100"/>
+                </a:lnSpc>
+                <a:spcBef>
+                  <a:spcPts val="0"/>
+                </a:spcBef>
+                <a:spcAft>
+                  <a:spcPts val="0"/>
+                </a:spcAft>
+              </a:pPr>
+              <a:r>
+                <a:rPr sz="1100">
+                  <a:solidFill>
+                    <a:srgbClr val="000000">
+                      <a:alpha val="100000"/>
+                    </a:srgbClr>
+                  </a:solidFill>
+                  <a:latin typeface="Helvetica"/>
+                  <a:cs typeface="Helvetica"/>
+                </a:rPr>
+                <a:t>eGFR difference (%): 100 × (CKD-EPI Cr-Cys − CG) / CG</a:t>
+              </a:r>
+            </a:p>
+          </p:txBody>
+        </p:sp>
+        <p:sp>
+          <p:nvSpPr>
+            <p:cNvPr id="88" name="tx88"/>
+            <p:cNvSpPr/>
+            <p:nvPr/>
+          </p:nvSpPr>
+          <p:spPr>
+            <a:xfrm rot="-5400000">
+              <a:off x="138035" y="4944909"/>
+              <a:ext cx="1016904" cy="100218"/>
+            </a:xfrm>
+            <a:prstGeom prst="rect">
+              <a:avLst/>
+            </a:prstGeom>
+            <a:noFill/>
+          </p:spPr>
+          <p:txBody>
+            <a:bodyPr lIns="0" rIns="0" tIns="0" bIns="0" anchorCtr="1" anchor="ctr" wrap="none"/>
+            <a:lstStyle/>
+            <a:p>
+              <a:pPr algn="l" marL="0" marR="0" indent="0">
+                <a:lnSpc>
+                  <a:spcPts val="1100"/>
+                </a:lnSpc>
+                <a:spcBef>
+                  <a:spcPts val="0"/>
+                </a:spcBef>
+                <a:spcAft>
+                  <a:spcPts val="0"/>
+                </a:spcAft>
+              </a:pPr>
+              <a:r>
+                <a:rPr sz="1100">
+                  <a:solidFill>
+                    <a:srgbClr val="000000">
+                      <a:alpha val="100000"/>
+                    </a:srgbClr>
+                  </a:solidFill>
+                  <a:latin typeface="Helvetica"/>
+                  <a:cs typeface="Helvetica"/>
+                </a:rPr>
+                <a:t>subHR (95% CI)</a:t>
+              </a:r>
+            </a:p>
+          </p:txBody>
+        </p:sp>
+        <p:sp>
+          <p:nvSpPr>
+            <p:cNvPr id="89" name="tx89"/>
+            <p:cNvSpPr/>
+            <p:nvPr/>
+          </p:nvSpPr>
+          <p:spPr>
+            <a:xfrm>
+              <a:off x="887106" y="4159544"/>
+              <a:ext cx="6985375" cy="82021"/>
+            </a:xfrm>
+            <a:prstGeom prst="rect">
+              <a:avLst/>
+            </a:prstGeom>
+            <a:noFill/>
+          </p:spPr>
+          <p:txBody>
+            <a:bodyPr lIns="0" rIns="0" tIns="0" bIns="0" anchorCtr="1" anchor="ctr" wrap="none"/>
+            <a:lstStyle/>
+            <a:p>
+              <a:pPr algn="l" marL="0" marR="0" indent="0">
+                <a:lnSpc>
+                  <a:spcPts val="900"/>
+                </a:lnSpc>
+                <a:spcBef>
+                  <a:spcPts val="0"/>
+                </a:spcBef>
+                <a:spcAft>
+                  <a:spcPts val="0"/>
+                </a:spcAft>
+              </a:pPr>
+              <a:r>
+                <a:rPr sz="900">
+                  <a:solidFill>
+                    <a:srgbClr val="404040">
+                      <a:alpha val="100000"/>
+                    </a:srgbClr>
+                  </a:solidFill>
+                  <a:latin typeface="Helvetica"/>
+                  <a:cs typeface="Helvetica"/>
+                </a:rPr>
+                <a:t>subHR per 10 % decline: 1.33 (1.02-1.72), p_Bonf = 0.199 (n = 6)  |  per IQR decline (Δ = 29.5 %): 2.31 (1.07-5.00)  |  IQR: [-15.6, 13.9] %</a:t>
+              </a:r>
+            </a:p>
+          </p:txBody>
+        </p:sp>
+        <p:sp>
+          <p:nvSpPr>
+            <p:cNvPr id="90" name="tx90"/>
+            <p:cNvSpPr/>
+            <p:nvPr/>
+          </p:nvSpPr>
+          <p:spPr>
+            <a:xfrm>
+              <a:off x="887106" y="3932770"/>
               <a:ext cx="3732672" cy="120152"/>
             </a:xfrm>
             <a:prstGeom prst="rect">
